--- a/presentation/talk.pptx
+++ b/presentation/talk.pptx
@@ -3139,7 +3139,7 @@
           <a:lstStyle/>
           <a:p>
             <a:pPr>
-              <a:defRPr sz="2200" b="1">
+              <a:defRPr sz="2000" b="1">
                 <a:solidFill>
                   <a:srgbClr val="1F2D5A"/>
                 </a:solidFill>
@@ -3174,7 +3174,7 @@
           <a:lstStyle/>
           <a:p>
             <a:pPr>
-              <a:defRPr sz="1300">
+              <a:defRPr sz="2000">
                 <a:solidFill>
                   <a:srgbClr val="202020"/>
                 </a:solidFill>
@@ -3186,16 +3186,16 @@
           </a:p>
           <a:p>
             <a:pPr>
-              <a:defRPr sz="1300">
-                <a:solidFill>
-                  <a:srgbClr val="202020"/>
-                </a:solidFill>
-              </a:defRPr>
-            </a:pPr>
-          </a:p>
-          <a:p>
-            <a:pPr>
-              <a:defRPr sz="1300">
+              <a:defRPr sz="2000">
+                <a:solidFill>
+                  <a:srgbClr val="202020"/>
+                </a:solidFill>
+              </a:defRPr>
+            </a:pPr>
+          </a:p>
+          <a:p>
+            <a:pPr>
+              <a:defRPr sz="2000">
                 <a:solidFill>
                   <a:srgbClr val="202020"/>
                 </a:solidFill>
@@ -3207,16 +3207,16 @@
           </a:p>
           <a:p>
             <a:pPr>
-              <a:defRPr sz="1300">
-                <a:solidFill>
-                  <a:srgbClr val="202020"/>
-                </a:solidFill>
-              </a:defRPr>
-            </a:pPr>
-          </a:p>
-          <a:p>
-            <a:pPr>
-              <a:defRPr sz="1300">
+              <a:defRPr sz="2000">
+                <a:solidFill>
+                  <a:srgbClr val="202020"/>
+                </a:solidFill>
+              </a:defRPr>
+            </a:pPr>
+          </a:p>
+          <a:p>
+            <a:pPr>
+              <a:defRPr sz="2000">
                 <a:solidFill>
                   <a:srgbClr val="202020"/>
                 </a:solidFill>
@@ -3224,27 +3224,6 @@
             </a:pPr>
             <a:r>
               <a:t>来源：`20251219_dmi_fm/successful_simulation/run_analytic_relax.out/`</a:t>
-            </a:r>
-          </a:p>
-          <a:p>
-            <a:pPr>
-              <a:defRPr sz="1300">
-                <a:solidFill>
-                  <a:srgbClr val="202020"/>
-                </a:solidFill>
-              </a:defRPr>
-            </a:pPr>
-          </a:p>
-          <a:p>
-            <a:pPr>
-              <a:defRPr sz="1300">
-                <a:solidFill>
-                  <a:srgbClr val="202020"/>
-                </a:solidFill>
-              </a:defRPr>
-            </a:pPr>
-            <a:r>
-              <a:t>---</a:t>
             </a:r>
           </a:p>
         </p:txBody>
@@ -3314,7 +3293,7 @@
           <a:lstStyle/>
           <a:p>
             <a:pPr>
-              <a:defRPr sz="2200" b="1">
+              <a:defRPr sz="2000" b="1">
                 <a:solidFill>
                   <a:srgbClr val="1F2D5A"/>
                 </a:solidFill>
@@ -3349,7 +3328,7 @@
           <a:lstStyle/>
           <a:p>
             <a:pPr>
-              <a:defRPr sz="1300">
+              <a:defRPr sz="2000">
                 <a:solidFill>
                   <a:srgbClr val="202020"/>
                 </a:solidFill>
@@ -3361,7 +3340,7 @@
           </a:p>
           <a:p>
             <a:pPr>
-              <a:defRPr sz="1300">
+              <a:defRPr sz="2000">
                 <a:solidFill>
                   <a:srgbClr val="202020"/>
                 </a:solidFill>
@@ -3373,7 +3352,7 @@
           </a:p>
           <a:p>
             <a:pPr>
-              <a:defRPr sz="1300">
+              <a:defRPr sz="2000">
                 <a:solidFill>
                   <a:srgbClr val="202020"/>
                 </a:solidFill>
@@ -3385,37 +3364,37 @@
           </a:p>
           <a:p>
             <a:pPr>
-              <a:defRPr sz="1300">
-                <a:solidFill>
-                  <a:srgbClr val="202020"/>
-                </a:solidFill>
-              </a:defRPr>
-            </a:pPr>
-          </a:p>
-          <a:p>
-            <a:pPr>
-              <a:defRPr sz="1300">
-                <a:solidFill>
-                  <a:srgbClr val="202020"/>
-                </a:solidFill>
-              </a:defRPr>
-            </a:pPr>
-            <a:r>
-              <a:t>**当初结论**：bg=mz 漂移、bg=mx,my 稳定。该结论已写入毕设论文 ch03 §3.2.3 早期版本。</a:t>
-            </a:r>
-          </a:p>
-          <a:p>
-            <a:pPr>
-              <a:defRPr sz="1300">
-                <a:solidFill>
-                  <a:srgbClr val="202020"/>
-                </a:solidFill>
-              </a:defRPr>
-            </a:pPr>
-          </a:p>
-          <a:p>
-            <a:pPr>
-              <a:defRPr sz="1300">
+              <a:defRPr sz="2000">
+                <a:solidFill>
+                  <a:srgbClr val="202020"/>
+                </a:solidFill>
+              </a:defRPr>
+            </a:pPr>
+          </a:p>
+          <a:p>
+            <a:pPr>
+              <a:defRPr sz="2000">
+                <a:solidFill>
+                  <a:srgbClr val="202020"/>
+                </a:solidFill>
+              </a:defRPr>
+            </a:pPr>
+            <a:r>
+              <a:t>当初结论：bg=mz 漂移、bg=mx,my 稳定。该结论已写入毕设论文 ch03 §3.2.3 早期版本。</a:t>
+            </a:r>
+          </a:p>
+          <a:p>
+            <a:pPr>
+              <a:defRPr sz="2000">
+                <a:solidFill>
+                  <a:srgbClr val="202020"/>
+                </a:solidFill>
+              </a:defRPr>
+            </a:pPr>
+          </a:p>
+          <a:p>
+            <a:pPr>
+              <a:defRPr sz="2000">
                 <a:solidFill>
                   <a:srgbClr val="202020"/>
                 </a:solidFill>
@@ -3423,27 +3402,6 @@
             </a:pPr>
             <a:r>
               <a:t>无图。来源：`20260105_frustrated_fm/drift_experiments/{bg_mx_axis_x_stable, bg_my_axis_y_stable}/`</a:t>
-            </a:r>
-          </a:p>
-          <a:p>
-            <a:pPr>
-              <a:defRPr sz="1300">
-                <a:solidFill>
-                  <a:srgbClr val="202020"/>
-                </a:solidFill>
-              </a:defRPr>
-            </a:pPr>
-          </a:p>
-          <a:p>
-            <a:pPr>
-              <a:defRPr sz="1300">
-                <a:solidFill>
-                  <a:srgbClr val="202020"/>
-                </a:solidFill>
-              </a:defRPr>
-            </a:pPr>
-            <a:r>
-              <a:t>---</a:t>
             </a:r>
           </a:p>
         </p:txBody>
@@ -3489,7 +3447,7 @@
           <a:lstStyle/>
           <a:p>
             <a:pPr>
-              <a:defRPr sz="2200" b="1">
+              <a:defRPr sz="2000" b="1">
                 <a:solidFill>
                   <a:srgbClr val="1F2D5A"/>
                 </a:solidFill>
@@ -3524,7 +3482,7 @@
           <a:lstStyle/>
           <a:p>
             <a:pPr>
-              <a:defRPr sz="1300">
+              <a:defRPr sz="2000">
                 <a:solidFill>
                   <a:srgbClr val="202020"/>
                 </a:solidFill>
@@ -3536,58 +3494,58 @@
           </a:p>
           <a:p>
             <a:pPr>
-              <a:defRPr sz="1300">
-                <a:solidFill>
-                  <a:srgbClr val="202020"/>
-                </a:solidFill>
-              </a:defRPr>
-            </a:pPr>
-          </a:p>
-          <a:p>
-            <a:pPr>
-              <a:defRPr sz="1300">
-                <a:solidFill>
-                  <a:srgbClr val="202020"/>
-                </a:solidFill>
-              </a:defRPr>
-            </a:pPr>
-            <a:r>
-              <a:t>**结果**：4 组完全一致，bg 方向无影响。**旧结论推翻。**</a:t>
-            </a:r>
-          </a:p>
-          <a:p>
-            <a:pPr>
-              <a:defRPr sz="1300">
-                <a:solidFill>
-                  <a:srgbClr val="202020"/>
-                </a:solidFill>
-              </a:defRPr>
-            </a:pPr>
-          </a:p>
-          <a:p>
-            <a:pPr>
-              <a:defRPr sz="1300">
-                <a:solidFill>
-                  <a:srgbClr val="202020"/>
-                </a:solidFill>
-              </a:defRPr>
-            </a:pPr>
-            <a:r>
-              <a:t>**真实机理**：前 1 ns 轴向格点递举弛豫 4.75 nm，之后钉扎。漂移与背景磁化方向无关。</a:t>
-            </a:r>
-          </a:p>
-          <a:p>
-            <a:pPr>
-              <a:defRPr sz="1300">
-                <a:solidFill>
-                  <a:srgbClr val="202020"/>
-                </a:solidFill>
-              </a:defRPr>
-            </a:pPr>
-          </a:p>
-          <a:p>
-            <a:pPr>
-              <a:defRPr sz="1300">
+              <a:defRPr sz="2000">
+                <a:solidFill>
+                  <a:srgbClr val="202020"/>
+                </a:solidFill>
+              </a:defRPr>
+            </a:pPr>
+          </a:p>
+          <a:p>
+            <a:pPr>
+              <a:defRPr sz="2000">
+                <a:solidFill>
+                  <a:srgbClr val="202020"/>
+                </a:solidFill>
+              </a:defRPr>
+            </a:pPr>
+            <a:r>
+              <a:t>结果：4 组完全一致，bg 方向无影响。旧结论推翻。</a:t>
+            </a:r>
+          </a:p>
+          <a:p>
+            <a:pPr>
+              <a:defRPr sz="2000">
+                <a:solidFill>
+                  <a:srgbClr val="202020"/>
+                </a:solidFill>
+              </a:defRPr>
+            </a:pPr>
+          </a:p>
+          <a:p>
+            <a:pPr>
+              <a:defRPr sz="2000">
+                <a:solidFill>
+                  <a:srgbClr val="202020"/>
+                </a:solidFill>
+              </a:defRPr>
+            </a:pPr>
+            <a:r>
+              <a:t>真实机理：前 1 ns 轴向格点递举弛豫 4.75 nm，之后钉扎。漂移与背景磁化方向无关。</a:t>
+            </a:r>
+          </a:p>
+          <a:p>
+            <a:pPr>
+              <a:defRPr sz="2000">
+                <a:solidFill>
+                  <a:srgbClr val="202020"/>
+                </a:solidFill>
+              </a:defRPr>
+            </a:pPr>
+          </a:p>
+          <a:p>
+            <a:pPr>
+              <a:defRPr sz="2000">
                 <a:solidFill>
                   <a:srgbClr val="202020"/>
                 </a:solidFill>
@@ -3599,16 +3557,16 @@
           </a:p>
           <a:p>
             <a:pPr>
-              <a:defRPr sz="1300">
-                <a:solidFill>
-                  <a:srgbClr val="202020"/>
-                </a:solidFill>
-              </a:defRPr>
-            </a:pPr>
-          </a:p>
-          <a:p>
-            <a:pPr>
-              <a:defRPr sz="1300">
+              <a:defRPr sz="2000">
+                <a:solidFill>
+                  <a:srgbClr val="202020"/>
+                </a:solidFill>
+              </a:defRPr>
+            </a:pPr>
+          </a:p>
+          <a:p>
+            <a:pPr>
+              <a:defRPr sz="2000">
                 <a:solidFill>
                   <a:srgbClr val="202020"/>
                 </a:solidFill>
@@ -3616,27 +3574,6 @@
             </a:pPr>
             <a:r>
               <a:t>来源：`20260105_frustrated_fm/drift_experiments/unified_rerun/`（4 组 + continue）</a:t>
-            </a:r>
-          </a:p>
-          <a:p>
-            <a:pPr>
-              <a:defRPr sz="1300">
-                <a:solidFill>
-                  <a:srgbClr val="202020"/>
-                </a:solidFill>
-              </a:defRPr>
-            </a:pPr>
-          </a:p>
-          <a:p>
-            <a:pPr>
-              <a:defRPr sz="1300">
-                <a:solidFill>
-                  <a:srgbClr val="202020"/>
-                </a:solidFill>
-              </a:defRPr>
-            </a:pPr>
-            <a:r>
-              <a:t>---</a:t>
             </a:r>
           </a:p>
         </p:txBody>
@@ -3706,7 +3643,7 @@
           <a:lstStyle/>
           <a:p>
             <a:pPr>
-              <a:defRPr sz="2200" b="1">
+              <a:defRPr sz="2000" b="1">
                 <a:solidFill>
                   <a:srgbClr val="1F2D5A"/>
                 </a:solidFill>
@@ -3741,7 +3678,7 @@
           <a:lstStyle/>
           <a:p>
             <a:pPr>
-              <a:defRPr sz="1300">
+              <a:defRPr sz="2000">
                 <a:solidFill>
                   <a:srgbClr val="202020"/>
                 </a:solidFill>
@@ -3753,28 +3690,28 @@
           </a:p>
           <a:p>
             <a:pPr>
-              <a:defRPr sz="1300">
-                <a:solidFill>
-                  <a:srgbClr val="202020"/>
-                </a:solidFill>
-              </a:defRPr>
-            </a:pPr>
-          </a:p>
-          <a:p>
-            <a:pPr>
-              <a:defRPr sz="1300">
-                <a:solidFill>
-                  <a:srgbClr val="202020"/>
-                </a:solidFill>
-              </a:defRPr>
-            </a:pPr>
-            <a:r>
-              <a:t>**结论**：</a:t>
-            </a:r>
-          </a:p>
-          <a:p>
-            <a:pPr>
-              <a:defRPr sz="1300">
+              <a:defRPr sz="2000">
+                <a:solidFill>
+                  <a:srgbClr val="202020"/>
+                </a:solidFill>
+              </a:defRPr>
+            </a:pPr>
+          </a:p>
+          <a:p>
+            <a:pPr>
+              <a:defRPr sz="2000">
+                <a:solidFill>
+                  <a:srgbClr val="202020"/>
+                </a:solidFill>
+              </a:defRPr>
+            </a:pPr>
+            <a:r>
+              <a:t>结论：</a:t>
+            </a:r>
+          </a:p>
+          <a:p>
+            <a:pPr>
+              <a:defRPr sz="2000">
                 <a:solidFill>
                   <a:srgbClr val="202020"/>
                 </a:solidFill>
@@ -3786,7 +3723,7 @@
           </a:p>
           <a:p>
             <a:pPr>
-              <a:defRPr sz="1300">
+              <a:defRPr sz="2000">
                 <a:solidFill>
                   <a:srgbClr val="202020"/>
                 </a:solidFill>
@@ -3798,7 +3735,7 @@
           </a:p>
           <a:p>
             <a:pPr>
-              <a:defRPr sz="1300">
+              <a:defRPr sz="2000">
                 <a:solidFill>
                   <a:srgbClr val="202020"/>
                 </a:solidFill>
@@ -3810,16 +3747,16 @@
           </a:p>
           <a:p>
             <a:pPr>
-              <a:defRPr sz="1300">
-                <a:solidFill>
-                  <a:srgbClr val="202020"/>
-                </a:solidFill>
-              </a:defRPr>
-            </a:pPr>
-          </a:p>
-          <a:p>
-            <a:pPr>
-              <a:defRPr sz="1300">
+              <a:defRPr sz="2000">
+                <a:solidFill>
+                  <a:srgbClr val="202020"/>
+                </a:solidFill>
+              </a:defRPr>
+            </a:pPr>
+          </a:p>
+          <a:p>
+            <a:pPr>
+              <a:defRPr sz="2000">
                 <a:solidFill>
                   <a:srgbClr val="202020"/>
                 </a:solidFill>
@@ -3831,16 +3768,16 @@
           </a:p>
           <a:p>
             <a:pPr>
-              <a:defRPr sz="1300">
-                <a:solidFill>
-                  <a:srgbClr val="202020"/>
-                </a:solidFill>
-              </a:defRPr>
-            </a:pPr>
-          </a:p>
-          <a:p>
-            <a:pPr>
-              <a:defRPr sz="1300">
+              <a:defRPr sz="2000">
+                <a:solidFill>
+                  <a:srgbClr val="202020"/>
+                </a:solidFill>
+              </a:defRPr>
+            </a:pPr>
+          </a:p>
+          <a:p>
+            <a:pPr>
+              <a:defRPr sz="2000">
                 <a:solidFill>
                   <a:srgbClr val="202020"/>
                 </a:solidFill>
@@ -3848,27 +3785,6 @@
             </a:pPr>
             <a:r>
               <a:t>来源：`20260105_frustrated_fm/spin_wave_dynamics/drive_selection/plane_wave/`</a:t>
-            </a:r>
-          </a:p>
-          <a:p>
-            <a:pPr>
-              <a:defRPr sz="1300">
-                <a:solidFill>
-                  <a:srgbClr val="202020"/>
-                </a:solidFill>
-              </a:defRPr>
-            </a:pPr>
-          </a:p>
-          <a:p>
-            <a:pPr>
-              <a:defRPr sz="1300">
-                <a:solidFill>
-                  <a:srgbClr val="202020"/>
-                </a:solidFill>
-              </a:defRPr>
-            </a:pPr>
-            <a:r>
-              <a:t>---</a:t>
             </a:r>
           </a:p>
         </p:txBody>
@@ -3938,7 +3854,7 @@
           <a:lstStyle/>
           <a:p>
             <a:pPr>
-              <a:defRPr sz="2200" b="1">
+              <a:defRPr sz="2000" b="1">
                 <a:solidFill>
                   <a:srgbClr val="1F2D5A"/>
                 </a:solidFill>
@@ -3973,7 +3889,7 @@
           <a:lstStyle/>
           <a:p>
             <a:pPr>
-              <a:defRPr sz="1300">
+              <a:defRPr sz="2000">
                 <a:solidFill>
                   <a:srgbClr val="202020"/>
                 </a:solidFill>
@@ -3985,37 +3901,37 @@
           </a:p>
           <a:p>
             <a:pPr>
-              <a:defRPr sz="1300">
-                <a:solidFill>
-                  <a:srgbClr val="202020"/>
-                </a:solidFill>
-              </a:defRPr>
-            </a:pPr>
-          </a:p>
-          <a:p>
-            <a:pPr>
-              <a:defRPr sz="1300">
-                <a:solidFill>
-                  <a:srgbClr val="202020"/>
-                </a:solidFill>
-              </a:defRPr>
-            </a:pPr>
-            <a:r>
-              <a:t>**结论**：100-200 GHz、1000 GHz 强响应；400-600 GHz 死区（位移近零）；Hopfion 沿 +z 方向运动（垂直波传播方向）。</a:t>
-            </a:r>
-          </a:p>
-          <a:p>
-            <a:pPr>
-              <a:defRPr sz="1300">
-                <a:solidFill>
-                  <a:srgbClr val="202020"/>
-                </a:solidFill>
-              </a:defRPr>
-            </a:pPr>
-          </a:p>
-          <a:p>
-            <a:pPr>
-              <a:defRPr sz="1300">
+              <a:defRPr sz="2000">
+                <a:solidFill>
+                  <a:srgbClr val="202020"/>
+                </a:solidFill>
+              </a:defRPr>
+            </a:pPr>
+          </a:p>
+          <a:p>
+            <a:pPr>
+              <a:defRPr sz="2000">
+                <a:solidFill>
+                  <a:srgbClr val="202020"/>
+                </a:solidFill>
+              </a:defRPr>
+            </a:pPr>
+            <a:r>
+              <a:t>结论：100-200 GHz、1000 GHz 强响应；400-600 GHz 死区（位移近零）；Hopfion 沿 +z 方向运动（垂直波传播方向）。</a:t>
+            </a:r>
+          </a:p>
+          <a:p>
+            <a:pPr>
+              <a:defRPr sz="2000">
+                <a:solidFill>
+                  <a:srgbClr val="202020"/>
+                </a:solidFill>
+              </a:defRPr>
+            </a:pPr>
+          </a:p>
+          <a:p>
+            <a:pPr>
+              <a:defRPr sz="2000">
                 <a:solidFill>
                   <a:srgbClr val="202020"/>
                 </a:solidFill>
@@ -4023,27 +3939,6 @@
             </a:pPr>
             <a:r>
               <a:t>来源：`20260105_frustrated_fm/spin_wave_dynamics/freq_sweep/plane_wave/srcX/{02ns, 05ns}/`</a:t>
-            </a:r>
-          </a:p>
-          <a:p>
-            <a:pPr>
-              <a:defRPr sz="1300">
-                <a:solidFill>
-                  <a:srgbClr val="202020"/>
-                </a:solidFill>
-              </a:defRPr>
-            </a:pPr>
-          </a:p>
-          <a:p>
-            <a:pPr>
-              <a:defRPr sz="1300">
-                <a:solidFill>
-                  <a:srgbClr val="202020"/>
-                </a:solidFill>
-              </a:defRPr>
-            </a:pPr>
-            <a:r>
-              <a:t>---</a:t>
             </a:r>
           </a:p>
         </p:txBody>
@@ -4113,7 +4008,7 @@
           <a:lstStyle/>
           <a:p>
             <a:pPr>
-              <a:defRPr sz="2200" b="1">
+              <a:defRPr sz="2000" b="1">
                 <a:solidFill>
                   <a:srgbClr val="1F2D5A"/>
                 </a:solidFill>
@@ -4148,7 +4043,7 @@
           <a:lstStyle/>
           <a:p>
             <a:pPr>
-              <a:defRPr sz="1300">
+              <a:defRPr sz="2000">
                 <a:solidFill>
                   <a:srgbClr val="202020"/>
                 </a:solidFill>
@@ -4160,28 +4055,28 @@
           </a:p>
           <a:p>
             <a:pPr>
-              <a:defRPr sz="1300">
-                <a:solidFill>
-                  <a:srgbClr val="202020"/>
-                </a:solidFill>
-              </a:defRPr>
-            </a:pPr>
-          </a:p>
-          <a:p>
-            <a:pPr>
-              <a:defRPr sz="1300">
-                <a:solidFill>
-                  <a:srgbClr val="202020"/>
-                </a:solidFill>
-              </a:defRPr>
-            </a:pPr>
-            <a:r>
-              <a:t>**结论**：</a:t>
-            </a:r>
-          </a:p>
-          <a:p>
-            <a:pPr>
-              <a:defRPr sz="1300">
+              <a:defRPr sz="2000">
+                <a:solidFill>
+                  <a:srgbClr val="202020"/>
+                </a:solidFill>
+              </a:defRPr>
+            </a:pPr>
+          </a:p>
+          <a:p>
+            <a:pPr>
+              <a:defRPr sz="2000">
+                <a:solidFill>
+                  <a:srgbClr val="202020"/>
+                </a:solidFill>
+              </a:defRPr>
+            </a:pPr>
+            <a:r>
+              <a:t>结论：</a:t>
+            </a:r>
+          </a:p>
+          <a:p>
+            <a:pPr>
+              <a:defRPr sz="2000">
                 <a:solidFill>
                   <a:srgbClr val="202020"/>
                 </a:solidFill>
@@ -4193,7 +4088,7 @@
           </a:p>
           <a:p>
             <a:pPr>
-              <a:defRPr sz="1300">
+              <a:defRPr sz="2000">
                 <a:solidFill>
                   <a:srgbClr val="202020"/>
                 </a:solidFill>
@@ -4205,7 +4100,7 @@
           </a:p>
           <a:p>
             <a:pPr>
-              <a:defRPr sz="1300">
+              <a:defRPr sz="2000">
                 <a:solidFill>
                   <a:srgbClr val="202020"/>
                 </a:solidFill>
@@ -4217,7 +4112,7 @@
           </a:p>
           <a:p>
             <a:pPr>
-              <a:defRPr sz="1300">
+              <a:defRPr sz="2000">
                 <a:solidFill>
                   <a:srgbClr val="202020"/>
                 </a:solidFill>
@@ -4229,16 +4124,16 @@
           </a:p>
           <a:p>
             <a:pPr>
-              <a:defRPr sz="1300">
-                <a:solidFill>
-                  <a:srgbClr val="202020"/>
-                </a:solidFill>
-              </a:defRPr>
-            </a:pPr>
-          </a:p>
-          <a:p>
-            <a:pPr>
-              <a:defRPr sz="1300">
+              <a:defRPr sz="2000">
+                <a:solidFill>
+                  <a:srgbClr val="202020"/>
+                </a:solidFill>
+              </a:defRPr>
+            </a:pPr>
+          </a:p>
+          <a:p>
+            <a:pPr>
+              <a:defRPr sz="2000">
                 <a:solidFill>
                   <a:srgbClr val="202020"/>
                 </a:solidFill>
@@ -4246,27 +4141,6 @@
             </a:pPr>
             <a:r>
               <a:t>来源：`20260105_frustrated_fm/spin_wave_dynamics/freq_sweep/plane_wave/srcZ/`</a:t>
-            </a:r>
-          </a:p>
-          <a:p>
-            <a:pPr>
-              <a:defRPr sz="1300">
-                <a:solidFill>
-                  <a:srgbClr val="202020"/>
-                </a:solidFill>
-              </a:defRPr>
-            </a:pPr>
-          </a:p>
-          <a:p>
-            <a:pPr>
-              <a:defRPr sz="1300">
-                <a:solidFill>
-                  <a:srgbClr val="202020"/>
-                </a:solidFill>
-              </a:defRPr>
-            </a:pPr>
-            <a:r>
-              <a:t>---</a:t>
             </a:r>
           </a:p>
         </p:txBody>
@@ -4336,7 +4210,7 @@
           <a:lstStyle/>
           <a:p>
             <a:pPr>
-              <a:defRPr sz="2200" b="1">
+              <a:defRPr sz="2000" b="1">
                 <a:solidFill>
                   <a:srgbClr val="1F2D5A"/>
                 </a:solidFill>
@@ -4371,7 +4245,7 @@
           <a:lstStyle/>
           <a:p>
             <a:pPr>
-              <a:defRPr sz="1300">
+              <a:defRPr sz="2000">
                 <a:solidFill>
                   <a:srgbClr val="202020"/>
                 </a:solidFill>
@@ -4383,49 +4257,49 @@
           </a:p>
           <a:p>
             <a:pPr>
-              <a:defRPr sz="1300">
-                <a:solidFill>
-                  <a:srgbClr val="202020"/>
-                </a:solidFill>
-              </a:defRPr>
-            </a:pPr>
-          </a:p>
-          <a:p>
-            <a:pPr>
-              <a:defRPr sz="1300">
-                <a:solidFill>
-                  <a:srgbClr val="202020"/>
-                </a:solidFill>
-              </a:defRPr>
-            </a:pPr>
-            <a:r>
-              <a:t>**毕设原结论**：v∝B¹·⁹⁹ 幂律（仅基于 B=0.5/1.0/2.0 T 三点拟合）。</a:t>
-            </a:r>
-          </a:p>
-          <a:p>
-            <a:pPr>
-              <a:defRPr sz="1300">
-                <a:solidFill>
-                  <a:srgbClr val="202020"/>
-                </a:solidFill>
-              </a:defRPr>
-            </a:pPr>
-          </a:p>
-          <a:p>
-            <a:pPr>
-              <a:defRPr sz="1300">
-                <a:solidFill>
-                  <a:srgbClr val="202020"/>
-                </a:solidFill>
-              </a:defRPr>
-            </a:pPr>
-            <a:r>
-              <a:t>**已推翻**：</a:t>
-            </a:r>
-          </a:p>
-          <a:p>
-            <a:pPr>
-              <a:defRPr sz="1300">
+              <a:defRPr sz="2000">
+                <a:solidFill>
+                  <a:srgbClr val="202020"/>
+                </a:solidFill>
+              </a:defRPr>
+            </a:pPr>
+          </a:p>
+          <a:p>
+            <a:pPr>
+              <a:defRPr sz="2000">
+                <a:solidFill>
+                  <a:srgbClr val="202020"/>
+                </a:solidFill>
+              </a:defRPr>
+            </a:pPr>
+            <a:r>
+              <a:t>毕设原结论：v∝B¹·⁹⁹ 幂律（仅基于 B=0.5/1.0/2.0 T 三点拟合）。</a:t>
+            </a:r>
+          </a:p>
+          <a:p>
+            <a:pPr>
+              <a:defRPr sz="2000">
+                <a:solidFill>
+                  <a:srgbClr val="202020"/>
+                </a:solidFill>
+              </a:defRPr>
+            </a:pPr>
+          </a:p>
+          <a:p>
+            <a:pPr>
+              <a:defRPr sz="2000">
+                <a:solidFill>
+                  <a:srgbClr val="202020"/>
+                </a:solidFill>
+              </a:defRPr>
+            </a:pPr>
+            <a:r>
+              <a:t>已推翻：</a:t>
+            </a:r>
+          </a:p>
+          <a:p>
+            <a:pPr>
+              <a:defRPr sz="2000">
                 <a:solidFill>
                   <a:srgbClr val="202020"/>
                 </a:solidFill>
@@ -4437,7 +4311,7 @@
           </a:p>
           <a:p>
             <a:pPr>
-              <a:defRPr sz="1300">
+              <a:defRPr sz="2000">
                 <a:solidFill>
                   <a:srgbClr val="202020"/>
                 </a:solidFill>
@@ -4449,7 +4323,7 @@
           </a:p>
           <a:p>
             <a:pPr>
-              <a:defRPr sz="1300">
+              <a:defRPr sz="2000">
                 <a:solidFill>
                   <a:srgbClr val="202020"/>
                 </a:solidFill>
@@ -4461,7 +4335,7 @@
           </a:p>
           <a:p>
             <a:pPr>
-              <a:defRPr sz="1300">
+              <a:defRPr sz="2000">
                 <a:solidFill>
                   <a:srgbClr val="202020"/>
                 </a:solidFill>
@@ -4473,7 +4347,7 @@
           </a:p>
           <a:p>
             <a:pPr>
-              <a:defRPr sz="1300">
+              <a:defRPr sz="2000">
                 <a:solidFill>
                   <a:srgbClr val="202020"/>
                 </a:solidFill>
@@ -4485,37 +4359,37 @@
           </a:p>
           <a:p>
             <a:pPr>
-              <a:defRPr sz="1300">
-                <a:solidFill>
-                  <a:srgbClr val="202020"/>
-                </a:solidFill>
-              </a:defRPr>
-            </a:pPr>
-          </a:p>
-          <a:p>
-            <a:pPr>
-              <a:defRPr sz="1300">
-                <a:solidFill>
-                  <a:srgbClr val="202020"/>
-                </a:solidFill>
-              </a:defRPr>
-            </a:pPr>
-            <a:r>
-              <a:t>**现状**：方向反转 + 幂律两个现象并存，但准确标度律和精确 Bc 都未确定。</a:t>
-            </a:r>
-          </a:p>
-          <a:p>
-            <a:pPr>
-              <a:defRPr sz="1300">
-                <a:solidFill>
-                  <a:srgbClr val="202020"/>
-                </a:solidFill>
-              </a:defRPr>
-            </a:pPr>
-          </a:p>
-          <a:p>
-            <a:pPr>
-              <a:defRPr sz="1300">
+              <a:defRPr sz="2000">
+                <a:solidFill>
+                  <a:srgbClr val="202020"/>
+                </a:solidFill>
+              </a:defRPr>
+            </a:pPr>
+          </a:p>
+          <a:p>
+            <a:pPr>
+              <a:defRPr sz="2000">
+                <a:solidFill>
+                  <a:srgbClr val="202020"/>
+                </a:solidFill>
+              </a:defRPr>
+            </a:pPr>
+            <a:r>
+              <a:t>现状：方向反转 + 幂律两个现象并存，但准确标度律和精确 Bc 都未确定。</a:t>
+            </a:r>
+          </a:p>
+          <a:p>
+            <a:pPr>
+              <a:defRPr sz="2000">
+                <a:solidFill>
+                  <a:srgbClr val="202020"/>
+                </a:solidFill>
+              </a:defRPr>
+            </a:pPr>
+          </a:p>
+          <a:p>
+            <a:pPr>
+              <a:defRPr sz="2000">
                 <a:solidFill>
                   <a:srgbClr val="202020"/>
                 </a:solidFill>
@@ -4523,27 +4397,6 @@
             </a:pPr>
             <a:r>
               <a:t>来源：`20260105_frustrated_fm/spin_wave_dynamics/amplitude_sweep/plane_wave/`</a:t>
-            </a:r>
-          </a:p>
-          <a:p>
-            <a:pPr>
-              <a:defRPr sz="1300">
-                <a:solidFill>
-                  <a:srgbClr val="202020"/>
-                </a:solidFill>
-              </a:defRPr>
-            </a:pPr>
-          </a:p>
-          <a:p>
-            <a:pPr>
-              <a:defRPr sz="1300">
-                <a:solidFill>
-                  <a:srgbClr val="202020"/>
-                </a:solidFill>
-              </a:defRPr>
-            </a:pPr>
-            <a:r>
-              <a:t>---</a:t>
             </a:r>
           </a:p>
         </p:txBody>
@@ -4613,7 +4466,7 @@
           <a:lstStyle/>
           <a:p>
             <a:pPr>
-              <a:defRPr sz="2200" b="1">
+              <a:defRPr sz="2000" b="1">
                 <a:solidFill>
                   <a:srgbClr val="1F2D5A"/>
                 </a:solidFill>
@@ -4648,7 +4501,7 @@
           <a:lstStyle/>
           <a:p>
             <a:pPr>
-              <a:defRPr sz="1300">
+              <a:defRPr sz="2000">
                 <a:solidFill>
                   <a:srgbClr val="202020"/>
                 </a:solidFill>
@@ -4660,16 +4513,16 @@
           </a:p>
           <a:p>
             <a:pPr>
-              <a:defRPr sz="1300">
-                <a:solidFill>
-                  <a:srgbClr val="202020"/>
-                </a:solidFill>
-              </a:defRPr>
-            </a:pPr>
-          </a:p>
-          <a:p>
-            <a:pPr>
-              <a:defRPr sz="1300">
+              <a:defRPr sz="2000">
+                <a:solidFill>
+                  <a:srgbClr val="202020"/>
+                </a:solidFill>
+              </a:defRPr>
+            </a:pPr>
+          </a:p>
+          <a:p>
+            <a:pPr>
+              <a:defRPr sz="2000">
                 <a:solidFill>
                   <a:srgbClr val="202020"/>
                 </a:solidFill>
@@ -4681,16 +4534,16 @@
           </a:p>
           <a:p>
             <a:pPr>
-              <a:defRPr sz="1300">
-                <a:solidFill>
-                  <a:srgbClr val="202020"/>
-                </a:solidFill>
-              </a:defRPr>
-            </a:pPr>
-          </a:p>
-          <a:p>
-            <a:pPr>
-              <a:defRPr sz="1300">
+              <a:defRPr sz="2000">
+                <a:solidFill>
+                  <a:srgbClr val="202020"/>
+                </a:solidFill>
+              </a:defRPr>
+            </a:pPr>
+          </a:p>
+          <a:p>
+            <a:pPr>
+              <a:defRPr sz="2000">
                 <a:solidFill>
                   <a:srgbClr val="202020"/>
                 </a:solidFill>
@@ -4698,27 +4551,6 @@
             </a:pPr>
             <a:r>
               <a:t>无图。来源：`20260105_frustrated_fm/spin_wave_dynamics/amplitude_sweep/plane_wave_srcZ/`</a:t>
-            </a:r>
-          </a:p>
-          <a:p>
-            <a:pPr>
-              <a:defRPr sz="1300">
-                <a:solidFill>
-                  <a:srgbClr val="202020"/>
-                </a:solidFill>
-              </a:defRPr>
-            </a:pPr>
-          </a:p>
-          <a:p>
-            <a:pPr>
-              <a:defRPr sz="1300">
-                <a:solidFill>
-                  <a:srgbClr val="202020"/>
-                </a:solidFill>
-              </a:defRPr>
-            </a:pPr>
-            <a:r>
-              <a:t>---</a:t>
             </a:r>
           </a:p>
         </p:txBody>
@@ -4764,7 +4596,7 @@
           <a:lstStyle/>
           <a:p>
             <a:pPr>
-              <a:defRPr sz="2200" b="1">
+              <a:defRPr sz="2000" b="1">
                 <a:solidFill>
                   <a:srgbClr val="1F2D5A"/>
                 </a:solidFill>
@@ -4799,7 +4631,7 @@
           <a:lstStyle/>
           <a:p>
             <a:pPr>
-              <a:defRPr sz="1300">
+              <a:defRPr sz="2000">
                 <a:solidFill>
                   <a:srgbClr val="202020"/>
                 </a:solidFill>
@@ -4811,7 +4643,7 @@
           </a:p>
           <a:p>
             <a:pPr>
-              <a:defRPr sz="1300">
+              <a:defRPr sz="2000">
                 <a:solidFill>
                   <a:srgbClr val="202020"/>
                 </a:solidFill>
@@ -4823,7 +4655,7 @@
           </a:p>
           <a:p>
             <a:pPr>
-              <a:defRPr sz="1300">
+              <a:defRPr sz="2000">
                 <a:solidFill>
                   <a:srgbClr val="202020"/>
                 </a:solidFill>
@@ -4835,16 +4667,16 @@
           </a:p>
           <a:p>
             <a:pPr>
-              <a:defRPr sz="1300">
-                <a:solidFill>
-                  <a:srgbClr val="202020"/>
-                </a:solidFill>
-              </a:defRPr>
-            </a:pPr>
-          </a:p>
-          <a:p>
-            <a:pPr>
-              <a:defRPr sz="1300">
+              <a:defRPr sz="2000">
+                <a:solidFill>
+                  <a:srgbClr val="202020"/>
+                </a:solidFill>
+              </a:defRPr>
+            </a:pPr>
+          </a:p>
+          <a:p>
+            <a:pPr>
+              <a:defRPr sz="2000">
                 <a:solidFill>
                   <a:srgbClr val="202020"/>
                 </a:solidFill>
@@ -4856,16 +4688,16 @@
           </a:p>
           <a:p>
             <a:pPr>
-              <a:defRPr sz="1300">
-                <a:solidFill>
-                  <a:srgbClr val="202020"/>
-                </a:solidFill>
-              </a:defRPr>
-            </a:pPr>
-          </a:p>
-          <a:p>
-            <a:pPr>
-              <a:defRPr sz="1300">
+              <a:defRPr sz="2000">
+                <a:solidFill>
+                  <a:srgbClr val="202020"/>
+                </a:solidFill>
+              </a:defRPr>
+            </a:pPr>
+          </a:p>
+          <a:p>
+            <a:pPr>
+              <a:defRPr sz="2000">
                 <a:solidFill>
                   <a:srgbClr val="202020"/>
                 </a:solidFill>
@@ -4873,27 +4705,6 @@
             </a:pPr>
             <a:r>
               <a:t>无图。</a:t>
-            </a:r>
-          </a:p>
-          <a:p>
-            <a:pPr>
-              <a:defRPr sz="1300">
-                <a:solidFill>
-                  <a:srgbClr val="202020"/>
-                </a:solidFill>
-              </a:defRPr>
-            </a:pPr>
-          </a:p>
-          <a:p>
-            <a:pPr>
-              <a:defRPr sz="1300">
-                <a:solidFill>
-                  <a:srgbClr val="202020"/>
-                </a:solidFill>
-              </a:defRPr>
-            </a:pPr>
-            <a:r>
-              <a:t>---</a:t>
             </a:r>
           </a:p>
         </p:txBody>
@@ -4939,7 +4750,7 @@
           <a:lstStyle/>
           <a:p>
             <a:pPr>
-              <a:defRPr sz="2200" b="1">
+              <a:defRPr sz="2000" b="1">
                 <a:solidFill>
                   <a:srgbClr val="1F2D5A"/>
                 </a:solidFill>
@@ -4974,7 +4785,7 @@
           <a:lstStyle/>
           <a:p>
             <a:pPr>
-              <a:defRPr sz="1300">
+              <a:defRPr sz="2000">
                 <a:solidFill>
                   <a:srgbClr val="202020"/>
                 </a:solidFill>
@@ -4986,28 +4797,28 @@
           </a:p>
           <a:p>
             <a:pPr>
-              <a:defRPr sz="1300">
-                <a:solidFill>
-                  <a:srgbClr val="202020"/>
-                </a:solidFill>
-              </a:defRPr>
-            </a:pPr>
-          </a:p>
-          <a:p>
-            <a:pPr>
-              <a:defRPr sz="1300">
-                <a:solidFill>
-                  <a:srgbClr val="202020"/>
-                </a:solidFill>
-              </a:defRPr>
-            </a:pPr>
-            <a:r>
-              <a:t>**结论**（B 设备数据迁回 2026-04-09）：</a:t>
-            </a:r>
-          </a:p>
-          <a:p>
-            <a:pPr>
-              <a:defRPr sz="1300">
+              <a:defRPr sz="2000">
+                <a:solidFill>
+                  <a:srgbClr val="202020"/>
+                </a:solidFill>
+              </a:defRPr>
+            </a:pPr>
+          </a:p>
+          <a:p>
+            <a:pPr>
+              <a:defRPr sz="2000">
+                <a:solidFill>
+                  <a:srgbClr val="202020"/>
+                </a:solidFill>
+              </a:defRPr>
+            </a:pPr>
+            <a:r>
+              <a:t>结论（B 设备数据迁回 2026-04-09）：</a:t>
+            </a:r>
+          </a:p>
+          <a:p>
+            <a:pPr>
+              <a:defRPr sz="2000">
                 <a:solidFill>
                   <a:srgbClr val="202020"/>
                 </a:solidFill>
@@ -5019,31 +4830,31 @@
           </a:p>
           <a:p>
             <a:pPr>
-              <a:defRPr sz="1300">
-                <a:solidFill>
-                  <a:srgbClr val="202020"/>
-                </a:solidFill>
-              </a:defRPr>
-            </a:pPr>
-            <a:r>
-              <a:t>- **全频段 +z**，与平面源 srcX 一致</a:t>
-            </a:r>
-          </a:p>
-          <a:p>
-            <a:pPr>
-              <a:defRPr sz="1300">
-                <a:solidFill>
-                  <a:srgbClr val="202020"/>
-                </a:solidFill>
-              </a:defRPr>
-            </a:pPr>
-            <a:r>
-              <a:t>- **死区消失**（平面源有 400-600 GHz 死区）</a:t>
-            </a:r>
-          </a:p>
-          <a:p>
-            <a:pPr>
-              <a:defRPr sz="1300">
+              <a:defRPr sz="2000">
+                <a:solidFill>
+                  <a:srgbClr val="202020"/>
+                </a:solidFill>
+              </a:defRPr>
+            </a:pPr>
+            <a:r>
+              <a:t>- 全频段 +z，与平面源 srcX 一致</a:t>
+            </a:r>
+          </a:p>
+          <a:p>
+            <a:pPr>
+              <a:defRPr sz="2000">
+                <a:solidFill>
+                  <a:srgbClr val="202020"/>
+                </a:solidFill>
+              </a:defRPr>
+            </a:pPr>
+            <a:r>
+              <a:t>- 死区消失（平面源有 400-600 GHz 死区）</a:t>
+            </a:r>
+          </a:p>
+          <a:p>
+            <a:pPr>
+              <a:defRPr sz="2000">
                 <a:solidFill>
                   <a:srgbClr val="202020"/>
                 </a:solidFill>
@@ -5055,16 +4866,16 @@
           </a:p>
           <a:p>
             <a:pPr>
-              <a:defRPr sz="1300">
-                <a:solidFill>
-                  <a:srgbClr val="202020"/>
-                </a:solidFill>
-              </a:defRPr>
-            </a:pPr>
-          </a:p>
-          <a:p>
-            <a:pPr>
-              <a:defRPr sz="1300">
+              <a:defRPr sz="2000">
+                <a:solidFill>
+                  <a:srgbClr val="202020"/>
+                </a:solidFill>
+              </a:defRPr>
+            </a:pPr>
+          </a:p>
+          <a:p>
+            <a:pPr>
+              <a:defRPr sz="2000">
                 <a:solidFill>
                   <a:srgbClr val="202020"/>
                 </a:solidFill>
@@ -5072,27 +4883,6 @@
             </a:pPr>
             <a:r>
               <a:t>来源：`20260105_frustrated_fm/spin_wave_dynamics/freq_sweep/point_source/srcX/`</a:t>
-            </a:r>
-          </a:p>
-          <a:p>
-            <a:pPr>
-              <a:defRPr sz="1300">
-                <a:solidFill>
-                  <a:srgbClr val="202020"/>
-                </a:solidFill>
-              </a:defRPr>
-            </a:pPr>
-          </a:p>
-          <a:p>
-            <a:pPr>
-              <a:defRPr sz="1300">
-                <a:solidFill>
-                  <a:srgbClr val="202020"/>
-                </a:solidFill>
-              </a:defRPr>
-            </a:pPr>
-            <a:r>
-              <a:t>---</a:t>
             </a:r>
           </a:p>
         </p:txBody>
@@ -5162,7 +4952,7 @@
           <a:lstStyle/>
           <a:p>
             <a:pPr>
-              <a:defRPr sz="2200" b="1">
+              <a:defRPr sz="2000" b="1">
                 <a:solidFill>
                   <a:srgbClr val="1F2D5A"/>
                 </a:solidFill>
@@ -5197,7 +4987,7 @@
           <a:lstStyle/>
           <a:p>
             <a:pPr>
-              <a:defRPr sz="1300">
+              <a:defRPr sz="2000">
                 <a:solidFill>
                   <a:srgbClr val="202020"/>
                 </a:solidFill>
@@ -5209,28 +4999,28 @@
           </a:p>
           <a:p>
             <a:pPr>
-              <a:defRPr sz="1300">
-                <a:solidFill>
-                  <a:srgbClr val="202020"/>
-                </a:solidFill>
-              </a:defRPr>
-            </a:pPr>
-          </a:p>
-          <a:p>
-            <a:pPr>
-              <a:defRPr sz="1300">
-                <a:solidFill>
-                  <a:srgbClr val="202020"/>
-                </a:solidFill>
-              </a:defRPr>
-            </a:pPr>
-            <a:r>
-              <a:t>**结论**：</a:t>
-            </a:r>
-          </a:p>
-          <a:p>
-            <a:pPr>
-              <a:defRPr sz="1300">
+              <a:defRPr sz="2000">
+                <a:solidFill>
+                  <a:srgbClr val="202020"/>
+                </a:solidFill>
+              </a:defRPr>
+            </a:pPr>
+          </a:p>
+          <a:p>
+            <a:pPr>
+              <a:defRPr sz="2000">
+                <a:solidFill>
+                  <a:srgbClr val="202020"/>
+                </a:solidFill>
+              </a:defRPr>
+            </a:pPr>
+            <a:r>
+              <a:t>结论：</a:t>
+            </a:r>
+          </a:p>
+          <a:p>
+            <a:pPr>
+              <a:defRPr sz="2000">
                 <a:solidFill>
                   <a:srgbClr val="202020"/>
                 </a:solidFill>
@@ -5242,19 +5032,19 @@
           </a:p>
           <a:p>
             <a:pPr>
-              <a:defRPr sz="1300">
-                <a:solidFill>
-                  <a:srgbClr val="202020"/>
-                </a:solidFill>
-              </a:defRPr>
-            </a:pPr>
-            <a:r>
-              <a:t>- **方向分布更复杂**：100/200/300/400 / 600 / 900 GHz +z，500 / 700 / 800 GHz -z（vs 平面源仅 100 GHz 异常）</a:t>
-            </a:r>
-          </a:p>
-          <a:p>
-            <a:pPr>
-              <a:defRPr sz="1300">
+              <a:defRPr sz="2000">
+                <a:solidFill>
+                  <a:srgbClr val="202020"/>
+                </a:solidFill>
+              </a:defRPr>
+            </a:pPr>
+            <a:r>
+              <a:t>- 方向分布更复杂：100/200/300/400 / 600 / 900 GHz +z，500 / 700 / 800 GHz -z（vs 平面源仅 100 GHz 异常）</a:t>
+            </a:r>
+          </a:p>
+          <a:p>
+            <a:pPr>
+              <a:defRPr sz="2000">
                 <a:solidFill>
                   <a:srgbClr val="202020"/>
                 </a:solidFill>
@@ -5266,16 +5056,16 @@
           </a:p>
           <a:p>
             <a:pPr>
-              <a:defRPr sz="1300">
-                <a:solidFill>
-                  <a:srgbClr val="202020"/>
-                </a:solidFill>
-              </a:defRPr>
-            </a:pPr>
-          </a:p>
-          <a:p>
-            <a:pPr>
-              <a:defRPr sz="1300">
+              <a:defRPr sz="2000">
+                <a:solidFill>
+                  <a:srgbClr val="202020"/>
+                </a:solidFill>
+              </a:defRPr>
+            </a:pPr>
+          </a:p>
+          <a:p>
+            <a:pPr>
+              <a:defRPr sz="2000">
                 <a:solidFill>
                   <a:srgbClr val="202020"/>
                 </a:solidFill>
@@ -5287,16 +5077,16 @@
           </a:p>
           <a:p>
             <a:pPr>
-              <a:defRPr sz="1300">
-                <a:solidFill>
-                  <a:srgbClr val="202020"/>
-                </a:solidFill>
-              </a:defRPr>
-            </a:pPr>
-          </a:p>
-          <a:p>
-            <a:pPr>
-              <a:defRPr sz="1300">
+              <a:defRPr sz="2000">
+                <a:solidFill>
+                  <a:srgbClr val="202020"/>
+                </a:solidFill>
+              </a:defRPr>
+            </a:pPr>
+          </a:p>
+          <a:p>
+            <a:pPr>
+              <a:defRPr sz="2000">
                 <a:solidFill>
                   <a:srgbClr val="202020"/>
                 </a:solidFill>
@@ -5304,27 +5094,6 @@
             </a:pPr>
             <a:r>
               <a:t>无图（共用 P18 图）。来源：`20260105_frustrated_fm/spin_wave_dynamics/freq_sweep/point_source/srcZ/`</a:t>
-            </a:r>
-          </a:p>
-          <a:p>
-            <a:pPr>
-              <a:defRPr sz="1300">
-                <a:solidFill>
-                  <a:srgbClr val="202020"/>
-                </a:solidFill>
-              </a:defRPr>
-            </a:pPr>
-          </a:p>
-          <a:p>
-            <a:pPr>
-              <a:defRPr sz="1300">
-                <a:solidFill>
-                  <a:srgbClr val="202020"/>
-                </a:solidFill>
-              </a:defRPr>
-            </a:pPr>
-            <a:r>
-              <a:t>---</a:t>
             </a:r>
           </a:p>
         </p:txBody>
@@ -5370,7 +5139,7 @@
           <a:lstStyle/>
           <a:p>
             <a:pPr>
-              <a:defRPr sz="2200" b="1">
+              <a:defRPr sz="2000" b="1">
                 <a:solidFill>
                   <a:srgbClr val="1F2D5A"/>
                 </a:solidFill>
@@ -5405,7 +5174,7 @@
           <a:lstStyle/>
           <a:p>
             <a:pPr>
-              <a:defRPr sz="1300">
+              <a:defRPr sz="2000">
                 <a:solidFill>
                   <a:srgbClr val="202020"/>
                 </a:solidFill>
@@ -5417,16 +5186,16 @@
           </a:p>
           <a:p>
             <a:pPr>
-              <a:defRPr sz="1300">
-                <a:solidFill>
-                  <a:srgbClr val="202020"/>
-                </a:solidFill>
-              </a:defRPr>
-            </a:pPr>
-          </a:p>
-          <a:p>
-            <a:pPr>
-              <a:defRPr sz="1300">
+              <a:defRPr sz="2000">
+                <a:solidFill>
+                  <a:srgbClr val="202020"/>
+                </a:solidFill>
+              </a:defRPr>
+            </a:pPr>
+          </a:p>
+          <a:p>
+            <a:pPr>
+              <a:defRPr sz="2000">
                 <a:solidFill>
                   <a:srgbClr val="202020"/>
                 </a:solidFill>
@@ -5438,16 +5207,16 @@
           </a:p>
           <a:p>
             <a:pPr>
-              <a:defRPr sz="1300">
-                <a:solidFill>
-                  <a:srgbClr val="202020"/>
-                </a:solidFill>
-              </a:defRPr>
-            </a:pPr>
-          </a:p>
-          <a:p>
-            <a:pPr>
-              <a:defRPr sz="1300">
+              <a:defRPr sz="2000">
+                <a:solidFill>
+                  <a:srgbClr val="202020"/>
+                </a:solidFill>
+              </a:defRPr>
+            </a:pPr>
+          </a:p>
+          <a:p>
+            <a:pPr>
+              <a:defRPr sz="2000">
                 <a:solidFill>
                   <a:srgbClr val="202020"/>
                 </a:solidFill>
@@ -5455,27 +5224,6 @@
             </a:pPr>
             <a:r>
               <a:t>无图。来源：`20251219_dmi_fm/failed_attempts/bulk_pbc_tests/`（4 runs）</a:t>
-            </a:r>
-          </a:p>
-          <a:p>
-            <a:pPr>
-              <a:defRPr sz="1300">
-                <a:solidFill>
-                  <a:srgbClr val="202020"/>
-                </a:solidFill>
-              </a:defRPr>
-            </a:pPr>
-          </a:p>
-          <a:p>
-            <a:pPr>
-              <a:defRPr sz="1300">
-                <a:solidFill>
-                  <a:srgbClr val="202020"/>
-                </a:solidFill>
-              </a:defRPr>
-            </a:pPr>
-            <a:r>
-              <a:t>---</a:t>
             </a:r>
           </a:p>
         </p:txBody>
@@ -5521,7 +5269,7 @@
           <a:lstStyle/>
           <a:p>
             <a:pPr>
-              <a:defRPr sz="2200" b="1">
+              <a:defRPr sz="2000" b="1">
                 <a:solidFill>
                   <a:srgbClr val="1F2D5A"/>
                 </a:solidFill>
@@ -5556,7 +5304,7 @@
           <a:lstStyle/>
           <a:p>
             <a:pPr>
-              <a:defRPr sz="1300">
+              <a:defRPr sz="2000">
                 <a:solidFill>
                   <a:srgbClr val="202020"/>
                 </a:solidFill>
@@ -5568,16 +5316,16 @@
           </a:p>
           <a:p>
             <a:pPr>
-              <a:defRPr sz="1300">
-                <a:solidFill>
-                  <a:srgbClr val="202020"/>
-                </a:solidFill>
-              </a:defRPr>
-            </a:pPr>
-          </a:p>
-          <a:p>
-            <a:pPr>
-              <a:defRPr sz="1300">
+              <a:defRPr sz="2000">
+                <a:solidFill>
+                  <a:srgbClr val="202020"/>
+                </a:solidFill>
+              </a:defRPr>
+            </a:pPr>
+          </a:p>
+          <a:p>
+            <a:pPr>
+              <a:defRPr sz="2000">
                 <a:solidFill>
                   <a:srgbClr val="202020"/>
                 </a:solidFill>
@@ -5589,7 +5337,7 @@
           </a:p>
           <a:p>
             <a:pPr>
-              <a:defRPr sz="1300">
+              <a:defRPr sz="2000">
                 <a:solidFill>
                   <a:srgbClr val="202020"/>
                 </a:solidFill>
@@ -5601,7 +5349,7 @@
           </a:p>
           <a:p>
             <a:pPr>
-              <a:defRPr sz="1300">
+              <a:defRPr sz="2000">
                 <a:solidFill>
                   <a:srgbClr val="202020"/>
                 </a:solidFill>
@@ -5613,19 +5361,19 @@
           </a:p>
           <a:p>
             <a:pPr>
-              <a:defRPr sz="1300">
-                <a:solidFill>
-                  <a:srgbClr val="202020"/>
-                </a:solidFill>
-              </a:defRPr>
-            </a:pPr>
-            <a:r>
-              <a:t>| B500 | **停在 0.433 ns**，未续跑成功 |</a:t>
-            </a:r>
-          </a:p>
-          <a:p>
-            <a:pPr>
-              <a:defRPr sz="1300">
+              <a:defRPr sz="2000">
+                <a:solidFill>
+                  <a:srgbClr val="202020"/>
+                </a:solidFill>
+              </a:defRPr>
+            </a:pPr>
+            <a:r>
+              <a:t>| B500 | 停在 0.433 ns，未续跑成功 |</a:t>
+            </a:r>
+          </a:p>
+          <a:p>
+            <a:pPr>
+              <a:defRPr sz="2000">
                 <a:solidFill>
                   <a:srgbClr val="202020"/>
                 </a:solidFill>
@@ -5637,16 +5385,16 @@
           </a:p>
           <a:p>
             <a:pPr>
-              <a:defRPr sz="1300">
-                <a:solidFill>
-                  <a:srgbClr val="202020"/>
-                </a:solidFill>
-              </a:defRPr>
-            </a:pPr>
-          </a:p>
-          <a:p>
-            <a:pPr>
-              <a:defRPr sz="1300">
+              <a:defRPr sz="2000">
+                <a:solidFill>
+                  <a:srgbClr val="202020"/>
+                </a:solidFill>
+              </a:defRPr>
+            </a:pPr>
+          </a:p>
+          <a:p>
+            <a:pPr>
+              <a:defRPr sz="2000">
                 <a:solidFill>
                   <a:srgbClr val="202020"/>
                 </a:solidFill>
@@ -5658,16 +5406,16 @@
           </a:p>
           <a:p>
             <a:pPr>
-              <a:defRPr sz="1300">
-                <a:solidFill>
-                  <a:srgbClr val="202020"/>
-                </a:solidFill>
-              </a:defRPr>
-            </a:pPr>
-          </a:p>
-          <a:p>
-            <a:pPr>
-              <a:defRPr sz="1300">
+              <a:defRPr sz="2000">
+                <a:solidFill>
+                  <a:srgbClr val="202020"/>
+                </a:solidFill>
+              </a:defRPr>
+            </a:pPr>
+          </a:p>
+          <a:p>
+            <a:pPr>
+              <a:defRPr sz="2000">
                 <a:solidFill>
                   <a:srgbClr val="202020"/>
                 </a:solidFill>
@@ -5675,27 +5423,6 @@
             </a:pPr>
             <a:r>
               <a:t>无图。来源：`20260105_frustrated_fm/spin_wave_dynamics/amplitude_sweep/point_source/`</a:t>
-            </a:r>
-          </a:p>
-          <a:p>
-            <a:pPr>
-              <a:defRPr sz="1300">
-                <a:solidFill>
-                  <a:srgbClr val="202020"/>
-                </a:solidFill>
-              </a:defRPr>
-            </a:pPr>
-          </a:p>
-          <a:p>
-            <a:pPr>
-              <a:defRPr sz="1300">
-                <a:solidFill>
-                  <a:srgbClr val="202020"/>
-                </a:solidFill>
-              </a:defRPr>
-            </a:pPr>
-            <a:r>
-              <a:t>---</a:t>
             </a:r>
           </a:p>
         </p:txBody>
@@ -5741,7 +5468,7 @@
           <a:lstStyle/>
           <a:p>
             <a:pPr>
-              <a:defRPr sz="2200" b="1">
+              <a:defRPr sz="2000" b="1">
                 <a:solidFill>
                   <a:srgbClr val="1F2D5A"/>
                 </a:solidFill>
@@ -5776,7 +5503,7 @@
           <a:lstStyle/>
           <a:p>
             <a:pPr>
-              <a:defRPr sz="1300">
+              <a:defRPr sz="2000">
                 <a:solidFill>
                   <a:srgbClr val="202020"/>
                 </a:solidFill>
@@ -5788,16 +5515,16 @@
           </a:p>
           <a:p>
             <a:pPr>
-              <a:defRPr sz="1300">
-                <a:solidFill>
-                  <a:srgbClr val="202020"/>
-                </a:solidFill>
-              </a:defRPr>
-            </a:pPr>
-          </a:p>
-          <a:p>
-            <a:pPr>
-              <a:defRPr sz="1300">
+              <a:defRPr sz="2000">
+                <a:solidFill>
+                  <a:srgbClr val="202020"/>
+                </a:solidFill>
+              </a:defRPr>
+            </a:pPr>
+          </a:p>
+          <a:p>
+            <a:pPr>
+              <a:defRPr sz="2000">
                 <a:solidFill>
                   <a:srgbClr val="202020"/>
                 </a:solidFill>
@@ -5809,16 +5536,16 @@
           </a:p>
           <a:p>
             <a:pPr>
-              <a:defRPr sz="1300">
-                <a:solidFill>
-                  <a:srgbClr val="202020"/>
-                </a:solidFill>
-              </a:defRPr>
-            </a:pPr>
-          </a:p>
-          <a:p>
-            <a:pPr>
-              <a:defRPr sz="1300">
+              <a:defRPr sz="2000">
+                <a:solidFill>
+                  <a:srgbClr val="202020"/>
+                </a:solidFill>
+              </a:defRPr>
+            </a:pPr>
+          </a:p>
+          <a:p>
+            <a:pPr>
+              <a:defRPr sz="2000">
                 <a:solidFill>
                   <a:srgbClr val="202020"/>
                 </a:solidFill>
@@ -5830,16 +5557,16 @@
           </a:p>
           <a:p>
             <a:pPr>
-              <a:defRPr sz="1300">
-                <a:solidFill>
-                  <a:srgbClr val="202020"/>
-                </a:solidFill>
-              </a:defRPr>
-            </a:pPr>
-          </a:p>
-          <a:p>
-            <a:pPr>
-              <a:defRPr sz="1300">
+              <a:defRPr sz="2000">
+                <a:solidFill>
+                  <a:srgbClr val="202020"/>
+                </a:solidFill>
+              </a:defRPr>
+            </a:pPr>
+          </a:p>
+          <a:p>
+            <a:pPr>
+              <a:defRPr sz="2000">
                 <a:solidFill>
                   <a:srgbClr val="202020"/>
                 </a:solidFill>
@@ -5847,27 +5574,6 @@
             </a:pPr>
             <a:r>
               <a:t>无图。来源：`20260105_frustrated_fm/spin_wave_dynamics/multisource_control/{baseline, bidirectional_z/v1}/`</a:t>
-            </a:r>
-          </a:p>
-          <a:p>
-            <a:pPr>
-              <a:defRPr sz="1300">
-                <a:solidFill>
-                  <a:srgbClr val="202020"/>
-                </a:solidFill>
-              </a:defRPr>
-            </a:pPr>
-          </a:p>
-          <a:p>
-            <a:pPr>
-              <a:defRPr sz="1300">
-                <a:solidFill>
-                  <a:srgbClr val="202020"/>
-                </a:solidFill>
-              </a:defRPr>
-            </a:pPr>
-            <a:r>
-              <a:t>---</a:t>
             </a:r>
           </a:p>
         </p:txBody>
@@ -5913,7 +5619,7 @@
           <a:lstStyle/>
           <a:p>
             <a:pPr>
-              <a:defRPr sz="2200" b="1">
+              <a:defRPr sz="2000" b="1">
                 <a:solidFill>
                   <a:srgbClr val="1F2D5A"/>
                 </a:solidFill>
@@ -5948,7 +5654,7 @@
           <a:lstStyle/>
           <a:p>
             <a:pPr>
-              <a:defRPr sz="1300">
+              <a:defRPr sz="2000">
                 <a:solidFill>
                   <a:srgbClr val="202020"/>
                 </a:solidFill>
@@ -5960,19 +5666,19 @@
           </a:p>
           <a:p>
             <a:pPr>
-              <a:defRPr sz="1300">
-                <a:solidFill>
-                  <a:srgbClr val="202020"/>
-                </a:solidFill>
-              </a:defRPr>
-            </a:pPr>
-            <a:r>
-              <a:t>- Phase1 100 GHz：Hopfion 仅 +0.04 nm（**Phase1 太短**）</a:t>
-            </a:r>
-          </a:p>
-          <a:p>
-            <a:pPr>
-              <a:defRPr sz="1300">
+              <a:defRPr sz="2000">
+                <a:solidFill>
+                  <a:srgbClr val="202020"/>
+                </a:solidFill>
+              </a:defRPr>
+            </a:pPr>
+            <a:r>
+              <a:t>- Phase1 100 GHz：Hopfion 仅 +0.04 nm（Phase1 太短）</a:t>
+            </a:r>
+          </a:p>
+          <a:p>
+            <a:pPr>
+              <a:defRPr sz="2000">
                 <a:solidFill>
                   <a:srgbClr val="202020"/>
                 </a:solidFill>
@@ -5984,28 +5690,28 @@
           </a:p>
           <a:p>
             <a:pPr>
-              <a:defRPr sz="1300">
-                <a:solidFill>
-                  <a:srgbClr val="202020"/>
-                </a:solidFill>
-              </a:defRPr>
-            </a:pPr>
-            <a:r>
-              <a:t>- **双向 FAILED**：未观察到 +z → -z 完整反转</a:t>
-            </a:r>
-          </a:p>
-          <a:p>
-            <a:pPr>
-              <a:defRPr sz="1300">
-                <a:solidFill>
-                  <a:srgbClr val="202020"/>
-                </a:solidFill>
-              </a:defRPr>
-            </a:pPr>
-          </a:p>
-          <a:p>
-            <a:pPr>
-              <a:defRPr sz="1300">
+              <a:defRPr sz="2000">
+                <a:solidFill>
+                  <a:srgbClr val="202020"/>
+                </a:solidFill>
+              </a:defRPr>
+            </a:pPr>
+            <a:r>
+              <a:t>- 双向 FAILED：未观察到 +z → -z 完整反转</a:t>
+            </a:r>
+          </a:p>
+          <a:p>
+            <a:pPr>
+              <a:defRPr sz="2000">
+                <a:solidFill>
+                  <a:srgbClr val="202020"/>
+                </a:solidFill>
+              </a:defRPr>
+            </a:pPr>
+          </a:p>
+          <a:p>
+            <a:pPr>
+              <a:defRPr sz="2000">
                 <a:solidFill>
                   <a:srgbClr val="202020"/>
                 </a:solidFill>
@@ -6017,94 +5723,94 @@
           </a:p>
           <a:p>
             <a:pPr>
-              <a:defRPr sz="1300">
-                <a:solidFill>
-                  <a:srgbClr val="202020"/>
-                </a:solidFill>
-              </a:defRPr>
-            </a:pPr>
-            <a:r>
-              <a:t>- Phase1 100 GHz：0 → +17.6 nm（**PASS**）</a:t>
-            </a:r>
-          </a:p>
-          <a:p>
-            <a:pPr>
-              <a:defRPr sz="1300">
-                <a:solidFill>
-                  <a:srgbClr val="202020"/>
-                </a:solidFill>
-              </a:defRPr>
-            </a:pPr>
-            <a:r>
-              <a:t>- Phase2 1100 GHz：+17.6 nm → -12.9 nm（**反转 SUCCESS**）</a:t>
-            </a:r>
-          </a:p>
-          <a:p>
-            <a:pPr>
-              <a:defRPr sz="1300">
-                <a:solidFill>
-                  <a:srgbClr val="202020"/>
-                </a:solidFill>
-              </a:defRPr>
-            </a:pPr>
-            <a:r>
-              <a:t>- **t ≈ 0.91 ns Hopfion 拓扑结构坍塌，core=0**（毕设展示截到 0.80 ns，未提坍塌，本次完整呈现到 1.00 ns）</a:t>
-            </a:r>
-          </a:p>
-          <a:p>
-            <a:pPr>
-              <a:defRPr sz="1300">
-                <a:solidFill>
-                  <a:srgbClr val="202020"/>
-                </a:solidFill>
-              </a:defRPr>
-            </a:pPr>
-          </a:p>
-          <a:p>
-            <a:pPr>
-              <a:defRPr sz="1300">
-                <a:solidFill>
-                  <a:srgbClr val="202020"/>
-                </a:solidFill>
-              </a:defRPr>
-            </a:pPr>
-            <a:r>
-              <a:t>**失败根因**：1100 GHz 推 -z 力量过强（耦合 ~74 nm/ns，远超 Phase1 的 ~35 nm/ns），Phase2 持续 0.30 ns 形变累积过临界。</a:t>
-            </a:r>
-          </a:p>
-          <a:p>
-            <a:pPr>
-              <a:defRPr sz="1300">
-                <a:solidFill>
-                  <a:srgbClr val="202020"/>
-                </a:solidFill>
-              </a:defRPr>
-            </a:pPr>
-          </a:p>
-          <a:p>
-            <a:pPr>
-              <a:defRPr sz="1300">
-                <a:solidFill>
-                  <a:srgbClr val="202020"/>
-                </a:solidFill>
-              </a:defRPr>
-            </a:pPr>
-            <a:r>
-              <a:t>**方案 A 调参（未实施）**：Phase2 脉宽 → 0.05-0.10 ns；Phase2 振幅 → 0.3-0.5 T；后接 0 场维持。</a:t>
-            </a:r>
-          </a:p>
-          <a:p>
-            <a:pPr>
-              <a:defRPr sz="1300">
-                <a:solidFill>
-                  <a:srgbClr val="202020"/>
-                </a:solidFill>
-              </a:defRPr>
-            </a:pPr>
-          </a:p>
-          <a:p>
-            <a:pPr>
-              <a:defRPr sz="1300">
+              <a:defRPr sz="2000">
+                <a:solidFill>
+                  <a:srgbClr val="202020"/>
+                </a:solidFill>
+              </a:defRPr>
+            </a:pPr>
+            <a:r>
+              <a:t>- Phase1 100 GHz：0 → +17.6 nm（PASS）</a:t>
+            </a:r>
+          </a:p>
+          <a:p>
+            <a:pPr>
+              <a:defRPr sz="2000">
+                <a:solidFill>
+                  <a:srgbClr val="202020"/>
+                </a:solidFill>
+              </a:defRPr>
+            </a:pPr>
+            <a:r>
+              <a:t>- Phase2 1100 GHz：+17.6 nm → -12.9 nm（反转 SUCCESS）</a:t>
+            </a:r>
+          </a:p>
+          <a:p>
+            <a:pPr>
+              <a:defRPr sz="2000">
+                <a:solidFill>
+                  <a:srgbClr val="202020"/>
+                </a:solidFill>
+              </a:defRPr>
+            </a:pPr>
+            <a:r>
+              <a:t>- t ≈ 0.91 ns Hopfion 拓扑结构坍塌，core=0（毕设展示截到 0.80 ns，未提坍塌，本次完整呈现到 1.00 ns）</a:t>
+            </a:r>
+          </a:p>
+          <a:p>
+            <a:pPr>
+              <a:defRPr sz="2000">
+                <a:solidFill>
+                  <a:srgbClr val="202020"/>
+                </a:solidFill>
+              </a:defRPr>
+            </a:pPr>
+          </a:p>
+          <a:p>
+            <a:pPr>
+              <a:defRPr sz="2000">
+                <a:solidFill>
+                  <a:srgbClr val="202020"/>
+                </a:solidFill>
+              </a:defRPr>
+            </a:pPr>
+            <a:r>
+              <a:t>失败根因：1100 GHz 推 -z 力量过强（耦合 ~74 nm/ns，远超 Phase1 的 ~35 nm/ns），Phase2 持续 0.30 ns 形变累积过临界。</a:t>
+            </a:r>
+          </a:p>
+          <a:p>
+            <a:pPr>
+              <a:defRPr sz="2000">
+                <a:solidFill>
+                  <a:srgbClr val="202020"/>
+                </a:solidFill>
+              </a:defRPr>
+            </a:pPr>
+          </a:p>
+          <a:p>
+            <a:pPr>
+              <a:defRPr sz="2000">
+                <a:solidFill>
+                  <a:srgbClr val="202020"/>
+                </a:solidFill>
+              </a:defRPr>
+            </a:pPr>
+            <a:r>
+              <a:t>方案 A 调参（未实施）：Phase2 脉宽 → 0.05-0.10 ns；Phase2 振幅 → 0.3-0.5 T；后接 0 场维持。</a:t>
+            </a:r>
+          </a:p>
+          <a:p>
+            <a:pPr>
+              <a:defRPr sz="2000">
+                <a:solidFill>
+                  <a:srgbClr val="202020"/>
+                </a:solidFill>
+              </a:defRPr>
+            </a:pPr>
+          </a:p>
+          <a:p>
+            <a:pPr>
+              <a:defRPr sz="2000">
                 <a:solidFill>
                   <a:srgbClr val="202020"/>
                 </a:solidFill>
@@ -6112,27 +5818,6 @@
             </a:pPr>
             <a:r>
               <a:t>来源：`20260105_frustrated_fm/spin_wave_dynamics/multisource_control/bidirectional_z/`</a:t>
-            </a:r>
-          </a:p>
-          <a:p>
-            <a:pPr>
-              <a:defRPr sz="1300">
-                <a:solidFill>
-                  <a:srgbClr val="202020"/>
-                </a:solidFill>
-              </a:defRPr>
-            </a:pPr>
-          </a:p>
-          <a:p>
-            <a:pPr>
-              <a:defRPr sz="1300">
-                <a:solidFill>
-                  <a:srgbClr val="202020"/>
-                </a:solidFill>
-              </a:defRPr>
-            </a:pPr>
-            <a:r>
-              <a:t>---</a:t>
             </a:r>
           </a:p>
         </p:txBody>
@@ -6202,7 +5887,7 @@
           <a:lstStyle/>
           <a:p>
             <a:pPr>
-              <a:defRPr sz="2200" b="1">
+              <a:defRPr sz="2000" b="1">
                 <a:solidFill>
                   <a:srgbClr val="1F2D5A"/>
                 </a:solidFill>
@@ -6237,7 +5922,7 @@
           <a:lstStyle/>
           <a:p>
             <a:pPr>
-              <a:defRPr sz="1300">
+              <a:defRPr sz="2000">
                 <a:solidFill>
                   <a:srgbClr val="202020"/>
                 </a:solidFill>
@@ -6249,16 +5934,16 @@
           </a:p>
           <a:p>
             <a:pPr>
-              <a:defRPr sz="1300">
-                <a:solidFill>
-                  <a:srgbClr val="202020"/>
-                </a:solidFill>
-              </a:defRPr>
-            </a:pPr>
-          </a:p>
-          <a:p>
-            <a:pPr>
-              <a:defRPr sz="1300">
+              <a:defRPr sz="2000">
+                <a:solidFill>
+                  <a:srgbClr val="202020"/>
+                </a:solidFill>
+              </a:defRPr>
+            </a:pPr>
+          </a:p>
+          <a:p>
+            <a:pPr>
+              <a:defRPr sz="2000">
                 <a:solidFill>
                   <a:srgbClr val="202020"/>
                 </a:solidFill>
@@ -6270,7 +5955,7 @@
           </a:p>
           <a:p>
             <a:pPr>
-              <a:defRPr sz="1300">
+              <a:defRPr sz="2000">
                 <a:solidFill>
                   <a:srgbClr val="202020"/>
                 </a:solidFill>
@@ -6282,16 +5967,16 @@
           </a:p>
           <a:p>
             <a:pPr>
-              <a:defRPr sz="1300">
-                <a:solidFill>
-                  <a:srgbClr val="202020"/>
-                </a:solidFill>
-              </a:defRPr>
-            </a:pPr>
-          </a:p>
-          <a:p>
-            <a:pPr>
-              <a:defRPr sz="1300">
+              <a:defRPr sz="2000">
+                <a:solidFill>
+                  <a:srgbClr val="202020"/>
+                </a:solidFill>
+              </a:defRPr>
+            </a:pPr>
+          </a:p>
+          <a:p>
+            <a:pPr>
+              <a:defRPr sz="2000">
                 <a:solidFill>
                   <a:srgbClr val="202020"/>
                 </a:solidFill>
@@ -6303,16 +5988,16 @@
           </a:p>
           <a:p>
             <a:pPr>
-              <a:defRPr sz="1300">
-                <a:solidFill>
-                  <a:srgbClr val="202020"/>
-                </a:solidFill>
-              </a:defRPr>
-            </a:pPr>
-          </a:p>
-          <a:p>
-            <a:pPr>
-              <a:defRPr sz="1300">
+              <a:defRPr sz="2000">
+                <a:solidFill>
+                  <a:srgbClr val="202020"/>
+                </a:solidFill>
+              </a:defRPr>
+            </a:pPr>
+          </a:p>
+          <a:p>
+            <a:pPr>
+              <a:defRPr sz="2000">
                 <a:solidFill>
                   <a:srgbClr val="202020"/>
                 </a:solidFill>
@@ -6320,27 +6005,6 @@
             </a:pPr>
             <a:r>
               <a:t>无图。来源：`20260310_wang2019_hopfion_STT/`</a:t>
-            </a:r>
-          </a:p>
-          <a:p>
-            <a:pPr>
-              <a:defRPr sz="1300">
-                <a:solidFill>
-                  <a:srgbClr val="202020"/>
-                </a:solidFill>
-              </a:defRPr>
-            </a:pPr>
-          </a:p>
-          <a:p>
-            <a:pPr>
-              <a:defRPr sz="1300">
-                <a:solidFill>
-                  <a:srgbClr val="202020"/>
-                </a:solidFill>
-              </a:defRPr>
-            </a:pPr>
-            <a:r>
-              <a:t>---</a:t>
             </a:r>
           </a:p>
         </p:txBody>
@@ -6386,7 +6050,7 @@
           <a:lstStyle/>
           <a:p>
             <a:pPr>
-              <a:defRPr sz="2200" b="1">
+              <a:defRPr sz="2000" b="1">
                 <a:solidFill>
                   <a:srgbClr val="1F2D5A"/>
                 </a:solidFill>
@@ -6421,7 +6085,7 @@
           <a:lstStyle/>
           <a:p>
             <a:pPr>
-              <a:defRPr sz="1300">
+              <a:defRPr sz="2000">
                 <a:solidFill>
                   <a:srgbClr val="202020"/>
                 </a:solidFill>
@@ -6433,16 +6097,16 @@
           </a:p>
           <a:p>
             <a:pPr>
-              <a:defRPr sz="1300">
-                <a:solidFill>
-                  <a:srgbClr val="202020"/>
-                </a:solidFill>
-              </a:defRPr>
-            </a:pPr>
-          </a:p>
-          <a:p>
-            <a:pPr>
-              <a:defRPr sz="1300">
+              <a:defRPr sz="2000">
+                <a:solidFill>
+                  <a:srgbClr val="202020"/>
+                </a:solidFill>
+              </a:defRPr>
+            </a:pPr>
+          </a:p>
+          <a:p>
+            <a:pPr>
+              <a:defRPr sz="2000">
                 <a:solidFill>
                   <a:srgbClr val="202020"/>
                 </a:solidFill>
@@ -6454,7 +6118,7 @@
           </a:p>
           <a:p>
             <a:pPr>
-              <a:defRPr sz="1300">
+              <a:defRPr sz="2000">
                 <a:solidFill>
                   <a:srgbClr val="202020"/>
                 </a:solidFill>
@@ -6466,28 +6130,28 @@
           </a:p>
           <a:p>
             <a:pPr>
-              <a:defRPr sz="1300">
-                <a:solidFill>
-                  <a:srgbClr val="202020"/>
-                </a:solidFill>
-              </a:defRPr>
-            </a:pPr>
-          </a:p>
-          <a:p>
-            <a:pPr>
-              <a:defRPr sz="1300">
-                <a:solidFill>
-                  <a:srgbClr val="202020"/>
-                </a:solidFill>
-              </a:defRPr>
-            </a:pPr>
-            <a:r>
-              <a:t>**结论 PASS**：</a:t>
-            </a:r>
-          </a:p>
-          <a:p>
-            <a:pPr>
-              <a:defRPr sz="1300">
+              <a:defRPr sz="2000">
+                <a:solidFill>
+                  <a:srgbClr val="202020"/>
+                </a:solidFill>
+              </a:defRPr>
+            </a:pPr>
+          </a:p>
+          <a:p>
+            <a:pPr>
+              <a:defRPr sz="2000">
+                <a:solidFill>
+                  <a:srgbClr val="202020"/>
+                </a:solidFill>
+              </a:defRPr>
+            </a:pPr>
+            <a:r>
+              <a:t>结论 PASS：</a:t>
+            </a:r>
+          </a:p>
+          <a:p>
+            <a:pPr>
+              <a:defRPr sz="2000">
                 <a:solidFill>
                   <a:srgbClr val="202020"/>
                 </a:solidFill>
@@ -6499,7 +6163,7 @@
           </a:p>
           <a:p>
             <a:pPr>
-              <a:defRPr sz="1300">
+              <a:defRPr sz="2000">
                 <a:solidFill>
                   <a:srgbClr val="202020"/>
                 </a:solidFill>
@@ -6511,7 +6175,7 @@
           </a:p>
           <a:p>
             <a:pPr>
-              <a:defRPr sz="1300">
+              <a:defRPr sz="2000">
                 <a:solidFill>
                   <a:srgbClr val="202020"/>
                 </a:solidFill>
@@ -6523,37 +6187,37 @@
           </a:p>
           <a:p>
             <a:pPr>
-              <a:defRPr sz="1300">
-                <a:solidFill>
-                  <a:srgbClr val="202020"/>
-                </a:solidFill>
-              </a:defRPr>
-            </a:pPr>
-          </a:p>
-          <a:p>
-            <a:pPr>
-              <a:defRPr sz="1300">
-                <a:solidFill>
-                  <a:srgbClr val="202020"/>
-                </a:solidFill>
-              </a:defRPr>
-            </a:pPr>
-            <a:r>
-              <a:t>**意外发现**：Hopfion **偏好低 Ku 区**（gradient 平衡在 Ku≈7500 端，即 +z 端），与初始假设"Hopfion 趋向高 Ku 区"**相反**。Phase 2 设计因此需要反转源-初态位置。</a:t>
-            </a:r>
-          </a:p>
-          <a:p>
-            <a:pPr>
-              <a:defRPr sz="1300">
-                <a:solidFill>
-                  <a:srgbClr val="202020"/>
-                </a:solidFill>
-              </a:defRPr>
-            </a:pPr>
-          </a:p>
-          <a:p>
-            <a:pPr>
-              <a:defRPr sz="1300">
+              <a:defRPr sz="2000">
+                <a:solidFill>
+                  <a:srgbClr val="202020"/>
+                </a:solidFill>
+              </a:defRPr>
+            </a:pPr>
+          </a:p>
+          <a:p>
+            <a:pPr>
+              <a:defRPr sz="2000">
+                <a:solidFill>
+                  <a:srgbClr val="202020"/>
+                </a:solidFill>
+              </a:defRPr>
+            </a:pPr>
+            <a:r>
+              <a:t>意外发现：Hopfion 偏好低 Ku 区（gradient 平衡在 Ku≈7500 端，即 +z 端），与初始假设"Hopfion 趋向高 Ku 区"相反。Phase 2 设计因此需要反转源-初态位置。</a:t>
+            </a:r>
+          </a:p>
+          <a:p>
+            <a:pPr>
+              <a:defRPr sz="2000">
+                <a:solidFill>
+                  <a:srgbClr val="202020"/>
+                </a:solidFill>
+              </a:defRPr>
+            </a:pPr>
+          </a:p>
+          <a:p>
+            <a:pPr>
+              <a:defRPr sz="2000">
                 <a:solidFill>
                   <a:srgbClr val="202020"/>
                 </a:solidFill>
@@ -6561,27 +6225,6 @@
             </a:pPr>
             <a:r>
               <a:t>来源：`lif_neuron_hopfion/gradient_ku_verification/drive_release_test/`</a:t>
-            </a:r>
-          </a:p>
-          <a:p>
-            <a:pPr>
-              <a:defRPr sz="1300">
-                <a:solidFill>
-                  <a:srgbClr val="202020"/>
-                </a:solidFill>
-              </a:defRPr>
-            </a:pPr>
-          </a:p>
-          <a:p>
-            <a:pPr>
-              <a:defRPr sz="1300">
-                <a:solidFill>
-                  <a:srgbClr val="202020"/>
-                </a:solidFill>
-              </a:defRPr>
-            </a:pPr>
-            <a:r>
-              <a:t>---</a:t>
             </a:r>
           </a:p>
         </p:txBody>
@@ -6651,7 +6294,7 @@
           <a:lstStyle/>
           <a:p>
             <a:pPr>
-              <a:defRPr sz="2200" b="1">
+              <a:defRPr sz="2000" b="1">
                 <a:solidFill>
                   <a:srgbClr val="1F2D5A"/>
                 </a:solidFill>
@@ -6686,7 +6329,7 @@
           <a:lstStyle/>
           <a:p>
             <a:pPr>
-              <a:defRPr sz="1300">
+              <a:defRPr sz="2000">
                 <a:solidFill>
                   <a:srgbClr val="202020"/>
                 </a:solidFill>
@@ -6698,37 +6341,37 @@
           </a:p>
           <a:p>
             <a:pPr>
-              <a:defRPr sz="1300">
-                <a:solidFill>
-                  <a:srgbClr val="202020"/>
-                </a:solidFill>
-              </a:defRPr>
-            </a:pPr>
-          </a:p>
-          <a:p>
-            <a:pPr>
-              <a:defRPr sz="1300">
-                <a:solidFill>
-                  <a:srgbClr val="202020"/>
-                </a:solidFill>
-              </a:defRPr>
-            </a:pPr>
-            <a:r>
-              <a:t>**FAILED**，t=1.089 ns kill（6h49m 跑了 49.5%）。</a:t>
-            </a:r>
-          </a:p>
-          <a:p>
-            <a:pPr>
-              <a:defRPr sz="1300">
-                <a:solidFill>
-                  <a:srgbClr val="202020"/>
-                </a:solidFill>
-              </a:defRPr>
-            </a:pPr>
-          </a:p>
-          <a:p>
-            <a:pPr>
-              <a:defRPr sz="1300">
+              <a:defRPr sz="2000">
+                <a:solidFill>
+                  <a:srgbClr val="202020"/>
+                </a:solidFill>
+              </a:defRPr>
+            </a:pPr>
+          </a:p>
+          <a:p>
+            <a:pPr>
+              <a:defRPr sz="2000">
+                <a:solidFill>
+                  <a:srgbClr val="202020"/>
+                </a:solidFill>
+              </a:defRPr>
+            </a:pPr>
+            <a:r>
+              <a:t>FAILED，t=1.089 ns kill（6h49m 跑了 49.5%）。</a:t>
+            </a:r>
+          </a:p>
+          <a:p>
+            <a:pPr>
+              <a:defRPr sz="2000">
+                <a:solidFill>
+                  <a:srgbClr val="202020"/>
+                </a:solidFill>
+              </a:defRPr>
+            </a:pPr>
+          </a:p>
+          <a:p>
+            <a:pPr>
+              <a:defRPr sz="2000">
                 <a:solidFill>
                   <a:srgbClr val="202020"/>
                 </a:solidFill>
@@ -6740,40 +6383,40 @@
           </a:p>
           <a:p>
             <a:pPr>
-              <a:defRPr sz="1300">
-                <a:solidFill>
-                  <a:srgbClr val="202020"/>
-                </a:solidFill>
-              </a:defRPr>
-            </a:pPr>
-          </a:p>
-          <a:p>
-            <a:pPr>
-              <a:defRPr sz="1300">
-                <a:solidFill>
-                  <a:srgbClr val="202020"/>
-                </a:solidFill>
-              </a:defRPr>
-            </a:pPr>
-            <a:r>
-              <a:t>**失败原因**：</a:t>
-            </a:r>
-          </a:p>
-          <a:p>
-            <a:pPr>
-              <a:defRPr sz="1300">
-                <a:solidFill>
-                  <a:srgbClr val="202020"/>
-                </a:solidFill>
-              </a:defRPr>
-            </a:pPr>
-            <a:r>
-              <a:t>1. 1100 GHz 推 -z 方向，与梯度 Ku 恢复力 +z **同向**（不是反向），Hopfion 单向漂移</a:t>
-            </a:r>
-          </a:p>
-          <a:p>
-            <a:pPr>
-              <a:defRPr sz="1300">
+              <a:defRPr sz="2000">
+                <a:solidFill>
+                  <a:srgbClr val="202020"/>
+                </a:solidFill>
+              </a:defRPr>
+            </a:pPr>
+          </a:p>
+          <a:p>
+            <a:pPr>
+              <a:defRPr sz="2000">
+                <a:solidFill>
+                  <a:srgbClr val="202020"/>
+                </a:solidFill>
+              </a:defRPr>
+            </a:pPr>
+            <a:r>
+              <a:t>失败原因：</a:t>
+            </a:r>
+          </a:p>
+          <a:p>
+            <a:pPr>
+              <a:defRPr sz="2000">
+                <a:solidFill>
+                  <a:srgbClr val="202020"/>
+                </a:solidFill>
+              </a:defRPr>
+            </a:pPr>
+            <a:r>
+              <a:t>1. 1100 GHz 推 -z 方向，与梯度 Ku 恢复力 +z 同向（不是反向），Hopfion 单向漂移</a:t>
+            </a:r>
+          </a:p>
+          <a:p>
+            <a:pPr>
+              <a:defRPr sz="2000">
                 <a:solidFill>
                   <a:srgbClr val="202020"/>
                 </a:solidFill>
@@ -6785,7 +6428,7 @@
           </a:p>
           <a:p>
             <a:pPr>
-              <a:defRPr sz="1300">
+              <a:defRPr sz="2000">
                 <a:solidFill>
                   <a:srgbClr val="202020"/>
                 </a:solidFill>
@@ -6797,16 +6440,16 @@
           </a:p>
           <a:p>
             <a:pPr>
-              <a:defRPr sz="1300">
-                <a:solidFill>
-                  <a:srgbClr val="202020"/>
-                </a:solidFill>
-              </a:defRPr>
-            </a:pPr>
-          </a:p>
-          <a:p>
-            <a:pPr>
-              <a:defRPr sz="1300">
+              <a:defRPr sz="2000">
+                <a:solidFill>
+                  <a:srgbClr val="202020"/>
+                </a:solidFill>
+              </a:defRPr>
+            </a:pPr>
+          </a:p>
+          <a:p>
+            <a:pPr>
+              <a:defRPr sz="2000">
                 <a:solidFill>
                   <a:srgbClr val="202020"/>
                 </a:solidFill>
@@ -6814,27 +6457,6 @@
             </a:pPr>
             <a:r>
               <a:t>来源：`lif_neuron_hopfion/lif_cycle_demo/pulse_train_integrate/`</a:t>
-            </a:r>
-          </a:p>
-          <a:p>
-            <a:pPr>
-              <a:defRPr sz="1300">
-                <a:solidFill>
-                  <a:srgbClr val="202020"/>
-                </a:solidFill>
-              </a:defRPr>
-            </a:pPr>
-          </a:p>
-          <a:p>
-            <a:pPr>
-              <a:defRPr sz="1300">
-                <a:solidFill>
-                  <a:srgbClr val="202020"/>
-                </a:solidFill>
-              </a:defRPr>
-            </a:pPr>
-            <a:r>
-              <a:t>---</a:t>
             </a:r>
           </a:p>
         </p:txBody>
@@ -6904,7 +6526,7 @@
           <a:lstStyle/>
           <a:p>
             <a:pPr>
-              <a:defRPr sz="2200" b="1">
+              <a:defRPr sz="2000" b="1">
                 <a:solidFill>
                   <a:srgbClr val="1F2D5A"/>
                 </a:solidFill>
@@ -6939,7 +6561,7 @@
           <a:lstStyle/>
           <a:p>
             <a:pPr>
-              <a:defRPr sz="1300">
+              <a:defRPr sz="2000">
                 <a:solidFill>
                   <a:srgbClr val="202020"/>
                 </a:solidFill>
@@ -6951,64 +6573,64 @@
           </a:p>
           <a:p>
             <a:pPr>
-              <a:defRPr sz="1300">
-                <a:solidFill>
-                  <a:srgbClr val="202020"/>
-                </a:solidFill>
-              </a:defRPr>
-            </a:pPr>
-            <a:r>
-              <a:t>- **方案 A**：反转源-初态相对位置（initial 在 -z 端高 Ku，integrate 用 100 GHz → +z，梯度自然拉回 -z，fire 用反向冲击）</a:t>
-            </a:r>
-          </a:p>
-          <a:p>
-            <a:pPr>
-              <a:defRPr sz="1300">
-                <a:solidFill>
-                  <a:srgbClr val="202020"/>
-                </a:solidFill>
-              </a:defRPr>
-            </a:pPr>
-            <a:r>
-              <a:t>- **方案 B**：降低 1100 GHz 幅度（B=0.3 T） + 延长 leak gap（0.5 ns）让自旋波耗散</a:t>
-            </a:r>
-          </a:p>
-          <a:p>
-            <a:pPr>
-              <a:defRPr sz="1300">
-                <a:solidFill>
-                  <a:srgbClr val="202020"/>
-                </a:solidFill>
-              </a:defRPr>
-            </a:pPr>
-            <a:r>
-              <a:t>- **方案 C**：缩短 pulse 宽（0.15 → 0.05 ns）减少单次注入能量</a:t>
-            </a:r>
-          </a:p>
-          <a:p>
-            <a:pPr>
-              <a:defRPr sz="1300">
-                <a:solidFill>
-                  <a:srgbClr val="202020"/>
-                </a:solidFill>
-              </a:defRPr>
-            </a:pPr>
-            <a:r>
-              <a:t>- **方案 D**：双频叠加 integrate（1100 GHz 短冲 + 立即 100 GHz 反向短冲抑制残余自旋波）</a:t>
-            </a:r>
-          </a:p>
-          <a:p>
-            <a:pPr>
-              <a:defRPr sz="1300">
-                <a:solidFill>
-                  <a:srgbClr val="202020"/>
-                </a:solidFill>
-              </a:defRPr>
-            </a:pPr>
-          </a:p>
-          <a:p>
-            <a:pPr>
-              <a:defRPr sz="1300">
+              <a:defRPr sz="2000">
+                <a:solidFill>
+                  <a:srgbClr val="202020"/>
+                </a:solidFill>
+              </a:defRPr>
+            </a:pPr>
+            <a:r>
+              <a:t>- 方案 A：反转源-初态相对位置（initial 在 -z 端高 Ku，integrate 用 100 GHz → +z，梯度自然拉回 -z，fire 用反向冲击）</a:t>
+            </a:r>
+          </a:p>
+          <a:p>
+            <a:pPr>
+              <a:defRPr sz="2000">
+                <a:solidFill>
+                  <a:srgbClr val="202020"/>
+                </a:solidFill>
+              </a:defRPr>
+            </a:pPr>
+            <a:r>
+              <a:t>- 方案 B：降低 1100 GHz 幅度（B=0.3 T） + 延长 leak gap（0.5 ns）让自旋波耗散</a:t>
+            </a:r>
+          </a:p>
+          <a:p>
+            <a:pPr>
+              <a:defRPr sz="2000">
+                <a:solidFill>
+                  <a:srgbClr val="202020"/>
+                </a:solidFill>
+              </a:defRPr>
+            </a:pPr>
+            <a:r>
+              <a:t>- 方案 C：缩短 pulse 宽（0.15 → 0.05 ns）减少单次注入能量</a:t>
+            </a:r>
+          </a:p>
+          <a:p>
+            <a:pPr>
+              <a:defRPr sz="2000">
+                <a:solidFill>
+                  <a:srgbClr val="202020"/>
+                </a:solidFill>
+              </a:defRPr>
+            </a:pPr>
+            <a:r>
+              <a:t>- 方案 D：双频叠加 integrate（1100 GHz 短冲 + 立即 100 GHz 反向短冲抑制残余自旋波）</a:t>
+            </a:r>
+          </a:p>
+          <a:p>
+            <a:pPr>
+              <a:defRPr sz="2000">
+                <a:solidFill>
+                  <a:srgbClr val="202020"/>
+                </a:solidFill>
+              </a:defRPr>
+            </a:pPr>
+          </a:p>
+          <a:p>
+            <a:pPr>
+              <a:defRPr sz="2000">
                 <a:solidFill>
                   <a:srgbClr val="202020"/>
                 </a:solidFill>
@@ -7020,16 +6642,16 @@
           </a:p>
           <a:p>
             <a:pPr>
-              <a:defRPr sz="1300">
-                <a:solidFill>
-                  <a:srgbClr val="202020"/>
-                </a:solidFill>
-              </a:defRPr>
-            </a:pPr>
-          </a:p>
-          <a:p>
-            <a:pPr>
-              <a:defRPr sz="1300">
+              <a:defRPr sz="2000">
+                <a:solidFill>
+                  <a:srgbClr val="202020"/>
+                </a:solidFill>
+              </a:defRPr>
+            </a:pPr>
+          </a:p>
+          <a:p>
+            <a:pPr>
+              <a:defRPr sz="2000">
                 <a:solidFill>
                   <a:srgbClr val="202020"/>
                 </a:solidFill>
@@ -7041,16 +6663,16 @@
           </a:p>
           <a:p>
             <a:pPr>
-              <a:defRPr sz="1300">
-                <a:solidFill>
-                  <a:srgbClr val="202020"/>
-                </a:solidFill>
-              </a:defRPr>
-            </a:pPr>
-          </a:p>
-          <a:p>
-            <a:pPr>
-              <a:defRPr sz="1300">
+              <a:defRPr sz="2000">
+                <a:solidFill>
+                  <a:srgbClr val="202020"/>
+                </a:solidFill>
+              </a:defRPr>
+            </a:pPr>
+          </a:p>
+          <a:p>
+            <a:pPr>
+              <a:defRPr sz="2000">
                 <a:solidFill>
                   <a:srgbClr val="202020"/>
                 </a:solidFill>
@@ -7058,27 +6680,6 @@
             </a:pPr>
             <a:r>
               <a:t>无图。来源：`lif_neuron_hopfion/lif_cycle_demo/`（脚本就绪）</a:t>
-            </a:r>
-          </a:p>
-          <a:p>
-            <a:pPr>
-              <a:defRPr sz="1300">
-                <a:solidFill>
-                  <a:srgbClr val="202020"/>
-                </a:solidFill>
-              </a:defRPr>
-            </a:pPr>
-          </a:p>
-          <a:p>
-            <a:pPr>
-              <a:defRPr sz="1300">
-                <a:solidFill>
-                  <a:srgbClr val="202020"/>
-                </a:solidFill>
-              </a:defRPr>
-            </a:pPr>
-            <a:r>
-              <a:t>---</a:t>
             </a:r>
           </a:p>
         </p:txBody>
@@ -7124,7 +6725,7 @@
           <a:lstStyle/>
           <a:p>
             <a:pPr>
-              <a:defRPr sz="2200" b="1">
+              <a:defRPr sz="2000" b="1">
                 <a:solidFill>
                   <a:srgbClr val="1F2D5A"/>
                 </a:solidFill>
@@ -7159,28 +6760,28 @@
           <a:lstStyle/>
           <a:p>
             <a:pPr>
-              <a:defRPr sz="1300">
-                <a:solidFill>
-                  <a:srgbClr val="202020"/>
-                </a:solidFill>
-              </a:defRPr>
-            </a:pPr>
-            <a:r>
-              <a:t>old_results/My_old_simulation/ 共 20 个 srcX/srcZ point source freq sweep。**含 J2/J4 系数符号错误**。</a:t>
-            </a:r>
-          </a:p>
-          <a:p>
-            <a:pPr>
-              <a:defRPr sz="1300">
-                <a:solidFill>
-                  <a:srgbClr val="202020"/>
-                </a:solidFill>
-              </a:defRPr>
-            </a:pPr>
-          </a:p>
-          <a:p>
-            <a:pPr>
-              <a:defRPr sz="1300">
+              <a:defRPr sz="2000">
+                <a:solidFill>
+                  <a:srgbClr val="202020"/>
+                </a:solidFill>
+              </a:defRPr>
+            </a:pPr>
+            <a:r>
+              <a:t>old_results/My_old_simulation/ 共 20 个 srcX/srcZ point source freq sweep。含 J2/J4 系数符号错误。</a:t>
+            </a:r>
+          </a:p>
+          <a:p>
+            <a:pPr>
+              <a:defRPr sz="2000">
+                <a:solidFill>
+                  <a:srgbClr val="202020"/>
+                </a:solidFill>
+              </a:defRPr>
+            </a:pPr>
+          </a:p>
+          <a:p>
+            <a:pPr>
+              <a:defRPr sz="2000">
                 <a:solidFill>
                   <a:srgbClr val="202020"/>
                 </a:solidFill>
@@ -7192,16 +6793,16 @@
           </a:p>
           <a:p>
             <a:pPr>
-              <a:defRPr sz="1300">
-                <a:solidFill>
-                  <a:srgbClr val="202020"/>
-                </a:solidFill>
-              </a:defRPr>
-            </a:pPr>
-          </a:p>
-          <a:p>
-            <a:pPr>
-              <a:defRPr sz="1300">
+              <a:defRPr sz="2000">
+                <a:solidFill>
+                  <a:srgbClr val="202020"/>
+                </a:solidFill>
+              </a:defRPr>
+            </a:pPr>
+          </a:p>
+          <a:p>
+            <a:pPr>
+              <a:defRPr sz="2000">
                 <a:solidFill>
                   <a:srgbClr val="202020"/>
                 </a:solidFill>
@@ -7213,37 +6814,37 @@
           </a:p>
           <a:p>
             <a:pPr>
-              <a:defRPr sz="1300">
-                <a:solidFill>
-                  <a:srgbClr val="202020"/>
-                </a:solidFill>
-              </a:defRPr>
-            </a:pPr>
-          </a:p>
-          <a:p>
-            <a:pPr>
-              <a:defRPr sz="1300">
-                <a:solidFill>
-                  <a:srgbClr val="202020"/>
-                </a:solidFill>
-              </a:defRPr>
-            </a:pPr>
-            <a:r>
-              <a:t>**经验**：复用别人代码时必须验证符号；从已验证的 R8r4_Ku0.mx3 拷参数，不要从公式重推。</a:t>
-            </a:r>
-          </a:p>
-          <a:p>
-            <a:pPr>
-              <a:defRPr sz="1300">
-                <a:solidFill>
-                  <a:srgbClr val="202020"/>
-                </a:solidFill>
-              </a:defRPr>
-            </a:pPr>
-          </a:p>
-          <a:p>
-            <a:pPr>
-              <a:defRPr sz="1300">
+              <a:defRPr sz="2000">
+                <a:solidFill>
+                  <a:srgbClr val="202020"/>
+                </a:solidFill>
+              </a:defRPr>
+            </a:pPr>
+          </a:p>
+          <a:p>
+            <a:pPr>
+              <a:defRPr sz="2000">
+                <a:solidFill>
+                  <a:srgbClr val="202020"/>
+                </a:solidFill>
+              </a:defRPr>
+            </a:pPr>
+            <a:r>
+              <a:t>经验：复用别人代码时必须验证符号；从已验证的 R8r4_Ku0.mx3 拷参数，不要从公式重推。</a:t>
+            </a:r>
+          </a:p>
+          <a:p>
+            <a:pPr>
+              <a:defRPr sz="2000">
+                <a:solidFill>
+                  <a:srgbClr val="202020"/>
+                </a:solidFill>
+              </a:defRPr>
+            </a:pPr>
+          </a:p>
+          <a:p>
+            <a:pPr>
+              <a:defRPr sz="2000">
                 <a:solidFill>
                   <a:srgbClr val="202020"/>
                 </a:solidFill>
@@ -7251,27 +6852,6 @@
             </a:pPr>
             <a:r>
               <a:t>无图。来源：`old_results/My_old_simulation/A材料尺寸对hopfion的影响/`</a:t>
-            </a:r>
-          </a:p>
-          <a:p>
-            <a:pPr>
-              <a:defRPr sz="1300">
-                <a:solidFill>
-                  <a:srgbClr val="202020"/>
-                </a:solidFill>
-              </a:defRPr>
-            </a:pPr>
-          </a:p>
-          <a:p>
-            <a:pPr>
-              <a:defRPr sz="1300">
-                <a:solidFill>
-                  <a:srgbClr val="202020"/>
-                </a:solidFill>
-              </a:defRPr>
-            </a:pPr>
-            <a:r>
-              <a:t>---</a:t>
             </a:r>
           </a:p>
         </p:txBody>
@@ -7317,7 +6897,7 @@
           <a:lstStyle/>
           <a:p>
             <a:pPr>
-              <a:defRPr sz="2200" b="1">
+              <a:defRPr sz="2000" b="1">
                 <a:solidFill>
                   <a:srgbClr val="1F2D5A"/>
                 </a:solidFill>
@@ -7352,7 +6932,7 @@
           <a:lstStyle/>
           <a:p>
             <a:pPr>
-              <a:defRPr sz="1300">
+              <a:defRPr sz="2000">
                 <a:solidFill>
                   <a:srgbClr val="202020"/>
                 </a:solidFill>
@@ -7364,16 +6944,16 @@
           </a:p>
           <a:p>
             <a:pPr>
-              <a:defRPr sz="1300">
-                <a:solidFill>
-                  <a:srgbClr val="202020"/>
-                </a:solidFill>
-              </a:defRPr>
-            </a:pPr>
-          </a:p>
-          <a:p>
-            <a:pPr>
-              <a:defRPr sz="1300">
+              <a:defRPr sz="2000">
+                <a:solidFill>
+                  <a:srgbClr val="202020"/>
+                </a:solidFill>
+              </a:defRPr>
+            </a:pPr>
+          </a:p>
+          <a:p>
+            <a:pPr>
+              <a:defRPr sz="2000">
                 <a:solidFill>
                   <a:srgbClr val="202020"/>
                 </a:solidFill>
@@ -7385,7 +6965,7 @@
           </a:p>
           <a:p>
             <a:pPr>
-              <a:defRPr sz="1300">
+              <a:defRPr sz="2000">
                 <a:solidFill>
                   <a:srgbClr val="202020"/>
                 </a:solidFill>
@@ -7397,7 +6977,7 @@
           </a:p>
           <a:p>
             <a:pPr>
-              <a:defRPr sz="1300">
+              <a:defRPr sz="2000">
                 <a:solidFill>
                   <a:srgbClr val="202020"/>
                 </a:solidFill>
@@ -7409,7 +6989,7 @@
           </a:p>
           <a:p>
             <a:pPr>
-              <a:defRPr sz="1300">
+              <a:defRPr sz="2000">
                 <a:solidFill>
                   <a:srgbClr val="202020"/>
                 </a:solidFill>
@@ -7421,7 +7001,7 @@
           </a:p>
           <a:p>
             <a:pPr>
-              <a:defRPr sz="1300">
+              <a:defRPr sz="2000">
                 <a:solidFill>
                   <a:srgbClr val="202020"/>
                 </a:solidFill>
@@ -7433,16 +7013,16 @@
           </a:p>
           <a:p>
             <a:pPr>
-              <a:defRPr sz="1300">
-                <a:solidFill>
-                  <a:srgbClr val="202020"/>
-                </a:solidFill>
-              </a:defRPr>
-            </a:pPr>
-          </a:p>
-          <a:p>
-            <a:pPr>
-              <a:defRPr sz="1300">
+              <a:defRPr sz="2000">
+                <a:solidFill>
+                  <a:srgbClr val="202020"/>
+                </a:solidFill>
+              </a:defRPr>
+            </a:pPr>
+          </a:p>
+          <a:p>
+            <a:pPr>
+              <a:defRPr sz="2000">
                 <a:solidFill>
                   <a:srgbClr val="202020"/>
                 </a:solidFill>
@@ -7454,16 +7034,16 @@
           </a:p>
           <a:p>
             <a:pPr>
-              <a:defRPr sz="1300">
-                <a:solidFill>
-                  <a:srgbClr val="202020"/>
-                </a:solidFill>
-              </a:defRPr>
-            </a:pPr>
-          </a:p>
-          <a:p>
-            <a:pPr>
-              <a:defRPr sz="1300">
+              <a:defRPr sz="2000">
+                <a:solidFill>
+                  <a:srgbClr val="202020"/>
+                </a:solidFill>
+              </a:defRPr>
+            </a:pPr>
+          </a:p>
+          <a:p>
+            <a:pPr>
+              <a:defRPr sz="2000">
                 <a:solidFill>
                   <a:srgbClr val="202020"/>
                 </a:solidFill>
@@ -7471,27 +7051,6 @@
             </a:pPr>
             <a:r>
               <a:t>无图。来源：`deviceB_package/`、`srtp/`</a:t>
-            </a:r>
-          </a:p>
-          <a:p>
-            <a:pPr>
-              <a:defRPr sz="1300">
-                <a:solidFill>
-                  <a:srgbClr val="202020"/>
-                </a:solidFill>
-              </a:defRPr>
-            </a:pPr>
-          </a:p>
-          <a:p>
-            <a:pPr>
-              <a:defRPr sz="1300">
-                <a:solidFill>
-                  <a:srgbClr val="202020"/>
-                </a:solidFill>
-              </a:defRPr>
-            </a:pPr>
-            <a:r>
-              <a:t>---</a:t>
             </a:r>
           </a:p>
         </p:txBody>
@@ -7537,7 +7096,7 @@
           <a:lstStyle/>
           <a:p>
             <a:pPr>
-              <a:defRPr sz="2200" b="1">
+              <a:defRPr sz="2000" b="1">
                 <a:solidFill>
                   <a:srgbClr val="1F2D5A"/>
                 </a:solidFill>
@@ -7572,91 +7131,91 @@
           <a:lstStyle/>
           <a:p>
             <a:pPr>
-              <a:defRPr sz="1300">
-                <a:solidFill>
-                  <a:srgbClr val="202020"/>
-                </a:solidFill>
-              </a:defRPr>
-            </a:pPr>
-            <a:r>
-              <a:t>**跑完且有清晰结论**：DMI-FM 三条件稳定性 / Frustrated FM 固有吸引子 R=2.60 nm / 居中稳态 Ku 三组 / Ku 临界趋势 / Q_H=1 验证 / 漂移机理修正 / 方向选择性 vibX/vibZ / srcX/srcZ 频率响应 / 单源双向 z 可控性 / 点源 vs 平面源对比 / LIF Phase 1 梯度恢复力 + Hopfion 偏好低 Ku</a:t>
-            </a:r>
-          </a:p>
-          <a:p>
-            <a:pPr>
-              <a:defRPr sz="1300">
-                <a:solidFill>
-                  <a:srgbClr val="202020"/>
-                </a:solidFill>
-              </a:defRPr>
-            </a:pPr>
-          </a:p>
-          <a:p>
-            <a:pPr>
-              <a:defRPr sz="1300">
-                <a:solidFill>
-                  <a:srgbClr val="202020"/>
-                </a:solidFill>
-              </a:defRPr>
-            </a:pPr>
-            <a:r>
-              <a:t>**跑完但未归纳完整结论**：amplitude_sweep srcX 旧标度律已推翻、新拟合未确定 / freq_switch v3 反转成功但坍塌后无后续 / STT 复现仅趋势确认无定量扫描</a:t>
-            </a:r>
-          </a:p>
-          <a:p>
-            <a:pPr>
-              <a:defRPr sz="1300">
-                <a:solidFill>
-                  <a:srgbClr val="202020"/>
-                </a:solidFill>
-              </a:defRPr>
-            </a:pPr>
-          </a:p>
-          <a:p>
-            <a:pPr>
-              <a:defRPr sz="1300">
-                <a:solidFill>
-                  <a:srgbClr val="202020"/>
-                </a:solidFill>
-              </a:defRPr>
-            </a:pPr>
-            <a:r>
-              <a:t>**停在半路**：amplitude_sweep srcZ cron 部分缺失 / amplitude_sweep point B500 停在 0.433 ns / freq_switch v3 坍塌后未续 / LIF Phase 2 F1 在 1.089 ns kill</a:t>
-            </a:r>
-          </a:p>
-          <a:p>
-            <a:pPr>
-              <a:defRPr sz="1300">
-                <a:solidFill>
-                  <a:srgbClr val="202020"/>
-                </a:solidFill>
-              </a:defRPr>
-            </a:pPr>
-          </a:p>
-          <a:p>
-            <a:pPr>
-              <a:defRPr sz="1300">
-                <a:solidFill>
-                  <a:srgbClr val="202020"/>
-                </a:solidFill>
-              </a:defRPr>
-            </a:pPr>
-            <a:r>
-              <a:t>**从未启动**：Q_H=2 / Q_H=4 稳定性验证 / freq_switch v3 方案 A 调参 / LIF Phase 2 重设计 4 候选 / Wang 2019 STT 参数扫描深化</a:t>
-            </a:r>
-          </a:p>
-          <a:p>
-            <a:pPr>
-              <a:defRPr sz="1300">
-                <a:solidFill>
-                  <a:srgbClr val="202020"/>
-                </a:solidFill>
-              </a:defRPr>
-            </a:pPr>
-          </a:p>
-          <a:p>
-            <a:pPr>
-              <a:defRPr sz="1300">
+              <a:defRPr sz="2000">
+                <a:solidFill>
+                  <a:srgbClr val="202020"/>
+                </a:solidFill>
+              </a:defRPr>
+            </a:pPr>
+            <a:r>
+              <a:t>跑完且有清晰结论：DMI-FM 三条件稳定性 / Frustrated FM 固有吸引子 R=2.60 nm / 居中稳态 Ku 三组 / Ku 临界趋势 / Q_H=1 验证 / 漂移机理修正 / 方向选择性 vibX/vibZ / srcX/srcZ 频率响应 / 单源双向 z 可控性 / 点源 vs 平面源对比 / LIF Phase 1 梯度恢复力 + Hopfion 偏好低 Ku</a:t>
+            </a:r>
+          </a:p>
+          <a:p>
+            <a:pPr>
+              <a:defRPr sz="2000">
+                <a:solidFill>
+                  <a:srgbClr val="202020"/>
+                </a:solidFill>
+              </a:defRPr>
+            </a:pPr>
+          </a:p>
+          <a:p>
+            <a:pPr>
+              <a:defRPr sz="2000">
+                <a:solidFill>
+                  <a:srgbClr val="202020"/>
+                </a:solidFill>
+              </a:defRPr>
+            </a:pPr>
+            <a:r>
+              <a:t>跑完但未归纳完整结论：amplitude_sweep srcX 旧标度律已推翻、新拟合未确定 / freq_switch v3 反转成功但坍塌后无后续 / STT 复现仅趋势确认无定量扫描</a:t>
+            </a:r>
+          </a:p>
+          <a:p>
+            <a:pPr>
+              <a:defRPr sz="2000">
+                <a:solidFill>
+                  <a:srgbClr val="202020"/>
+                </a:solidFill>
+              </a:defRPr>
+            </a:pPr>
+          </a:p>
+          <a:p>
+            <a:pPr>
+              <a:defRPr sz="2000">
+                <a:solidFill>
+                  <a:srgbClr val="202020"/>
+                </a:solidFill>
+              </a:defRPr>
+            </a:pPr>
+            <a:r>
+              <a:t>停在半路：amplitude_sweep srcZ cron 部分缺失 / amplitude_sweep point B500 停在 0.433 ns / freq_switch v3 坍塌后未续 / LIF Phase 2 F1 在 1.089 ns kill</a:t>
+            </a:r>
+          </a:p>
+          <a:p>
+            <a:pPr>
+              <a:defRPr sz="2000">
+                <a:solidFill>
+                  <a:srgbClr val="202020"/>
+                </a:solidFill>
+              </a:defRPr>
+            </a:pPr>
+          </a:p>
+          <a:p>
+            <a:pPr>
+              <a:defRPr sz="2000">
+                <a:solidFill>
+                  <a:srgbClr val="202020"/>
+                </a:solidFill>
+              </a:defRPr>
+            </a:pPr>
+            <a:r>
+              <a:t>从未启动：Q_H=2 / Q_H=4 稳定性验证 / freq_switch v3 方案 A 调参 / LIF Phase 2 重设计 4 候选 / Wang 2019 STT 参数扫描深化</a:t>
+            </a:r>
+          </a:p>
+          <a:p>
+            <a:pPr>
+              <a:defRPr sz="2000">
+                <a:solidFill>
+                  <a:srgbClr val="202020"/>
+                </a:solidFill>
+              </a:defRPr>
+            </a:pPr>
+          </a:p>
+          <a:p>
+            <a:pPr>
+              <a:defRPr sz="2000">
                 <a:solidFill>
                   <a:srgbClr val="202020"/>
                 </a:solidFill>
@@ -7709,7 +7268,7 @@
           <a:lstStyle/>
           <a:p>
             <a:pPr>
-              <a:defRPr sz="2200" b="1">
+              <a:defRPr sz="2000" b="1">
                 <a:solidFill>
                   <a:srgbClr val="1F2D5A"/>
                 </a:solidFill>
@@ -7744,7 +7303,7 @@
           <a:lstStyle/>
           <a:p>
             <a:pPr>
-              <a:defRPr sz="1300">
+              <a:defRPr sz="2000">
                 <a:solidFill>
                   <a:srgbClr val="202020"/>
                 </a:solidFill>
@@ -7756,16 +7315,16 @@
           </a:p>
           <a:p>
             <a:pPr>
-              <a:defRPr sz="1300">
-                <a:solidFill>
-                  <a:srgbClr val="202020"/>
-                </a:solidFill>
-              </a:defRPr>
-            </a:pPr>
-          </a:p>
-          <a:p>
-            <a:pPr>
-              <a:defRPr sz="1300">
+              <a:defRPr sz="2000">
+                <a:solidFill>
+                  <a:srgbClr val="202020"/>
+                </a:solidFill>
+              </a:defRPr>
+            </a:pPr>
+          </a:p>
+          <a:p>
+            <a:pPr>
+              <a:defRPr sz="2000">
                 <a:solidFill>
                   <a:srgbClr val="202020"/>
                 </a:solidFill>
@@ -7777,16 +7336,16 @@
           </a:p>
           <a:p>
             <a:pPr>
-              <a:defRPr sz="1300">
-                <a:solidFill>
-                  <a:srgbClr val="202020"/>
-                </a:solidFill>
-              </a:defRPr>
-            </a:pPr>
-          </a:p>
-          <a:p>
-            <a:pPr>
-              <a:defRPr sz="1300">
+              <a:defRPr sz="2000">
+                <a:solidFill>
+                  <a:srgbClr val="202020"/>
+                </a:solidFill>
+              </a:defRPr>
+            </a:pPr>
+          </a:p>
+          <a:p>
+            <a:pPr>
+              <a:defRPr sz="2000">
                 <a:solidFill>
                   <a:srgbClr val="202020"/>
                 </a:solidFill>
@@ -7794,27 +7353,6 @@
             </a:pPr>
             <a:r>
               <a:t>无图。来源：`20251219_dmi_fm/failed_attempts/sutcliffe_disc_wrong_ansatz/`</a:t>
-            </a:r>
-          </a:p>
-          <a:p>
-            <a:pPr>
-              <a:defRPr sz="1300">
-                <a:solidFill>
-                  <a:srgbClr val="202020"/>
-                </a:solidFill>
-              </a:defRPr>
-            </a:pPr>
-          </a:p>
-          <a:p>
-            <a:pPr>
-              <a:defRPr sz="1300">
-                <a:solidFill>
-                  <a:srgbClr val="202020"/>
-                </a:solidFill>
-              </a:defRPr>
-            </a:pPr>
-            <a:r>
-              <a:t>---</a:t>
             </a:r>
           </a:p>
         </p:txBody>
@@ -7860,7 +7398,7 @@
           <a:lstStyle/>
           <a:p>
             <a:pPr>
-              <a:defRPr sz="2200" b="1">
+              <a:defRPr sz="2000" b="1">
                 <a:solidFill>
                   <a:srgbClr val="1F2D5A"/>
                 </a:solidFill>
@@ -7895,7 +7433,7 @@
           <a:lstStyle/>
           <a:p>
             <a:pPr>
-              <a:defRPr sz="1300">
+              <a:defRPr sz="2000">
                 <a:solidFill>
                   <a:srgbClr val="202020"/>
                 </a:solidFill>
@@ -7907,16 +7445,16 @@
           </a:p>
           <a:p>
             <a:pPr>
-              <a:defRPr sz="1300">
-                <a:solidFill>
-                  <a:srgbClr val="202020"/>
-                </a:solidFill>
-              </a:defRPr>
-            </a:pPr>
-          </a:p>
-          <a:p>
-            <a:pPr>
-              <a:defRPr sz="1300">
+              <a:defRPr sz="2000">
+                <a:solidFill>
+                  <a:srgbClr val="202020"/>
+                </a:solidFill>
+              </a:defRPr>
+            </a:pPr>
+          </a:p>
+          <a:p>
+            <a:pPr>
+              <a:defRPr sz="2000">
                 <a:solidFill>
                   <a:srgbClr val="202020"/>
                 </a:solidFill>
@@ -7924,27 +7462,6 @@
             </a:pPr>
             <a:r>
               <a:t>仅描述现象，无结论。来源：`20251219_dmi_fm/failed_attempts/toroidal_nanoring_approach/`</a:t>
-            </a:r>
-          </a:p>
-          <a:p>
-            <a:pPr>
-              <a:defRPr sz="1300">
-                <a:solidFill>
-                  <a:srgbClr val="202020"/>
-                </a:solidFill>
-              </a:defRPr>
-            </a:pPr>
-          </a:p>
-          <a:p>
-            <a:pPr>
-              <a:defRPr sz="1300">
-                <a:solidFill>
-                  <a:srgbClr val="202020"/>
-                </a:solidFill>
-              </a:defRPr>
-            </a:pPr>
-            <a:r>
-              <a:t>---</a:t>
             </a:r>
           </a:p>
         </p:txBody>
@@ -7990,7 +7507,7 @@
           <a:lstStyle/>
           <a:p>
             <a:pPr>
-              <a:defRPr sz="2200" b="1">
+              <a:defRPr sz="2000" b="1">
                 <a:solidFill>
                   <a:srgbClr val="1F2D5A"/>
                 </a:solidFill>
@@ -8025,7 +7542,7 @@
           <a:lstStyle/>
           <a:p>
             <a:pPr>
-              <a:defRPr sz="1300">
+              <a:defRPr sz="2000">
                 <a:solidFill>
                   <a:srgbClr val="202020"/>
                 </a:solidFill>
@@ -8037,16 +7554,16 @@
           </a:p>
           <a:p>
             <a:pPr>
-              <a:defRPr sz="1300">
-                <a:solidFill>
-                  <a:srgbClr val="202020"/>
-                </a:solidFill>
-              </a:defRPr>
-            </a:pPr>
-          </a:p>
-          <a:p>
-            <a:pPr>
-              <a:defRPr sz="1300">
+              <a:defRPr sz="2000">
+                <a:solidFill>
+                  <a:srgbClr val="202020"/>
+                </a:solidFill>
+              </a:defRPr>
+            </a:pPr>
+          </a:p>
+          <a:p>
+            <a:pPr>
+              <a:defRPr sz="2000">
                 <a:solidFill>
                   <a:srgbClr val="202020"/>
                 </a:solidFill>
@@ -8058,16 +7575,16 @@
           </a:p>
           <a:p>
             <a:pPr>
-              <a:defRPr sz="1300">
-                <a:solidFill>
-                  <a:srgbClr val="202020"/>
-                </a:solidFill>
-              </a:defRPr>
-            </a:pPr>
-          </a:p>
-          <a:p>
-            <a:pPr>
-              <a:defRPr sz="1300">
+              <a:defRPr sz="2000">
+                <a:solidFill>
+                  <a:srgbClr val="202020"/>
+                </a:solidFill>
+              </a:defRPr>
+            </a:pPr>
+          </a:p>
+          <a:p>
+            <a:pPr>
+              <a:defRPr sz="2000">
                 <a:solidFill>
                   <a:srgbClr val="202020"/>
                 </a:solidFill>
@@ -8075,27 +7592,6 @@
             </a:pPr>
             <a:r>
               <a:t>无图。来源：`20251219_dmi_fm/{isolated_hopfion_10lambda, neel_hopfion}/`</a:t>
-            </a:r>
-          </a:p>
-          <a:p>
-            <a:pPr>
-              <a:defRPr sz="1300">
-                <a:solidFill>
-                  <a:srgbClr val="202020"/>
-                </a:solidFill>
-              </a:defRPr>
-            </a:pPr>
-          </a:p>
-          <a:p>
-            <a:pPr>
-              <a:defRPr sz="1300">
-                <a:solidFill>
-                  <a:srgbClr val="202020"/>
-                </a:solidFill>
-              </a:defRPr>
-            </a:pPr>
-            <a:r>
-              <a:t>---</a:t>
             </a:r>
           </a:p>
         </p:txBody>
@@ -8141,7 +7637,7 @@
           <a:lstStyle/>
           <a:p>
             <a:pPr>
-              <a:defRPr sz="2200" b="1">
+              <a:defRPr sz="2000" b="1">
                 <a:solidFill>
                   <a:srgbClr val="1F2D5A"/>
                 </a:solidFill>
@@ -8176,7 +7672,7 @@
           <a:lstStyle/>
           <a:p>
             <a:pPr>
-              <a:defRPr sz="1300">
+              <a:defRPr sz="2000">
                 <a:solidFill>
                   <a:srgbClr val="202020"/>
                 </a:solidFill>
@@ -8188,16 +7684,16 @@
           </a:p>
           <a:p>
             <a:pPr>
-              <a:defRPr sz="1300">
-                <a:solidFill>
-                  <a:srgbClr val="202020"/>
-                </a:solidFill>
-              </a:defRPr>
-            </a:pPr>
-          </a:p>
-          <a:p>
-            <a:pPr>
-              <a:defRPr sz="1300">
+              <a:defRPr sz="2000">
+                <a:solidFill>
+                  <a:srgbClr val="202020"/>
+                </a:solidFill>
+              </a:defRPr>
+            </a:pPr>
+          </a:p>
+          <a:p>
+            <a:pPr>
+              <a:defRPr sz="2000">
                 <a:solidFill>
                   <a:srgbClr val="202020"/>
                 </a:solidFill>
@@ -8209,16 +7705,16 @@
           </a:p>
           <a:p>
             <a:pPr>
-              <a:defRPr sz="1300">
-                <a:solidFill>
-                  <a:srgbClr val="202020"/>
-                </a:solidFill>
-              </a:defRPr>
-            </a:pPr>
-          </a:p>
-          <a:p>
-            <a:pPr>
-              <a:defRPr sz="1300">
+              <a:defRPr sz="2000">
+                <a:solidFill>
+                  <a:srgbClr val="202020"/>
+                </a:solidFill>
+              </a:defRPr>
+            </a:pPr>
+          </a:p>
+          <a:p>
+            <a:pPr>
+              <a:defRPr sz="2000">
                 <a:solidFill>
                   <a:srgbClr val="202020"/>
                 </a:solidFill>
@@ -8226,27 +7722,6 @@
             </a:pPr>
             <a:r>
               <a:t>无图（可加 bishe fig3-3_size_convergence）。来源：`20260105_frustrated_fm/size_sweep/`</a:t>
-            </a:r>
-          </a:p>
-          <a:p>
-            <a:pPr>
-              <a:defRPr sz="1300">
-                <a:solidFill>
-                  <a:srgbClr val="202020"/>
-                </a:solidFill>
-              </a:defRPr>
-            </a:pPr>
-          </a:p>
-          <a:p>
-            <a:pPr>
-              <a:defRPr sz="1300">
-                <a:solidFill>
-                  <a:srgbClr val="202020"/>
-                </a:solidFill>
-              </a:defRPr>
-            </a:pPr>
-            <a:r>
-              <a:t>---</a:t>
             </a:r>
           </a:p>
         </p:txBody>
@@ -8292,7 +7767,7 @@
           <a:lstStyle/>
           <a:p>
             <a:pPr>
-              <a:defRPr sz="2200" b="1">
+              <a:defRPr sz="2000" b="1">
                 <a:solidFill>
                   <a:srgbClr val="1F2D5A"/>
                 </a:solidFill>
@@ -8327,7 +7802,7 @@
           <a:lstStyle/>
           <a:p>
             <a:pPr>
-              <a:defRPr sz="1300">
+              <a:defRPr sz="2000">
                 <a:solidFill>
                   <a:srgbClr val="202020"/>
                 </a:solidFill>
@@ -8339,16 +7814,16 @@
           </a:p>
           <a:p>
             <a:pPr>
-              <a:defRPr sz="1300">
-                <a:solidFill>
-                  <a:srgbClr val="202020"/>
-                </a:solidFill>
-              </a:defRPr>
-            </a:pPr>
-          </a:p>
-          <a:p>
-            <a:pPr>
-              <a:defRPr sz="1300">
+              <a:defRPr sz="2000">
+                <a:solidFill>
+                  <a:srgbClr val="202020"/>
+                </a:solidFill>
+              </a:defRPr>
+            </a:pPr>
+          </a:p>
+          <a:p>
+            <a:pPr>
+              <a:defRPr sz="2000">
                 <a:solidFill>
                   <a:srgbClr val="202020"/>
                 </a:solidFill>
@@ -8360,7 +7835,7 @@
           </a:p>
           <a:p>
             <a:pPr>
-              <a:defRPr sz="1300">
+              <a:defRPr sz="2000">
                 <a:solidFill>
                   <a:srgbClr val="202020"/>
                 </a:solidFill>
@@ -8372,7 +7847,7 @@
           </a:p>
           <a:p>
             <a:pPr>
-              <a:defRPr sz="1300">
+              <a:defRPr sz="2000">
                 <a:solidFill>
                   <a:srgbClr val="202020"/>
                 </a:solidFill>
@@ -8384,7 +7859,7 @@
           </a:p>
           <a:p>
             <a:pPr>
-              <a:defRPr sz="1300">
+              <a:defRPr sz="2000">
                 <a:solidFill>
                   <a:srgbClr val="202020"/>
                 </a:solidFill>
@@ -8396,7 +7871,7 @@
           </a:p>
           <a:p>
             <a:pPr>
-              <a:defRPr sz="1300">
+              <a:defRPr sz="2000">
                 <a:solidFill>
                   <a:srgbClr val="202020"/>
                 </a:solidFill>
@@ -8408,16 +7883,16 @@
           </a:p>
           <a:p>
             <a:pPr>
-              <a:defRPr sz="1300">
-                <a:solidFill>
-                  <a:srgbClr val="202020"/>
-                </a:solidFill>
-              </a:defRPr>
-            </a:pPr>
-          </a:p>
-          <a:p>
-            <a:pPr>
-              <a:defRPr sz="1300">
+              <a:defRPr sz="2000">
+                <a:solidFill>
+                  <a:srgbClr val="202020"/>
+                </a:solidFill>
+              </a:defRPr>
+            </a:pPr>
+          </a:p>
+          <a:p>
+            <a:pPr>
+              <a:defRPr sz="2000">
                 <a:solidFill>
                   <a:srgbClr val="202020"/>
                 </a:solidFill>
@@ -8429,16 +7904,16 @@
           </a:p>
           <a:p>
             <a:pPr>
-              <a:defRPr sz="1300">
-                <a:solidFill>
-                  <a:srgbClr val="202020"/>
-                </a:solidFill>
-              </a:defRPr>
-            </a:pPr>
-          </a:p>
-          <a:p>
-            <a:pPr>
-              <a:defRPr sz="1300">
+              <a:defRPr sz="2000">
+                <a:solidFill>
+                  <a:srgbClr val="202020"/>
+                </a:solidFill>
+              </a:defRPr>
+            </a:pPr>
+          </a:p>
+          <a:p>
+            <a:pPr>
+              <a:defRPr sz="2000">
                 <a:solidFill>
                   <a:srgbClr val="202020"/>
                 </a:solidFill>
@@ -8446,27 +7921,6 @@
             </a:pPr>
             <a:r>
               <a:t>无图。来源：`20260105_frustrated_fm/centered_stability_test/`</a:t>
-            </a:r>
-          </a:p>
-          <a:p>
-            <a:pPr>
-              <a:defRPr sz="1300">
-                <a:solidFill>
-                  <a:srgbClr val="202020"/>
-                </a:solidFill>
-              </a:defRPr>
-            </a:pPr>
-          </a:p>
-          <a:p>
-            <a:pPr>
-              <a:defRPr sz="1300">
-                <a:solidFill>
-                  <a:srgbClr val="202020"/>
-                </a:solidFill>
-              </a:defRPr>
-            </a:pPr>
-            <a:r>
-              <a:t>---</a:t>
             </a:r>
           </a:p>
         </p:txBody>
@@ -8512,7 +7966,7 @@
           <a:lstStyle/>
           <a:p>
             <a:pPr>
-              <a:defRPr sz="2200" b="1">
+              <a:defRPr sz="2000" b="1">
                 <a:solidFill>
                   <a:srgbClr val="1F2D5A"/>
                 </a:solidFill>
@@ -8547,7 +8001,7 @@
           <a:lstStyle/>
           <a:p>
             <a:pPr>
-              <a:defRPr sz="1300">
+              <a:defRPr sz="2000">
                 <a:solidFill>
                   <a:srgbClr val="202020"/>
                 </a:solidFill>
@@ -8559,16 +8013,16 @@
           </a:p>
           <a:p>
             <a:pPr>
-              <a:defRPr sz="1300">
-                <a:solidFill>
-                  <a:srgbClr val="202020"/>
-                </a:solidFill>
-              </a:defRPr>
-            </a:pPr>
-          </a:p>
-          <a:p>
-            <a:pPr>
-              <a:defRPr sz="1300">
+              <a:defRPr sz="2000">
+                <a:solidFill>
+                  <a:srgbClr val="202020"/>
+                </a:solidFill>
+              </a:defRPr>
+            </a:pPr>
+          </a:p>
+          <a:p>
+            <a:pPr>
+              <a:defRPr sz="2000">
                 <a:solidFill>
                   <a:srgbClr val="202020"/>
                 </a:solidFill>
@@ -8580,16 +8034,16 @@
           </a:p>
           <a:p>
             <a:pPr>
-              <a:defRPr sz="1300">
-                <a:solidFill>
-                  <a:srgbClr val="202020"/>
-                </a:solidFill>
-              </a:defRPr>
-            </a:pPr>
-          </a:p>
-          <a:p>
-            <a:pPr>
-              <a:defRPr sz="1300">
+              <a:defRPr sz="2000">
+                <a:solidFill>
+                  <a:srgbClr val="202020"/>
+                </a:solidFill>
+              </a:defRPr>
+            </a:pPr>
+          </a:p>
+          <a:p>
+            <a:pPr>
+              <a:defRPr sz="2000">
                 <a:solidFill>
                   <a:srgbClr val="202020"/>
                 </a:solidFill>
@@ -8597,27 +8051,6 @@
             </a:pPr>
             <a:r>
               <a:t>来源：`20260105_frustrated_fm/anisotropy_study/ku_critical_sweep/`</a:t>
-            </a:r>
-          </a:p>
-          <a:p>
-            <a:pPr>
-              <a:defRPr sz="1300">
-                <a:solidFill>
-                  <a:srgbClr val="202020"/>
-                </a:solidFill>
-              </a:defRPr>
-            </a:pPr>
-          </a:p>
-          <a:p>
-            <a:pPr>
-              <a:defRPr sz="1300">
-                <a:solidFill>
-                  <a:srgbClr val="202020"/>
-                </a:solidFill>
-              </a:defRPr>
-            </a:pPr>
-            <a:r>
-              <a:t>---</a:t>
             </a:r>
           </a:p>
         </p:txBody>
@@ -8687,7 +8120,7 @@
           <a:lstStyle/>
           <a:p>
             <a:pPr>
-              <a:defRPr sz="2200" b="1">
+              <a:defRPr sz="2000" b="1">
                 <a:solidFill>
                   <a:srgbClr val="1F2D5A"/>
                 </a:solidFill>
@@ -8722,7 +8155,7 @@
           <a:lstStyle/>
           <a:p>
             <a:pPr>
-              <a:defRPr sz="1300">
+              <a:defRPr sz="2000">
                 <a:solidFill>
                   <a:srgbClr val="202020"/>
                 </a:solidFill>
@@ -8734,37 +8167,37 @@
           </a:p>
           <a:p>
             <a:pPr>
-              <a:defRPr sz="1300">
-                <a:solidFill>
-                  <a:srgbClr val="202020"/>
-                </a:solidFill>
-              </a:defRPr>
-            </a:pPr>
-          </a:p>
-          <a:p>
-            <a:pPr>
-              <a:defRPr sz="1300">
-                <a:solidFill>
-                  <a:srgbClr val="202020"/>
-                </a:solidFill>
-              </a:defRPr>
-            </a:pPr>
-            <a:r>
-              <a:t>compute_hopf_index.py 对当前体系所有 Hopfion 初始态做 Q_H 数值验证：结果均为 Q_H=1。Q_H=2 (p=1,q=2) 和 Q_H=4 在 frustrated FM 体系下的稳定性**从未仿真**，是下一步方向。</a:t>
-            </a:r>
-          </a:p>
-          <a:p>
-            <a:pPr>
-              <a:defRPr sz="1300">
-                <a:solidFill>
-                  <a:srgbClr val="202020"/>
-                </a:solidFill>
-              </a:defRPr>
-            </a:pPr>
-          </a:p>
-          <a:p>
-            <a:pPr>
-              <a:defRPr sz="1300">
+              <a:defRPr sz="2000">
+                <a:solidFill>
+                  <a:srgbClr val="202020"/>
+                </a:solidFill>
+              </a:defRPr>
+            </a:pPr>
+          </a:p>
+          <a:p>
+            <a:pPr>
+              <a:defRPr sz="2000">
+                <a:solidFill>
+                  <a:srgbClr val="202020"/>
+                </a:solidFill>
+              </a:defRPr>
+            </a:pPr>
+            <a:r>
+              <a:t>compute_hopf_index.py 对当前体系所有 Hopfion 初始态做 Q_H 数值验证：结果均为 Q_H=1。Q_H=2 (p=1,q=2) 和 Q_H=4 在 frustrated FM 体系下的稳定性从未仿真，是下一步方向。</a:t>
+            </a:r>
+          </a:p>
+          <a:p>
+            <a:pPr>
+              <a:defRPr sz="2000">
+                <a:solidFill>
+                  <a:srgbClr val="202020"/>
+                </a:solidFill>
+              </a:defRPr>
+            </a:pPr>
+          </a:p>
+          <a:p>
+            <a:pPr>
+              <a:defRPr sz="2000">
                 <a:solidFill>
                   <a:srgbClr val="202020"/>
                 </a:solidFill>
@@ -8772,27 +8205,6 @@
             </a:pPr>
             <a:r>
               <a:t>无图。来源：`20260105_frustrated_fm/anisotropy_study/size_vs_ku/` + `compute_hopf_index.py`</a:t>
-            </a:r>
-          </a:p>
-          <a:p>
-            <a:pPr>
-              <a:defRPr sz="1300">
-                <a:solidFill>
-                  <a:srgbClr val="202020"/>
-                </a:solidFill>
-              </a:defRPr>
-            </a:pPr>
-          </a:p>
-          <a:p>
-            <a:pPr>
-              <a:defRPr sz="1300">
-                <a:solidFill>
-                  <a:srgbClr val="202020"/>
-                </a:solidFill>
-              </a:defRPr>
-            </a:pPr>
-            <a:r>
-              <a:t>---</a:t>
             </a:r>
           </a:p>
         </p:txBody>

--- a/presentation/talk.pptx
+++ b/presentation/talk.pptx
@@ -3133,47 +3133,47 @@
           <a:noFill/>
         </p:spPr>
         <p:txBody>
+          <a:bodyPr wrap="none">
+            <a:spAutoFit/>
+          </a:bodyPr>
+          <a:lstStyle/>
+          <a:p>
+            <a:pPr>
+              <a:defRPr sz="2000" b="1">
+                <a:solidFill>
+                  <a:srgbClr val="1F2D5A"/>
+                </a:solidFill>
+              </a:defRPr>
+            </a:pPr>
+            <a:r>
+              <a:t>DMI-FM Hopfion 成功稳定</a:t>
+            </a:r>
+          </a:p>
+        </p:txBody>
+      </p:sp>
+      <p:sp>
+        <p:nvSpPr>
+          <p:cNvPr id="3" name="TextBox 2"/>
+          <p:cNvSpPr txBox="1"/>
+          <p:nvPr/>
+        </p:nvSpPr>
+        <p:spPr>
+          <a:xfrm>
+            <a:off x="457200" y="1097280"/>
+            <a:ext cx="6858000" cy="4937760"/>
+          </a:xfrm>
+          <a:prstGeom prst="rect">
+            <a:avLst/>
+          </a:prstGeom>
+          <a:noFill/>
+        </p:spPr>
+        <p:txBody>
           <a:bodyPr wrap="square">
             <a:spAutoFit/>
           </a:bodyPr>
           <a:lstStyle/>
           <a:p>
             <a:pPr>
-              <a:defRPr sz="2000" b="1">
-                <a:solidFill>
-                  <a:srgbClr val="1F2D5A"/>
-                </a:solidFill>
-              </a:defRPr>
-            </a:pPr>
-            <a:r>
-              <a:t>P1 — DMI-FM Hopfion 成功稳定</a:t>
-            </a:r>
-          </a:p>
-        </p:txBody>
-      </p:sp>
-      <p:sp>
-        <p:nvSpPr>
-          <p:cNvPr id="3" name="TextBox 2"/>
-          <p:cNvSpPr txBox="1"/>
-          <p:nvPr/>
-        </p:nvSpPr>
-        <p:spPr>
-          <a:xfrm>
-            <a:off x="457200" y="1097280"/>
-            <a:ext cx="6858000" cy="5303520"/>
-          </a:xfrm>
-          <a:prstGeom prst="rect">
-            <a:avLst/>
-          </a:prstGeom>
-          <a:noFill/>
-        </p:spPr>
-        <p:txBody>
-          <a:bodyPr wrap="square">
-            <a:spAutoFit/>
-          </a:bodyPr>
-          <a:lstStyle/>
-          <a:p>
-            <a:pPr>
               <a:defRPr sz="2000">
                 <a:solidFill>
                   <a:srgbClr val="202020"/>
@@ -3203,27 +3203,6 @@
             </a:pPr>
             <a:r>
               <a:t>材料参数：Msat=384e3, Aex=8.78e-12, Dbulk=1.58e-3, λ=70 nm。</a:t>
-            </a:r>
-          </a:p>
-          <a:p>
-            <a:pPr>
-              <a:defRPr sz="2000">
-                <a:solidFill>
-                  <a:srgbClr val="202020"/>
-                </a:solidFill>
-              </a:defRPr>
-            </a:pPr>
-          </a:p>
-          <a:p>
-            <a:pPr>
-              <a:defRPr sz="2000">
-                <a:solidFill>
-                  <a:srgbClr val="202020"/>
-                </a:solidFill>
-              </a:defRPr>
-            </a:pPr>
-            <a:r>
-              <a:t>来源：`20251219_dmi_fm/successful_simulation/run_analytic_relax.out/`</a:t>
             </a:r>
           </a:p>
         </p:txBody>
@@ -3252,6 +3231,41 @@
           </a:prstGeom>
         </p:spPr>
       </p:pic>
+      <p:sp>
+        <p:nvSpPr>
+          <p:cNvPr id="5" name="TextBox 4"/>
+          <p:cNvSpPr txBox="1"/>
+          <p:nvPr/>
+        </p:nvSpPr>
+        <p:spPr>
+          <a:xfrm>
+            <a:off x="4572000" y="6355080"/>
+            <a:ext cx="7315200" cy="365760"/>
+          </a:xfrm>
+          <a:prstGeom prst="rect">
+            <a:avLst/>
+          </a:prstGeom>
+          <a:noFill/>
+        </p:spPr>
+        <p:txBody>
+          <a:bodyPr wrap="square">
+            <a:spAutoFit/>
+          </a:bodyPr>
+          <a:lstStyle/>
+          <a:p>
+            <a:pPr algn="r">
+              <a:defRPr sz="1000" i="1">
+                <a:solidFill>
+                  <a:srgbClr val="808080"/>
+                </a:solidFill>
+              </a:defRPr>
+            </a:pPr>
+            <a:r>
+              <a:t>来源：`20251219_dmi_fm/successful_simulation/run_analytic_relax.out/`</a:t>
+            </a:r>
+          </a:p>
+        </p:txBody>
+      </p:sp>
     </p:spTree>
   </p:cSld>
   <p:clrMapOvr>
@@ -3287,34 +3301,114 @@
           <a:noFill/>
         </p:spPr>
         <p:txBody>
+          <a:bodyPr wrap="none">
+            <a:spAutoFit/>
+          </a:bodyPr>
+          <a:lstStyle/>
+          <a:p>
+            <a:pPr>
+              <a:defRPr sz="2000" b="1">
+                <a:solidFill>
+                  <a:srgbClr val="1F2D5A"/>
+                </a:solidFill>
+              </a:defRPr>
+            </a:pPr>
+            <a:r>
+              <a:t>漂移旧实验</a:t>
+            </a:r>
+          </a:p>
+        </p:txBody>
+      </p:sp>
+      <p:sp>
+        <p:nvSpPr>
+          <p:cNvPr id="3" name="TextBox 2"/>
+          <p:cNvSpPr txBox="1"/>
+          <p:nvPr/>
+        </p:nvSpPr>
+        <p:spPr>
+          <a:xfrm>
+            <a:off x="457200" y="1097280"/>
+            <a:ext cx="11247120" cy="4937760"/>
+          </a:xfrm>
+          <a:prstGeom prst="rect">
+            <a:avLst/>
+          </a:prstGeom>
+          <a:noFill/>
+        </p:spPr>
+        <p:txBody>
           <a:bodyPr wrap="square">
             <a:spAutoFit/>
           </a:bodyPr>
           <a:lstStyle/>
           <a:p>
             <a:pPr>
-              <a:defRPr sz="2000" b="1">
-                <a:solidFill>
-                  <a:srgbClr val="1F2D5A"/>
-                </a:solidFill>
-              </a:defRPr>
-            </a:pPr>
-            <a:r>
-              <a:t>P10 — 漂移旧实验</a:t>
-            </a:r>
-          </a:p>
-        </p:txBody>
-      </p:sp>
-      <p:sp>
-        <p:nvSpPr>
-          <p:cNvPr id="3" name="TextBox 2"/>
+              <a:defRPr sz="2000">
+                <a:solidFill>
+                  <a:srgbClr val="202020"/>
+                </a:solidFill>
+              </a:defRPr>
+            </a:pPr>
+            <a:r>
+              <a:t>drift_experiments 旧实验：</a:t>
+            </a:r>
+          </a:p>
+          <a:p>
+            <a:pPr>
+              <a:defRPr sz="2000">
+                <a:solidFill>
+                  <a:srgbClr val="202020"/>
+                </a:solidFill>
+              </a:defRPr>
+            </a:pPr>
+            <a:r>
+              <a:t>- bg_mx_axis_x_stable：alpha=5.0, R8r4, 10 ns 长跑，200 帧</a:t>
+            </a:r>
+          </a:p>
+          <a:p>
+            <a:pPr>
+              <a:defRPr sz="2000">
+                <a:solidFill>
+                  <a:srgbClr val="202020"/>
+                </a:solidFill>
+              </a:defRPr>
+            </a:pPr>
+            <a:r>
+              <a:t>- bg_my_axis_y_stable：1 ns 短跑，20 帧</a:t>
+            </a:r>
+          </a:p>
+          <a:p>
+            <a:pPr>
+              <a:defRPr sz="2000">
+                <a:solidFill>
+                  <a:srgbClr val="202020"/>
+                </a:solidFill>
+              </a:defRPr>
+            </a:pPr>
+          </a:p>
+          <a:p>
+            <a:pPr>
+              <a:defRPr sz="2000">
+                <a:solidFill>
+                  <a:srgbClr val="202020"/>
+                </a:solidFill>
+              </a:defRPr>
+            </a:pPr>
+            <a:r>
+              <a:t>当初结论：bg=mz 漂移、bg=mx,my 稳定。该结论已写入毕设论文 ch03 §3.2.3 早期版本。</a:t>
+            </a:r>
+          </a:p>
+        </p:txBody>
+      </p:sp>
+      <p:sp>
+        <p:nvSpPr>
+          <p:cNvPr id="4" name="TextBox 3"/>
           <p:cNvSpPr txBox="1"/>
           <p:nvPr/>
         </p:nvSpPr>
         <p:spPr>
           <a:xfrm>
-            <a:off x="457200" y="1097280"/>
-            <a:ext cx="11247120" cy="5303520"/>
+            <a:off x="4572000" y="6355080"/>
+            <a:ext cx="7315200" cy="365760"/>
           </a:xfrm>
           <a:prstGeom prst="rect">
             <a:avLst/>
@@ -3327,81 +3421,15 @@
           </a:bodyPr>
           <a:lstStyle/>
           <a:p>
-            <a:pPr>
-              <a:defRPr sz="2000">
-                <a:solidFill>
-                  <a:srgbClr val="202020"/>
-                </a:solidFill>
-              </a:defRPr>
-            </a:pPr>
-            <a:r>
-              <a:t>drift_experiments 旧实验：</a:t>
-            </a:r>
-          </a:p>
-          <a:p>
-            <a:pPr>
-              <a:defRPr sz="2000">
-                <a:solidFill>
-                  <a:srgbClr val="202020"/>
-                </a:solidFill>
-              </a:defRPr>
-            </a:pPr>
-            <a:r>
-              <a:t>- bg_mx_axis_x_stable：alpha=5.0, R8r4, 10 ns 长跑，200 帧</a:t>
-            </a:r>
-          </a:p>
-          <a:p>
-            <a:pPr>
-              <a:defRPr sz="2000">
-                <a:solidFill>
-                  <a:srgbClr val="202020"/>
-                </a:solidFill>
-              </a:defRPr>
-            </a:pPr>
-            <a:r>
-              <a:t>- bg_my_axis_y_stable：1 ns 短跑，20 帧</a:t>
-            </a:r>
-          </a:p>
-          <a:p>
-            <a:pPr>
-              <a:defRPr sz="2000">
-                <a:solidFill>
-                  <a:srgbClr val="202020"/>
-                </a:solidFill>
-              </a:defRPr>
-            </a:pPr>
-          </a:p>
-          <a:p>
-            <a:pPr>
-              <a:defRPr sz="2000">
-                <a:solidFill>
-                  <a:srgbClr val="202020"/>
-                </a:solidFill>
-              </a:defRPr>
-            </a:pPr>
-            <a:r>
-              <a:t>当初结论：bg=mz 漂移、bg=mx,my 稳定。该结论已写入毕设论文 ch03 §3.2.3 早期版本。</a:t>
-            </a:r>
-          </a:p>
-          <a:p>
-            <a:pPr>
-              <a:defRPr sz="2000">
-                <a:solidFill>
-                  <a:srgbClr val="202020"/>
-                </a:solidFill>
-              </a:defRPr>
-            </a:pPr>
-          </a:p>
-          <a:p>
-            <a:pPr>
-              <a:defRPr sz="2000">
-                <a:solidFill>
-                  <a:srgbClr val="202020"/>
-                </a:solidFill>
-              </a:defRPr>
-            </a:pPr>
-            <a:r>
-              <a:t>无图。来源：`20260105_frustrated_fm/drift_experiments/{bg_mx_axis_x_stable, bg_my_axis_y_stable}/`</a:t>
+            <a:pPr algn="r">
+              <a:defRPr sz="1000" i="1">
+                <a:solidFill>
+                  <a:srgbClr val="808080"/>
+                </a:solidFill>
+              </a:defRPr>
+            </a:pPr>
+            <a:r>
+              <a:t>来源：`20260105_frustrated_fm/drift_experiments/{bg_mx_axis_x_stable, bg_my_axis_y_stable}/`</a:t>
             </a:r>
           </a:p>
         </p:txBody>
@@ -3441,47 +3469,47 @@
           <a:noFill/>
         </p:spPr>
         <p:txBody>
+          <a:bodyPr wrap="none">
+            <a:spAutoFit/>
+          </a:bodyPr>
+          <a:lstStyle/>
+          <a:p>
+            <a:pPr>
+              <a:defRPr sz="2000" b="1">
+                <a:solidFill>
+                  <a:srgbClr val="1F2D5A"/>
+                </a:solidFill>
+              </a:defRPr>
+            </a:pPr>
+            <a:r>
+              <a:t>漂移结论推翻：unified_rerun 控制变量</a:t>
+            </a:r>
+          </a:p>
+        </p:txBody>
+      </p:sp>
+      <p:sp>
+        <p:nvSpPr>
+          <p:cNvPr id="3" name="TextBox 2"/>
+          <p:cNvSpPr txBox="1"/>
+          <p:nvPr/>
+        </p:nvSpPr>
+        <p:spPr>
+          <a:xfrm>
+            <a:off x="457200" y="1097280"/>
+            <a:ext cx="6858000" cy="4937760"/>
+          </a:xfrm>
+          <a:prstGeom prst="rect">
+            <a:avLst/>
+          </a:prstGeom>
+          <a:noFill/>
+        </p:spPr>
+        <p:txBody>
           <a:bodyPr wrap="square">
             <a:spAutoFit/>
           </a:bodyPr>
           <a:lstStyle/>
           <a:p>
             <a:pPr>
-              <a:defRPr sz="2000" b="1">
-                <a:solidFill>
-                  <a:srgbClr val="1F2D5A"/>
-                </a:solidFill>
-              </a:defRPr>
-            </a:pPr>
-            <a:r>
-              <a:t>P11 — 漂移结论推翻：unified_rerun 控制变量</a:t>
-            </a:r>
-          </a:p>
-        </p:txBody>
-      </p:sp>
-      <p:sp>
-        <p:nvSpPr>
-          <p:cNvPr id="3" name="TextBox 2"/>
-          <p:cNvSpPr txBox="1"/>
-          <p:nvPr/>
-        </p:nvSpPr>
-        <p:spPr>
-          <a:xfrm>
-            <a:off x="457200" y="1097280"/>
-            <a:ext cx="6858000" cy="5303520"/>
-          </a:xfrm>
-          <a:prstGeom prst="rect">
-            <a:avLst/>
-          </a:prstGeom>
-          <a:noFill/>
-        </p:spPr>
-        <p:txBody>
-          <a:bodyPr wrap="square">
-            <a:spAutoFit/>
-          </a:bodyPr>
-          <a:lstStyle/>
-          <a:p>
-            <a:pPr>
               <a:defRPr sz="2000">
                 <a:solidFill>
                   <a:srgbClr val="202020"/>
@@ -3553,27 +3581,6 @@
             </a:pPr>
             <a:r>
               <a:t>毕设 ch03 §3.2.3、ch06 已同步修正；fig3-4_drift_comparison.png 重新生成入论文。</a:t>
-            </a:r>
-          </a:p>
-          <a:p>
-            <a:pPr>
-              <a:defRPr sz="2000">
-                <a:solidFill>
-                  <a:srgbClr val="202020"/>
-                </a:solidFill>
-              </a:defRPr>
-            </a:pPr>
-          </a:p>
-          <a:p>
-            <a:pPr>
-              <a:defRPr sz="2000">
-                <a:solidFill>
-                  <a:srgbClr val="202020"/>
-                </a:solidFill>
-              </a:defRPr>
-            </a:pPr>
-            <a:r>
-              <a:t>来源：`20260105_frustrated_fm/drift_experiments/unified_rerun/`（4 组 + continue）</a:t>
             </a:r>
           </a:p>
         </p:txBody>
@@ -3602,6 +3609,41 @@
           </a:prstGeom>
         </p:spPr>
       </p:pic>
+      <p:sp>
+        <p:nvSpPr>
+          <p:cNvPr id="5" name="TextBox 4"/>
+          <p:cNvSpPr txBox="1"/>
+          <p:nvPr/>
+        </p:nvSpPr>
+        <p:spPr>
+          <a:xfrm>
+            <a:off x="4572000" y="6355080"/>
+            <a:ext cx="7315200" cy="365760"/>
+          </a:xfrm>
+          <a:prstGeom prst="rect">
+            <a:avLst/>
+          </a:prstGeom>
+          <a:noFill/>
+        </p:spPr>
+        <p:txBody>
+          <a:bodyPr wrap="square">
+            <a:spAutoFit/>
+          </a:bodyPr>
+          <a:lstStyle/>
+          <a:p>
+            <a:pPr algn="r">
+              <a:defRPr sz="1000" i="1">
+                <a:solidFill>
+                  <a:srgbClr val="808080"/>
+                </a:solidFill>
+              </a:defRPr>
+            </a:pPr>
+            <a:r>
+              <a:t>来源：`20260105_frustrated_fm/drift_experiments/unified_rerun/`（4 组 + continue）</a:t>
+            </a:r>
+          </a:p>
+        </p:txBody>
+      </p:sp>
     </p:spTree>
   </p:cSld>
   <p:clrMapOvr>
@@ -3637,47 +3679,47 @@
           <a:noFill/>
         </p:spPr>
         <p:txBody>
+          <a:bodyPr wrap="none">
+            <a:spAutoFit/>
+          </a:bodyPr>
+          <a:lstStyle/>
+          <a:p>
+            <a:pPr>
+              <a:defRPr sz="2000" b="1">
+                <a:solidFill>
+                  <a:srgbClr val="1F2D5A"/>
+                </a:solidFill>
+              </a:defRPr>
+            </a:pPr>
+            <a:r>
+              <a:t>自旋波方向选择性（5 组）</a:t>
+            </a:r>
+          </a:p>
+        </p:txBody>
+      </p:sp>
+      <p:sp>
+        <p:nvSpPr>
+          <p:cNvPr id="3" name="TextBox 2"/>
+          <p:cNvSpPr txBox="1"/>
+          <p:nvPr/>
+        </p:nvSpPr>
+        <p:spPr>
+          <a:xfrm>
+            <a:off x="457200" y="1097280"/>
+            <a:ext cx="6858000" cy="4937760"/>
+          </a:xfrm>
+          <a:prstGeom prst="rect">
+            <a:avLst/>
+          </a:prstGeom>
+          <a:noFill/>
+        </p:spPr>
+        <p:txBody>
           <a:bodyPr wrap="square">
             <a:spAutoFit/>
           </a:bodyPr>
           <a:lstStyle/>
           <a:p>
             <a:pPr>
-              <a:defRPr sz="2000" b="1">
-                <a:solidFill>
-                  <a:srgbClr val="1F2D5A"/>
-                </a:solidFill>
-              </a:defRPr>
-            </a:pPr>
-            <a:r>
-              <a:t>P12 — 自旋波方向选择性（5 组）</a:t>
-            </a:r>
-          </a:p>
-        </p:txBody>
-      </p:sp>
-      <p:sp>
-        <p:nvSpPr>
-          <p:cNvPr id="3" name="TextBox 2"/>
-          <p:cNvSpPr txBox="1"/>
-          <p:nvPr/>
-        </p:nvSpPr>
-        <p:spPr>
-          <a:xfrm>
-            <a:off x="457200" y="1097280"/>
-            <a:ext cx="6858000" cy="5303520"/>
-          </a:xfrm>
-          <a:prstGeom prst="rect">
-            <a:avLst/>
-          </a:prstGeom>
-          <a:noFill/>
-        </p:spPr>
-        <p:txBody>
-          <a:bodyPr wrap="square">
-            <a:spAutoFit/>
-          </a:bodyPr>
-          <a:lstStyle/>
-          <a:p>
-            <a:pPr>
               <a:defRPr sz="2000">
                 <a:solidFill>
                   <a:srgbClr val="202020"/>
@@ -3764,27 +3806,6 @@
             </a:pPr>
             <a:r>
               <a:t>后续所有自旋波仿真默认 vib 方向 = X。</a:t>
-            </a:r>
-          </a:p>
-          <a:p>
-            <a:pPr>
-              <a:defRPr sz="2000">
-                <a:solidFill>
-                  <a:srgbClr val="202020"/>
-                </a:solidFill>
-              </a:defRPr>
-            </a:pPr>
-          </a:p>
-          <a:p>
-            <a:pPr>
-              <a:defRPr sz="2000">
-                <a:solidFill>
-                  <a:srgbClr val="202020"/>
-                </a:solidFill>
-              </a:defRPr>
-            </a:pPr>
-            <a:r>
-              <a:t>来源：`20260105_frustrated_fm/spin_wave_dynamics/drive_selection/plane_wave/`</a:t>
             </a:r>
           </a:p>
         </p:txBody>
@@ -3813,6 +3834,41 @@
           </a:prstGeom>
         </p:spPr>
       </p:pic>
+      <p:sp>
+        <p:nvSpPr>
+          <p:cNvPr id="5" name="TextBox 4"/>
+          <p:cNvSpPr txBox="1"/>
+          <p:nvPr/>
+        </p:nvSpPr>
+        <p:spPr>
+          <a:xfrm>
+            <a:off x="4572000" y="6355080"/>
+            <a:ext cx="7315200" cy="365760"/>
+          </a:xfrm>
+          <a:prstGeom prst="rect">
+            <a:avLst/>
+          </a:prstGeom>
+          <a:noFill/>
+        </p:spPr>
+        <p:txBody>
+          <a:bodyPr wrap="square">
+            <a:spAutoFit/>
+          </a:bodyPr>
+          <a:lstStyle/>
+          <a:p>
+            <a:pPr algn="r">
+              <a:defRPr sz="1000" i="1">
+                <a:solidFill>
+                  <a:srgbClr val="808080"/>
+                </a:solidFill>
+              </a:defRPr>
+            </a:pPr>
+            <a:r>
+              <a:t>来源：`20260105_frustrated_fm/spin_wave_dynamics/drive_selection/plane_wave/`</a:t>
+            </a:r>
+          </a:p>
+        </p:txBody>
+      </p:sp>
     </p:spTree>
   </p:cSld>
   <p:clrMapOvr>
@@ -3848,47 +3904,47 @@
           <a:noFill/>
         </p:spPr>
         <p:txBody>
+          <a:bodyPr wrap="none">
+            <a:spAutoFit/>
+          </a:bodyPr>
+          <a:lstStyle/>
+          <a:p>
+            <a:pPr>
+              <a:defRPr sz="2000" b="1">
+                <a:solidFill>
+                  <a:srgbClr val="1F2D5A"/>
+                </a:solidFill>
+              </a:defRPr>
+            </a:pPr>
+            <a:r>
+              <a:t>平面源 srcX 频率扫描（14 频率）</a:t>
+            </a:r>
+          </a:p>
+        </p:txBody>
+      </p:sp>
+      <p:sp>
+        <p:nvSpPr>
+          <p:cNvPr id="3" name="TextBox 2"/>
+          <p:cNvSpPr txBox="1"/>
+          <p:nvPr/>
+        </p:nvSpPr>
+        <p:spPr>
+          <a:xfrm>
+            <a:off x="457200" y="1097280"/>
+            <a:ext cx="6858000" cy="4937760"/>
+          </a:xfrm>
+          <a:prstGeom prst="rect">
+            <a:avLst/>
+          </a:prstGeom>
+          <a:noFill/>
+        </p:spPr>
+        <p:txBody>
           <a:bodyPr wrap="square">
             <a:spAutoFit/>
           </a:bodyPr>
           <a:lstStyle/>
           <a:p>
             <a:pPr>
-              <a:defRPr sz="2000" b="1">
-                <a:solidFill>
-                  <a:srgbClr val="1F2D5A"/>
-                </a:solidFill>
-              </a:defRPr>
-            </a:pPr>
-            <a:r>
-              <a:t>P13 — 平面源 srcX 频率扫描（14 频率）</a:t>
-            </a:r>
-          </a:p>
-        </p:txBody>
-      </p:sp>
-      <p:sp>
-        <p:nvSpPr>
-          <p:cNvPr id="3" name="TextBox 2"/>
-          <p:cNvSpPr txBox="1"/>
-          <p:nvPr/>
-        </p:nvSpPr>
-        <p:spPr>
-          <a:xfrm>
-            <a:off x="457200" y="1097280"/>
-            <a:ext cx="6858000" cy="5303520"/>
-          </a:xfrm>
-          <a:prstGeom prst="rect">
-            <a:avLst/>
-          </a:prstGeom>
-          <a:noFill/>
-        </p:spPr>
-        <p:txBody>
-          <a:bodyPr wrap="square">
-            <a:spAutoFit/>
-          </a:bodyPr>
-          <a:lstStyle/>
-          <a:p>
-            <a:pPr>
               <a:defRPr sz="2000">
                 <a:solidFill>
                   <a:srgbClr val="202020"/>
@@ -3918,27 +3974,6 @@
             </a:pPr>
             <a:r>
               <a:t>结论：100-200 GHz、1000 GHz 强响应；400-600 GHz 死区（位移近零）；Hopfion 沿 +z 方向运动（垂直波传播方向）。</a:t>
-            </a:r>
-          </a:p>
-          <a:p>
-            <a:pPr>
-              <a:defRPr sz="2000">
-                <a:solidFill>
-                  <a:srgbClr val="202020"/>
-                </a:solidFill>
-              </a:defRPr>
-            </a:pPr>
-          </a:p>
-          <a:p>
-            <a:pPr>
-              <a:defRPr sz="2000">
-                <a:solidFill>
-                  <a:srgbClr val="202020"/>
-                </a:solidFill>
-              </a:defRPr>
-            </a:pPr>
-            <a:r>
-              <a:t>来源：`20260105_frustrated_fm/spin_wave_dynamics/freq_sweep/plane_wave/srcX/{02ns, 05ns}/`</a:t>
             </a:r>
           </a:p>
         </p:txBody>
@@ -3967,6 +4002,41 @@
           </a:prstGeom>
         </p:spPr>
       </p:pic>
+      <p:sp>
+        <p:nvSpPr>
+          <p:cNvPr id="5" name="TextBox 4"/>
+          <p:cNvSpPr txBox="1"/>
+          <p:nvPr/>
+        </p:nvSpPr>
+        <p:spPr>
+          <a:xfrm>
+            <a:off x="4572000" y="6355080"/>
+            <a:ext cx="7315200" cy="365760"/>
+          </a:xfrm>
+          <a:prstGeom prst="rect">
+            <a:avLst/>
+          </a:prstGeom>
+          <a:noFill/>
+        </p:spPr>
+        <p:txBody>
+          <a:bodyPr wrap="square">
+            <a:spAutoFit/>
+          </a:bodyPr>
+          <a:lstStyle/>
+          <a:p>
+            <a:pPr algn="r">
+              <a:defRPr sz="1000" i="1">
+                <a:solidFill>
+                  <a:srgbClr val="808080"/>
+                </a:solidFill>
+              </a:defRPr>
+            </a:pPr>
+            <a:r>
+              <a:t>来源：`20260105_frustrated_fm/spin_wave_dynamics/freq_sweep/plane_wave/srcX/{02ns, 05ns}/`</a:t>
+            </a:r>
+          </a:p>
+        </p:txBody>
+      </p:sp>
     </p:spTree>
   </p:cSld>
   <p:clrMapOvr>
@@ -4002,47 +4072,47 @@
           <a:noFill/>
         </p:spPr>
         <p:txBody>
+          <a:bodyPr wrap="none">
+            <a:spAutoFit/>
+          </a:bodyPr>
+          <a:lstStyle/>
+          <a:p>
+            <a:pPr>
+              <a:defRPr sz="2000" b="1">
+                <a:solidFill>
+                  <a:srgbClr val="1F2D5A"/>
+                </a:solidFill>
+              </a:defRPr>
+            </a:pPr>
+            <a:r>
+              <a:t>平面源 srcZ 频率扫描（20 频率）</a:t>
+            </a:r>
+          </a:p>
+        </p:txBody>
+      </p:sp>
+      <p:sp>
+        <p:nvSpPr>
+          <p:cNvPr id="3" name="TextBox 2"/>
+          <p:cNvSpPr txBox="1"/>
+          <p:nvPr/>
+        </p:nvSpPr>
+        <p:spPr>
+          <a:xfrm>
+            <a:off x="457200" y="1097280"/>
+            <a:ext cx="6858000" cy="4937760"/>
+          </a:xfrm>
+          <a:prstGeom prst="rect">
+            <a:avLst/>
+          </a:prstGeom>
+          <a:noFill/>
+        </p:spPr>
+        <p:txBody>
           <a:bodyPr wrap="square">
             <a:spAutoFit/>
           </a:bodyPr>
           <a:lstStyle/>
           <a:p>
             <a:pPr>
-              <a:defRPr sz="2000" b="1">
-                <a:solidFill>
-                  <a:srgbClr val="1F2D5A"/>
-                </a:solidFill>
-              </a:defRPr>
-            </a:pPr>
-            <a:r>
-              <a:t>P14 — 平面源 srcZ 频率扫描（20 频率）</a:t>
-            </a:r>
-          </a:p>
-        </p:txBody>
-      </p:sp>
-      <p:sp>
-        <p:nvSpPr>
-          <p:cNvPr id="3" name="TextBox 2"/>
-          <p:cNvSpPr txBox="1"/>
-          <p:nvPr/>
-        </p:nvSpPr>
-        <p:spPr>
-          <a:xfrm>
-            <a:off x="457200" y="1097280"/>
-            <a:ext cx="6858000" cy="5303520"/>
-          </a:xfrm>
-          <a:prstGeom prst="rect">
-            <a:avLst/>
-          </a:prstGeom>
-          <a:noFill/>
-        </p:spPr>
-        <p:txBody>
-          <a:bodyPr wrap="square">
-            <a:spAutoFit/>
-          </a:bodyPr>
-          <a:lstStyle/>
-          <a:p>
-            <a:pPr>
               <a:defRPr sz="2000">
                 <a:solidFill>
                   <a:srgbClr val="202020"/>
@@ -4120,27 +4190,6 @@
             </a:pPr>
             <a:r>
               <a:t>- 整体趋势：srcZ → -z（沿波传播方向）</a:t>
-            </a:r>
-          </a:p>
-          <a:p>
-            <a:pPr>
-              <a:defRPr sz="2000">
-                <a:solidFill>
-                  <a:srgbClr val="202020"/>
-                </a:solidFill>
-              </a:defRPr>
-            </a:pPr>
-          </a:p>
-          <a:p>
-            <a:pPr>
-              <a:defRPr sz="2000">
-                <a:solidFill>
-                  <a:srgbClr val="202020"/>
-                </a:solidFill>
-              </a:defRPr>
-            </a:pPr>
-            <a:r>
-              <a:t>来源：`20260105_frustrated_fm/spin_wave_dynamics/freq_sweep/plane_wave/srcZ/`</a:t>
             </a:r>
           </a:p>
         </p:txBody>
@@ -4169,6 +4218,41 @@
           </a:prstGeom>
         </p:spPr>
       </p:pic>
+      <p:sp>
+        <p:nvSpPr>
+          <p:cNvPr id="5" name="TextBox 4"/>
+          <p:cNvSpPr txBox="1"/>
+          <p:nvPr/>
+        </p:nvSpPr>
+        <p:spPr>
+          <a:xfrm>
+            <a:off x="4572000" y="6355080"/>
+            <a:ext cx="7315200" cy="365760"/>
+          </a:xfrm>
+          <a:prstGeom prst="rect">
+            <a:avLst/>
+          </a:prstGeom>
+          <a:noFill/>
+        </p:spPr>
+        <p:txBody>
+          <a:bodyPr wrap="square">
+            <a:spAutoFit/>
+          </a:bodyPr>
+          <a:lstStyle/>
+          <a:p>
+            <a:pPr algn="r">
+              <a:defRPr sz="1000" i="1">
+                <a:solidFill>
+                  <a:srgbClr val="808080"/>
+                </a:solidFill>
+              </a:defRPr>
+            </a:pPr>
+            <a:r>
+              <a:t>来源：`20260105_frustrated_fm/spin_wave_dynamics/freq_sweep/plane_wave/srcZ/`</a:t>
+            </a:r>
+          </a:p>
+        </p:txBody>
+      </p:sp>
     </p:spTree>
   </p:cSld>
   <p:clrMapOvr>
@@ -4204,47 +4288,47 @@
           <a:noFill/>
         </p:spPr>
         <p:txBody>
+          <a:bodyPr wrap="none">
+            <a:spAutoFit/>
+          </a:bodyPr>
+          <a:lstStyle/>
+          <a:p>
+            <a:pPr>
+              <a:defRPr sz="2000" b="1">
+                <a:solidFill>
+                  <a:srgbClr val="1F2D5A"/>
+                </a:solidFill>
+              </a:defRPr>
+            </a:pPr>
+            <a:r>
+              <a:t>srcX 幅度扫描 @440 GHz（旧标度律已推翻）</a:t>
+            </a:r>
+          </a:p>
+        </p:txBody>
+      </p:sp>
+      <p:sp>
+        <p:nvSpPr>
+          <p:cNvPr id="3" name="TextBox 2"/>
+          <p:cNvSpPr txBox="1"/>
+          <p:nvPr/>
+        </p:nvSpPr>
+        <p:spPr>
+          <a:xfrm>
+            <a:off x="457200" y="1097280"/>
+            <a:ext cx="6858000" cy="4937760"/>
+          </a:xfrm>
+          <a:prstGeom prst="rect">
+            <a:avLst/>
+          </a:prstGeom>
+          <a:noFill/>
+        </p:spPr>
+        <p:txBody>
           <a:bodyPr wrap="square">
             <a:spAutoFit/>
           </a:bodyPr>
           <a:lstStyle/>
           <a:p>
             <a:pPr>
-              <a:defRPr sz="2000" b="1">
-                <a:solidFill>
-                  <a:srgbClr val="1F2D5A"/>
-                </a:solidFill>
-              </a:defRPr>
-            </a:pPr>
-            <a:r>
-              <a:t>P15 — srcX 幅度扫描 @440 GHz（旧标度律已推翻）</a:t>
-            </a:r>
-          </a:p>
-        </p:txBody>
-      </p:sp>
-      <p:sp>
-        <p:nvSpPr>
-          <p:cNvPr id="3" name="TextBox 2"/>
-          <p:cNvSpPr txBox="1"/>
-          <p:nvPr/>
-        </p:nvSpPr>
-        <p:spPr>
-          <a:xfrm>
-            <a:off x="457200" y="1097280"/>
-            <a:ext cx="6858000" cy="5303520"/>
-          </a:xfrm>
-          <a:prstGeom prst="rect">
-            <a:avLst/>
-          </a:prstGeom>
-          <a:noFill/>
-        </p:spPr>
-        <p:txBody>
-          <a:bodyPr wrap="square">
-            <a:spAutoFit/>
-          </a:bodyPr>
-          <a:lstStyle/>
-          <a:p>
-            <a:pPr>
               <a:defRPr sz="2000">
                 <a:solidFill>
                   <a:srgbClr val="202020"/>
@@ -4376,27 +4460,6 @@
             </a:pPr>
             <a:r>
               <a:t>现状：方向反转 + 幂律两个现象并存，但准确标度律和精确 Bc 都未确定。</a:t>
-            </a:r>
-          </a:p>
-          <a:p>
-            <a:pPr>
-              <a:defRPr sz="2000">
-                <a:solidFill>
-                  <a:srgbClr val="202020"/>
-                </a:solidFill>
-              </a:defRPr>
-            </a:pPr>
-          </a:p>
-          <a:p>
-            <a:pPr>
-              <a:defRPr sz="2000">
-                <a:solidFill>
-                  <a:srgbClr val="202020"/>
-                </a:solidFill>
-              </a:defRPr>
-            </a:pPr>
-            <a:r>
-              <a:t>来源：`20260105_frustrated_fm/spin_wave_dynamics/amplitude_sweep/plane_wave/`</a:t>
             </a:r>
           </a:p>
         </p:txBody>
@@ -4425,6 +4488,41 @@
           </a:prstGeom>
         </p:spPr>
       </p:pic>
+      <p:sp>
+        <p:nvSpPr>
+          <p:cNvPr id="5" name="TextBox 4"/>
+          <p:cNvSpPr txBox="1"/>
+          <p:nvPr/>
+        </p:nvSpPr>
+        <p:spPr>
+          <a:xfrm>
+            <a:off x="4572000" y="6355080"/>
+            <a:ext cx="7315200" cy="365760"/>
+          </a:xfrm>
+          <a:prstGeom prst="rect">
+            <a:avLst/>
+          </a:prstGeom>
+          <a:noFill/>
+        </p:spPr>
+        <p:txBody>
+          <a:bodyPr wrap="square">
+            <a:spAutoFit/>
+          </a:bodyPr>
+          <a:lstStyle/>
+          <a:p>
+            <a:pPr algn="r">
+              <a:defRPr sz="1000" i="1">
+                <a:solidFill>
+                  <a:srgbClr val="808080"/>
+                </a:solidFill>
+              </a:defRPr>
+            </a:pPr>
+            <a:r>
+              <a:t>来源：`20260105_frustrated_fm/spin_wave_dynamics/amplitude_sweep/plane_wave/`</a:t>
+            </a:r>
+          </a:p>
+        </p:txBody>
+      </p:sp>
     </p:spTree>
   </p:cSld>
   <p:clrMapOvr>
@@ -4460,34 +4558,90 @@
           <a:noFill/>
         </p:spPr>
         <p:txBody>
+          <a:bodyPr wrap="none">
+            <a:spAutoFit/>
+          </a:bodyPr>
+          <a:lstStyle/>
+          <a:p>
+            <a:pPr>
+              <a:defRPr sz="2000" b="1">
+                <a:solidFill>
+                  <a:srgbClr val="1F2D5A"/>
+                </a:solidFill>
+              </a:defRPr>
+            </a:pPr>
+            <a:r>
+              <a:t>srcZ 幅度扫描 @1100 GHz（cron 跑，部分数据）</a:t>
+            </a:r>
+          </a:p>
+        </p:txBody>
+      </p:sp>
+      <p:sp>
+        <p:nvSpPr>
+          <p:cNvPr id="3" name="TextBox 2"/>
+          <p:cNvSpPr txBox="1"/>
+          <p:nvPr/>
+        </p:nvSpPr>
+        <p:spPr>
+          <a:xfrm>
+            <a:off x="457200" y="1097280"/>
+            <a:ext cx="11247120" cy="4937760"/>
+          </a:xfrm>
+          <a:prstGeom prst="rect">
+            <a:avLst/>
+          </a:prstGeom>
+          <a:noFill/>
+        </p:spPr>
+        <p:txBody>
           <a:bodyPr wrap="square">
             <a:spAutoFit/>
           </a:bodyPr>
           <a:lstStyle/>
           <a:p>
             <a:pPr>
-              <a:defRPr sz="2000" b="1">
-                <a:solidFill>
-                  <a:srgbClr val="1F2D5A"/>
-                </a:solidFill>
-              </a:defRPr>
-            </a:pPr>
-            <a:r>
-              <a:t>P16 — srcZ 幅度扫描 @1100 GHz（cron 跑，部分数据）</a:t>
-            </a:r>
-          </a:p>
-        </p:txBody>
-      </p:sp>
-      <p:sp>
-        <p:nvSpPr>
-          <p:cNvPr id="3" name="TextBox 2"/>
+              <a:defRPr sz="2000">
+                <a:solidFill>
+                  <a:srgbClr val="202020"/>
+                </a:solidFill>
+              </a:defRPr>
+            </a:pPr>
+            <a:r>
+              <a:t>amplitude_sweep/plane_wave_srcZ：B=0.1 / 0.5 / 1.0 / 1.5 / 2.0 T 等约 6 点 @1100 GHz cron 进行。当前数据回收状态不全，未整理分析。</a:t>
+            </a:r>
+          </a:p>
+          <a:p>
+            <a:pPr>
+              <a:defRPr sz="2000">
+                <a:solidFill>
+                  <a:srgbClr val="202020"/>
+                </a:solidFill>
+              </a:defRPr>
+            </a:pPr>
+          </a:p>
+          <a:p>
+            <a:pPr>
+              <a:defRPr sz="2000">
+                <a:solidFill>
+                  <a:srgbClr val="202020"/>
+                </a:solidFill>
+              </a:defRPr>
+            </a:pPr>
+            <a:r>
+              <a:t>仅描述现象：在已完成 B 点上，Hopfion 沿 -z 漂移幅度大致随 B 增大。无量化标度律结论。</a:t>
+            </a:r>
+          </a:p>
+        </p:txBody>
+      </p:sp>
+      <p:sp>
+        <p:nvSpPr>
+          <p:cNvPr id="4" name="TextBox 3"/>
           <p:cNvSpPr txBox="1"/>
           <p:nvPr/>
         </p:nvSpPr>
         <p:spPr>
           <a:xfrm>
-            <a:off x="457200" y="1097280"/>
-            <a:ext cx="11247120" cy="5303520"/>
+            <a:off x="4572000" y="6355080"/>
+            <a:ext cx="7315200" cy="365760"/>
           </a:xfrm>
           <a:prstGeom prst="rect">
             <a:avLst/>
@@ -4500,57 +4654,15 @@
           </a:bodyPr>
           <a:lstStyle/>
           <a:p>
-            <a:pPr>
-              <a:defRPr sz="2000">
-                <a:solidFill>
-                  <a:srgbClr val="202020"/>
-                </a:solidFill>
-              </a:defRPr>
-            </a:pPr>
-            <a:r>
-              <a:t>amplitude_sweep/plane_wave_srcZ：B=0.1 / 0.5 / 1.0 / 1.5 / 2.0 T 等约 6 点 @1100 GHz cron 进行。当前数据回收状态不全，未整理分析。</a:t>
-            </a:r>
-          </a:p>
-          <a:p>
-            <a:pPr>
-              <a:defRPr sz="2000">
-                <a:solidFill>
-                  <a:srgbClr val="202020"/>
-                </a:solidFill>
-              </a:defRPr>
-            </a:pPr>
-          </a:p>
-          <a:p>
-            <a:pPr>
-              <a:defRPr sz="2000">
-                <a:solidFill>
-                  <a:srgbClr val="202020"/>
-                </a:solidFill>
-              </a:defRPr>
-            </a:pPr>
-            <a:r>
-              <a:t>仅描述现象：在已完成 B 点上，Hopfion 沿 -z 漂移幅度大致随 B 增大。无量化标度律结论。</a:t>
-            </a:r>
-          </a:p>
-          <a:p>
-            <a:pPr>
-              <a:defRPr sz="2000">
-                <a:solidFill>
-                  <a:srgbClr val="202020"/>
-                </a:solidFill>
-              </a:defRPr>
-            </a:pPr>
-          </a:p>
-          <a:p>
-            <a:pPr>
-              <a:defRPr sz="2000">
-                <a:solidFill>
-                  <a:srgbClr val="202020"/>
-                </a:solidFill>
-              </a:defRPr>
-            </a:pPr>
-            <a:r>
-              <a:t>无图。来源：`20260105_frustrated_fm/spin_wave_dynamics/amplitude_sweep/plane_wave_srcZ/`</a:t>
+            <a:pPr algn="r">
+              <a:defRPr sz="1000" i="1">
+                <a:solidFill>
+                  <a:srgbClr val="808080"/>
+                </a:solidFill>
+              </a:defRPr>
+            </a:pPr>
+            <a:r>
+              <a:t>来源：`20260105_frustrated_fm/spin_wave_dynamics/amplitude_sweep/plane_wave_srcZ/`</a:t>
             </a:r>
           </a:p>
         </p:txBody>
@@ -4590,47 +4702,47 @@
           <a:noFill/>
         </p:spPr>
         <p:txBody>
+          <a:bodyPr wrap="none">
+            <a:spAutoFit/>
+          </a:bodyPr>
+          <a:lstStyle/>
+          <a:p>
+            <a:pPr>
+              <a:defRPr sz="2000" b="1">
+                <a:solidFill>
+                  <a:srgbClr val="1F2D5A"/>
+                </a:solidFill>
+              </a:defRPr>
+            </a:pPr>
+            <a:r>
+              <a:t>单源双向 z 控制（结论）</a:t>
+            </a:r>
+          </a:p>
+        </p:txBody>
+      </p:sp>
+      <p:sp>
+        <p:nvSpPr>
+          <p:cNvPr id="3" name="TextBox 2"/>
+          <p:cNvSpPr txBox="1"/>
+          <p:nvPr/>
+        </p:nvSpPr>
+        <p:spPr>
+          <a:xfrm>
+            <a:off x="457200" y="1097280"/>
+            <a:ext cx="11247120" cy="4937760"/>
+          </a:xfrm>
+          <a:prstGeom prst="rect">
+            <a:avLst/>
+          </a:prstGeom>
+          <a:noFill/>
+        </p:spPr>
+        <p:txBody>
           <a:bodyPr wrap="square">
             <a:spAutoFit/>
           </a:bodyPr>
           <a:lstStyle/>
           <a:p>
             <a:pPr>
-              <a:defRPr sz="2000" b="1">
-                <a:solidFill>
-                  <a:srgbClr val="1F2D5A"/>
-                </a:solidFill>
-              </a:defRPr>
-            </a:pPr>
-            <a:r>
-              <a:t>P17 — 单源双向 z 控制（结论）</a:t>
-            </a:r>
-          </a:p>
-        </p:txBody>
-      </p:sp>
-      <p:sp>
-        <p:nvSpPr>
-          <p:cNvPr id="3" name="TextBox 2"/>
-          <p:cNvSpPr txBox="1"/>
-          <p:nvPr/>
-        </p:nvSpPr>
-        <p:spPr>
-          <a:xfrm>
-            <a:off x="457200" y="1097280"/>
-            <a:ext cx="11247120" cy="5303520"/>
-          </a:xfrm>
-          <a:prstGeom prst="rect">
-            <a:avLst/>
-          </a:prstGeom>
-          <a:noFill/>
-        </p:spPr>
-        <p:txBody>
-          <a:bodyPr wrap="square">
-            <a:spAutoFit/>
-          </a:bodyPr>
-          <a:lstStyle/>
-          <a:p>
-            <a:pPr>
               <a:defRPr sz="2000">
                 <a:solidFill>
                   <a:srgbClr val="202020"/>
@@ -4684,27 +4796,6 @@
             </a:pPr>
             <a:r>
               <a:t>这是后续多源 freq_switch 实验的物理基础。</a:t>
-            </a:r>
-          </a:p>
-          <a:p>
-            <a:pPr>
-              <a:defRPr sz="2000">
-                <a:solidFill>
-                  <a:srgbClr val="202020"/>
-                </a:solidFill>
-              </a:defRPr>
-            </a:pPr>
-          </a:p>
-          <a:p>
-            <a:pPr>
-              <a:defRPr sz="2000">
-                <a:solidFill>
-                  <a:srgbClr val="202020"/>
-                </a:solidFill>
-              </a:defRPr>
-            </a:pPr>
-            <a:r>
-              <a:t>无图。</a:t>
             </a:r>
           </a:p>
         </p:txBody>
@@ -4744,47 +4835,47 @@
           <a:noFill/>
         </p:spPr>
         <p:txBody>
+          <a:bodyPr wrap="none">
+            <a:spAutoFit/>
+          </a:bodyPr>
+          <a:lstStyle/>
+          <a:p>
+            <a:pPr>
+              <a:defRPr sz="2000" b="1">
+                <a:solidFill>
+                  <a:srgbClr val="1F2D5A"/>
+                </a:solidFill>
+              </a:defRPr>
+            </a:pPr>
+            <a:r>
+              <a:t>点源 srcX 频率扫描（10 频率）</a:t>
+            </a:r>
+          </a:p>
+        </p:txBody>
+      </p:sp>
+      <p:sp>
+        <p:nvSpPr>
+          <p:cNvPr id="3" name="TextBox 2"/>
+          <p:cNvSpPr txBox="1"/>
+          <p:nvPr/>
+        </p:nvSpPr>
+        <p:spPr>
+          <a:xfrm>
+            <a:off x="457200" y="1097280"/>
+            <a:ext cx="6858000" cy="4937760"/>
+          </a:xfrm>
+          <a:prstGeom prst="rect">
+            <a:avLst/>
+          </a:prstGeom>
+          <a:noFill/>
+        </p:spPr>
+        <p:txBody>
           <a:bodyPr wrap="square">
             <a:spAutoFit/>
           </a:bodyPr>
           <a:lstStyle/>
           <a:p>
             <a:pPr>
-              <a:defRPr sz="2000" b="1">
-                <a:solidFill>
-                  <a:srgbClr val="1F2D5A"/>
-                </a:solidFill>
-              </a:defRPr>
-            </a:pPr>
-            <a:r>
-              <a:t>P18 — 点源 srcX 频率扫描（10 频率）</a:t>
-            </a:r>
-          </a:p>
-        </p:txBody>
-      </p:sp>
-      <p:sp>
-        <p:nvSpPr>
-          <p:cNvPr id="3" name="TextBox 2"/>
-          <p:cNvSpPr txBox="1"/>
-          <p:nvPr/>
-        </p:nvSpPr>
-        <p:spPr>
-          <a:xfrm>
-            <a:off x="457200" y="1097280"/>
-            <a:ext cx="6858000" cy="5303520"/>
-          </a:xfrm>
-          <a:prstGeom prst="rect">
-            <a:avLst/>
-          </a:prstGeom>
-          <a:noFill/>
-        </p:spPr>
-        <p:txBody>
-          <a:bodyPr wrap="square">
-            <a:spAutoFit/>
-          </a:bodyPr>
-          <a:lstStyle/>
-          <a:p>
-            <a:pPr>
               <a:defRPr sz="2000">
                 <a:solidFill>
                   <a:srgbClr val="202020"/>
@@ -4862,27 +4953,6 @@
             </a:pPr>
             <a:r>
               <a:t>- Hall 角 69-89°，保持高 Hall 角拓扑特征</a:t>
-            </a:r>
-          </a:p>
-          <a:p>
-            <a:pPr>
-              <a:defRPr sz="2000">
-                <a:solidFill>
-                  <a:srgbClr val="202020"/>
-                </a:solidFill>
-              </a:defRPr>
-            </a:pPr>
-          </a:p>
-          <a:p>
-            <a:pPr>
-              <a:defRPr sz="2000">
-                <a:solidFill>
-                  <a:srgbClr val="202020"/>
-                </a:solidFill>
-              </a:defRPr>
-            </a:pPr>
-            <a:r>
-              <a:t>来源：`20260105_frustrated_fm/spin_wave_dynamics/freq_sweep/point_source/srcX/`</a:t>
             </a:r>
           </a:p>
         </p:txBody>
@@ -4911,6 +4981,41 @@
           </a:prstGeom>
         </p:spPr>
       </p:pic>
+      <p:sp>
+        <p:nvSpPr>
+          <p:cNvPr id="5" name="TextBox 4"/>
+          <p:cNvSpPr txBox="1"/>
+          <p:nvPr/>
+        </p:nvSpPr>
+        <p:spPr>
+          <a:xfrm>
+            <a:off x="4572000" y="6355080"/>
+            <a:ext cx="7315200" cy="365760"/>
+          </a:xfrm>
+          <a:prstGeom prst="rect">
+            <a:avLst/>
+          </a:prstGeom>
+          <a:noFill/>
+        </p:spPr>
+        <p:txBody>
+          <a:bodyPr wrap="square">
+            <a:spAutoFit/>
+          </a:bodyPr>
+          <a:lstStyle/>
+          <a:p>
+            <a:pPr algn="r">
+              <a:defRPr sz="1000" i="1">
+                <a:solidFill>
+                  <a:srgbClr val="808080"/>
+                </a:solidFill>
+              </a:defRPr>
+            </a:pPr>
+            <a:r>
+              <a:t>来源：`20260105_frustrated_fm/spin_wave_dynamics/freq_sweep/point_source/srcX/`</a:t>
+            </a:r>
+          </a:p>
+        </p:txBody>
+      </p:sp>
     </p:spTree>
   </p:cSld>
   <p:clrMapOvr>
@@ -4946,34 +5051,147 @@
           <a:noFill/>
         </p:spPr>
         <p:txBody>
+          <a:bodyPr wrap="none">
+            <a:spAutoFit/>
+          </a:bodyPr>
+          <a:lstStyle/>
+          <a:p>
+            <a:pPr>
+              <a:defRPr sz="2000" b="1">
+                <a:solidFill>
+                  <a:srgbClr val="1F2D5A"/>
+                </a:solidFill>
+              </a:defRPr>
+            </a:pPr>
+            <a:r>
+              <a:t>点源 srcZ 频率扫描（10 频率）</a:t>
+            </a:r>
+          </a:p>
+        </p:txBody>
+      </p:sp>
+      <p:sp>
+        <p:nvSpPr>
+          <p:cNvPr id="3" name="TextBox 2"/>
+          <p:cNvSpPr txBox="1"/>
+          <p:nvPr/>
+        </p:nvSpPr>
+        <p:spPr>
+          <a:xfrm>
+            <a:off x="457200" y="1097280"/>
+            <a:ext cx="11247120" cy="4937760"/>
+          </a:xfrm>
+          <a:prstGeom prst="rect">
+            <a:avLst/>
+          </a:prstGeom>
+          <a:noFill/>
+        </p:spPr>
+        <p:txBody>
           <a:bodyPr wrap="square">
             <a:spAutoFit/>
           </a:bodyPr>
           <a:lstStyle/>
           <a:p>
             <a:pPr>
-              <a:defRPr sz="2000" b="1">
-                <a:solidFill>
-                  <a:srgbClr val="1F2D5A"/>
-                </a:solidFill>
-              </a:defRPr>
-            </a:pPr>
-            <a:r>
-              <a:t>P19 — 点源 srcZ 频率扫描（10 频率）</a:t>
-            </a:r>
-          </a:p>
-        </p:txBody>
-      </p:sp>
-      <p:sp>
-        <p:nvSpPr>
-          <p:cNvPr id="3" name="TextBox 2"/>
+              <a:defRPr sz="2000">
+                <a:solidFill>
+                  <a:srgbClr val="202020"/>
+                </a:solidFill>
+              </a:defRPr>
+            </a:pPr>
+            <a:r>
+              <a:t>同 P18 参数，srcZ 位置。</a:t>
+            </a:r>
+          </a:p>
+          <a:p>
+            <a:pPr>
+              <a:defRPr sz="2000">
+                <a:solidFill>
+                  <a:srgbClr val="202020"/>
+                </a:solidFill>
+              </a:defRPr>
+            </a:pPr>
+          </a:p>
+          <a:p>
+            <a:pPr>
+              <a:defRPr sz="2000">
+                <a:solidFill>
+                  <a:srgbClr val="202020"/>
+                </a:solidFill>
+              </a:defRPr>
+            </a:pPr>
+            <a:r>
+              <a:t>结论：</a:t>
+            </a:r>
+          </a:p>
+          <a:p>
+            <a:pPr>
+              <a:defRPr sz="2000">
+                <a:solidFill>
+                  <a:srgbClr val="202020"/>
+                </a:solidFill>
+              </a:defRPr>
+            </a:pPr>
+            <a:r>
+              <a:t>- 最强响应：800 GHz，|dr| = 7.31 nm，方向 -z（vs 平面源 1100 GHz）</a:t>
+            </a:r>
+          </a:p>
+          <a:p>
+            <a:pPr>
+              <a:defRPr sz="2000">
+                <a:solidFill>
+                  <a:srgbClr val="202020"/>
+                </a:solidFill>
+              </a:defRPr>
+            </a:pPr>
+            <a:r>
+              <a:t>- 方向分布更复杂：100/200/300/400 / 600 / 900 GHz +z，500 / 700 / 800 GHz -z（vs 平面源仅 100 GHz 异常）</a:t>
+            </a:r>
+          </a:p>
+          <a:p>
+            <a:pPr>
+              <a:defRPr sz="2000">
+                <a:solidFill>
+                  <a:srgbClr val="202020"/>
+                </a:solidFill>
+              </a:defRPr>
+            </a:pPr>
+            <a:r>
+              <a:t>- Hall 角 9-40°（vs 平面源 ~1°），对称性部分破坏</a:t>
+            </a:r>
+          </a:p>
+          <a:p>
+            <a:pPr>
+              <a:defRPr sz="2000">
+                <a:solidFill>
+                  <a:srgbClr val="202020"/>
+                </a:solidFill>
+              </a:defRPr>
+            </a:pPr>
+          </a:p>
+          <a:p>
+            <a:pPr>
+              <a:defRPr sz="2000">
+                <a:solidFill>
+                  <a:srgbClr val="202020"/>
+                </a:solidFill>
+              </a:defRPr>
+            </a:pPr>
+            <a:r>
+              <a:t>核心结论（综合 P18 P19）：振荡方向选择性、运动方向、Hall 角等本质由 Hopfion 拓扑决定，不依赖激励几何。点源改变共振分布细节，未改变基本物理图像。</a:t>
+            </a:r>
+          </a:p>
+        </p:txBody>
+      </p:sp>
+      <p:sp>
+        <p:nvSpPr>
+          <p:cNvPr id="4" name="TextBox 3"/>
           <p:cNvSpPr txBox="1"/>
           <p:nvPr/>
         </p:nvSpPr>
         <p:spPr>
           <a:xfrm>
-            <a:off x="457200" y="1097280"/>
-            <a:ext cx="11247120" cy="5303520"/>
+            <a:off x="4572000" y="6355080"/>
+            <a:ext cx="7315200" cy="365760"/>
           </a:xfrm>
           <a:prstGeom prst="rect">
             <a:avLst/>
@@ -4986,114 +5204,15 @@
           </a:bodyPr>
           <a:lstStyle/>
           <a:p>
-            <a:pPr>
-              <a:defRPr sz="2000">
-                <a:solidFill>
-                  <a:srgbClr val="202020"/>
-                </a:solidFill>
-              </a:defRPr>
-            </a:pPr>
-            <a:r>
-              <a:t>同 P18 参数，srcZ 位置。</a:t>
-            </a:r>
-          </a:p>
-          <a:p>
-            <a:pPr>
-              <a:defRPr sz="2000">
-                <a:solidFill>
-                  <a:srgbClr val="202020"/>
-                </a:solidFill>
-              </a:defRPr>
-            </a:pPr>
-          </a:p>
-          <a:p>
-            <a:pPr>
-              <a:defRPr sz="2000">
-                <a:solidFill>
-                  <a:srgbClr val="202020"/>
-                </a:solidFill>
-              </a:defRPr>
-            </a:pPr>
-            <a:r>
-              <a:t>结论：</a:t>
-            </a:r>
-          </a:p>
-          <a:p>
-            <a:pPr>
-              <a:defRPr sz="2000">
-                <a:solidFill>
-                  <a:srgbClr val="202020"/>
-                </a:solidFill>
-              </a:defRPr>
-            </a:pPr>
-            <a:r>
-              <a:t>- 最强响应：800 GHz，|dr| = 7.31 nm，方向 -z（vs 平面源 1100 GHz）</a:t>
-            </a:r>
-          </a:p>
-          <a:p>
-            <a:pPr>
-              <a:defRPr sz="2000">
-                <a:solidFill>
-                  <a:srgbClr val="202020"/>
-                </a:solidFill>
-              </a:defRPr>
-            </a:pPr>
-            <a:r>
-              <a:t>- 方向分布更复杂：100/200/300/400 / 600 / 900 GHz +z，500 / 700 / 800 GHz -z（vs 平面源仅 100 GHz 异常）</a:t>
-            </a:r>
-          </a:p>
-          <a:p>
-            <a:pPr>
-              <a:defRPr sz="2000">
-                <a:solidFill>
-                  <a:srgbClr val="202020"/>
-                </a:solidFill>
-              </a:defRPr>
-            </a:pPr>
-            <a:r>
-              <a:t>- Hall 角 9-40°（vs 平面源 ~1°），对称性部分破坏</a:t>
-            </a:r>
-          </a:p>
-          <a:p>
-            <a:pPr>
-              <a:defRPr sz="2000">
-                <a:solidFill>
-                  <a:srgbClr val="202020"/>
-                </a:solidFill>
-              </a:defRPr>
-            </a:pPr>
-          </a:p>
-          <a:p>
-            <a:pPr>
-              <a:defRPr sz="2000">
-                <a:solidFill>
-                  <a:srgbClr val="202020"/>
-                </a:solidFill>
-              </a:defRPr>
-            </a:pPr>
-            <a:r>
-              <a:t>核心结论（综合 P18 P19）：振荡方向选择性、运动方向、Hall 角等本质由 Hopfion 拓扑决定，不依赖激励几何。点源改变共振分布细节，未改变基本物理图像。</a:t>
-            </a:r>
-          </a:p>
-          <a:p>
-            <a:pPr>
-              <a:defRPr sz="2000">
-                <a:solidFill>
-                  <a:srgbClr val="202020"/>
-                </a:solidFill>
-              </a:defRPr>
-            </a:pPr>
-          </a:p>
-          <a:p>
-            <a:pPr>
-              <a:defRPr sz="2000">
-                <a:solidFill>
-                  <a:srgbClr val="202020"/>
-                </a:solidFill>
-              </a:defRPr>
-            </a:pPr>
-            <a:r>
-              <a:t>无图（共用 P18 图）。来源：`20260105_frustrated_fm/spin_wave_dynamics/freq_sweep/point_source/srcZ/`</a:t>
+            <a:pPr algn="r">
+              <a:defRPr sz="1000" i="1">
+                <a:solidFill>
+                  <a:srgbClr val="808080"/>
+                </a:solidFill>
+              </a:defRPr>
+            </a:pPr>
+            <a:r>
+              <a:t>来源：`20260105_frustrated_fm/spin_wave_dynamics/freq_sweep/point_source/srcZ/`</a:t>
             </a:r>
           </a:p>
         </p:txBody>
@@ -5133,34 +5252,90 @@
           <a:noFill/>
         </p:spPr>
         <p:txBody>
+          <a:bodyPr wrap="none">
+            <a:spAutoFit/>
+          </a:bodyPr>
+          <a:lstStyle/>
+          <a:p>
+            <a:pPr>
+              <a:defRPr sz="2000" b="1">
+                <a:solidFill>
+                  <a:srgbClr val="1F2D5A"/>
+                </a:solidFill>
+              </a:defRPr>
+            </a:pPr>
+            <a:r>
+              <a:t>DMI-FM 失败：Bulk PBC 螺旋态竞争</a:t>
+            </a:r>
+          </a:p>
+        </p:txBody>
+      </p:sp>
+      <p:sp>
+        <p:nvSpPr>
+          <p:cNvPr id="3" name="TextBox 2"/>
+          <p:cNvSpPr txBox="1"/>
+          <p:nvPr/>
+        </p:nvSpPr>
+        <p:spPr>
+          <a:xfrm>
+            <a:off x="457200" y="1097280"/>
+            <a:ext cx="11247120" cy="4937760"/>
+          </a:xfrm>
+          <a:prstGeom prst="rect">
+            <a:avLst/>
+          </a:prstGeom>
+          <a:noFill/>
+        </p:spPr>
+        <p:txBody>
           <a:bodyPr wrap="square">
             <a:spAutoFit/>
           </a:bodyPr>
           <a:lstStyle/>
           <a:p>
             <a:pPr>
-              <a:defRPr sz="2000" b="1">
-                <a:solidFill>
-                  <a:srgbClr val="1F2D5A"/>
-                </a:solidFill>
-              </a:defRPr>
-            </a:pPr>
-            <a:r>
-              <a:t>P2 — DMI-FM 失败：Bulk PBC 螺旋态竞争</a:t>
-            </a:r>
-          </a:p>
-        </p:txBody>
-      </p:sp>
-      <p:sp>
-        <p:nvSpPr>
-          <p:cNvPr id="3" name="TextBox 2"/>
+              <a:defRPr sz="2000">
+                <a:solidFill>
+                  <a:srgbClr val="202020"/>
+                </a:solidFill>
+              </a:defRPr>
+            </a:pPr>
+            <a:r>
+              <a:t>在 Bulk PBC（无 frozen 边界、无表面）几何下尝试 2 次仿真（nopbc_demag、pbc_demag、nopbc_nodemag、pbc_nodemag 四种组合）。Hopfion 初始态弛豫过程中始终被螺旋态竞争掉，最终演化为螺旋态。</a:t>
+            </a:r>
+          </a:p>
+          <a:p>
+            <a:pPr>
+              <a:defRPr sz="2000">
+                <a:solidFill>
+                  <a:srgbClr val="202020"/>
+                </a:solidFill>
+              </a:defRPr>
+            </a:pPr>
+          </a:p>
+          <a:p>
+            <a:pPr>
+              <a:defRPr sz="2000">
+                <a:solidFill>
+                  <a:srgbClr val="202020"/>
+                </a:solidFill>
+              </a:defRPr>
+            </a:pPr>
+            <a:r>
+              <a:t>说明 Bloch Hopfion 在 FeGe 中的稳定性强依赖于表面边界条件，不是 bulk 拓扑稳定相。</a:t>
+            </a:r>
+          </a:p>
+        </p:txBody>
+      </p:sp>
+      <p:sp>
+        <p:nvSpPr>
+          <p:cNvPr id="4" name="TextBox 3"/>
           <p:cNvSpPr txBox="1"/>
           <p:nvPr/>
         </p:nvSpPr>
         <p:spPr>
           <a:xfrm>
-            <a:off x="457200" y="1097280"/>
-            <a:ext cx="11247120" cy="5303520"/>
+            <a:off x="4572000" y="6355080"/>
+            <a:ext cx="7315200" cy="365760"/>
           </a:xfrm>
           <a:prstGeom prst="rect">
             <a:avLst/>
@@ -5173,57 +5348,15 @@
           </a:bodyPr>
           <a:lstStyle/>
           <a:p>
-            <a:pPr>
-              <a:defRPr sz="2000">
-                <a:solidFill>
-                  <a:srgbClr val="202020"/>
-                </a:solidFill>
-              </a:defRPr>
-            </a:pPr>
-            <a:r>
-              <a:t>在 Bulk PBC（无 frozen 边界、无表面）几何下尝试 2 次仿真（nopbc_demag、pbc_demag、nopbc_nodemag、pbc_nodemag 四种组合）。Hopfion 初始态弛豫过程中始终被螺旋态竞争掉，最终演化为螺旋态。</a:t>
-            </a:r>
-          </a:p>
-          <a:p>
-            <a:pPr>
-              <a:defRPr sz="2000">
-                <a:solidFill>
-                  <a:srgbClr val="202020"/>
-                </a:solidFill>
-              </a:defRPr>
-            </a:pPr>
-          </a:p>
-          <a:p>
-            <a:pPr>
-              <a:defRPr sz="2000">
-                <a:solidFill>
-                  <a:srgbClr val="202020"/>
-                </a:solidFill>
-              </a:defRPr>
-            </a:pPr>
-            <a:r>
-              <a:t>说明 Bloch Hopfion 在 FeGe 中的稳定性强依赖于表面边界条件，不是 bulk 拓扑稳定相。</a:t>
-            </a:r>
-          </a:p>
-          <a:p>
-            <a:pPr>
-              <a:defRPr sz="2000">
-                <a:solidFill>
-                  <a:srgbClr val="202020"/>
-                </a:solidFill>
-              </a:defRPr>
-            </a:pPr>
-          </a:p>
-          <a:p>
-            <a:pPr>
-              <a:defRPr sz="2000">
-                <a:solidFill>
-                  <a:srgbClr val="202020"/>
-                </a:solidFill>
-              </a:defRPr>
-            </a:pPr>
-            <a:r>
-              <a:t>无图。来源：`20251219_dmi_fm/failed_attempts/bulk_pbc_tests/`（4 runs）</a:t>
+            <a:pPr algn="r">
+              <a:defRPr sz="1000" i="1">
+                <a:solidFill>
+                  <a:srgbClr val="808080"/>
+                </a:solidFill>
+              </a:defRPr>
+            </a:pPr>
+            <a:r>
+              <a:t>来源：`20251219_dmi_fm/failed_attempts/bulk_pbc_tests/`（4 runs）</a:t>
             </a:r>
           </a:p>
         </p:txBody>
@@ -5263,34 +5396,159 @@
           <a:noFill/>
         </p:spPr>
         <p:txBody>
+          <a:bodyPr wrap="none">
+            <a:spAutoFit/>
+          </a:bodyPr>
+          <a:lstStyle/>
+          <a:p>
+            <a:pPr>
+              <a:defRPr sz="2000" b="1">
+                <a:solidFill>
+                  <a:srgbClr val="1F2D5A"/>
+                </a:solidFill>
+              </a:defRPr>
+            </a:pPr>
+            <a:r>
+              <a:t>点源幅度扫描（部分完成）</a:t>
+            </a:r>
+          </a:p>
+        </p:txBody>
+      </p:sp>
+      <p:sp>
+        <p:nvSpPr>
+          <p:cNvPr id="3" name="TextBox 2"/>
+          <p:cNvSpPr txBox="1"/>
+          <p:nvPr/>
+        </p:nvSpPr>
+        <p:spPr>
+          <a:xfrm>
+            <a:off x="457200" y="1097280"/>
+            <a:ext cx="11247120" cy="4937760"/>
+          </a:xfrm>
+          <a:prstGeom prst="rect">
+            <a:avLst/>
+          </a:prstGeom>
+          <a:noFill/>
+        </p:spPr>
+        <p:txBody>
           <a:bodyPr wrap="square">
             <a:spAutoFit/>
           </a:bodyPr>
           <a:lstStyle/>
           <a:p>
             <a:pPr>
-              <a:defRPr sz="2000" b="1">
-                <a:solidFill>
-                  <a:srgbClr val="1F2D5A"/>
-                </a:solidFill>
-              </a:defRPr>
-            </a:pPr>
-            <a:r>
-              <a:t>P20 — 点源幅度扫描（部分完成）</a:t>
-            </a:r>
-          </a:p>
-        </p:txBody>
-      </p:sp>
-      <p:sp>
-        <p:nvSpPr>
-          <p:cNvPr id="3" name="TextBox 2"/>
+              <a:defRPr sz="2000">
+                <a:solidFill>
+                  <a:srgbClr val="202020"/>
+                </a:solidFill>
+              </a:defRPr>
+            </a:pPr>
+            <a:r>
+              <a:t>amplitude_sweep/point_source @1100 GHz：</a:t>
+            </a:r>
+          </a:p>
+          <a:p>
+            <a:pPr>
+              <a:defRPr sz="2000">
+                <a:solidFill>
+                  <a:srgbClr val="202020"/>
+                </a:solidFill>
+              </a:defRPr>
+            </a:pPr>
+          </a:p>
+          <a:p>
+            <a:pPr>
+              <a:defRPr sz="2000">
+                <a:solidFill>
+                  <a:srgbClr val="202020"/>
+                </a:solidFill>
+              </a:defRPr>
+            </a:pPr>
+            <a:r>
+              <a:t>| B | 状态 |</a:t>
+            </a:r>
+          </a:p>
+          <a:p>
+            <a:pPr>
+              <a:defRPr sz="2000">
+                <a:solidFill>
+                  <a:srgbClr val="202020"/>
+                </a:solidFill>
+              </a:defRPr>
+            </a:pPr>
+            <a:r>
+              <a:t>|---|---|</a:t>
+            </a:r>
+          </a:p>
+          <a:p>
+            <a:pPr>
+              <a:defRPr sz="2000">
+                <a:solidFill>
+                  <a:srgbClr val="202020"/>
+                </a:solidFill>
+              </a:defRPr>
+            </a:pPr>
+            <a:r>
+              <a:t>| B100 / B200 / B300 / B400 | 完成 |</a:t>
+            </a:r>
+          </a:p>
+          <a:p>
+            <a:pPr>
+              <a:defRPr sz="2000">
+                <a:solidFill>
+                  <a:srgbClr val="202020"/>
+                </a:solidFill>
+              </a:defRPr>
+            </a:pPr>
+            <a:r>
+              <a:t>| B500 | 停在 0.433 ns，未续跑成功 |</a:t>
+            </a:r>
+          </a:p>
+          <a:p>
+            <a:pPr>
+              <a:defRPr sz="2000">
+                <a:solidFill>
+                  <a:srgbClr val="202020"/>
+                </a:solidFill>
+              </a:defRPr>
+            </a:pPr>
+            <a:r>
+              <a:t>| B700 / B1000 / B2000 | 未跑 |</a:t>
+            </a:r>
+          </a:p>
+          <a:p>
+            <a:pPr>
+              <a:defRPr sz="2000">
+                <a:solidFill>
+                  <a:srgbClr val="202020"/>
+                </a:solidFill>
+              </a:defRPr>
+            </a:pPr>
+          </a:p>
+          <a:p>
+            <a:pPr>
+              <a:defRPr sz="2000">
+                <a:solidFill>
+                  <a:srgbClr val="202020"/>
+                </a:solidFill>
+              </a:defRPr>
+            </a:pPr>
+            <a:r>
+              <a:t>仅描述现象：已完成的 B100-B400 显示 Hopfion 位移随 B 增大但尚无完整 v(B) 曲线，无标度律结论。</a:t>
+            </a:r>
+          </a:p>
+        </p:txBody>
+      </p:sp>
+      <p:sp>
+        <p:nvSpPr>
+          <p:cNvPr id="4" name="TextBox 3"/>
           <p:cNvSpPr txBox="1"/>
           <p:nvPr/>
         </p:nvSpPr>
         <p:spPr>
           <a:xfrm>
-            <a:off x="457200" y="1097280"/>
-            <a:ext cx="11247120" cy="5303520"/>
+            <a:off x="4572000" y="6355080"/>
+            <a:ext cx="7315200" cy="365760"/>
           </a:xfrm>
           <a:prstGeom prst="rect">
             <a:avLst/>
@@ -5303,126 +5561,15 @@
           </a:bodyPr>
           <a:lstStyle/>
           <a:p>
-            <a:pPr>
-              <a:defRPr sz="2000">
-                <a:solidFill>
-                  <a:srgbClr val="202020"/>
-                </a:solidFill>
-              </a:defRPr>
-            </a:pPr>
-            <a:r>
-              <a:t>amplitude_sweep/point_source @1100 GHz：</a:t>
-            </a:r>
-          </a:p>
-          <a:p>
-            <a:pPr>
-              <a:defRPr sz="2000">
-                <a:solidFill>
-                  <a:srgbClr val="202020"/>
-                </a:solidFill>
-              </a:defRPr>
-            </a:pPr>
-          </a:p>
-          <a:p>
-            <a:pPr>
-              <a:defRPr sz="2000">
-                <a:solidFill>
-                  <a:srgbClr val="202020"/>
-                </a:solidFill>
-              </a:defRPr>
-            </a:pPr>
-            <a:r>
-              <a:t>| B | 状态 |</a:t>
-            </a:r>
-          </a:p>
-          <a:p>
-            <a:pPr>
-              <a:defRPr sz="2000">
-                <a:solidFill>
-                  <a:srgbClr val="202020"/>
-                </a:solidFill>
-              </a:defRPr>
-            </a:pPr>
-            <a:r>
-              <a:t>|---|---|</a:t>
-            </a:r>
-          </a:p>
-          <a:p>
-            <a:pPr>
-              <a:defRPr sz="2000">
-                <a:solidFill>
-                  <a:srgbClr val="202020"/>
-                </a:solidFill>
-              </a:defRPr>
-            </a:pPr>
-            <a:r>
-              <a:t>| B100 / B200 / B300 / B400 | 完成 |</a:t>
-            </a:r>
-          </a:p>
-          <a:p>
-            <a:pPr>
-              <a:defRPr sz="2000">
-                <a:solidFill>
-                  <a:srgbClr val="202020"/>
-                </a:solidFill>
-              </a:defRPr>
-            </a:pPr>
-            <a:r>
-              <a:t>| B500 | 停在 0.433 ns，未续跑成功 |</a:t>
-            </a:r>
-          </a:p>
-          <a:p>
-            <a:pPr>
-              <a:defRPr sz="2000">
-                <a:solidFill>
-                  <a:srgbClr val="202020"/>
-                </a:solidFill>
-              </a:defRPr>
-            </a:pPr>
-            <a:r>
-              <a:t>| B700 / B1000 / B2000 | 未跑 |</a:t>
-            </a:r>
-          </a:p>
-          <a:p>
-            <a:pPr>
-              <a:defRPr sz="2000">
-                <a:solidFill>
-                  <a:srgbClr val="202020"/>
-                </a:solidFill>
-              </a:defRPr>
-            </a:pPr>
-          </a:p>
-          <a:p>
-            <a:pPr>
-              <a:defRPr sz="2000">
-                <a:solidFill>
-                  <a:srgbClr val="202020"/>
-                </a:solidFill>
-              </a:defRPr>
-            </a:pPr>
-            <a:r>
-              <a:t>仅描述现象：已完成的 B100-B400 显示 Hopfion 位移随 B 增大但尚无完整 v(B) 曲线，无标度律结论。</a:t>
-            </a:r>
-          </a:p>
-          <a:p>
-            <a:pPr>
-              <a:defRPr sz="2000">
-                <a:solidFill>
-                  <a:srgbClr val="202020"/>
-                </a:solidFill>
-              </a:defRPr>
-            </a:pPr>
-          </a:p>
-          <a:p>
-            <a:pPr>
-              <a:defRPr sz="2000">
-                <a:solidFill>
-                  <a:srgbClr val="202020"/>
-                </a:solidFill>
-              </a:defRPr>
-            </a:pPr>
-            <a:r>
-              <a:t>无图。来源：`20260105_frustrated_fm/spin_wave_dynamics/amplitude_sweep/point_source/`</a:t>
+            <a:pPr algn="r">
+              <a:defRPr sz="1000" i="1">
+                <a:solidFill>
+                  <a:srgbClr val="808080"/>
+                </a:solidFill>
+              </a:defRPr>
+            </a:pPr>
+            <a:r>
+              <a:t>来源：`20260105_frustrated_fm/spin_wave_dynamics/amplitude_sweep/point_source/`</a:t>
             </a:r>
           </a:p>
         </p:txBody>
@@ -5462,34 +5609,111 @@
           <a:noFill/>
         </p:spPr>
         <p:txBody>
+          <a:bodyPr wrap="none">
+            <a:spAutoFit/>
+          </a:bodyPr>
+          <a:lstStyle/>
+          <a:p>
+            <a:pPr>
+              <a:defRPr sz="2000" b="1">
+                <a:solidFill>
+                  <a:srgbClr val="1F2D5A"/>
+                </a:solidFill>
+              </a:defRPr>
+            </a:pPr>
+            <a:r>
+              <a:t>多源基线 + 双向 z v1</a:t>
+            </a:r>
+          </a:p>
+        </p:txBody>
+      </p:sp>
+      <p:sp>
+        <p:nvSpPr>
+          <p:cNvPr id="3" name="TextBox 2"/>
+          <p:cNvSpPr txBox="1"/>
+          <p:nvPr/>
+        </p:nvSpPr>
+        <p:spPr>
+          <a:xfrm>
+            <a:off x="457200" y="1097280"/>
+            <a:ext cx="11247120" cy="4937760"/>
+          </a:xfrm>
+          <a:prstGeom prst="rect">
+            <a:avLst/>
+          </a:prstGeom>
+          <a:noFill/>
+        </p:spPr>
+        <p:txBody>
           <a:bodyPr wrap="square">
             <a:spAutoFit/>
           </a:bodyPr>
           <a:lstStyle/>
           <a:p>
             <a:pPr>
-              <a:defRPr sz="2000" b="1">
-                <a:solidFill>
-                  <a:srgbClr val="1F2D5A"/>
-                </a:solidFill>
-              </a:defRPr>
-            </a:pPr>
-            <a:r>
-              <a:t>P21 — 多源基线 + 双向 z v1</a:t>
-            </a:r>
-          </a:p>
-        </p:txBody>
-      </p:sp>
-      <p:sp>
-        <p:nvSpPr>
-          <p:cNvPr id="3" name="TextBox 2"/>
+              <a:defRPr sz="2000">
+                <a:solidFill>
+                  <a:srgbClr val="202020"/>
+                </a:solidFill>
+              </a:defRPr>
+            </a:pPr>
+            <a:r>
+              <a:t>baseline：srcX + srcZ 同时激发 @单一频率 → Hopfion 仅 +z，未实现反转。</a:t>
+            </a:r>
+          </a:p>
+          <a:p>
+            <a:pPr>
+              <a:defRPr sz="2000">
+                <a:solidFill>
+                  <a:srgbClr val="202020"/>
+                </a:solidFill>
+              </a:defRPr>
+            </a:pPr>
+          </a:p>
+          <a:p>
+            <a:pPr>
+              <a:defRPr sz="2000">
+                <a:solidFill>
+                  <a:srgbClr val="202020"/>
+                </a:solidFill>
+              </a:defRPr>
+            </a:pPr>
+            <a:r>
+              <a:t>bidirectional_z v1（z_bidirectional_control）：双源叠加 + 反相设计 → Hopfion 仍仅 +z。</a:t>
+            </a:r>
+          </a:p>
+          <a:p>
+            <a:pPr>
+              <a:defRPr sz="2000">
+                <a:solidFill>
+                  <a:srgbClr val="202020"/>
+                </a:solidFill>
+              </a:defRPr>
+            </a:pPr>
+          </a:p>
+          <a:p>
+            <a:pPr>
+              <a:defRPr sz="2000">
+                <a:solidFill>
+                  <a:srgbClr val="202020"/>
+                </a:solidFill>
+              </a:defRPr>
+            </a:pPr>
+            <a:r>
+              <a:t>结论：单纯空间叠加双源不足以实现双向 z 控制，需要时序切换。</a:t>
+            </a:r>
+          </a:p>
+        </p:txBody>
+      </p:sp>
+      <p:sp>
+        <p:nvSpPr>
+          <p:cNvPr id="4" name="TextBox 3"/>
           <p:cNvSpPr txBox="1"/>
           <p:nvPr/>
         </p:nvSpPr>
         <p:spPr>
           <a:xfrm>
-            <a:off x="457200" y="1097280"/>
-            <a:ext cx="11247120" cy="5303520"/>
+            <a:off x="4572000" y="6355080"/>
+            <a:ext cx="7315200" cy="365760"/>
           </a:xfrm>
           <a:prstGeom prst="rect">
             <a:avLst/>
@@ -5502,78 +5726,15 @@
           </a:bodyPr>
           <a:lstStyle/>
           <a:p>
-            <a:pPr>
-              <a:defRPr sz="2000">
-                <a:solidFill>
-                  <a:srgbClr val="202020"/>
-                </a:solidFill>
-              </a:defRPr>
-            </a:pPr>
-            <a:r>
-              <a:t>baseline：srcX + srcZ 同时激发 @单一频率 → Hopfion 仅 +z，未实现反转。</a:t>
-            </a:r>
-          </a:p>
-          <a:p>
-            <a:pPr>
-              <a:defRPr sz="2000">
-                <a:solidFill>
-                  <a:srgbClr val="202020"/>
-                </a:solidFill>
-              </a:defRPr>
-            </a:pPr>
-          </a:p>
-          <a:p>
-            <a:pPr>
-              <a:defRPr sz="2000">
-                <a:solidFill>
-                  <a:srgbClr val="202020"/>
-                </a:solidFill>
-              </a:defRPr>
-            </a:pPr>
-            <a:r>
-              <a:t>bidirectional_z v1（z_bidirectional_control）：双源叠加 + 反相设计 → Hopfion 仍仅 +z。</a:t>
-            </a:r>
-          </a:p>
-          <a:p>
-            <a:pPr>
-              <a:defRPr sz="2000">
-                <a:solidFill>
-                  <a:srgbClr val="202020"/>
-                </a:solidFill>
-              </a:defRPr>
-            </a:pPr>
-          </a:p>
-          <a:p>
-            <a:pPr>
-              <a:defRPr sz="2000">
-                <a:solidFill>
-                  <a:srgbClr val="202020"/>
-                </a:solidFill>
-              </a:defRPr>
-            </a:pPr>
-            <a:r>
-              <a:t>结论：单纯空间叠加双源不足以实现双向 z 控制，需要时序切换。</a:t>
-            </a:r>
-          </a:p>
-          <a:p>
-            <a:pPr>
-              <a:defRPr sz="2000">
-                <a:solidFill>
-                  <a:srgbClr val="202020"/>
-                </a:solidFill>
-              </a:defRPr>
-            </a:pPr>
-          </a:p>
-          <a:p>
-            <a:pPr>
-              <a:defRPr sz="2000">
-                <a:solidFill>
-                  <a:srgbClr val="202020"/>
-                </a:solidFill>
-              </a:defRPr>
-            </a:pPr>
-            <a:r>
-              <a:t>无图。来源：`20260105_frustrated_fm/spin_wave_dynamics/multisource_control/{baseline, bidirectional_z/v1}/`</a:t>
+            <a:pPr algn="r">
+              <a:defRPr sz="1000" i="1">
+                <a:solidFill>
+                  <a:srgbClr val="808080"/>
+                </a:solidFill>
+              </a:defRPr>
+            </a:pPr>
+            <a:r>
+              <a:t>来源：`20260105_frustrated_fm/spin_wave_dynamics/multisource_control/{baseline, bidirectional_z/v1}/`</a:t>
             </a:r>
           </a:p>
         </p:txBody>
@@ -5613,47 +5774,47 @@
           <a:noFill/>
         </p:spPr>
         <p:txBody>
+          <a:bodyPr wrap="none">
+            <a:spAutoFit/>
+          </a:bodyPr>
+          <a:lstStyle/>
+          <a:p>
+            <a:pPr>
+              <a:defRPr sz="2000" b="1">
+                <a:solidFill>
+                  <a:srgbClr val="1F2D5A"/>
+                </a:solidFill>
+              </a:defRPr>
+            </a:pPr>
+            <a:r>
+              <a:t>freq_switch v2 v3 双向 z 控制（含坍塌真相）</a:t>
+            </a:r>
+          </a:p>
+        </p:txBody>
+      </p:sp>
+      <p:sp>
+        <p:nvSpPr>
+          <p:cNvPr id="3" name="TextBox 2"/>
+          <p:cNvSpPr txBox="1"/>
+          <p:nvPr/>
+        </p:nvSpPr>
+        <p:spPr>
+          <a:xfrm>
+            <a:off x="457200" y="1097280"/>
+            <a:ext cx="6858000" cy="4937760"/>
+          </a:xfrm>
+          <a:prstGeom prst="rect">
+            <a:avLst/>
+          </a:prstGeom>
+          <a:noFill/>
+        </p:spPr>
+        <p:txBody>
           <a:bodyPr wrap="square">
             <a:spAutoFit/>
           </a:bodyPr>
           <a:lstStyle/>
           <a:p>
             <a:pPr>
-              <a:defRPr sz="2000" b="1">
-                <a:solidFill>
-                  <a:srgbClr val="1F2D5A"/>
-                </a:solidFill>
-              </a:defRPr>
-            </a:pPr>
-            <a:r>
-              <a:t>P22 — freq_switch v2 v3 双向 z 控制（含坍塌真相）</a:t>
-            </a:r>
-          </a:p>
-        </p:txBody>
-      </p:sp>
-      <p:sp>
-        <p:nvSpPr>
-          <p:cNvPr id="3" name="TextBox 2"/>
-          <p:cNvSpPr txBox="1"/>
-          <p:nvPr/>
-        </p:nvSpPr>
-        <p:spPr>
-          <a:xfrm>
-            <a:off x="457200" y="1097280"/>
-            <a:ext cx="6858000" cy="5303520"/>
-          </a:xfrm>
-          <a:prstGeom prst="rect">
-            <a:avLst/>
-          </a:prstGeom>
-          <a:noFill/>
-        </p:spPr>
-        <p:txBody>
-          <a:bodyPr wrap="square">
-            <a:spAutoFit/>
-          </a:bodyPr>
-          <a:lstStyle/>
-          <a:p>
-            <a:pPr>
               <a:defRPr sz="2000">
                 <a:solidFill>
                   <a:srgbClr val="202020"/>
@@ -5797,27 +5958,6 @@
             </a:pPr>
             <a:r>
               <a:t>方案 A 调参（未实施）：Phase2 脉宽 → 0.05-0.10 ns；Phase2 振幅 → 0.3-0.5 T；后接 0 场维持。</a:t>
-            </a:r>
-          </a:p>
-          <a:p>
-            <a:pPr>
-              <a:defRPr sz="2000">
-                <a:solidFill>
-                  <a:srgbClr val="202020"/>
-                </a:solidFill>
-              </a:defRPr>
-            </a:pPr>
-          </a:p>
-          <a:p>
-            <a:pPr>
-              <a:defRPr sz="2000">
-                <a:solidFill>
-                  <a:srgbClr val="202020"/>
-                </a:solidFill>
-              </a:defRPr>
-            </a:pPr>
-            <a:r>
-              <a:t>来源：`20260105_frustrated_fm/spin_wave_dynamics/multisource_control/bidirectional_z/`</a:t>
             </a:r>
           </a:p>
         </p:txBody>
@@ -5846,6 +5986,41 @@
           </a:prstGeom>
         </p:spPr>
       </p:pic>
+      <p:sp>
+        <p:nvSpPr>
+          <p:cNvPr id="5" name="TextBox 4"/>
+          <p:cNvSpPr txBox="1"/>
+          <p:nvPr/>
+        </p:nvSpPr>
+        <p:spPr>
+          <a:xfrm>
+            <a:off x="4572000" y="6355080"/>
+            <a:ext cx="7315200" cy="365760"/>
+          </a:xfrm>
+          <a:prstGeom prst="rect">
+            <a:avLst/>
+          </a:prstGeom>
+          <a:noFill/>
+        </p:spPr>
+        <p:txBody>
+          <a:bodyPr wrap="square">
+            <a:spAutoFit/>
+          </a:bodyPr>
+          <a:lstStyle/>
+          <a:p>
+            <a:pPr algn="r">
+              <a:defRPr sz="1000" i="1">
+                <a:solidFill>
+                  <a:srgbClr val="808080"/>
+                </a:solidFill>
+              </a:defRPr>
+            </a:pPr>
+            <a:r>
+              <a:t>来源：`20260105_frustrated_fm/spin_wave_dynamics/multisource_control/bidirectional_z/`</a:t>
+            </a:r>
+          </a:p>
+        </p:txBody>
+      </p:sp>
     </p:spTree>
   </p:cSld>
   <p:clrMapOvr>
@@ -5881,34 +6056,123 @@
           <a:noFill/>
         </p:spPr>
         <p:txBody>
+          <a:bodyPr wrap="none">
+            <a:spAutoFit/>
+          </a:bodyPr>
+          <a:lstStyle/>
+          <a:p>
+            <a:pPr>
+              <a:defRPr sz="2000" b="1">
+                <a:solidFill>
+                  <a:srgbClr val="1F2D5A"/>
+                </a:solidFill>
+              </a:defRPr>
+            </a:pPr>
+            <a:r>
+              <a:t>STT 驱动 Bloch Hopfion（Wang 2019 复现）</a:t>
+            </a:r>
+          </a:p>
+        </p:txBody>
+      </p:sp>
+      <p:sp>
+        <p:nvSpPr>
+          <p:cNvPr id="3" name="TextBox 2"/>
+          <p:cNvSpPr txBox="1"/>
+          <p:nvPr/>
+        </p:nvSpPr>
+        <p:spPr>
+          <a:xfrm>
+            <a:off x="457200" y="1097280"/>
+            <a:ext cx="11247120" cy="4937760"/>
+          </a:xfrm>
+          <a:prstGeom prst="rect">
+            <a:avLst/>
+          </a:prstGeom>
+          <a:noFill/>
+        </p:spPr>
+        <p:txBody>
           <a:bodyPr wrap="square">
             <a:spAutoFit/>
           </a:bodyPr>
           <a:lstStyle/>
           <a:p>
             <a:pPr>
-              <a:defRPr sz="2000" b="1">
-                <a:solidFill>
-                  <a:srgbClr val="1F2D5A"/>
-                </a:solidFill>
-              </a:defRPr>
-            </a:pPr>
-            <a:r>
-              <a:t>P23 — STT 驱动 Bloch Hopfion（Wang 2019 复现）</a:t>
-            </a:r>
-          </a:p>
-        </p:txBody>
-      </p:sp>
-      <p:sp>
-        <p:nvSpPr>
-          <p:cNvPr id="3" name="TextBox 2"/>
+              <a:defRPr sz="2000">
+                <a:solidFill>
+                  <a:srgbClr val="202020"/>
+                </a:solidFill>
+              </a:defRPr>
+            </a:pPr>
+            <a:r>
+              <a:t>20260310_wang2019_hopfion_STT：复现 Wang et al. 2019 PRL。</a:t>
+            </a:r>
+          </a:p>
+          <a:p>
+            <a:pPr>
+              <a:defRPr sz="2000">
+                <a:solidFill>
+                  <a:srgbClr val="202020"/>
+                </a:solidFill>
+              </a:defRPr>
+            </a:pPr>
+          </a:p>
+          <a:p>
+            <a:pPr>
+              <a:defRPr sz="2000">
+                <a:solidFill>
+                  <a:srgbClr val="202020"/>
+                </a:solidFill>
+              </a:defRPr>
+            </a:pPr>
+            <a:r>
+              <a:t>- v1：91 帧 STT 驱动动力学</a:t>
+            </a:r>
+          </a:p>
+          <a:p>
+            <a:pPr>
+              <a:defRPr sz="2000">
+                <a:solidFill>
+                  <a:srgbClr val="202020"/>
+                </a:solidFill>
+              </a:defRPr>
+            </a:pPr>
+            <a:r>
+              <a:t>- v2：32 帧，参数调整版</a:t>
+            </a:r>
+          </a:p>
+          <a:p>
+            <a:pPr>
+              <a:defRPr sz="2000">
+                <a:solidFill>
+                  <a:srgbClr val="202020"/>
+                </a:solidFill>
+              </a:defRPr>
+            </a:pPr>
+          </a:p>
+          <a:p>
+            <a:pPr>
+              <a:defRPr sz="2000">
+                <a:solidFill>
+                  <a:srgbClr val="202020"/>
+                </a:solidFill>
+              </a:defRPr>
+            </a:pPr>
+            <a:r>
+              <a:t>结论：STT 电流可驱动 Bloch Hopfion 沿电流方向运动，与 Wang 论文趋势一致。后续未深入做参数扫描。</a:t>
+            </a:r>
+          </a:p>
+        </p:txBody>
+      </p:sp>
+      <p:sp>
+        <p:nvSpPr>
+          <p:cNvPr id="4" name="TextBox 3"/>
           <p:cNvSpPr txBox="1"/>
           <p:nvPr/>
         </p:nvSpPr>
         <p:spPr>
           <a:xfrm>
-            <a:off x="457200" y="1097280"/>
-            <a:ext cx="11247120" cy="5303520"/>
+            <a:off x="4572000" y="6355080"/>
+            <a:ext cx="7315200" cy="365760"/>
           </a:xfrm>
           <a:prstGeom prst="rect">
             <a:avLst/>
@@ -5921,90 +6185,15 @@
           </a:bodyPr>
           <a:lstStyle/>
           <a:p>
-            <a:pPr>
-              <a:defRPr sz="2000">
-                <a:solidFill>
-                  <a:srgbClr val="202020"/>
-                </a:solidFill>
-              </a:defRPr>
-            </a:pPr>
-            <a:r>
-              <a:t>20260310_wang2019_hopfion_STT：复现 Wang et al. 2019 PRL。</a:t>
-            </a:r>
-          </a:p>
-          <a:p>
-            <a:pPr>
-              <a:defRPr sz="2000">
-                <a:solidFill>
-                  <a:srgbClr val="202020"/>
-                </a:solidFill>
-              </a:defRPr>
-            </a:pPr>
-          </a:p>
-          <a:p>
-            <a:pPr>
-              <a:defRPr sz="2000">
-                <a:solidFill>
-                  <a:srgbClr val="202020"/>
-                </a:solidFill>
-              </a:defRPr>
-            </a:pPr>
-            <a:r>
-              <a:t>- v1：91 帧 STT 驱动动力学</a:t>
-            </a:r>
-          </a:p>
-          <a:p>
-            <a:pPr>
-              <a:defRPr sz="2000">
-                <a:solidFill>
-                  <a:srgbClr val="202020"/>
-                </a:solidFill>
-              </a:defRPr>
-            </a:pPr>
-            <a:r>
-              <a:t>- v2：32 帧，参数调整版</a:t>
-            </a:r>
-          </a:p>
-          <a:p>
-            <a:pPr>
-              <a:defRPr sz="2000">
-                <a:solidFill>
-                  <a:srgbClr val="202020"/>
-                </a:solidFill>
-              </a:defRPr>
-            </a:pPr>
-          </a:p>
-          <a:p>
-            <a:pPr>
-              <a:defRPr sz="2000">
-                <a:solidFill>
-                  <a:srgbClr val="202020"/>
-                </a:solidFill>
-              </a:defRPr>
-            </a:pPr>
-            <a:r>
-              <a:t>结论：STT 电流可驱动 Bloch Hopfion 沿电流方向运动，与 Wang 论文趋势一致。后续未深入做参数扫描。</a:t>
-            </a:r>
-          </a:p>
-          <a:p>
-            <a:pPr>
-              <a:defRPr sz="2000">
-                <a:solidFill>
-                  <a:srgbClr val="202020"/>
-                </a:solidFill>
-              </a:defRPr>
-            </a:pPr>
-          </a:p>
-          <a:p>
-            <a:pPr>
-              <a:defRPr sz="2000">
-                <a:solidFill>
-                  <a:srgbClr val="202020"/>
-                </a:solidFill>
-              </a:defRPr>
-            </a:pPr>
-            <a:r>
-              <a:t>无图。来源：`20260310_wang2019_hopfion_STT/`</a:t>
+            <a:pPr algn="r">
+              <a:defRPr sz="1000" i="1">
+                <a:solidFill>
+                  <a:srgbClr val="808080"/>
+                </a:solidFill>
+              </a:defRPr>
+            </a:pPr>
+            <a:r>
+              <a:t>来源：`20260310_wang2019_hopfion_STT/`</a:t>
             </a:r>
           </a:p>
         </p:txBody>
@@ -6044,47 +6233,47 @@
           <a:noFill/>
         </p:spPr>
         <p:txBody>
+          <a:bodyPr wrap="none">
+            <a:spAutoFit/>
+          </a:bodyPr>
+          <a:lstStyle/>
+          <a:p>
+            <a:pPr>
+              <a:defRPr sz="2000" b="1">
+                <a:solidFill>
+                  <a:srgbClr val="1F2D5A"/>
+                </a:solidFill>
+              </a:defRPr>
+            </a:pPr>
+            <a:r>
+              <a:t>LIF Phase 1：梯度 Ku 恢复力验证（PASS）</a:t>
+            </a:r>
+          </a:p>
+        </p:txBody>
+      </p:sp>
+      <p:sp>
+        <p:nvSpPr>
+          <p:cNvPr id="3" name="TextBox 2"/>
+          <p:cNvSpPr txBox="1"/>
+          <p:nvPr/>
+        </p:nvSpPr>
+        <p:spPr>
+          <a:xfrm>
+            <a:off x="457200" y="1097280"/>
+            <a:ext cx="6858000" cy="4937760"/>
+          </a:xfrm>
+          <a:prstGeom prst="rect">
+            <a:avLst/>
+          </a:prstGeom>
+          <a:noFill/>
+        </p:spPr>
+        <p:txBody>
           <a:bodyPr wrap="square">
             <a:spAutoFit/>
           </a:bodyPr>
           <a:lstStyle/>
           <a:p>
             <a:pPr>
-              <a:defRPr sz="2000" b="1">
-                <a:solidFill>
-                  <a:srgbClr val="1F2D5A"/>
-                </a:solidFill>
-              </a:defRPr>
-            </a:pPr>
-            <a:r>
-              <a:t>P24 — LIF Phase 1：梯度 Ku 恢复力验证（PASS）</a:t>
-            </a:r>
-          </a:p>
-        </p:txBody>
-      </p:sp>
-      <p:sp>
-        <p:nvSpPr>
-          <p:cNvPr id="3" name="TextBox 2"/>
-          <p:cNvSpPr txBox="1"/>
-          <p:nvPr/>
-        </p:nvSpPr>
-        <p:spPr>
-          <a:xfrm>
-            <a:off x="457200" y="1097280"/>
-            <a:ext cx="6858000" cy="5303520"/>
-          </a:xfrm>
-          <a:prstGeom prst="rect">
-            <a:avLst/>
-          </a:prstGeom>
-          <a:noFill/>
-        </p:spPr>
-        <p:txBody>
-          <a:bodyPr wrap="square">
-            <a:spAutoFit/>
-          </a:bodyPr>
-          <a:lstStyle/>
-          <a:p>
-            <a:pPr>
               <a:defRPr sz="2000">
                 <a:solidFill>
                   <a:srgbClr val="202020"/>
@@ -6204,27 +6393,6 @@
             </a:pPr>
             <a:r>
               <a:t>意外发现：Hopfion 偏好低 Ku 区（gradient 平衡在 Ku≈7500 端，即 +z 端），与初始假设"Hopfion 趋向高 Ku 区"相反。Phase 2 设计因此需要反转源-初态位置。</a:t>
-            </a:r>
-          </a:p>
-          <a:p>
-            <a:pPr>
-              <a:defRPr sz="2000">
-                <a:solidFill>
-                  <a:srgbClr val="202020"/>
-                </a:solidFill>
-              </a:defRPr>
-            </a:pPr>
-          </a:p>
-          <a:p>
-            <a:pPr>
-              <a:defRPr sz="2000">
-                <a:solidFill>
-                  <a:srgbClr val="202020"/>
-                </a:solidFill>
-              </a:defRPr>
-            </a:pPr>
-            <a:r>
-              <a:t>来源：`lif_neuron_hopfion/gradient_ku_verification/drive_release_test/`</a:t>
             </a:r>
           </a:p>
         </p:txBody>
@@ -6253,6 +6421,41 @@
           </a:prstGeom>
         </p:spPr>
       </p:pic>
+      <p:sp>
+        <p:nvSpPr>
+          <p:cNvPr id="5" name="TextBox 4"/>
+          <p:cNvSpPr txBox="1"/>
+          <p:nvPr/>
+        </p:nvSpPr>
+        <p:spPr>
+          <a:xfrm>
+            <a:off x="4572000" y="6355080"/>
+            <a:ext cx="7315200" cy="365760"/>
+          </a:xfrm>
+          <a:prstGeom prst="rect">
+            <a:avLst/>
+          </a:prstGeom>
+          <a:noFill/>
+        </p:spPr>
+        <p:txBody>
+          <a:bodyPr wrap="square">
+            <a:spAutoFit/>
+          </a:bodyPr>
+          <a:lstStyle/>
+          <a:p>
+            <a:pPr algn="r">
+              <a:defRPr sz="1000" i="1">
+                <a:solidFill>
+                  <a:srgbClr val="808080"/>
+                </a:solidFill>
+              </a:defRPr>
+            </a:pPr>
+            <a:r>
+              <a:t>来源：`lif_neuron_hopfion/gradient_ku_verification/drive_release_test/`</a:t>
+            </a:r>
+          </a:p>
+        </p:txBody>
+      </p:sp>
     </p:spTree>
   </p:cSld>
   <p:clrMapOvr>
@@ -6288,47 +6491,47 @@
           <a:noFill/>
         </p:spPr>
         <p:txBody>
+          <a:bodyPr wrap="none">
+            <a:spAutoFit/>
+          </a:bodyPr>
+          <a:lstStyle/>
+          <a:p>
+            <a:pPr>
+              <a:defRPr sz="2000" b="1">
+                <a:solidFill>
+                  <a:srgbClr val="1F2D5A"/>
+                </a:solidFill>
+              </a:defRPr>
+            </a:pPr>
+            <a:r>
+              <a:t>LIF Phase 2 F1：脉冲列 integrate（FAILED）</a:t>
+            </a:r>
+          </a:p>
+        </p:txBody>
+      </p:sp>
+      <p:sp>
+        <p:nvSpPr>
+          <p:cNvPr id="3" name="TextBox 2"/>
+          <p:cNvSpPr txBox="1"/>
+          <p:nvPr/>
+        </p:nvSpPr>
+        <p:spPr>
+          <a:xfrm>
+            <a:off x="457200" y="1097280"/>
+            <a:ext cx="6858000" cy="4937760"/>
+          </a:xfrm>
+          <a:prstGeom prst="rect">
+            <a:avLst/>
+          </a:prstGeom>
+          <a:noFill/>
+        </p:spPr>
+        <p:txBody>
           <a:bodyPr wrap="square">
             <a:spAutoFit/>
           </a:bodyPr>
           <a:lstStyle/>
           <a:p>
             <a:pPr>
-              <a:defRPr sz="2000" b="1">
-                <a:solidFill>
-                  <a:srgbClr val="1F2D5A"/>
-                </a:solidFill>
-              </a:defRPr>
-            </a:pPr>
-            <a:r>
-              <a:t>P25 — LIF Phase 2 F1：脉冲列 integrate（FAILED）</a:t>
-            </a:r>
-          </a:p>
-        </p:txBody>
-      </p:sp>
-      <p:sp>
-        <p:nvSpPr>
-          <p:cNvPr id="3" name="TextBox 2"/>
-          <p:cNvSpPr txBox="1"/>
-          <p:nvPr/>
-        </p:nvSpPr>
-        <p:spPr>
-          <a:xfrm>
-            <a:off x="457200" y="1097280"/>
-            <a:ext cx="6858000" cy="5303520"/>
-          </a:xfrm>
-          <a:prstGeom prst="rect">
-            <a:avLst/>
-          </a:prstGeom>
-          <a:noFill/>
-        </p:spPr>
-        <p:txBody>
-          <a:bodyPr wrap="square">
-            <a:spAutoFit/>
-          </a:bodyPr>
-          <a:lstStyle/>
-          <a:p>
-            <a:pPr>
               <a:defRPr sz="2000">
                 <a:solidFill>
                   <a:srgbClr val="202020"/>
@@ -6436,27 +6639,6 @@
             </a:pPr>
             <a:r>
               <a:t>3. Phase 1 V2 在 100 GHz 下的"低 Ku 偏好"不能外推到 1100 GHz</a:t>
-            </a:r>
-          </a:p>
-          <a:p>
-            <a:pPr>
-              <a:defRPr sz="2000">
-                <a:solidFill>
-                  <a:srgbClr val="202020"/>
-                </a:solidFill>
-              </a:defRPr>
-            </a:pPr>
-          </a:p>
-          <a:p>
-            <a:pPr>
-              <a:defRPr sz="2000">
-                <a:solidFill>
-                  <a:srgbClr val="202020"/>
-                </a:solidFill>
-              </a:defRPr>
-            </a:pPr>
-            <a:r>
-              <a:t>来源：`lif_neuron_hopfion/lif_cycle_demo/pulse_train_integrate/`</a:t>
             </a:r>
           </a:p>
         </p:txBody>
@@ -6485,6 +6667,41 @@
           </a:prstGeom>
         </p:spPr>
       </p:pic>
+      <p:sp>
+        <p:nvSpPr>
+          <p:cNvPr id="5" name="TextBox 4"/>
+          <p:cNvSpPr txBox="1"/>
+          <p:nvPr/>
+        </p:nvSpPr>
+        <p:spPr>
+          <a:xfrm>
+            <a:off x="4572000" y="6355080"/>
+            <a:ext cx="7315200" cy="365760"/>
+          </a:xfrm>
+          <a:prstGeom prst="rect">
+            <a:avLst/>
+          </a:prstGeom>
+          <a:noFill/>
+        </p:spPr>
+        <p:txBody>
+          <a:bodyPr wrap="square">
+            <a:spAutoFit/>
+          </a:bodyPr>
+          <a:lstStyle/>
+          <a:p>
+            <a:pPr algn="r">
+              <a:defRPr sz="1000" i="1">
+                <a:solidFill>
+                  <a:srgbClr val="808080"/>
+                </a:solidFill>
+              </a:defRPr>
+            </a:pPr>
+            <a:r>
+              <a:t>来源：`lif_neuron_hopfion/lif_cycle_demo/pulse_train_integrate/`</a:t>
+            </a:r>
+          </a:p>
+        </p:txBody>
+      </p:sp>
     </p:spTree>
   </p:cSld>
   <p:clrMapOvr>
@@ -6520,34 +6737,159 @@
           <a:noFill/>
         </p:spPr>
         <p:txBody>
+          <a:bodyPr wrap="none">
+            <a:spAutoFit/>
+          </a:bodyPr>
+          <a:lstStyle/>
+          <a:p>
+            <a:pPr>
+              <a:defRPr sz="2000" b="1">
+                <a:solidFill>
+                  <a:srgbClr val="1F2D5A"/>
+                </a:solidFill>
+              </a:defRPr>
+            </a:pPr>
+            <a:r>
+              <a:t>LIF Phase 2 重设计候选（未开工）</a:t>
+            </a:r>
+          </a:p>
+        </p:txBody>
+      </p:sp>
+      <p:sp>
+        <p:nvSpPr>
+          <p:cNvPr id="3" name="TextBox 2"/>
+          <p:cNvSpPr txBox="1"/>
+          <p:nvPr/>
+        </p:nvSpPr>
+        <p:spPr>
+          <a:xfrm>
+            <a:off x="457200" y="1097280"/>
+            <a:ext cx="11247120" cy="4937760"/>
+          </a:xfrm>
+          <a:prstGeom prst="rect">
+            <a:avLst/>
+          </a:prstGeom>
+          <a:noFill/>
+        </p:spPr>
+        <p:txBody>
           <a:bodyPr wrap="square">
             <a:spAutoFit/>
           </a:bodyPr>
           <a:lstStyle/>
           <a:p>
             <a:pPr>
-              <a:defRPr sz="2000" b="1">
-                <a:solidFill>
-                  <a:srgbClr val="1F2D5A"/>
-                </a:solidFill>
-              </a:defRPr>
-            </a:pPr>
-            <a:r>
-              <a:t>P26 — LIF Phase 2 重设计候选（未开工）</a:t>
-            </a:r>
-          </a:p>
-        </p:txBody>
-      </p:sp>
-      <p:sp>
-        <p:nvSpPr>
-          <p:cNvPr id="3" name="TextBox 2"/>
+              <a:defRPr sz="2000">
+                <a:solidFill>
+                  <a:srgbClr val="202020"/>
+                </a:solidFill>
+              </a:defRPr>
+            </a:pPr>
+            <a:r>
+              <a:t>4 个候选方向：</a:t>
+            </a:r>
+          </a:p>
+          <a:p>
+            <a:pPr>
+              <a:defRPr sz="2000">
+                <a:solidFill>
+                  <a:srgbClr val="202020"/>
+                </a:solidFill>
+              </a:defRPr>
+            </a:pPr>
+            <a:r>
+              <a:t>- 方案 A：反转源-初态相对位置（initial 在 -z 端高 Ku，integrate 用 100 GHz → +z，梯度自然拉回 -z，fire 用反向冲击）</a:t>
+            </a:r>
+          </a:p>
+          <a:p>
+            <a:pPr>
+              <a:defRPr sz="2000">
+                <a:solidFill>
+                  <a:srgbClr val="202020"/>
+                </a:solidFill>
+              </a:defRPr>
+            </a:pPr>
+            <a:r>
+              <a:t>- 方案 B：降低 1100 GHz 幅度（B=0.3 T） + 延长 leak gap（0.5 ns）让自旋波耗散</a:t>
+            </a:r>
+          </a:p>
+          <a:p>
+            <a:pPr>
+              <a:defRPr sz="2000">
+                <a:solidFill>
+                  <a:srgbClr val="202020"/>
+                </a:solidFill>
+              </a:defRPr>
+            </a:pPr>
+            <a:r>
+              <a:t>- 方案 C：缩短 pulse 宽（0.15 → 0.05 ns）减少单次注入能量</a:t>
+            </a:r>
+          </a:p>
+          <a:p>
+            <a:pPr>
+              <a:defRPr sz="2000">
+                <a:solidFill>
+                  <a:srgbClr val="202020"/>
+                </a:solidFill>
+              </a:defRPr>
+            </a:pPr>
+            <a:r>
+              <a:t>- 方案 D：双频叠加 integrate（1100 GHz 短冲 + 立即 100 GHz 反向短冲抑制残余自旋波）</a:t>
+            </a:r>
+          </a:p>
+          <a:p>
+            <a:pPr>
+              <a:defRPr sz="2000">
+                <a:solidFill>
+                  <a:srgbClr val="202020"/>
+                </a:solidFill>
+              </a:defRPr>
+            </a:pPr>
+          </a:p>
+          <a:p>
+            <a:pPr>
+              <a:defRPr sz="2000">
+                <a:solidFill>
+                  <a:srgbClr val="202020"/>
+                </a:solidFill>
+              </a:defRPr>
+            </a:pPr>
+            <a:r>
+              <a:t>仅 sub-threshold 对照（B=0.1 T）脚本就绪：`subthreshold_B0p1T.mx3`。</a:t>
+            </a:r>
+          </a:p>
+          <a:p>
+            <a:pPr>
+              <a:defRPr sz="2000">
+                <a:solidFill>
+                  <a:srgbClr val="202020"/>
+                </a:solidFill>
+              </a:defRPr>
+            </a:pPr>
+          </a:p>
+          <a:p>
+            <a:pPr>
+              <a:defRPr sz="2000">
+                <a:solidFill>
+                  <a:srgbClr val="202020"/>
+                </a:solidFill>
+              </a:defRPr>
+            </a:pPr>
+            <a:r>
+              <a:t>未开工，等定方案。</a:t>
+            </a:r>
+          </a:p>
+        </p:txBody>
+      </p:sp>
+      <p:sp>
+        <p:nvSpPr>
+          <p:cNvPr id="4" name="TextBox 3"/>
           <p:cNvSpPr txBox="1"/>
           <p:nvPr/>
         </p:nvSpPr>
         <p:spPr>
           <a:xfrm>
-            <a:off x="457200" y="1097280"/>
-            <a:ext cx="11247120" cy="5303520"/>
+            <a:off x="4572000" y="6355080"/>
+            <a:ext cx="7315200" cy="365760"/>
           </a:xfrm>
           <a:prstGeom prst="rect">
             <a:avLst/>
@@ -6560,126 +6902,15 @@
           </a:bodyPr>
           <a:lstStyle/>
           <a:p>
-            <a:pPr>
-              <a:defRPr sz="2000">
-                <a:solidFill>
-                  <a:srgbClr val="202020"/>
-                </a:solidFill>
-              </a:defRPr>
-            </a:pPr>
-            <a:r>
-              <a:t>4 个候选方向：</a:t>
-            </a:r>
-          </a:p>
-          <a:p>
-            <a:pPr>
-              <a:defRPr sz="2000">
-                <a:solidFill>
-                  <a:srgbClr val="202020"/>
-                </a:solidFill>
-              </a:defRPr>
-            </a:pPr>
-            <a:r>
-              <a:t>- 方案 A：反转源-初态相对位置（initial 在 -z 端高 Ku，integrate 用 100 GHz → +z，梯度自然拉回 -z，fire 用反向冲击）</a:t>
-            </a:r>
-          </a:p>
-          <a:p>
-            <a:pPr>
-              <a:defRPr sz="2000">
-                <a:solidFill>
-                  <a:srgbClr val="202020"/>
-                </a:solidFill>
-              </a:defRPr>
-            </a:pPr>
-            <a:r>
-              <a:t>- 方案 B：降低 1100 GHz 幅度（B=0.3 T） + 延长 leak gap（0.5 ns）让自旋波耗散</a:t>
-            </a:r>
-          </a:p>
-          <a:p>
-            <a:pPr>
-              <a:defRPr sz="2000">
-                <a:solidFill>
-                  <a:srgbClr val="202020"/>
-                </a:solidFill>
-              </a:defRPr>
-            </a:pPr>
-            <a:r>
-              <a:t>- 方案 C：缩短 pulse 宽（0.15 → 0.05 ns）减少单次注入能量</a:t>
-            </a:r>
-          </a:p>
-          <a:p>
-            <a:pPr>
-              <a:defRPr sz="2000">
-                <a:solidFill>
-                  <a:srgbClr val="202020"/>
-                </a:solidFill>
-              </a:defRPr>
-            </a:pPr>
-            <a:r>
-              <a:t>- 方案 D：双频叠加 integrate（1100 GHz 短冲 + 立即 100 GHz 反向短冲抑制残余自旋波）</a:t>
-            </a:r>
-          </a:p>
-          <a:p>
-            <a:pPr>
-              <a:defRPr sz="2000">
-                <a:solidFill>
-                  <a:srgbClr val="202020"/>
-                </a:solidFill>
-              </a:defRPr>
-            </a:pPr>
-          </a:p>
-          <a:p>
-            <a:pPr>
-              <a:defRPr sz="2000">
-                <a:solidFill>
-                  <a:srgbClr val="202020"/>
-                </a:solidFill>
-              </a:defRPr>
-            </a:pPr>
-            <a:r>
-              <a:t>仅 sub-threshold 对照（B=0.1 T）脚本就绪：`subthreshold_B0p1T.mx3`。</a:t>
-            </a:r>
-          </a:p>
-          <a:p>
-            <a:pPr>
-              <a:defRPr sz="2000">
-                <a:solidFill>
-                  <a:srgbClr val="202020"/>
-                </a:solidFill>
-              </a:defRPr>
-            </a:pPr>
-          </a:p>
-          <a:p>
-            <a:pPr>
-              <a:defRPr sz="2000">
-                <a:solidFill>
-                  <a:srgbClr val="202020"/>
-                </a:solidFill>
-              </a:defRPr>
-            </a:pPr>
-            <a:r>
-              <a:t>未开工，等定方案。</a:t>
-            </a:r>
-          </a:p>
-          <a:p>
-            <a:pPr>
-              <a:defRPr sz="2000">
-                <a:solidFill>
-                  <a:srgbClr val="202020"/>
-                </a:solidFill>
-              </a:defRPr>
-            </a:pPr>
-          </a:p>
-          <a:p>
-            <a:pPr>
-              <a:defRPr sz="2000">
-                <a:solidFill>
-                  <a:srgbClr val="202020"/>
-                </a:solidFill>
-              </a:defRPr>
-            </a:pPr>
-            <a:r>
-              <a:t>无图。来源：`lif_neuron_hopfion/lif_cycle_demo/`（脚本就绪）</a:t>
+            <a:pPr algn="r">
+              <a:defRPr sz="1000" i="1">
+                <a:solidFill>
+                  <a:srgbClr val="808080"/>
+                </a:solidFill>
+              </a:defRPr>
+            </a:pPr>
+            <a:r>
+              <a:t>来源：`lif_neuron_hopfion/lif_cycle_demo/`（脚本就绪）</a:t>
             </a:r>
           </a:p>
         </p:txBody>
@@ -6719,34 +6950,132 @@
           <a:noFill/>
         </p:spPr>
         <p:txBody>
+          <a:bodyPr wrap="none">
+            <a:spAutoFit/>
+          </a:bodyPr>
+          <a:lstStyle/>
+          <a:p>
+            <a:pPr>
+              <a:defRPr sz="2000" b="1">
+                <a:solidFill>
+                  <a:srgbClr val="1F2D5A"/>
+                </a:solidFill>
+              </a:defRPr>
+            </a:pPr>
+            <a:r>
+              <a:t>旧版本对标：My_old_simulation（系数错误）</a:t>
+            </a:r>
+          </a:p>
+        </p:txBody>
+      </p:sp>
+      <p:sp>
+        <p:nvSpPr>
+          <p:cNvPr id="3" name="TextBox 2"/>
+          <p:cNvSpPr txBox="1"/>
+          <p:nvPr/>
+        </p:nvSpPr>
+        <p:spPr>
+          <a:xfrm>
+            <a:off x="457200" y="1097280"/>
+            <a:ext cx="11247120" cy="4937760"/>
+          </a:xfrm>
+          <a:prstGeom prst="rect">
+            <a:avLst/>
+          </a:prstGeom>
+          <a:noFill/>
+        </p:spPr>
+        <p:txBody>
           <a:bodyPr wrap="square">
             <a:spAutoFit/>
           </a:bodyPr>
           <a:lstStyle/>
           <a:p>
             <a:pPr>
-              <a:defRPr sz="2000" b="1">
-                <a:solidFill>
-                  <a:srgbClr val="1F2D5A"/>
-                </a:solidFill>
-              </a:defRPr>
-            </a:pPr>
-            <a:r>
-              <a:t>P27 — 旧版本对标：My_old_simulation（系数错误）</a:t>
-            </a:r>
-          </a:p>
-        </p:txBody>
-      </p:sp>
-      <p:sp>
-        <p:nvSpPr>
-          <p:cNvPr id="3" name="TextBox 2"/>
+              <a:defRPr sz="2000">
+                <a:solidFill>
+                  <a:srgbClr val="202020"/>
+                </a:solidFill>
+              </a:defRPr>
+            </a:pPr>
+            <a:r>
+              <a:t>old_results/My_old_simulation/ 共 20 个 srcX/srcZ point source freq sweep。含 J2/J4 系数符号错误。</a:t>
+            </a:r>
+          </a:p>
+          <a:p>
+            <a:pPr>
+              <a:defRPr sz="2000">
+                <a:solidFill>
+                  <a:srgbClr val="202020"/>
+                </a:solidFill>
+              </a:defRPr>
+            </a:pPr>
+          </a:p>
+          <a:p>
+            <a:pPr>
+              <a:defRPr sz="2000">
+                <a:solidFill>
+                  <a:srgbClr val="202020"/>
+                </a:solidFill>
+              </a:defRPr>
+            </a:pPr>
+            <a:r>
+              <a:t>具体陷阱：J2 / J4 在 frustrated FM 模型里有正负号约定，不同文献存在差异。旧版本采用了错误符号约定。</a:t>
+            </a:r>
+          </a:p>
+          <a:p>
+            <a:pPr>
+              <a:defRPr sz="2000">
+                <a:solidFill>
+                  <a:srgbClr val="202020"/>
+                </a:solidFill>
+              </a:defRPr>
+            </a:pPr>
+          </a:p>
+          <a:p>
+            <a:pPr>
+              <a:defRPr sz="2000">
+                <a:solidFill>
+                  <a:srgbClr val="202020"/>
+                </a:solidFill>
+              </a:defRPr>
+            </a:pPr>
+            <a:r>
+              <a:t>与当前正确版本对比：拓扑荷数值差异约 2-3%；动力学定性趋势相同但定量结果不可比。</a:t>
+            </a:r>
+          </a:p>
+          <a:p>
+            <a:pPr>
+              <a:defRPr sz="2000">
+                <a:solidFill>
+                  <a:srgbClr val="202020"/>
+                </a:solidFill>
+              </a:defRPr>
+            </a:pPr>
+          </a:p>
+          <a:p>
+            <a:pPr>
+              <a:defRPr sz="2000">
+                <a:solidFill>
+                  <a:srgbClr val="202020"/>
+                </a:solidFill>
+              </a:defRPr>
+            </a:pPr>
+            <a:r>
+              <a:t>经验：复用别人代码时必须验证符号；从已验证的 R8r4_Ku0.mx3 拷参数，不要从公式重推。</a:t>
+            </a:r>
+          </a:p>
+        </p:txBody>
+      </p:sp>
+      <p:sp>
+        <p:nvSpPr>
+          <p:cNvPr id="4" name="TextBox 3"/>
           <p:cNvSpPr txBox="1"/>
           <p:nvPr/>
         </p:nvSpPr>
         <p:spPr>
           <a:xfrm>
-            <a:off x="457200" y="1097280"/>
-            <a:ext cx="11247120" cy="5303520"/>
+            <a:off x="4572000" y="6355080"/>
+            <a:ext cx="7315200" cy="365760"/>
           </a:xfrm>
           <a:prstGeom prst="rect">
             <a:avLst/>
@@ -6759,99 +7088,15 @@
           </a:bodyPr>
           <a:lstStyle/>
           <a:p>
-            <a:pPr>
-              <a:defRPr sz="2000">
-                <a:solidFill>
-                  <a:srgbClr val="202020"/>
-                </a:solidFill>
-              </a:defRPr>
-            </a:pPr>
-            <a:r>
-              <a:t>old_results/My_old_simulation/ 共 20 个 srcX/srcZ point source freq sweep。含 J2/J4 系数符号错误。</a:t>
-            </a:r>
-          </a:p>
-          <a:p>
-            <a:pPr>
-              <a:defRPr sz="2000">
-                <a:solidFill>
-                  <a:srgbClr val="202020"/>
-                </a:solidFill>
-              </a:defRPr>
-            </a:pPr>
-          </a:p>
-          <a:p>
-            <a:pPr>
-              <a:defRPr sz="2000">
-                <a:solidFill>
-                  <a:srgbClr val="202020"/>
-                </a:solidFill>
-              </a:defRPr>
-            </a:pPr>
-            <a:r>
-              <a:t>具体陷阱：J2 / J4 在 frustrated FM 模型里有正负号约定，不同文献存在差异。旧版本采用了错误符号约定。</a:t>
-            </a:r>
-          </a:p>
-          <a:p>
-            <a:pPr>
-              <a:defRPr sz="2000">
-                <a:solidFill>
-                  <a:srgbClr val="202020"/>
-                </a:solidFill>
-              </a:defRPr>
-            </a:pPr>
-          </a:p>
-          <a:p>
-            <a:pPr>
-              <a:defRPr sz="2000">
-                <a:solidFill>
-                  <a:srgbClr val="202020"/>
-                </a:solidFill>
-              </a:defRPr>
-            </a:pPr>
-            <a:r>
-              <a:t>与当前正确版本对比：拓扑荷数值差异约 2-3%；动力学定性趋势相同但定量结果不可比。</a:t>
-            </a:r>
-          </a:p>
-          <a:p>
-            <a:pPr>
-              <a:defRPr sz="2000">
-                <a:solidFill>
-                  <a:srgbClr val="202020"/>
-                </a:solidFill>
-              </a:defRPr>
-            </a:pPr>
-          </a:p>
-          <a:p>
-            <a:pPr>
-              <a:defRPr sz="2000">
-                <a:solidFill>
-                  <a:srgbClr val="202020"/>
-                </a:solidFill>
-              </a:defRPr>
-            </a:pPr>
-            <a:r>
-              <a:t>经验：复用别人代码时必须验证符号；从已验证的 R8r4_Ku0.mx3 拷参数，不要从公式重推。</a:t>
-            </a:r>
-          </a:p>
-          <a:p>
-            <a:pPr>
-              <a:defRPr sz="2000">
-                <a:solidFill>
-                  <a:srgbClr val="202020"/>
-                </a:solidFill>
-              </a:defRPr>
-            </a:pPr>
-          </a:p>
-          <a:p>
-            <a:pPr>
-              <a:defRPr sz="2000">
-                <a:solidFill>
-                  <a:srgbClr val="202020"/>
-                </a:solidFill>
-              </a:defRPr>
-            </a:pPr>
-            <a:r>
-              <a:t>无图。来源：`old_results/My_old_simulation/A材料尺寸对hopfion的影响/`</a:t>
+            <a:pPr algn="r">
+              <a:defRPr sz="1000" i="1">
+                <a:solidFill>
+                  <a:srgbClr val="808080"/>
+                </a:solidFill>
+              </a:defRPr>
+            </a:pPr>
+            <a:r>
+              <a:t>来源：`old_results/My_old_simulation/A材料尺寸对hopfion的影响/`</a:t>
             </a:r>
           </a:p>
         </p:txBody>
@@ -6891,34 +7136,159 @@
           <a:noFill/>
         </p:spPr>
         <p:txBody>
+          <a:bodyPr wrap="none">
+            <a:spAutoFit/>
+          </a:bodyPr>
+          <a:lstStyle/>
+          <a:p>
+            <a:pPr>
+              <a:defRPr sz="2000" b="1">
+                <a:solidFill>
+                  <a:srgbClr val="1F2D5A"/>
+                </a:solidFill>
+              </a:defRPr>
+            </a:pPr>
+            <a:r>
+              <a:t>Device B 验证 + srtp 学生项目</a:t>
+            </a:r>
+          </a:p>
+        </p:txBody>
+      </p:sp>
+      <p:sp>
+        <p:nvSpPr>
+          <p:cNvPr id="3" name="TextBox 2"/>
+          <p:cNvSpPr txBox="1"/>
+          <p:nvPr/>
+        </p:nvSpPr>
+        <p:spPr>
+          <a:xfrm>
+            <a:off x="457200" y="1097280"/>
+            <a:ext cx="11247120" cy="4937760"/>
+          </a:xfrm>
+          <a:prstGeom prst="rect">
+            <a:avLst/>
+          </a:prstGeom>
+          <a:noFill/>
+        </p:spPr>
+        <p:txBody>
           <a:bodyPr wrap="square">
             <a:spAutoFit/>
           </a:bodyPr>
           <a:lstStyle/>
           <a:p>
             <a:pPr>
-              <a:defRPr sz="2000" b="1">
-                <a:solidFill>
-                  <a:srgbClr val="1F2D5A"/>
-                </a:solidFill>
-              </a:defRPr>
-            </a:pPr>
-            <a:r>
-              <a:t>P28 — Device B 验证 + srtp 学生项目</a:t>
-            </a:r>
-          </a:p>
-        </p:txBody>
-      </p:sp>
-      <p:sp>
-        <p:nvSpPr>
-          <p:cNvPr id="3" name="TextBox 2"/>
+              <a:defRPr sz="2000">
+                <a:solidFill>
+                  <a:srgbClr val="202020"/>
+                </a:solidFill>
+              </a:defRPr>
+            </a:pPr>
+            <a:r>
+              <a:t>deviceB_package：用户次要 Windows 机器独立运行 srcZ freq sweep 9 个验证。结果与主机一致，作为独立机器交叉验证。</a:t>
+            </a:r>
+          </a:p>
+          <a:p>
+            <a:pPr>
+              <a:defRPr sz="2000">
+                <a:solidFill>
+                  <a:srgbClr val="202020"/>
+                </a:solidFill>
+              </a:defRPr>
+            </a:pPr>
+          </a:p>
+          <a:p>
+            <a:pPr>
+              <a:defRPr sz="2000">
+                <a:solidFill>
+                  <a:srgbClr val="202020"/>
+                </a:solidFill>
+              </a:defRPr>
+            </a:pPr>
+            <a:r>
+              <a:t>srtp/：早期学生项目存档。</a:t>
+            </a:r>
+          </a:p>
+          <a:p>
+            <a:pPr>
+              <a:defRPr sz="2000">
+                <a:solidFill>
+                  <a:srgbClr val="202020"/>
+                </a:solidFill>
+              </a:defRPr>
+            </a:pPr>
+            <a:r>
+              <a:t>- experiments/fege.mx3：早期 FeGe 尝试</a:t>
+            </a:r>
+          </a:p>
+          <a:p>
+            <a:pPr>
+              <a:defRPr sz="2000">
+                <a:solidFill>
+                  <a:srgbClr val="202020"/>
+                </a:solidFill>
+              </a:defRPr>
+            </a:pPr>
+            <a:r>
+              <a:t>- hopfion_mumax3/1.spinwave &amp; magnetic field x/：早期自旋波驱动</a:t>
+            </a:r>
+          </a:p>
+          <a:p>
+            <a:pPr>
+              <a:defRPr sz="2000">
+                <a:solidFill>
+                  <a:srgbClr val="202020"/>
+                </a:solidFill>
+              </a:defRPr>
+            </a:pPr>
+            <a:r>
+              <a:t>- magnon-hopfion-main/：振荡-Hopfion 耦合，未完成</a:t>
+            </a:r>
+          </a:p>
+          <a:p>
+            <a:pPr>
+              <a:defRPr sz="2000">
+                <a:solidFill>
+                  <a:srgbClr val="202020"/>
+                </a:solidFill>
+              </a:defRPr>
+            </a:pPr>
+            <a:r>
+              <a:t>- draw_hopfion/：早期可视化</a:t>
+            </a:r>
+          </a:p>
+          <a:p>
+            <a:pPr>
+              <a:defRPr sz="2000">
+                <a:solidFill>
+                  <a:srgbClr val="202020"/>
+                </a:solidFill>
+              </a:defRPr>
+            </a:pPr>
+          </a:p>
+          <a:p>
+            <a:pPr>
+              <a:defRPr sz="2000">
+                <a:solidFill>
+                  <a:srgbClr val="202020"/>
+                </a:solidFill>
+              </a:defRPr>
+            </a:pPr>
+            <a:r>
+              <a:t>历史价值：展示项目早期摸索过程，与当前体系参数差异较大，不可直接复用。</a:t>
+            </a:r>
+          </a:p>
+        </p:txBody>
+      </p:sp>
+      <p:sp>
+        <p:nvSpPr>
+          <p:cNvPr id="4" name="TextBox 3"/>
           <p:cNvSpPr txBox="1"/>
           <p:nvPr/>
         </p:nvSpPr>
         <p:spPr>
           <a:xfrm>
-            <a:off x="457200" y="1097280"/>
-            <a:ext cx="11247120" cy="5303520"/>
+            <a:off x="4572000" y="6355080"/>
+            <a:ext cx="7315200" cy="365760"/>
           </a:xfrm>
           <a:prstGeom prst="rect">
             <a:avLst/>
@@ -6931,126 +7301,15 @@
           </a:bodyPr>
           <a:lstStyle/>
           <a:p>
-            <a:pPr>
-              <a:defRPr sz="2000">
-                <a:solidFill>
-                  <a:srgbClr val="202020"/>
-                </a:solidFill>
-              </a:defRPr>
-            </a:pPr>
-            <a:r>
-              <a:t>deviceB_package：用户次要 Windows 机器独立运行 srcZ freq sweep 9 个验证。结果与主机一致，作为独立机器交叉验证。</a:t>
-            </a:r>
-          </a:p>
-          <a:p>
-            <a:pPr>
-              <a:defRPr sz="2000">
-                <a:solidFill>
-                  <a:srgbClr val="202020"/>
-                </a:solidFill>
-              </a:defRPr>
-            </a:pPr>
-          </a:p>
-          <a:p>
-            <a:pPr>
-              <a:defRPr sz="2000">
-                <a:solidFill>
-                  <a:srgbClr val="202020"/>
-                </a:solidFill>
-              </a:defRPr>
-            </a:pPr>
-            <a:r>
-              <a:t>srtp/：早期学生项目存档。</a:t>
-            </a:r>
-          </a:p>
-          <a:p>
-            <a:pPr>
-              <a:defRPr sz="2000">
-                <a:solidFill>
-                  <a:srgbClr val="202020"/>
-                </a:solidFill>
-              </a:defRPr>
-            </a:pPr>
-            <a:r>
-              <a:t>- experiments/fege.mx3：早期 FeGe 尝试</a:t>
-            </a:r>
-          </a:p>
-          <a:p>
-            <a:pPr>
-              <a:defRPr sz="2000">
-                <a:solidFill>
-                  <a:srgbClr val="202020"/>
-                </a:solidFill>
-              </a:defRPr>
-            </a:pPr>
-            <a:r>
-              <a:t>- hopfion_mumax3/1.spinwave &amp; magnetic field x/：早期自旋波驱动</a:t>
-            </a:r>
-          </a:p>
-          <a:p>
-            <a:pPr>
-              <a:defRPr sz="2000">
-                <a:solidFill>
-                  <a:srgbClr val="202020"/>
-                </a:solidFill>
-              </a:defRPr>
-            </a:pPr>
-            <a:r>
-              <a:t>- magnon-hopfion-main/：振荡-Hopfion 耦合，未完成</a:t>
-            </a:r>
-          </a:p>
-          <a:p>
-            <a:pPr>
-              <a:defRPr sz="2000">
-                <a:solidFill>
-                  <a:srgbClr val="202020"/>
-                </a:solidFill>
-              </a:defRPr>
-            </a:pPr>
-            <a:r>
-              <a:t>- draw_hopfion/：早期可视化</a:t>
-            </a:r>
-          </a:p>
-          <a:p>
-            <a:pPr>
-              <a:defRPr sz="2000">
-                <a:solidFill>
-                  <a:srgbClr val="202020"/>
-                </a:solidFill>
-              </a:defRPr>
-            </a:pPr>
-          </a:p>
-          <a:p>
-            <a:pPr>
-              <a:defRPr sz="2000">
-                <a:solidFill>
-                  <a:srgbClr val="202020"/>
-                </a:solidFill>
-              </a:defRPr>
-            </a:pPr>
-            <a:r>
-              <a:t>历史价值：展示项目早期摸索过程，与当前体系参数差异较大，不可直接复用。</a:t>
-            </a:r>
-          </a:p>
-          <a:p>
-            <a:pPr>
-              <a:defRPr sz="2000">
-                <a:solidFill>
-                  <a:srgbClr val="202020"/>
-                </a:solidFill>
-              </a:defRPr>
-            </a:pPr>
-          </a:p>
-          <a:p>
-            <a:pPr>
-              <a:defRPr sz="2000">
-                <a:solidFill>
-                  <a:srgbClr val="202020"/>
-                </a:solidFill>
-              </a:defRPr>
-            </a:pPr>
-            <a:r>
-              <a:t>无图。来源：`deviceB_package/`、`srtp/`</a:t>
+            <a:pPr algn="r">
+              <a:defRPr sz="1000" i="1">
+                <a:solidFill>
+                  <a:srgbClr val="808080"/>
+                </a:solidFill>
+              </a:defRPr>
+            </a:pPr>
+            <a:r>
+              <a:t>来源：`deviceB_package/`、`srtp/`</a:t>
             </a:r>
           </a:p>
         </p:txBody>
@@ -7090,47 +7349,47 @@
           <a:noFill/>
         </p:spPr>
         <p:txBody>
+          <a:bodyPr wrap="none">
+            <a:spAutoFit/>
+          </a:bodyPr>
+          <a:lstStyle/>
+          <a:p>
+            <a:pPr>
+              <a:defRPr sz="2000" b="1">
+                <a:solidFill>
+                  <a:srgbClr val="1F2D5A"/>
+                </a:solidFill>
+              </a:defRPr>
+            </a:pPr>
+            <a:r>
+              <a:t>现状清单</a:t>
+            </a:r>
+          </a:p>
+        </p:txBody>
+      </p:sp>
+      <p:sp>
+        <p:nvSpPr>
+          <p:cNvPr id="3" name="TextBox 2"/>
+          <p:cNvSpPr txBox="1"/>
+          <p:nvPr/>
+        </p:nvSpPr>
+        <p:spPr>
+          <a:xfrm>
+            <a:off x="457200" y="1097280"/>
+            <a:ext cx="11247120" cy="4937760"/>
+          </a:xfrm>
+          <a:prstGeom prst="rect">
+            <a:avLst/>
+          </a:prstGeom>
+          <a:noFill/>
+        </p:spPr>
+        <p:txBody>
           <a:bodyPr wrap="square">
             <a:spAutoFit/>
           </a:bodyPr>
           <a:lstStyle/>
           <a:p>
             <a:pPr>
-              <a:defRPr sz="2000" b="1">
-                <a:solidFill>
-                  <a:srgbClr val="1F2D5A"/>
-                </a:solidFill>
-              </a:defRPr>
-            </a:pPr>
-            <a:r>
-              <a:t>P29 — 现状清单</a:t>
-            </a:r>
-          </a:p>
-        </p:txBody>
-      </p:sp>
-      <p:sp>
-        <p:nvSpPr>
-          <p:cNvPr id="3" name="TextBox 2"/>
-          <p:cNvSpPr txBox="1"/>
-          <p:nvPr/>
-        </p:nvSpPr>
-        <p:spPr>
-          <a:xfrm>
-            <a:off x="457200" y="1097280"/>
-            <a:ext cx="11247120" cy="5303520"/>
-          </a:xfrm>
-          <a:prstGeom prst="rect">
-            <a:avLst/>
-          </a:prstGeom>
-          <a:noFill/>
-        </p:spPr>
-        <p:txBody>
-          <a:bodyPr wrap="square">
-            <a:spAutoFit/>
-          </a:bodyPr>
-          <a:lstStyle/>
-          <a:p>
-            <a:pPr>
               <a:defRPr sz="2000">
                 <a:solidFill>
                   <a:srgbClr val="202020"/>
@@ -7202,27 +7461,6 @@
             </a:pPr>
             <a:r>
               <a:t>从未启动：Q_H=2 / Q_H=4 稳定性验证 / freq_switch v3 方案 A 调参 / LIF Phase 2 重设计 4 候选 / Wang 2019 STT 参数扫描深化</a:t>
-            </a:r>
-          </a:p>
-          <a:p>
-            <a:pPr>
-              <a:defRPr sz="2000">
-                <a:solidFill>
-                  <a:srgbClr val="202020"/>
-                </a:solidFill>
-              </a:defRPr>
-            </a:pPr>
-          </a:p>
-          <a:p>
-            <a:pPr>
-              <a:defRPr sz="2000">
-                <a:solidFill>
-                  <a:srgbClr val="202020"/>
-                </a:solidFill>
-              </a:defRPr>
-            </a:pPr>
-            <a:r>
-              <a:t>无图。</a:t>
             </a:r>
           </a:p>
         </p:txBody>
@@ -7262,34 +7500,90 @@
           <a:noFill/>
         </p:spPr>
         <p:txBody>
+          <a:bodyPr wrap="none">
+            <a:spAutoFit/>
+          </a:bodyPr>
+          <a:lstStyle/>
+          <a:p>
+            <a:pPr>
+              <a:defRPr sz="2000" b="1">
+                <a:solidFill>
+                  <a:srgbClr val="1F2D5A"/>
+                </a:solidFill>
+              </a:defRPr>
+            </a:pPr>
+            <a:r>
+              <a:t>DMI-FM 失败：错误环形 ansatz</a:t>
+            </a:r>
+          </a:p>
+        </p:txBody>
+      </p:sp>
+      <p:sp>
+        <p:nvSpPr>
+          <p:cNvPr id="3" name="TextBox 2"/>
+          <p:cNvSpPr txBox="1"/>
+          <p:nvPr/>
+        </p:nvSpPr>
+        <p:spPr>
+          <a:xfrm>
+            <a:off x="457200" y="1097280"/>
+            <a:ext cx="11247120" cy="4937760"/>
+          </a:xfrm>
+          <a:prstGeom prst="rect">
+            <a:avLst/>
+          </a:prstGeom>
+          <a:noFill/>
+        </p:spPr>
+        <p:txBody>
           <a:bodyPr wrap="square">
             <a:spAutoFit/>
           </a:bodyPr>
           <a:lstStyle/>
           <a:p>
             <a:pPr>
-              <a:defRPr sz="2000" b="1">
-                <a:solidFill>
-                  <a:srgbClr val="1F2D5A"/>
-                </a:solidFill>
-              </a:defRPr>
-            </a:pPr>
-            <a:r>
-              <a:t>P3 — DMI-FM 失败：错误环形 ansatz</a:t>
-            </a:r>
-          </a:p>
-        </p:txBody>
-      </p:sp>
-      <p:sp>
-        <p:nvSpPr>
-          <p:cNvPr id="3" name="TextBox 2"/>
+              <a:defRPr sz="2000">
+                <a:solidFill>
+                  <a:srgbClr val="202020"/>
+                </a:solidFill>
+              </a:defRPr>
+            </a:pPr>
+            <a:r>
+              <a:t>在意识到需要 Sutcliffe 解析初态之前，尝试用 disc 环形 ansatz 直接构造 Hopfion 初始态。共 4 次尝试（含 128nm 体系 + 含退磁组合）。Hopfion 拓扑结构在弛豫早期就解构。</a:t>
+            </a:r>
+          </a:p>
+          <a:p>
+            <a:pPr>
+              <a:defRPr sz="2000">
+                <a:solidFill>
+                  <a:srgbClr val="202020"/>
+                </a:solidFill>
+              </a:defRPr>
+            </a:pPr>
+          </a:p>
+          <a:p>
+            <a:pPr>
+              <a:defRPr sz="2000">
+                <a:solidFill>
+                  <a:srgbClr val="202020"/>
+                </a:solidFill>
+              </a:defRPr>
+            </a:pPr>
+            <a:r>
+              <a:t>教训：3D 拓扑结构不能用 2D 环形剖面外推；必须用基于 Hopf 不变量的解析解。</a:t>
+            </a:r>
+          </a:p>
+        </p:txBody>
+      </p:sp>
+      <p:sp>
+        <p:nvSpPr>
+          <p:cNvPr id="4" name="TextBox 3"/>
           <p:cNvSpPr txBox="1"/>
           <p:nvPr/>
         </p:nvSpPr>
         <p:spPr>
           <a:xfrm>
-            <a:off x="457200" y="1097280"/>
-            <a:ext cx="11247120" cy="5303520"/>
+            <a:off x="4572000" y="6355080"/>
+            <a:ext cx="7315200" cy="365760"/>
           </a:xfrm>
           <a:prstGeom prst="rect">
             <a:avLst/>
@@ -7302,57 +7596,15 @@
           </a:bodyPr>
           <a:lstStyle/>
           <a:p>
-            <a:pPr>
-              <a:defRPr sz="2000">
-                <a:solidFill>
-                  <a:srgbClr val="202020"/>
-                </a:solidFill>
-              </a:defRPr>
-            </a:pPr>
-            <a:r>
-              <a:t>在意识到需要 Sutcliffe 解析初态之前，尝试用 disc 环形 ansatz 直接构造 Hopfion 初始态。共 4 次尝试（含 128nm 体系 + 含退磁组合）。Hopfion 拓扑结构在弛豫早期就解构。</a:t>
-            </a:r>
-          </a:p>
-          <a:p>
-            <a:pPr>
-              <a:defRPr sz="2000">
-                <a:solidFill>
-                  <a:srgbClr val="202020"/>
-                </a:solidFill>
-              </a:defRPr>
-            </a:pPr>
-          </a:p>
-          <a:p>
-            <a:pPr>
-              <a:defRPr sz="2000">
-                <a:solidFill>
-                  <a:srgbClr val="202020"/>
-                </a:solidFill>
-              </a:defRPr>
-            </a:pPr>
-            <a:r>
-              <a:t>教训：3D 拓扑结构不能用 2D 环形剖面外推；必须用基于 Hopf 不变量的解析解。</a:t>
-            </a:r>
-          </a:p>
-          <a:p>
-            <a:pPr>
-              <a:defRPr sz="2000">
-                <a:solidFill>
-                  <a:srgbClr val="202020"/>
-                </a:solidFill>
-              </a:defRPr>
-            </a:pPr>
-          </a:p>
-          <a:p>
-            <a:pPr>
-              <a:defRPr sz="2000">
-                <a:solidFill>
-                  <a:srgbClr val="202020"/>
-                </a:solidFill>
-              </a:defRPr>
-            </a:pPr>
-            <a:r>
-              <a:t>无图。来源：`20251219_dmi_fm/failed_attempts/sutcliffe_disc_wrong_ansatz/`</a:t>
+            <a:pPr algn="r">
+              <a:defRPr sz="1000" i="1">
+                <a:solidFill>
+                  <a:srgbClr val="808080"/>
+                </a:solidFill>
+              </a:defRPr>
+            </a:pPr>
+            <a:r>
+              <a:t>来源：`20251219_dmi_fm/failed_attempts/sutcliffe_disc_wrong_ansatz/`</a:t>
             </a:r>
           </a:p>
         </p:txBody>
@@ -7392,34 +7644,69 @@
           <a:noFill/>
         </p:spPr>
         <p:txBody>
+          <a:bodyPr wrap="none">
+            <a:spAutoFit/>
+          </a:bodyPr>
+          <a:lstStyle/>
+          <a:p>
+            <a:pPr>
+              <a:defRPr sz="2000" b="1">
+                <a:solidFill>
+                  <a:srgbClr val="1F2D5A"/>
+                </a:solidFill>
+              </a:defRPr>
+            </a:pPr>
+            <a:r>
+              <a:t>DMI-FM 失败：toroidal nanoring</a:t>
+            </a:r>
+          </a:p>
+        </p:txBody>
+      </p:sp>
+      <p:sp>
+        <p:nvSpPr>
+          <p:cNvPr id="3" name="TextBox 2"/>
+          <p:cNvSpPr txBox="1"/>
+          <p:nvPr/>
+        </p:nvSpPr>
+        <p:spPr>
+          <a:xfrm>
+            <a:off x="457200" y="1097280"/>
+            <a:ext cx="11247120" cy="4937760"/>
+          </a:xfrm>
+          <a:prstGeom prst="rect">
+            <a:avLst/>
+          </a:prstGeom>
+          <a:noFill/>
+        </p:spPr>
+        <p:txBody>
           <a:bodyPr wrap="square">
             <a:spAutoFit/>
           </a:bodyPr>
           <a:lstStyle/>
           <a:p>
             <a:pPr>
-              <a:defRPr sz="2000" b="1">
-                <a:solidFill>
-                  <a:srgbClr val="1F2D5A"/>
-                </a:solidFill>
-              </a:defRPr>
-            </a:pPr>
-            <a:r>
-              <a:t>P4 — DMI-FM 失败：toroidal nanoring</a:t>
-            </a:r>
-          </a:p>
-        </p:txBody>
-      </p:sp>
-      <p:sp>
-        <p:nvSpPr>
-          <p:cNvPr id="3" name="TextBox 2"/>
+              <a:defRPr sz="2000">
+                <a:solidFill>
+                  <a:srgbClr val="202020"/>
+                </a:solidFill>
+              </a:defRPr>
+            </a:pPr>
+            <a:r>
+              <a:t>尝试用环形 nanoring 几何承载 Hopfion，2 次实验都未跑完。判断方向不对后放弃。</a:t>
+            </a:r>
+          </a:p>
+        </p:txBody>
+      </p:sp>
+      <p:sp>
+        <p:nvSpPr>
+          <p:cNvPr id="4" name="TextBox 3"/>
           <p:cNvSpPr txBox="1"/>
           <p:nvPr/>
         </p:nvSpPr>
         <p:spPr>
           <a:xfrm>
-            <a:off x="457200" y="1097280"/>
-            <a:ext cx="11247120" cy="5303520"/>
+            <a:off x="4572000" y="6355080"/>
+            <a:ext cx="7315200" cy="365760"/>
           </a:xfrm>
           <a:prstGeom prst="rect">
             <a:avLst/>
@@ -7432,36 +7719,15 @@
           </a:bodyPr>
           <a:lstStyle/>
           <a:p>
-            <a:pPr>
-              <a:defRPr sz="2000">
-                <a:solidFill>
-                  <a:srgbClr val="202020"/>
-                </a:solidFill>
-              </a:defRPr>
-            </a:pPr>
-            <a:r>
-              <a:t>尝试用环形 nanoring 几何承载 Hopfion，2 次实验都未跑完。判断方向不对后放弃。</a:t>
-            </a:r>
-          </a:p>
-          <a:p>
-            <a:pPr>
-              <a:defRPr sz="2000">
-                <a:solidFill>
-                  <a:srgbClr val="202020"/>
-                </a:solidFill>
-              </a:defRPr>
-            </a:pPr>
-          </a:p>
-          <a:p>
-            <a:pPr>
-              <a:defRPr sz="2000">
-                <a:solidFill>
-                  <a:srgbClr val="202020"/>
-                </a:solidFill>
-              </a:defRPr>
-            </a:pPr>
-            <a:r>
-              <a:t>仅描述现象，无结论。来源：`20251219_dmi_fm/failed_attempts/toroidal_nanoring_approach/`</a:t>
+            <a:pPr algn="r">
+              <a:defRPr sz="1000" i="1">
+                <a:solidFill>
+                  <a:srgbClr val="808080"/>
+                </a:solidFill>
+              </a:defRPr>
+            </a:pPr>
+            <a:r>
+              <a:t>来源：`20251219_dmi_fm/failed_attempts/toroidal_nanoring_approach/`</a:t>
             </a:r>
           </a:p>
         </p:txBody>
@@ -7501,34 +7767,90 @@
           <a:noFill/>
         </p:spPr>
         <p:txBody>
+          <a:bodyPr wrap="none">
+            <a:spAutoFit/>
+          </a:bodyPr>
+          <a:lstStyle/>
+          <a:p>
+            <a:pPr>
+              <a:defRPr sz="2000" b="1">
+                <a:solidFill>
+                  <a:srgbClr val="1F2D5A"/>
+                </a:solidFill>
+              </a:defRPr>
+            </a:pPr>
+            <a:r>
+              <a:t>DMI-FM 旁支：isolated_10λ + Neel 型</a:t>
+            </a:r>
+          </a:p>
+        </p:txBody>
+      </p:sp>
+      <p:sp>
+        <p:nvSpPr>
+          <p:cNvPr id="3" name="TextBox 2"/>
+          <p:cNvSpPr txBox="1"/>
+          <p:nvPr/>
+        </p:nvSpPr>
+        <p:spPr>
+          <a:xfrm>
+            <a:off x="457200" y="1097280"/>
+            <a:ext cx="11247120" cy="4937760"/>
+          </a:xfrm>
+          <a:prstGeom prst="rect">
+            <a:avLst/>
+          </a:prstGeom>
+          <a:noFill/>
+        </p:spPr>
+        <p:txBody>
           <a:bodyPr wrap="square">
             <a:spAutoFit/>
           </a:bodyPr>
           <a:lstStyle/>
           <a:p>
             <a:pPr>
-              <a:defRPr sz="2000" b="1">
-                <a:solidFill>
-                  <a:srgbClr val="1F2D5A"/>
-                </a:solidFill>
-              </a:defRPr>
-            </a:pPr>
-            <a:r>
-              <a:t>P5 — DMI-FM 旁支：isolated_10λ + Neel 型</a:t>
-            </a:r>
-          </a:p>
-        </p:txBody>
-      </p:sp>
-      <p:sp>
-        <p:nvSpPr>
-          <p:cNvPr id="3" name="TextBox 2"/>
+              <a:defRPr sz="2000">
+                <a:solidFill>
+                  <a:srgbClr val="202020"/>
+                </a:solidFill>
+              </a:defRPr>
+            </a:pPr>
+            <a:r>
+              <a:t>isolated_hopfion_10lambda：10λ 盘几何下隔离 Hopfion 1 次测试，作为成功方案的尺寸对照。</a:t>
+            </a:r>
+          </a:p>
+          <a:p>
+            <a:pPr>
+              <a:defRPr sz="2000">
+                <a:solidFill>
+                  <a:srgbClr val="202020"/>
+                </a:solidFill>
+              </a:defRPr>
+            </a:pPr>
+          </a:p>
+          <a:p>
+            <a:pPr>
+              <a:defRPr sz="2000">
+                <a:solidFill>
+                  <a:srgbClr val="202020"/>
+                </a:solidFill>
+              </a:defRPr>
+            </a:pPr>
+            <a:r>
+              <a:t>neel_hopfion：Neel 型 Hopfion 共 9 次扫描（v1-v4 演化 + 5 个变体），v4 最长跑到 125 帧。结论：Neel 型也可稳定，与 Bloch 型并行存在。</a:t>
+            </a:r>
+          </a:p>
+        </p:txBody>
+      </p:sp>
+      <p:sp>
+        <p:nvSpPr>
+          <p:cNvPr id="4" name="TextBox 3"/>
           <p:cNvSpPr txBox="1"/>
           <p:nvPr/>
         </p:nvSpPr>
         <p:spPr>
           <a:xfrm>
-            <a:off x="457200" y="1097280"/>
-            <a:ext cx="11247120" cy="5303520"/>
+            <a:off x="4572000" y="6355080"/>
+            <a:ext cx="7315200" cy="365760"/>
           </a:xfrm>
           <a:prstGeom prst="rect">
             <a:avLst/>
@@ -7541,57 +7863,15 @@
           </a:bodyPr>
           <a:lstStyle/>
           <a:p>
-            <a:pPr>
-              <a:defRPr sz="2000">
-                <a:solidFill>
-                  <a:srgbClr val="202020"/>
-                </a:solidFill>
-              </a:defRPr>
-            </a:pPr>
-            <a:r>
-              <a:t>isolated_hopfion_10lambda：10λ 盘几何下隔离 Hopfion 1 次测试，作为成功方案的尺寸对照。</a:t>
-            </a:r>
-          </a:p>
-          <a:p>
-            <a:pPr>
-              <a:defRPr sz="2000">
-                <a:solidFill>
-                  <a:srgbClr val="202020"/>
-                </a:solidFill>
-              </a:defRPr>
-            </a:pPr>
-          </a:p>
-          <a:p>
-            <a:pPr>
-              <a:defRPr sz="2000">
-                <a:solidFill>
-                  <a:srgbClr val="202020"/>
-                </a:solidFill>
-              </a:defRPr>
-            </a:pPr>
-            <a:r>
-              <a:t>neel_hopfion：Neel 型 Hopfion 共 9 次扫描（v1-v4 演化 + 5 个变体），v4 最长跑到 125 帧。结论：Neel 型也可稳定，与 Bloch 型并行存在。</a:t>
-            </a:r>
-          </a:p>
-          <a:p>
-            <a:pPr>
-              <a:defRPr sz="2000">
-                <a:solidFill>
-                  <a:srgbClr val="202020"/>
-                </a:solidFill>
-              </a:defRPr>
-            </a:pPr>
-          </a:p>
-          <a:p>
-            <a:pPr>
-              <a:defRPr sz="2000">
-                <a:solidFill>
-                  <a:srgbClr val="202020"/>
-                </a:solidFill>
-              </a:defRPr>
-            </a:pPr>
-            <a:r>
-              <a:t>无图。来源：`20251219_dmi_fm/{isolated_hopfion_10lambda, neel_hopfion}/`</a:t>
+            <a:pPr algn="r">
+              <a:defRPr sz="1000" i="1">
+                <a:solidFill>
+                  <a:srgbClr val="808080"/>
+                </a:solidFill>
+              </a:defRPr>
+            </a:pPr>
+            <a:r>
+              <a:t>来源：`20251219_dmi_fm/{isolated_hopfion_10lambda, neel_hopfion}/`</a:t>
             </a:r>
           </a:p>
         </p:txBody>
@@ -7631,34 +7911,90 @@
           <a:noFill/>
         </p:spPr>
         <p:txBody>
+          <a:bodyPr wrap="none">
+            <a:spAutoFit/>
+          </a:bodyPr>
+          <a:lstStyle/>
+          <a:p>
+            <a:pPr>
+              <a:defRPr sz="2000" b="1">
+                <a:solidFill>
+                  <a:srgbClr val="1F2D5A"/>
+                </a:solidFill>
+              </a:defRPr>
+            </a:pPr>
+            <a:r>
+              <a:t>Frustrated FM 固有吸引子</a:t>
+            </a:r>
+          </a:p>
+        </p:txBody>
+      </p:sp>
+      <p:sp>
+        <p:nvSpPr>
+          <p:cNvPr id="3" name="TextBox 2"/>
+          <p:cNvSpPr txBox="1"/>
+          <p:nvPr/>
+        </p:nvSpPr>
+        <p:spPr>
+          <a:xfrm>
+            <a:off x="457200" y="1097280"/>
+            <a:ext cx="11247120" cy="4937760"/>
+          </a:xfrm>
+          <a:prstGeom prst="rect">
+            <a:avLst/>
+          </a:prstGeom>
+          <a:noFill/>
+        </p:spPr>
+        <p:txBody>
           <a:bodyPr wrap="square">
             <a:spAutoFit/>
           </a:bodyPr>
           <a:lstStyle/>
           <a:p>
             <a:pPr>
-              <a:defRPr sz="2000" b="1">
-                <a:solidFill>
-                  <a:srgbClr val="1F2D5A"/>
-                </a:solidFill>
-              </a:defRPr>
-            </a:pPr>
-            <a:r>
-              <a:t>P6 — Frustrated FM 固有吸引子</a:t>
-            </a:r>
-          </a:p>
-        </p:txBody>
-      </p:sp>
-      <p:sp>
-        <p:nvSpPr>
-          <p:cNvPr id="3" name="TextBox 2"/>
+              <a:defRPr sz="2000">
+                <a:solidFill>
+                  <a:srgbClr val="202020"/>
+                </a:solidFill>
+              </a:defRPr>
+            </a:pPr>
+            <a:r>
+              <a:t>无 DMI 体系，参数：100³ 格点 / 0.5 nm cell / PBC(1,1,1) / Ms=1.5e5 / Aex=5e-12 / J2=-0.164·J1 / J4=-0.082·J1。</a:t>
+            </a:r>
+          </a:p>
+          <a:p>
+            <a:pPr>
+              <a:defRPr sz="2000">
+                <a:solidFill>
+                  <a:srgbClr val="202020"/>
+                </a:solidFill>
+              </a:defRPr>
+            </a:pPr>
+          </a:p>
+          <a:p>
+            <a:pPr>
+              <a:defRPr sz="2000">
+                <a:solidFill>
+                  <a:srgbClr val="202020"/>
+                </a:solidFill>
+              </a:defRPr>
+            </a:pPr>
+            <a:r>
+              <a:t>size_sweep 两次实验：R8r4 初始 + R12r5 初始，Ku=0 下分别弛豫。两者都收敛到同一吸引子 R=2.60 nm。R12r5 收缩到 R=2.60，R8r4 膨胀到 R=2.60。说明体系存在唯一的固有 Hopfion 尺寸。</a:t>
+            </a:r>
+          </a:p>
+        </p:txBody>
+      </p:sp>
+      <p:sp>
+        <p:nvSpPr>
+          <p:cNvPr id="4" name="TextBox 3"/>
           <p:cNvSpPr txBox="1"/>
           <p:nvPr/>
         </p:nvSpPr>
         <p:spPr>
           <a:xfrm>
-            <a:off x="457200" y="1097280"/>
-            <a:ext cx="11247120" cy="5303520"/>
+            <a:off x="4572000" y="6355080"/>
+            <a:ext cx="7315200" cy="365760"/>
           </a:xfrm>
           <a:prstGeom prst="rect">
             <a:avLst/>
@@ -7671,57 +8007,15 @@
           </a:bodyPr>
           <a:lstStyle/>
           <a:p>
-            <a:pPr>
-              <a:defRPr sz="2000">
-                <a:solidFill>
-                  <a:srgbClr val="202020"/>
-                </a:solidFill>
-              </a:defRPr>
-            </a:pPr>
-            <a:r>
-              <a:t>无 DMI 体系，参数：100³ 格点 / 0.5 nm cell / PBC(1,1,1) / Ms=1.5e5 / Aex=5e-12 / J2=-0.164·J1 / J4=-0.082·J1。</a:t>
-            </a:r>
-          </a:p>
-          <a:p>
-            <a:pPr>
-              <a:defRPr sz="2000">
-                <a:solidFill>
-                  <a:srgbClr val="202020"/>
-                </a:solidFill>
-              </a:defRPr>
-            </a:pPr>
-          </a:p>
-          <a:p>
-            <a:pPr>
-              <a:defRPr sz="2000">
-                <a:solidFill>
-                  <a:srgbClr val="202020"/>
-                </a:solidFill>
-              </a:defRPr>
-            </a:pPr>
-            <a:r>
-              <a:t>size_sweep 两次实验：R8r4 初始 + R12r5 初始，Ku=0 下分别弛豫。两者都收敛到同一吸引子 R=2.60 nm。R12r5 收缩到 R=2.60，R8r4 膨胀到 R=2.60。说明体系存在唯一的固有 Hopfion 尺寸。</a:t>
-            </a:r>
-          </a:p>
-          <a:p>
-            <a:pPr>
-              <a:defRPr sz="2000">
-                <a:solidFill>
-                  <a:srgbClr val="202020"/>
-                </a:solidFill>
-              </a:defRPr>
-            </a:pPr>
-          </a:p>
-          <a:p>
-            <a:pPr>
-              <a:defRPr sz="2000">
-                <a:solidFill>
-                  <a:srgbClr val="202020"/>
-                </a:solidFill>
-              </a:defRPr>
-            </a:pPr>
-            <a:r>
-              <a:t>无图（可加 bishe fig3-3_size_convergence）。来源：`20260105_frustrated_fm/size_sweep/`</a:t>
+            <a:pPr algn="r">
+              <a:defRPr sz="1000" i="1">
+                <a:solidFill>
+                  <a:srgbClr val="808080"/>
+                </a:solidFill>
+              </a:defRPr>
+            </a:pPr>
+            <a:r>
+              <a:t>来源：`20260105_frustrated_fm/size_sweep/`</a:t>
             </a:r>
           </a:p>
         </p:txBody>
@@ -7761,34 +8055,159 @@
           <a:noFill/>
         </p:spPr>
         <p:txBody>
+          <a:bodyPr wrap="none">
+            <a:spAutoFit/>
+          </a:bodyPr>
+          <a:lstStyle/>
+          <a:p>
+            <a:pPr>
+              <a:defRPr sz="2000" b="1">
+                <a:solidFill>
+                  <a:srgbClr val="1F2D5A"/>
+                </a:solidFill>
+              </a:defRPr>
+            </a:pPr>
+            <a:r>
+              <a:t>Frustrated FM 居中稳态（三组 Ku）</a:t>
+            </a:r>
+          </a:p>
+        </p:txBody>
+      </p:sp>
+      <p:sp>
+        <p:nvSpPr>
+          <p:cNvPr id="3" name="TextBox 2"/>
+          <p:cNvSpPr txBox="1"/>
+          <p:nvPr/>
+        </p:nvSpPr>
+        <p:spPr>
+          <a:xfrm>
+            <a:off x="457200" y="1097280"/>
+            <a:ext cx="11247120" cy="4937760"/>
+          </a:xfrm>
+          <a:prstGeom prst="rect">
+            <a:avLst/>
+          </a:prstGeom>
+          <a:noFill/>
+        </p:spPr>
+        <p:txBody>
           <a:bodyPr wrap="square">
             <a:spAutoFit/>
           </a:bodyPr>
           <a:lstStyle/>
           <a:p>
             <a:pPr>
-              <a:defRPr sz="2000" b="1">
-                <a:solidFill>
-                  <a:srgbClr val="1F2D5A"/>
-                </a:solidFill>
-              </a:defRPr>
-            </a:pPr>
-            <a:r>
-              <a:t>P7 — Frustrated FM 居中稳态（三组 Ku）</a:t>
-            </a:r>
-          </a:p>
-        </p:txBody>
-      </p:sp>
-      <p:sp>
-        <p:nvSpPr>
-          <p:cNvPr id="3" name="TextBox 2"/>
+              <a:defRPr sz="2000">
+                <a:solidFill>
+                  <a:srgbClr val="202020"/>
+                </a:solidFill>
+              </a:defRPr>
+            </a:pPr>
+            <a:r>
+              <a:t>centered_stability_test：把 Hopfion 平移到盒子中心，验证不同 Ku 下的居中稳态。</a:t>
+            </a:r>
+          </a:p>
+          <a:p>
+            <a:pPr>
+              <a:defRPr sz="2000">
+                <a:solidFill>
+                  <a:srgbClr val="202020"/>
+                </a:solidFill>
+              </a:defRPr>
+            </a:pPr>
+          </a:p>
+          <a:p>
+            <a:pPr>
+              <a:defRPr sz="2000">
+                <a:solidFill>
+                  <a:srgbClr val="202020"/>
+                </a:solidFill>
+              </a:defRPr>
+            </a:pPr>
+            <a:r>
+              <a:t>| 配置 | 1ns z 漂移 | 结果 |</a:t>
+            </a:r>
+          </a:p>
+          <a:p>
+            <a:pPr>
+              <a:defRPr sz="2000">
+                <a:solidFill>
+                  <a:srgbClr val="202020"/>
+                </a:solidFill>
+              </a:defRPr>
+            </a:pPr>
+            <a:r>
+              <a:t>|---|---|---|</a:t>
+            </a:r>
+          </a:p>
+          <a:p>
+            <a:pPr>
+              <a:defRPr sz="2000">
+                <a:solidFill>
+                  <a:srgbClr val="202020"/>
+                </a:solidFill>
+              </a:defRPr>
+            </a:pPr>
+            <a:r>
+              <a:t>| Ku=0 | +0.70 nm | PASS（呼吸模式）|</a:t>
+            </a:r>
+          </a:p>
+          <a:p>
+            <a:pPr>
+              <a:defRPr sz="2000">
+                <a:solidFill>
+                  <a:srgbClr val="202020"/>
+                </a:solidFill>
+              </a:defRPr>
+            </a:pPr>
+            <a:r>
+              <a:t>| Ku=10k | -0.019 nm | PASS（最稳，选为 SW 初始态）|</a:t>
+            </a:r>
+          </a:p>
+          <a:p>
+            <a:pPr>
+              <a:defRPr sz="2000">
+                <a:solidFill>
+                  <a:srgbClr val="202020"/>
+                </a:solidFill>
+              </a:defRPr>
+            </a:pPr>
+            <a:r>
+              <a:t>| Ku=50k | +0.062 nm | PASS |</a:t>
+            </a:r>
+          </a:p>
+          <a:p>
+            <a:pPr>
+              <a:defRPr sz="2000">
+                <a:solidFill>
+                  <a:srgbClr val="202020"/>
+                </a:solidFill>
+              </a:defRPr>
+            </a:pPr>
+          </a:p>
+          <a:p>
+            <a:pPr>
+              <a:defRPr sz="2000">
+                <a:solidFill>
+                  <a:srgbClr val="202020"/>
+                </a:solidFill>
+              </a:defRPr>
+            </a:pPr>
+            <a:r>
+              <a:t>判定：1 ns z-center 漂移 &lt;2 nm。三组全过。Ku=10k 输出 m000020.ovf 作为后续自旋波动力学全部仿真的公共初始态。</a:t>
+            </a:r>
+          </a:p>
+        </p:txBody>
+      </p:sp>
+      <p:sp>
+        <p:nvSpPr>
+          <p:cNvPr id="4" name="TextBox 3"/>
           <p:cNvSpPr txBox="1"/>
           <p:nvPr/>
         </p:nvSpPr>
         <p:spPr>
           <a:xfrm>
-            <a:off x="457200" y="1097280"/>
-            <a:ext cx="11247120" cy="5303520"/>
+            <a:off x="4572000" y="6355080"/>
+            <a:ext cx="7315200" cy="365760"/>
           </a:xfrm>
           <a:prstGeom prst="rect">
             <a:avLst/>
@@ -7801,126 +8220,15 @@
           </a:bodyPr>
           <a:lstStyle/>
           <a:p>
-            <a:pPr>
-              <a:defRPr sz="2000">
-                <a:solidFill>
-                  <a:srgbClr val="202020"/>
-                </a:solidFill>
-              </a:defRPr>
-            </a:pPr>
-            <a:r>
-              <a:t>centered_stability_test：把 Hopfion 平移到盒子中心，验证不同 Ku 下的居中稳态。</a:t>
-            </a:r>
-          </a:p>
-          <a:p>
-            <a:pPr>
-              <a:defRPr sz="2000">
-                <a:solidFill>
-                  <a:srgbClr val="202020"/>
-                </a:solidFill>
-              </a:defRPr>
-            </a:pPr>
-          </a:p>
-          <a:p>
-            <a:pPr>
-              <a:defRPr sz="2000">
-                <a:solidFill>
-                  <a:srgbClr val="202020"/>
-                </a:solidFill>
-              </a:defRPr>
-            </a:pPr>
-            <a:r>
-              <a:t>| 配置 | 1ns z 漂移 | 结果 |</a:t>
-            </a:r>
-          </a:p>
-          <a:p>
-            <a:pPr>
-              <a:defRPr sz="2000">
-                <a:solidFill>
-                  <a:srgbClr val="202020"/>
-                </a:solidFill>
-              </a:defRPr>
-            </a:pPr>
-            <a:r>
-              <a:t>|---|---|---|</a:t>
-            </a:r>
-          </a:p>
-          <a:p>
-            <a:pPr>
-              <a:defRPr sz="2000">
-                <a:solidFill>
-                  <a:srgbClr val="202020"/>
-                </a:solidFill>
-              </a:defRPr>
-            </a:pPr>
-            <a:r>
-              <a:t>| Ku=0 | +0.70 nm | PASS（呼吸模式）|</a:t>
-            </a:r>
-          </a:p>
-          <a:p>
-            <a:pPr>
-              <a:defRPr sz="2000">
-                <a:solidFill>
-                  <a:srgbClr val="202020"/>
-                </a:solidFill>
-              </a:defRPr>
-            </a:pPr>
-            <a:r>
-              <a:t>| Ku=10k | -0.019 nm | PASS（最稳，选为 SW 初始态）|</a:t>
-            </a:r>
-          </a:p>
-          <a:p>
-            <a:pPr>
-              <a:defRPr sz="2000">
-                <a:solidFill>
-                  <a:srgbClr val="202020"/>
-                </a:solidFill>
-              </a:defRPr>
-            </a:pPr>
-            <a:r>
-              <a:t>| Ku=50k | +0.062 nm | PASS |</a:t>
-            </a:r>
-          </a:p>
-          <a:p>
-            <a:pPr>
-              <a:defRPr sz="2000">
-                <a:solidFill>
-                  <a:srgbClr val="202020"/>
-                </a:solidFill>
-              </a:defRPr>
-            </a:pPr>
-          </a:p>
-          <a:p>
-            <a:pPr>
-              <a:defRPr sz="2000">
-                <a:solidFill>
-                  <a:srgbClr val="202020"/>
-                </a:solidFill>
-              </a:defRPr>
-            </a:pPr>
-            <a:r>
-              <a:t>判定：1 ns z-center 漂移 &lt;2 nm。三组全过。Ku=10k 输出 m000020.ovf 作为后续自旋波动力学全部仿真的公共初始态。</a:t>
-            </a:r>
-          </a:p>
-          <a:p>
-            <a:pPr>
-              <a:defRPr sz="2000">
-                <a:solidFill>
-                  <a:srgbClr val="202020"/>
-                </a:solidFill>
-              </a:defRPr>
-            </a:pPr>
-          </a:p>
-          <a:p>
-            <a:pPr>
-              <a:defRPr sz="2000">
-                <a:solidFill>
-                  <a:srgbClr val="202020"/>
-                </a:solidFill>
-              </a:defRPr>
-            </a:pPr>
-            <a:r>
-              <a:t>无图。来源：`20260105_frustrated_fm/centered_stability_test/`</a:t>
+            <a:pPr algn="r">
+              <a:defRPr sz="1000" i="1">
+                <a:solidFill>
+                  <a:srgbClr val="808080"/>
+                </a:solidFill>
+              </a:defRPr>
+            </a:pPr>
+            <a:r>
+              <a:t>来源：`20260105_frustrated_fm/centered_stability_test/`</a:t>
             </a:r>
           </a:p>
         </p:txBody>
@@ -7960,47 +8268,47 @@
           <a:noFill/>
         </p:spPr>
         <p:txBody>
+          <a:bodyPr wrap="none">
+            <a:spAutoFit/>
+          </a:bodyPr>
+          <a:lstStyle/>
+          <a:p>
+            <a:pPr>
+              <a:defRPr sz="2000" b="1">
+                <a:solidFill>
+                  <a:srgbClr val="1F2D5A"/>
+                </a:solidFill>
+              </a:defRPr>
+            </a:pPr>
+            <a:r>
+              <a:t>Ku 临界扫描（13 点）</a:t>
+            </a:r>
+          </a:p>
+        </p:txBody>
+      </p:sp>
+      <p:sp>
+        <p:nvSpPr>
+          <p:cNvPr id="3" name="TextBox 2"/>
+          <p:cNvSpPr txBox="1"/>
+          <p:nvPr/>
+        </p:nvSpPr>
+        <p:spPr>
+          <a:xfrm>
+            <a:off x="457200" y="1097280"/>
+            <a:ext cx="6858000" cy="4937760"/>
+          </a:xfrm>
+          <a:prstGeom prst="rect">
+            <a:avLst/>
+          </a:prstGeom>
+          <a:noFill/>
+        </p:spPr>
+        <p:txBody>
           <a:bodyPr wrap="square">
             <a:spAutoFit/>
           </a:bodyPr>
           <a:lstStyle/>
           <a:p>
             <a:pPr>
-              <a:defRPr sz="2000" b="1">
-                <a:solidFill>
-                  <a:srgbClr val="1F2D5A"/>
-                </a:solidFill>
-              </a:defRPr>
-            </a:pPr>
-            <a:r>
-              <a:t>P8 — Ku 临界扫描（13 点）</a:t>
-            </a:r>
-          </a:p>
-        </p:txBody>
-      </p:sp>
-      <p:sp>
-        <p:nvSpPr>
-          <p:cNvPr id="3" name="TextBox 2"/>
-          <p:cNvSpPr txBox="1"/>
-          <p:nvPr/>
-        </p:nvSpPr>
-        <p:spPr>
-          <a:xfrm>
-            <a:off x="457200" y="1097280"/>
-            <a:ext cx="6858000" cy="5303520"/>
-          </a:xfrm>
-          <a:prstGeom prst="rect">
-            <a:avLst/>
-          </a:prstGeom>
-          <a:noFill/>
-        </p:spPr>
-        <p:txBody>
-          <a:bodyPr wrap="square">
-            <a:spAutoFit/>
-          </a:bodyPr>
-          <a:lstStyle/>
-          <a:p>
-            <a:pPr>
               <a:defRPr sz="2000">
                 <a:solidFill>
                   <a:srgbClr val="202020"/>
@@ -8030,27 +8338,6 @@
             </a:pPr>
             <a:r>
               <a:t>现象 + 结论：Ku 增大 Hopfion 单调收缩。R8r4 体系下，约 52–55 k 区间 Hopfion 结构坍塌。具体临界值 Ku_c 因材料体系而异（R3r2、R12r5 各不同），非研究优先级。</a:t>
-            </a:r>
-          </a:p>
-          <a:p>
-            <a:pPr>
-              <a:defRPr sz="2000">
-                <a:solidFill>
-                  <a:srgbClr val="202020"/>
-                </a:solidFill>
-              </a:defRPr>
-            </a:pPr>
-          </a:p>
-          <a:p>
-            <a:pPr>
-              <a:defRPr sz="2000">
-                <a:solidFill>
-                  <a:srgbClr val="202020"/>
-                </a:solidFill>
-              </a:defRPr>
-            </a:pPr>
-            <a:r>
-              <a:t>来源：`20260105_frustrated_fm/anisotropy_study/ku_critical_sweep/`</a:t>
             </a:r>
           </a:p>
         </p:txBody>
@@ -8079,6 +8366,41 @@
           </a:prstGeom>
         </p:spPr>
       </p:pic>
+      <p:sp>
+        <p:nvSpPr>
+          <p:cNvPr id="5" name="TextBox 4"/>
+          <p:cNvSpPr txBox="1"/>
+          <p:nvPr/>
+        </p:nvSpPr>
+        <p:spPr>
+          <a:xfrm>
+            <a:off x="4572000" y="6355080"/>
+            <a:ext cx="7315200" cy="365760"/>
+          </a:xfrm>
+          <a:prstGeom prst="rect">
+            <a:avLst/>
+          </a:prstGeom>
+          <a:noFill/>
+        </p:spPr>
+        <p:txBody>
+          <a:bodyPr wrap="square">
+            <a:spAutoFit/>
+          </a:bodyPr>
+          <a:lstStyle/>
+          <a:p>
+            <a:pPr algn="r">
+              <a:defRPr sz="1000" i="1">
+                <a:solidFill>
+                  <a:srgbClr val="808080"/>
+                </a:solidFill>
+              </a:defRPr>
+            </a:pPr>
+            <a:r>
+              <a:t>来源：`20260105_frustrated_fm/anisotropy_study/ku_critical_sweep/`</a:t>
+            </a:r>
+          </a:p>
+        </p:txBody>
+      </p:sp>
     </p:spTree>
   </p:cSld>
   <p:clrMapOvr>
@@ -8114,34 +8436,90 @@
           <a:noFill/>
         </p:spPr>
         <p:txBody>
+          <a:bodyPr wrap="none">
+            <a:spAutoFit/>
+          </a:bodyPr>
+          <a:lstStyle/>
+          <a:p>
+            <a:pPr>
+              <a:defRPr sz="2000" b="1">
+                <a:solidFill>
+                  <a:srgbClr val="1F2D5A"/>
+                </a:solidFill>
+              </a:defRPr>
+            </a:pPr>
+            <a:r>
+              <a:t>size_vs_ku + 拓扑荷 Q_H=1 验证</a:t>
+            </a:r>
+          </a:p>
+        </p:txBody>
+      </p:sp>
+      <p:sp>
+        <p:nvSpPr>
+          <p:cNvPr id="3" name="TextBox 2"/>
+          <p:cNvSpPr txBox="1"/>
+          <p:nvPr/>
+        </p:nvSpPr>
+        <p:spPr>
+          <a:xfrm>
+            <a:off x="457200" y="1097280"/>
+            <a:ext cx="11247120" cy="4937760"/>
+          </a:xfrm>
+          <a:prstGeom prst="rect">
+            <a:avLst/>
+          </a:prstGeom>
+          <a:noFill/>
+        </p:spPr>
+        <p:txBody>
           <a:bodyPr wrap="square">
             <a:spAutoFit/>
           </a:bodyPr>
           <a:lstStyle/>
           <a:p>
             <a:pPr>
-              <a:defRPr sz="2000" b="1">
-                <a:solidFill>
-                  <a:srgbClr val="1F2D5A"/>
-                </a:solidFill>
-              </a:defRPr>
-            </a:pPr>
-            <a:r>
-              <a:t>P9 — size_vs_ku + 拓扑荷 Q_H=1 验证</a:t>
-            </a:r>
-          </a:p>
-        </p:txBody>
-      </p:sp>
-      <p:sp>
-        <p:nvSpPr>
-          <p:cNvPr id="3" name="TextBox 2"/>
+              <a:defRPr sz="2000">
+                <a:solidFill>
+                  <a:srgbClr val="202020"/>
+                </a:solidFill>
+              </a:defRPr>
+            </a:pPr>
+            <a:r>
+              <a:t>anisotropy_study/size_vs_ku：R12r5 起始，扫描 Ku=0 / 2.5k / 5k / 10k / 12k 等共 6 个点，研究 R(Ku) 依赖关系。与 ku_critical_sweep 互补。</a:t>
+            </a:r>
+          </a:p>
+          <a:p>
+            <a:pPr>
+              <a:defRPr sz="2000">
+                <a:solidFill>
+                  <a:srgbClr val="202020"/>
+                </a:solidFill>
+              </a:defRPr>
+            </a:pPr>
+          </a:p>
+          <a:p>
+            <a:pPr>
+              <a:defRPr sz="2000">
+                <a:solidFill>
+                  <a:srgbClr val="202020"/>
+                </a:solidFill>
+              </a:defRPr>
+            </a:pPr>
+            <a:r>
+              <a:t>compute_hopf_index.py 对当前体系所有 Hopfion 初始态做 Q_H 数值验证：结果均为 Q_H=1。Q_H=2 (p=1,q=2) 和 Q_H=4 在 frustrated FM 体系下的稳定性从未仿真，是下一步方向。</a:t>
+            </a:r>
+          </a:p>
+        </p:txBody>
+      </p:sp>
+      <p:sp>
+        <p:nvSpPr>
+          <p:cNvPr id="4" name="TextBox 3"/>
           <p:cNvSpPr txBox="1"/>
           <p:nvPr/>
         </p:nvSpPr>
         <p:spPr>
           <a:xfrm>
-            <a:off x="457200" y="1097280"/>
-            <a:ext cx="11247120" cy="5303520"/>
+            <a:off x="4572000" y="6355080"/>
+            <a:ext cx="7315200" cy="365760"/>
           </a:xfrm>
           <a:prstGeom prst="rect">
             <a:avLst/>
@@ -8154,57 +8532,15 @@
           </a:bodyPr>
           <a:lstStyle/>
           <a:p>
-            <a:pPr>
-              <a:defRPr sz="2000">
-                <a:solidFill>
-                  <a:srgbClr val="202020"/>
-                </a:solidFill>
-              </a:defRPr>
-            </a:pPr>
-            <a:r>
-              <a:t>anisotropy_study/size_vs_ku：R12r5 起始，扫描 Ku=0 / 2.5k / 5k / 10k / 12k 等共 6 个点，研究 R(Ku) 依赖关系。与 ku_critical_sweep 互补。</a:t>
-            </a:r>
-          </a:p>
-          <a:p>
-            <a:pPr>
-              <a:defRPr sz="2000">
-                <a:solidFill>
-                  <a:srgbClr val="202020"/>
-                </a:solidFill>
-              </a:defRPr>
-            </a:pPr>
-          </a:p>
-          <a:p>
-            <a:pPr>
-              <a:defRPr sz="2000">
-                <a:solidFill>
-                  <a:srgbClr val="202020"/>
-                </a:solidFill>
-              </a:defRPr>
-            </a:pPr>
-            <a:r>
-              <a:t>compute_hopf_index.py 对当前体系所有 Hopfion 初始态做 Q_H 数值验证：结果均为 Q_H=1。Q_H=2 (p=1,q=2) 和 Q_H=4 在 frustrated FM 体系下的稳定性从未仿真，是下一步方向。</a:t>
-            </a:r>
-          </a:p>
-          <a:p>
-            <a:pPr>
-              <a:defRPr sz="2000">
-                <a:solidFill>
-                  <a:srgbClr val="202020"/>
-                </a:solidFill>
-              </a:defRPr>
-            </a:pPr>
-          </a:p>
-          <a:p>
-            <a:pPr>
-              <a:defRPr sz="2000">
-                <a:solidFill>
-                  <a:srgbClr val="202020"/>
-                </a:solidFill>
-              </a:defRPr>
-            </a:pPr>
-            <a:r>
-              <a:t>无图。来源：`20260105_frustrated_fm/anisotropy_study/size_vs_ku/` + `compute_hopf_index.py`</a:t>
+            <a:pPr algn="r">
+              <a:defRPr sz="1000" i="1">
+                <a:solidFill>
+                  <a:srgbClr val="808080"/>
+                </a:solidFill>
+              </a:defRPr>
+            </a:pPr>
+            <a:r>
+              <a:t>来源：`20260105_frustrated_fm/anisotropy_study/size_vs_ku/` + `compute_hopf_index.py`</a:t>
             </a:r>
           </a:p>
         </p:txBody>

--- a/presentation/talk.pptx
+++ b/presentation/talk.pptx
@@ -28,12 +28,6 @@
     <p:sldId id="276" r:id="rId27"/>
     <p:sldId id="277" r:id="rId28"/>
     <p:sldId id="278" r:id="rId29"/>
-    <p:sldId id="279" r:id="rId30"/>
-    <p:sldId id="280" r:id="rId31"/>
-    <p:sldId id="281" r:id="rId32"/>
-    <p:sldId id="282" r:id="rId33"/>
-    <p:sldId id="283" r:id="rId34"/>
-    <p:sldId id="284" r:id="rId35"/>
   </p:sldIdLst>
   <p:sldSz cx="12188952" cy="6858000" type="screen4x3"/>
   <p:notesSz cx="6858000" cy="9144000"/>
@@ -3146,7 +3140,7 @@
               </a:defRPr>
             </a:pPr>
             <a:r>
-              <a:t>DMI-FM Hopfion 成功稳定</a:t>
+              <a:t>Frustrated FM 稳态尺寸</a:t>
             </a:r>
           </a:p>
         </p:txBody>
@@ -3160,7 +3154,7 @@
         <p:spPr>
           <a:xfrm>
             <a:off x="457200" y="1097280"/>
-            <a:ext cx="6858000" cy="4937760"/>
+            <a:ext cx="11247120" cy="4937760"/>
           </a:xfrm>
           <a:prstGeom prst="rect">
             <a:avLst/>
@@ -3181,59 +3175,56 @@
               </a:defRPr>
             </a:pPr>
             <a:r>
-              <a:t>在 FeGe 体系下，用 Sutcliffe 解析初始态作为种子，结合顶底层 frozenspins 强制 mz=±1 边界，并开启退磁场，Bloch Hopfion 在 d=210 nm (3λ)、h=70 nm (λ) 盘几何中 2 ns 演化保持稳定。三个条件缺一不可：缺 Sutcliffe 初态收敛失败；缺 frozenspins 被表面磁化吃掉；缺退磁场 MAP 态比 Hopfion 能量更低、跃迁掉。</a:t>
-            </a:r>
-          </a:p>
-          <a:p>
-            <a:pPr>
-              <a:defRPr sz="2000">
-                <a:solidFill>
-                  <a:srgbClr val="202020"/>
-                </a:solidFill>
-              </a:defRPr>
-            </a:pPr>
-          </a:p>
-          <a:p>
-            <a:pPr>
-              <a:defRPr sz="2000">
-                <a:solidFill>
-                  <a:srgbClr val="202020"/>
-                </a:solidFill>
-              </a:defRPr>
-            </a:pPr>
-            <a:r>
-              <a:t>材料参数：Msat=384e3, Aex=8.78e-12, Dbulk=1.58e-3, λ=70 nm。</a:t>
-            </a:r>
-          </a:p>
-        </p:txBody>
-      </p:sp>
-      <p:pic>
-        <p:nvPicPr>
-          <p:cNvPr id="4" name="Picture 3" descr="dmi_fm_stable.png"/>
-          <p:cNvPicPr>
-            <a:picLocks noChangeAspect="1"/>
-          </p:cNvPicPr>
-          <p:nvPr/>
-        </p:nvPicPr>
-        <p:blipFill>
-          <a:blip r:embed="rId2"/>
-          <a:stretch>
-            <a:fillRect/>
-          </a:stretch>
-        </p:blipFill>
-        <p:spPr>
-          <a:xfrm>
-            <a:off x="7589520" y="1280160"/>
-            <a:ext cx="4297680" cy="1710301"/>
-          </a:xfrm>
-          <a:prstGeom prst="rect">
-            <a:avLst/>
-          </a:prstGeom>
-        </p:spPr>
-      </p:pic>
-      <p:sp>
-        <p:nvSpPr>
-          <p:cNvPr id="5" name="TextBox 4"/>
+              <a:t>无 DMI 体系，参数：100³ 格点 / 0.5 nm cell / PBC(1,1,1) / Ms=1.5e5 / Aex=5e-12 / J2=-0.164·J1 / J4=-0.082·J1。</a:t>
+            </a:r>
+          </a:p>
+          <a:p>
+            <a:pPr>
+              <a:defRPr sz="2000">
+                <a:solidFill>
+                  <a:srgbClr val="202020"/>
+                </a:solidFill>
+              </a:defRPr>
+            </a:pPr>
+          </a:p>
+          <a:p>
+            <a:pPr>
+              <a:defRPr sz="2000">
+                <a:solidFill>
+                  <a:srgbClr val="202020"/>
+                </a:solidFill>
+              </a:defRPr>
+            </a:pPr>
+            <a:r>
+              <a:t>size_sweep 两次实验：R8r4 初始 + R12r5 初始，Ku=0 下分别弛豫。两者都收敛到相同的稳态尺寸 R=2.60 nm。R12r5 收缩到 R=2.60，R8r4 膨胀到 R=2.60。</a:t>
+            </a:r>
+          </a:p>
+          <a:p>
+            <a:pPr>
+              <a:defRPr sz="2000">
+                <a:solidFill>
+                  <a:srgbClr val="202020"/>
+                </a:solidFill>
+              </a:defRPr>
+            </a:pPr>
+          </a:p>
+          <a:p>
+            <a:pPr>
+              <a:defRPr sz="2000">
+                <a:solidFill>
+                  <a:srgbClr val="202020"/>
+                </a:solidFill>
+              </a:defRPr>
+            </a:pPr>
+            <a:r>
+              <a:t>稳态尺寸由材料体系参数（Ku, J2/J4, Aex, Ms）决定，与初态尺寸无关。换材料体系则稳态值漂移。</a:t>
+            </a:r>
+          </a:p>
+        </p:txBody>
+      </p:sp>
+      <p:sp>
+        <p:nvSpPr>
+          <p:cNvPr id="4" name="TextBox 3"/>
           <p:cNvSpPr txBox="1"/>
           <p:nvPr/>
         </p:nvSpPr>
@@ -3261,7 +3252,7 @@
               </a:defRPr>
             </a:pPr>
             <a:r>
-              <a:t>来源：`20251219_dmi_fm/successful_simulation/run_analytic_relax.out/`</a:t>
+              <a:t>来源：`20260105_frustrated_fm/size_sweep/`</a:t>
             </a:r>
           </a:p>
         </p:txBody>
@@ -3314,7 +3305,7 @@
               </a:defRPr>
             </a:pPr>
             <a:r>
-              <a:t>漂移旧实验</a:t>
+              <a:t>srcX 幅度扫描 @440 GHz（旧标度律已推翻）</a:t>
             </a:r>
           </a:p>
         </p:txBody>
@@ -3328,7 +3319,7 @@
         <p:spPr>
           <a:xfrm>
             <a:off x="457200" y="1097280"/>
-            <a:ext cx="11247120" cy="4937760"/>
+            <a:ext cx="6858000" cy="4937760"/>
           </a:xfrm>
           <a:prstGeom prst="rect">
             <a:avLst/>
@@ -3349,59 +3340,161 @@
               </a:defRPr>
             </a:pPr>
             <a:r>
-              <a:t>drift_experiments 旧实验：</a:t>
-            </a:r>
-          </a:p>
-          <a:p>
-            <a:pPr>
-              <a:defRPr sz="2000">
-                <a:solidFill>
-                  <a:srgbClr val="202020"/>
-                </a:solidFill>
-              </a:defRPr>
-            </a:pPr>
-            <a:r>
-              <a:t>- bg_mx_axis_x_stable：alpha=5.0, R8r4, 10 ns 长跑，200 帧</a:t>
-            </a:r>
-          </a:p>
-          <a:p>
-            <a:pPr>
-              <a:defRPr sz="2000">
-                <a:solidFill>
-                  <a:srgbClr val="202020"/>
-                </a:solidFill>
-              </a:defRPr>
-            </a:pPr>
-            <a:r>
-              <a:t>- bg_my_axis_y_stable：1 ns 短跑，20 帧</a:t>
-            </a:r>
-          </a:p>
-          <a:p>
-            <a:pPr>
-              <a:defRPr sz="2000">
-                <a:solidFill>
-                  <a:srgbClr val="202020"/>
-                </a:solidFill>
-              </a:defRPr>
-            </a:pPr>
-          </a:p>
-          <a:p>
-            <a:pPr>
-              <a:defRPr sz="2000">
-                <a:solidFill>
-                  <a:srgbClr val="202020"/>
-                </a:solidFill>
-              </a:defRPr>
-            </a:pPr>
-            <a:r>
-              <a:t>当初结论：bg=mz 漂移、bg=mx,my 稳定。该结论已写入毕设论文 ch03 §3.2.3 早期版本。</a:t>
-            </a:r>
-          </a:p>
-        </p:txBody>
-      </p:sp>
-      <p:sp>
-        <p:nvSpPr>
-          <p:cNvPr id="4" name="TextBox 3"/>
+              <a:t>amplitude_sweep/plane_wave 6 点：B = 0.05 / 0.1 / 0.2 / 0.3 / 0.5 / 0.7 / 1.0 / 2.0 T 等。</a:t>
+            </a:r>
+          </a:p>
+          <a:p>
+            <a:pPr>
+              <a:defRPr sz="2000">
+                <a:solidFill>
+                  <a:srgbClr val="202020"/>
+                </a:solidFill>
+              </a:defRPr>
+            </a:pPr>
+          </a:p>
+          <a:p>
+            <a:pPr>
+              <a:defRPr sz="2000">
+                <a:solidFill>
+                  <a:srgbClr val="202020"/>
+                </a:solidFill>
+              </a:defRPr>
+            </a:pPr>
+            <a:r>
+              <a:t>毕设原结论：v∝B¹·⁹⁹ 幂律（仅基于 B=0.5/1.0/2.0 T 三点拟合）。</a:t>
+            </a:r>
+          </a:p>
+          <a:p>
+            <a:pPr>
+              <a:defRPr sz="2000">
+                <a:solidFill>
+                  <a:srgbClr val="202020"/>
+                </a:solidFill>
+              </a:defRPr>
+            </a:pPr>
+          </a:p>
+          <a:p>
+            <a:pPr>
+              <a:defRPr sz="2000">
+                <a:solidFill>
+                  <a:srgbClr val="202020"/>
+                </a:solidFill>
+              </a:defRPr>
+            </a:pPr>
+            <a:r>
+              <a:t>已推翻：</a:t>
+            </a:r>
+          </a:p>
+          <a:p>
+            <a:pPr>
+              <a:defRPr sz="2000">
+                <a:solidFill>
+                  <a:srgbClr val="202020"/>
+                </a:solidFill>
+              </a:defRPr>
+            </a:pPr>
+            <a:r>
+              <a:t>- 拟合点过少（仅 3 点）</a:t>
+            </a:r>
+          </a:p>
+          <a:p>
+            <a:pPr>
+              <a:defRPr sz="2000">
+                <a:solidFill>
+                  <a:srgbClr val="202020"/>
+                </a:solidFill>
+              </a:defRPr>
+            </a:pPr>
+            <a:r>
+              <a:t>- B≤0.2 T 数据被排除为"噪声"（|dr|&lt;0.1 nm）</a:t>
+            </a:r>
+          </a:p>
+          <a:p>
+            <a:pPr>
+              <a:defRPr sz="2000">
+                <a:solidFill>
+                  <a:srgbClr val="202020"/>
+                </a:solidFill>
+              </a:defRPr>
+            </a:pPr>
+            <a:r>
+              <a:t>- B=0.05 / 0.1 T 实际朝源运动 -z，B≥0.2 T 远离源 +z</a:t>
+            </a:r>
+          </a:p>
+          <a:p>
+            <a:pPr>
+              <a:defRPr sz="2000">
+                <a:solidFill>
+                  <a:srgbClr val="202020"/>
+                </a:solidFill>
+              </a:defRPr>
+            </a:pPr>
+            <a:r>
+              <a:t>- 方向反转阈值 Bc ∈ (0.1, 0.2) T 未精确定位</a:t>
+            </a:r>
+          </a:p>
+          <a:p>
+            <a:pPr>
+              <a:defRPr sz="2000">
+                <a:solidFill>
+                  <a:srgbClr val="202020"/>
+                </a:solidFill>
+              </a:defRPr>
+            </a:pPr>
+            <a:r>
+              <a:t>- B=5 T 高场点未验证幂律是否外推</a:t>
+            </a:r>
+          </a:p>
+          <a:p>
+            <a:pPr>
+              <a:defRPr sz="2000">
+                <a:solidFill>
+                  <a:srgbClr val="202020"/>
+                </a:solidFill>
+              </a:defRPr>
+            </a:pPr>
+          </a:p>
+          <a:p>
+            <a:pPr>
+              <a:defRPr sz="2000">
+                <a:solidFill>
+                  <a:srgbClr val="202020"/>
+                </a:solidFill>
+              </a:defRPr>
+            </a:pPr>
+            <a:r>
+              <a:t>现状：方向反转 + 幂律两个现象并存，但准确标度律和精确 Bc 都未确定。</a:t>
+            </a:r>
+          </a:p>
+        </p:txBody>
+      </p:sp>
+      <p:pic>
+        <p:nvPicPr>
+          <p:cNvPr id="4" name="Picture 3" descr="amplitude_law_failed.png"/>
+          <p:cNvPicPr>
+            <a:picLocks noChangeAspect="1"/>
+          </p:cNvPicPr>
+          <p:nvPr/>
+        </p:nvPicPr>
+        <p:blipFill>
+          <a:blip r:embed="rId2"/>
+          <a:stretch>
+            <a:fillRect/>
+          </a:stretch>
+        </p:blipFill>
+        <p:spPr>
+          <a:xfrm>
+            <a:off x="7589520" y="1280160"/>
+            <a:ext cx="4297680" cy="2626477"/>
+          </a:xfrm>
+          <a:prstGeom prst="rect">
+            <a:avLst/>
+          </a:prstGeom>
+        </p:spPr>
+      </p:pic>
+      <p:sp>
+        <p:nvSpPr>
+          <p:cNvPr id="5" name="TextBox 4"/>
           <p:cNvSpPr txBox="1"/>
           <p:nvPr/>
         </p:nvSpPr>
@@ -3429,7 +3522,7 @@
               </a:defRPr>
             </a:pPr>
             <a:r>
-              <a:t>来源：`20260105_frustrated_fm/drift_experiments/{bg_mx_axis_x_stable, bg_my_axis_y_stable}/`</a:t>
+              <a:t>来源：`20260105_frustrated_fm/spin_wave_dynamics/amplitude_sweep/plane_wave/`</a:t>
             </a:r>
           </a:p>
         </p:txBody>
@@ -3482,7 +3575,7 @@
               </a:defRPr>
             </a:pPr>
             <a:r>
-              <a:t>漂移结论推翻：unified_rerun 控制变量</a:t>
+              <a:t>srcZ 幅度扫描 @1100 GHz（cron 跑，部分数据）</a:t>
             </a:r>
           </a:p>
         </p:txBody>
@@ -3496,7 +3589,7 @@
         <p:spPr>
           <a:xfrm>
             <a:off x="457200" y="1097280"/>
-            <a:ext cx="6858000" cy="4937760"/>
+            <a:ext cx="11247120" cy="4937760"/>
           </a:xfrm>
           <a:prstGeom prst="rect">
             <a:avLst/>
@@ -3517,101 +3610,35 @@
               </a:defRPr>
             </a:pPr>
             <a:r>
-              <a:t>unified_rerun：4 组统一参数（alpha=0.2, Ku=0, R3r2, 2 ns），bg=mx/my/mz × axis 组合。</a:t>
-            </a:r>
-          </a:p>
-          <a:p>
-            <a:pPr>
-              <a:defRPr sz="2000">
-                <a:solidFill>
-                  <a:srgbClr val="202020"/>
-                </a:solidFill>
-              </a:defRPr>
-            </a:pPr>
-          </a:p>
-          <a:p>
-            <a:pPr>
-              <a:defRPr sz="2000">
-                <a:solidFill>
-                  <a:srgbClr val="202020"/>
-                </a:solidFill>
-              </a:defRPr>
-            </a:pPr>
-            <a:r>
-              <a:t>结果：4 组完全一致，bg 方向无影响。旧结论推翻。</a:t>
-            </a:r>
-          </a:p>
-          <a:p>
-            <a:pPr>
-              <a:defRPr sz="2000">
-                <a:solidFill>
-                  <a:srgbClr val="202020"/>
-                </a:solidFill>
-              </a:defRPr>
-            </a:pPr>
-          </a:p>
-          <a:p>
-            <a:pPr>
-              <a:defRPr sz="2000">
-                <a:solidFill>
-                  <a:srgbClr val="202020"/>
-                </a:solidFill>
-              </a:defRPr>
-            </a:pPr>
-            <a:r>
-              <a:t>真实机理：前 1 ns 轴向格点递举弛豫 4.75 nm，之后钉扎。漂移与背景磁化方向无关。</a:t>
-            </a:r>
-          </a:p>
-          <a:p>
-            <a:pPr>
-              <a:defRPr sz="2000">
-                <a:solidFill>
-                  <a:srgbClr val="202020"/>
-                </a:solidFill>
-              </a:defRPr>
-            </a:pPr>
-          </a:p>
-          <a:p>
-            <a:pPr>
-              <a:defRPr sz="2000">
-                <a:solidFill>
-                  <a:srgbClr val="202020"/>
-                </a:solidFill>
-              </a:defRPr>
-            </a:pPr>
-            <a:r>
-              <a:t>毕设 ch03 §3.2.3、ch06 已同步修正；fig3-4_drift_comparison.png 重新生成入论文。</a:t>
-            </a:r>
-          </a:p>
-        </p:txBody>
-      </p:sp>
-      <p:pic>
-        <p:nvPicPr>
-          <p:cNvPr id="4" name="Picture 3" descr="drift_4groups_comparison.png"/>
-          <p:cNvPicPr>
-            <a:picLocks noChangeAspect="1"/>
-          </p:cNvPicPr>
-          <p:nvPr/>
-        </p:nvPicPr>
-        <p:blipFill>
-          <a:blip r:embed="rId2"/>
-          <a:stretch>
-            <a:fillRect/>
-          </a:stretch>
-        </p:blipFill>
-        <p:spPr>
-          <a:xfrm>
-            <a:off x="7589520" y="1280160"/>
-            <a:ext cx="4297680" cy="1586288"/>
-          </a:xfrm>
-          <a:prstGeom prst="rect">
-            <a:avLst/>
-          </a:prstGeom>
-        </p:spPr>
-      </p:pic>
-      <p:sp>
-        <p:nvSpPr>
-          <p:cNvPr id="5" name="TextBox 4"/>
+              <a:t>amplitude_sweep/plane_wave_srcZ：B=0.1 / 0.5 / 1.0 / 1.5 / 2.0 T 等约 6 点 @1100 GHz cron 进行。当前数据回收状态不全，未整理分析。</a:t>
+            </a:r>
+          </a:p>
+          <a:p>
+            <a:pPr>
+              <a:defRPr sz="2000">
+                <a:solidFill>
+                  <a:srgbClr val="202020"/>
+                </a:solidFill>
+              </a:defRPr>
+            </a:pPr>
+          </a:p>
+          <a:p>
+            <a:pPr>
+              <a:defRPr sz="2000">
+                <a:solidFill>
+                  <a:srgbClr val="202020"/>
+                </a:solidFill>
+              </a:defRPr>
+            </a:pPr>
+            <a:r>
+              <a:t>在已完成 B 点上，Hopfion 沿 -z 漂移幅度大致随 B 增大。无量化标度律结论。</a:t>
+            </a:r>
+          </a:p>
+        </p:txBody>
+      </p:sp>
+      <p:sp>
+        <p:nvSpPr>
+          <p:cNvPr id="4" name="TextBox 3"/>
           <p:cNvSpPr txBox="1"/>
           <p:nvPr/>
         </p:nvSpPr>
@@ -3639,7 +3666,7 @@
               </a:defRPr>
             </a:pPr>
             <a:r>
-              <a:t>来源：`20260105_frustrated_fm/drift_experiments/unified_rerun/`（4 组 + continue）</a:t>
+              <a:t>来源：`20260105_frustrated_fm/spin_wave_dynamics/amplitude_sweep/plane_wave_srcZ/`</a:t>
             </a:r>
           </a:p>
         </p:txBody>
@@ -3692,7 +3719,7 @@
               </a:defRPr>
             </a:pPr>
             <a:r>
-              <a:t>自旋波方向选择性（5 组）</a:t>
+              <a:t>单源双向 z 控制（结论）</a:t>
             </a:r>
           </a:p>
         </p:txBody>
@@ -3706,7 +3733,7 @@
         <p:spPr>
           <a:xfrm>
             <a:off x="457200" y="1097280"/>
-            <a:ext cx="6858000" cy="4937760"/>
+            <a:ext cx="11247120" cy="4937760"/>
           </a:xfrm>
           <a:prstGeom prst="rect">
             <a:avLst/>
@@ -3727,144 +3754,52 @@
               </a:defRPr>
             </a:pPr>
             <a:r>
-              <a:t>drive_selection/plane_wave 5 次仿真：srcX×vibX, srcX×vibZ, srcY×vibX, srcZ×vibX, srcZ×vibZ。</a:t>
-            </a:r>
-          </a:p>
-          <a:p>
-            <a:pPr>
-              <a:defRPr sz="2000">
-                <a:solidFill>
-                  <a:srgbClr val="202020"/>
-                </a:solidFill>
-              </a:defRPr>
-            </a:pPr>
-          </a:p>
-          <a:p>
-            <a:pPr>
-              <a:defRPr sz="2000">
-                <a:solidFill>
-                  <a:srgbClr val="202020"/>
-                </a:solidFill>
-              </a:defRPr>
-            </a:pPr>
-            <a:r>
-              <a:t>结论：</a:t>
-            </a:r>
-          </a:p>
-          <a:p>
-            <a:pPr>
-              <a:defRPr sz="2000">
-                <a:solidFill>
-                  <a:srgbClr val="202020"/>
-                </a:solidFill>
-              </a:defRPr>
-            </a:pPr>
-            <a:r>
-              <a:t>- vibX 强耦合，vibZ 无耦合</a:t>
-            </a:r>
-          </a:p>
-          <a:p>
-            <a:pPr>
-              <a:defRPr sz="2000">
-                <a:solidFill>
-                  <a:srgbClr val="202020"/>
-                </a:solidFill>
-              </a:defRPr>
-            </a:pPr>
-            <a:r>
-              <a:t>- srcX 与 srcY 完全等价（面内对称性）</a:t>
-            </a:r>
-          </a:p>
-          <a:p>
-            <a:pPr>
-              <a:defRPr sz="2000">
-                <a:solidFill>
-                  <a:srgbClr val="202020"/>
-                </a:solidFill>
-              </a:defRPr>
-            </a:pPr>
-            <a:r>
-              <a:t>- vibZ 路径下 Hopfion 几乎不动</a:t>
-            </a:r>
-          </a:p>
-          <a:p>
-            <a:pPr>
-              <a:defRPr sz="2000">
-                <a:solidFill>
-                  <a:srgbClr val="202020"/>
-                </a:solidFill>
-              </a:defRPr>
-            </a:pPr>
-          </a:p>
-          <a:p>
-            <a:pPr>
-              <a:defRPr sz="2000">
-                <a:solidFill>
-                  <a:srgbClr val="202020"/>
-                </a:solidFill>
-              </a:defRPr>
-            </a:pPr>
-            <a:r>
-              <a:t>后续所有自旋波仿真默认 vib 方向 = X。</a:t>
-            </a:r>
-          </a:p>
-        </p:txBody>
-      </p:sp>
-      <p:pic>
-        <p:nvPicPr>
-          <p:cNvPr id="4" name="Picture 3" descr="direction_selectivity.png"/>
-          <p:cNvPicPr>
-            <a:picLocks noChangeAspect="1"/>
-          </p:cNvPicPr>
-          <p:nvPr/>
-        </p:nvPicPr>
-        <p:blipFill>
-          <a:blip r:embed="rId2"/>
-          <a:stretch>
-            <a:fillRect/>
-          </a:stretch>
-        </p:blipFill>
-        <p:spPr>
-          <a:xfrm>
-            <a:off x="7589520" y="1280160"/>
-            <a:ext cx="4297680" cy="6153752"/>
-          </a:xfrm>
-          <a:prstGeom prst="rect">
-            <a:avLst/>
-          </a:prstGeom>
-        </p:spPr>
-      </p:pic>
-      <p:sp>
-        <p:nvSpPr>
-          <p:cNvPr id="5" name="TextBox 4"/>
-          <p:cNvSpPr txBox="1"/>
-          <p:nvPr/>
-        </p:nvSpPr>
-        <p:spPr>
-          <a:xfrm>
-            <a:off x="4572000" y="6355080"/>
-            <a:ext cx="7315200" cy="365760"/>
-          </a:xfrm>
-          <a:prstGeom prst="rect">
-            <a:avLst/>
-          </a:prstGeom>
-          <a:noFill/>
-        </p:spPr>
-        <p:txBody>
-          <a:bodyPr wrap="square">
-            <a:spAutoFit/>
-          </a:bodyPr>
-          <a:lstStyle/>
-          <a:p>
-            <a:pPr algn="r">
-              <a:defRPr sz="1000" i="1">
-                <a:solidFill>
-                  <a:srgbClr val="808080"/>
-                </a:solidFill>
-              </a:defRPr>
-            </a:pPr>
-            <a:r>
-              <a:t>来源：`20260105_frustrated_fm/spin_wave_dynamics/drive_selection/plane_wave/`</a:t>
+              <a:t>综合 P8 P9：仅靠平面源、单一频率、改换激发位置，就实现 Hopfion 沿 ±z 双向运动：</a:t>
+            </a:r>
+          </a:p>
+          <a:p>
+            <a:pPr>
+              <a:defRPr sz="2000">
+                <a:solidFill>
+                  <a:srgbClr val="202020"/>
+                </a:solidFill>
+              </a:defRPr>
+            </a:pPr>
+            <a:r>
+              <a:t>- srcX → +z（垂直传播）</a:t>
+            </a:r>
+          </a:p>
+          <a:p>
+            <a:pPr>
+              <a:defRPr sz="2000">
+                <a:solidFill>
+                  <a:srgbClr val="202020"/>
+                </a:solidFill>
+              </a:defRPr>
+            </a:pPr>
+            <a:r>
+              <a:t>- srcZ → -z（沿传播）</a:t>
+            </a:r>
+          </a:p>
+          <a:p>
+            <a:pPr>
+              <a:defRPr sz="2000">
+                <a:solidFill>
+                  <a:srgbClr val="202020"/>
+                </a:solidFill>
+              </a:defRPr>
+            </a:pPr>
+          </a:p>
+          <a:p>
+            <a:pPr>
+              <a:defRPr sz="2000">
+                <a:solidFill>
+                  <a:srgbClr val="202020"/>
+                </a:solidFill>
+              </a:defRPr>
+            </a:pPr>
+            <a:r>
+              <a:t>这是后续多源 freq_switch 实验的物理基础。</a:t>
             </a:r>
           </a:p>
         </p:txBody>
@@ -3917,7 +3852,7 @@
               </a:defRPr>
             </a:pPr>
             <a:r>
-              <a:t>平面源 srcX 频率扫描（14 频率）</a:t>
+              <a:t>点源 srcX 频率扫描（10 频率）</a:t>
             </a:r>
           </a:p>
         </p:txBody>
@@ -3952,35 +3887,83 @@
               </a:defRPr>
             </a:pPr>
             <a:r>
-              <a:t>freq_sweep/plane_wave/srcX：02ns 段 10 频率（100/200/300/400/500/600/700/800/900/1000 GHz）+ 05ns 段 4 频率（100/200/500/1000 GHz）。</a:t>
-            </a:r>
-          </a:p>
-          <a:p>
-            <a:pPr>
-              <a:defRPr sz="2000">
-                <a:solidFill>
-                  <a:srgbClr val="202020"/>
-                </a:solidFill>
-              </a:defRPr>
-            </a:pPr>
-          </a:p>
-          <a:p>
-            <a:pPr>
-              <a:defRPr sz="2000">
-                <a:solidFill>
-                  <a:srgbClr val="202020"/>
-                </a:solidFill>
-              </a:defRPr>
-            </a:pPr>
-            <a:r>
-              <a:t>结论：100-200 GHz、1000 GHz 强响应；400-600 GHz 死区（位移近零）；Hopfion 沿 +z 方向运动（垂直波传播方向）。</a:t>
+              <a:t>freq_sweep/point_source/srcX：DefRegionCell(7, 30, 50, 50) 单格 0.5 nm³，B_amp=500 T（对比平面源 1 T 薄片层）。10 频率 100-1000 GHz。</a:t>
+            </a:r>
+          </a:p>
+          <a:p>
+            <a:pPr>
+              <a:defRPr sz="2000">
+                <a:solidFill>
+                  <a:srgbClr val="202020"/>
+                </a:solidFill>
+              </a:defRPr>
+            </a:pPr>
+          </a:p>
+          <a:p>
+            <a:pPr>
+              <a:defRPr sz="2000">
+                <a:solidFill>
+                  <a:srgbClr val="202020"/>
+                </a:solidFill>
+              </a:defRPr>
+            </a:pPr>
+            <a:r>
+              <a:t>结论（B 设备数据迁回 2026-04-09）：</a:t>
+            </a:r>
+          </a:p>
+          <a:p>
+            <a:pPr>
+              <a:defRPr sz="2000">
+                <a:solidFill>
+                  <a:srgbClr val="202020"/>
+                </a:solidFill>
+              </a:defRPr>
+            </a:pPr>
+            <a:r>
+              <a:t>- 最强响应：700 GHz，|dr| = 5.71 nm（vs 平面源 1000 GHz）</a:t>
+            </a:r>
+          </a:p>
+          <a:p>
+            <a:pPr>
+              <a:defRPr sz="2000">
+                <a:solidFill>
+                  <a:srgbClr val="202020"/>
+                </a:solidFill>
+              </a:defRPr>
+            </a:pPr>
+            <a:r>
+              <a:t>- 全频段 +z，与平面源 srcX 一致</a:t>
+            </a:r>
+          </a:p>
+          <a:p>
+            <a:pPr>
+              <a:defRPr sz="2000">
+                <a:solidFill>
+                  <a:srgbClr val="202020"/>
+                </a:solidFill>
+              </a:defRPr>
+            </a:pPr>
+            <a:r>
+              <a:t>- 死区消失（平面源有 400-600 GHz 死区）</a:t>
+            </a:r>
+          </a:p>
+          <a:p>
+            <a:pPr>
+              <a:defRPr sz="2000">
+                <a:solidFill>
+                  <a:srgbClr val="202020"/>
+                </a:solidFill>
+              </a:defRPr>
+            </a:pPr>
+            <a:r>
+              <a:t>- Hall 角 69-89°，保持高 Hall 角拓扑特征</a:t>
             </a:r>
           </a:p>
         </p:txBody>
       </p:sp>
       <p:pic>
         <p:nvPicPr>
-          <p:cNvPr id="4" name="Picture 3" descr="freq_response_srcX.png"/>
+          <p:cNvPr id="4" name="Picture 3" descr="point_vs_plane.png"/>
           <p:cNvPicPr>
             <a:picLocks noChangeAspect="1"/>
           </p:cNvPicPr>
@@ -3995,7 +3978,7 @@
         <p:spPr>
           <a:xfrm>
             <a:off x="7589520" y="1280160"/>
-            <a:ext cx="4297680" cy="3069771"/>
+            <a:ext cx="4297680" cy="4164043"/>
           </a:xfrm>
           <a:prstGeom prst="rect">
             <a:avLst/>
@@ -4032,7 +4015,7 @@
               </a:defRPr>
             </a:pPr>
             <a:r>
-              <a:t>来源：`20260105_frustrated_fm/spin_wave_dynamics/freq_sweep/plane_wave/srcX/{02ns, 05ns}/`</a:t>
+              <a:t>来源：`20260105_frustrated_fm/spin_wave_dynamics/freq_sweep/point_source/srcX/`</a:t>
             </a:r>
           </a:p>
         </p:txBody>
@@ -4085,7 +4068,7 @@
               </a:defRPr>
             </a:pPr>
             <a:r>
-              <a:t>平面源 srcZ 频率扫描（20 频率）</a:t>
+              <a:t>点源 srcZ 频率扫描（10 频率）</a:t>
             </a:r>
           </a:p>
         </p:txBody>
@@ -4099,7 +4082,7 @@
         <p:spPr>
           <a:xfrm>
             <a:off x="457200" y="1097280"/>
-            <a:ext cx="6858000" cy="4937760"/>
+            <a:ext cx="11247120" cy="4937760"/>
           </a:xfrm>
           <a:prstGeom prst="rect">
             <a:avLst/>
@@ -4120,7 +4103,7 @@
               </a:defRPr>
             </a:pPr>
             <a:r>
-              <a:t>freq_sweep/plane_wave/srcZ：coarse 10 频率 + fine 10 频率，总共 20 个频率点（100-1500 GHz 区间）。</a:t>
+              <a:t>同 P13 参数，srcZ 位置。</a:t>
             </a:r>
           </a:p>
           <a:p>
@@ -4153,74 +4136,59 @@
               </a:defRPr>
             </a:pPr>
             <a:r>
-              <a:t>- 1100 GHz 全频段最强响应：|dz| = 18.1 nm，方向 -z</a:t>
-            </a:r>
-          </a:p>
-          <a:p>
-            <a:pPr>
-              <a:defRPr sz="2000">
-                <a:solidFill>
-                  <a:srgbClr val="202020"/>
-                </a:solidFill>
-              </a:defRPr>
-            </a:pPr>
-            <a:r>
-              <a:t>- 100 GHz 异常：方向 +z（与其他频率相反）</a:t>
-            </a:r>
-          </a:p>
-          <a:p>
-            <a:pPr>
-              <a:defRPr sz="2000">
-                <a:solidFill>
-                  <a:srgbClr val="202020"/>
-                </a:solidFill>
-              </a:defRPr>
-            </a:pPr>
-            <a:r>
-              <a:t>- 死区：75 / 150 / 600 / 1300 GHz</a:t>
-            </a:r>
-          </a:p>
-          <a:p>
-            <a:pPr>
-              <a:defRPr sz="2000">
-                <a:solidFill>
-                  <a:srgbClr val="202020"/>
-                </a:solidFill>
-              </a:defRPr>
-            </a:pPr>
-            <a:r>
-              <a:t>- 整体趋势：srcZ → -z（沿波传播方向）</a:t>
-            </a:r>
-          </a:p>
-        </p:txBody>
-      </p:sp>
-      <p:pic>
-        <p:nvPicPr>
-          <p:cNvPr id="4" name="Picture 3" descr="freq_response_srcZ.png"/>
-          <p:cNvPicPr>
-            <a:picLocks noChangeAspect="1"/>
-          </p:cNvPicPr>
-          <p:nvPr/>
-        </p:nvPicPr>
-        <p:blipFill>
-          <a:blip r:embed="rId2"/>
-          <a:stretch>
-            <a:fillRect/>
-          </a:stretch>
-        </p:blipFill>
-        <p:spPr>
-          <a:xfrm>
-            <a:off x="7589520" y="1280160"/>
-            <a:ext cx="4297680" cy="1193800"/>
-          </a:xfrm>
-          <a:prstGeom prst="rect">
-            <a:avLst/>
-          </a:prstGeom>
-        </p:spPr>
-      </p:pic>
-      <p:sp>
-        <p:nvSpPr>
-          <p:cNvPr id="5" name="TextBox 4"/>
+              <a:t>- 最强响应：800 GHz，|dr| = 7.31 nm，方向 -z（vs 平面源 1100 GHz）</a:t>
+            </a:r>
+          </a:p>
+          <a:p>
+            <a:pPr>
+              <a:defRPr sz="2000">
+                <a:solidFill>
+                  <a:srgbClr val="202020"/>
+                </a:solidFill>
+              </a:defRPr>
+            </a:pPr>
+            <a:r>
+              <a:t>- 方向分布更复杂：100/200/300/400 / 600 / 900 GHz +z，500 / 700 / 800 GHz -z（vs 平面源仅 100 GHz 异常）</a:t>
+            </a:r>
+          </a:p>
+          <a:p>
+            <a:pPr>
+              <a:defRPr sz="2000">
+                <a:solidFill>
+                  <a:srgbClr val="202020"/>
+                </a:solidFill>
+              </a:defRPr>
+            </a:pPr>
+            <a:r>
+              <a:t>- Hall 角 9-40°（vs 平面源 ~1°），对称性部分破坏</a:t>
+            </a:r>
+          </a:p>
+          <a:p>
+            <a:pPr>
+              <a:defRPr sz="2000">
+                <a:solidFill>
+                  <a:srgbClr val="202020"/>
+                </a:solidFill>
+              </a:defRPr>
+            </a:pPr>
+          </a:p>
+          <a:p>
+            <a:pPr>
+              <a:defRPr sz="2000">
+                <a:solidFill>
+                  <a:srgbClr val="202020"/>
+                </a:solidFill>
+              </a:defRPr>
+            </a:pPr>
+            <a:r>
+              <a:t>核心结论（综合 P13 P14）：振荡方向选择性、运动方向、Hall 角等本质由 Hopfion 拓扑决定，不依赖激励几何。点源改变共振分布细节，未改变基本物理图像。</a:t>
+            </a:r>
+          </a:p>
+        </p:txBody>
+      </p:sp>
+      <p:sp>
+        <p:nvSpPr>
+          <p:cNvPr id="4" name="TextBox 3"/>
           <p:cNvSpPr txBox="1"/>
           <p:nvPr/>
         </p:nvSpPr>
@@ -4248,7 +4216,7 @@
               </a:defRPr>
             </a:pPr>
             <a:r>
-              <a:t>来源：`20260105_frustrated_fm/spin_wave_dynamics/freq_sweep/plane_wave/srcZ/`</a:t>
+              <a:t>来源：`20260105_frustrated_fm/spin_wave_dynamics/freq_sweep/point_source/srcZ/`</a:t>
             </a:r>
           </a:p>
         </p:txBody>
@@ -4301,7 +4269,7 @@
               </a:defRPr>
             </a:pPr>
             <a:r>
-              <a:t>srcX 幅度扫描 @440 GHz（旧标度律已推翻）</a:t>
+              <a:t>点源幅度扫描（部分完成）</a:t>
             </a:r>
           </a:p>
         </p:txBody>
@@ -4315,7 +4283,7 @@
         <p:spPr>
           <a:xfrm>
             <a:off x="457200" y="1097280"/>
-            <a:ext cx="6858000" cy="4937760"/>
+            <a:ext cx="11247120" cy="4937760"/>
           </a:xfrm>
           <a:prstGeom prst="rect">
             <a:avLst/>
@@ -4336,161 +4304,104 @@
               </a:defRPr>
             </a:pPr>
             <a:r>
-              <a:t>amplitude_sweep/plane_wave 6 点：B = 0.05 / 0.1 / 0.2 / 0.3 / 0.5 / 0.7 / 1.0 / 2.0 T 等。</a:t>
-            </a:r>
-          </a:p>
-          <a:p>
-            <a:pPr>
-              <a:defRPr sz="2000">
-                <a:solidFill>
-                  <a:srgbClr val="202020"/>
-                </a:solidFill>
-              </a:defRPr>
-            </a:pPr>
-          </a:p>
-          <a:p>
-            <a:pPr>
-              <a:defRPr sz="2000">
-                <a:solidFill>
-                  <a:srgbClr val="202020"/>
-                </a:solidFill>
-              </a:defRPr>
-            </a:pPr>
-            <a:r>
-              <a:t>毕设原结论：v∝B¹·⁹⁹ 幂律（仅基于 B=0.5/1.0/2.0 T 三点拟合）。</a:t>
-            </a:r>
-          </a:p>
-          <a:p>
-            <a:pPr>
-              <a:defRPr sz="2000">
-                <a:solidFill>
-                  <a:srgbClr val="202020"/>
-                </a:solidFill>
-              </a:defRPr>
-            </a:pPr>
-          </a:p>
-          <a:p>
-            <a:pPr>
-              <a:defRPr sz="2000">
-                <a:solidFill>
-                  <a:srgbClr val="202020"/>
-                </a:solidFill>
-              </a:defRPr>
-            </a:pPr>
-            <a:r>
-              <a:t>已推翻：</a:t>
-            </a:r>
-          </a:p>
-          <a:p>
-            <a:pPr>
-              <a:defRPr sz="2000">
-                <a:solidFill>
-                  <a:srgbClr val="202020"/>
-                </a:solidFill>
-              </a:defRPr>
-            </a:pPr>
-            <a:r>
-              <a:t>- 拟合点过少（仅 3 点）</a:t>
-            </a:r>
-          </a:p>
-          <a:p>
-            <a:pPr>
-              <a:defRPr sz="2000">
-                <a:solidFill>
-                  <a:srgbClr val="202020"/>
-                </a:solidFill>
-              </a:defRPr>
-            </a:pPr>
-            <a:r>
-              <a:t>- B≤0.2 T 数据被排除为"噪声"（|dr|&lt;0.1 nm）</a:t>
-            </a:r>
-          </a:p>
-          <a:p>
-            <a:pPr>
-              <a:defRPr sz="2000">
-                <a:solidFill>
-                  <a:srgbClr val="202020"/>
-                </a:solidFill>
-              </a:defRPr>
-            </a:pPr>
-            <a:r>
-              <a:t>- B=0.05 / 0.1 T 实际朝源运动 -z，B≥0.2 T 远离源 +z</a:t>
-            </a:r>
-          </a:p>
-          <a:p>
-            <a:pPr>
-              <a:defRPr sz="2000">
-                <a:solidFill>
-                  <a:srgbClr val="202020"/>
-                </a:solidFill>
-              </a:defRPr>
-            </a:pPr>
-            <a:r>
-              <a:t>- 方向反转阈值 Bc ∈ (0.1, 0.2) T 未精确定位</a:t>
-            </a:r>
-          </a:p>
-          <a:p>
-            <a:pPr>
-              <a:defRPr sz="2000">
-                <a:solidFill>
-                  <a:srgbClr val="202020"/>
-                </a:solidFill>
-              </a:defRPr>
-            </a:pPr>
-            <a:r>
-              <a:t>- B=5 T 高场点未验证幂律是否外推</a:t>
-            </a:r>
-          </a:p>
-          <a:p>
-            <a:pPr>
-              <a:defRPr sz="2000">
-                <a:solidFill>
-                  <a:srgbClr val="202020"/>
-                </a:solidFill>
-              </a:defRPr>
-            </a:pPr>
-          </a:p>
-          <a:p>
-            <a:pPr>
-              <a:defRPr sz="2000">
-                <a:solidFill>
-                  <a:srgbClr val="202020"/>
-                </a:solidFill>
-              </a:defRPr>
-            </a:pPr>
-            <a:r>
-              <a:t>现状：方向反转 + 幂律两个现象并存，但准确标度律和精确 Bc 都未确定。</a:t>
-            </a:r>
-          </a:p>
-        </p:txBody>
-      </p:sp>
-      <p:pic>
-        <p:nvPicPr>
-          <p:cNvPr id="4" name="Picture 3" descr="amplitude_law_failed.png"/>
-          <p:cNvPicPr>
-            <a:picLocks noChangeAspect="1"/>
-          </p:cNvPicPr>
-          <p:nvPr/>
-        </p:nvPicPr>
-        <p:blipFill>
-          <a:blip r:embed="rId2"/>
-          <a:stretch>
-            <a:fillRect/>
-          </a:stretch>
-        </p:blipFill>
-        <p:spPr>
-          <a:xfrm>
-            <a:off x="7589520" y="1280160"/>
-            <a:ext cx="4297680" cy="2626477"/>
-          </a:xfrm>
-          <a:prstGeom prst="rect">
-            <a:avLst/>
-          </a:prstGeom>
-        </p:spPr>
-      </p:pic>
-      <p:sp>
-        <p:nvSpPr>
-          <p:cNvPr id="5" name="TextBox 4"/>
+              <a:t>amplitude_sweep/point_source @1100 GHz：</a:t>
+            </a:r>
+          </a:p>
+          <a:p>
+            <a:pPr>
+              <a:defRPr sz="2000">
+                <a:solidFill>
+                  <a:srgbClr val="202020"/>
+                </a:solidFill>
+              </a:defRPr>
+            </a:pPr>
+          </a:p>
+          <a:p>
+            <a:pPr>
+              <a:defRPr sz="2000">
+                <a:solidFill>
+                  <a:srgbClr val="202020"/>
+                </a:solidFill>
+              </a:defRPr>
+            </a:pPr>
+            <a:r>
+              <a:t>| B | 状态 |</a:t>
+            </a:r>
+          </a:p>
+          <a:p>
+            <a:pPr>
+              <a:defRPr sz="2000">
+                <a:solidFill>
+                  <a:srgbClr val="202020"/>
+                </a:solidFill>
+              </a:defRPr>
+            </a:pPr>
+            <a:r>
+              <a:t>|---|---|</a:t>
+            </a:r>
+          </a:p>
+          <a:p>
+            <a:pPr>
+              <a:defRPr sz="2000">
+                <a:solidFill>
+                  <a:srgbClr val="202020"/>
+                </a:solidFill>
+              </a:defRPr>
+            </a:pPr>
+            <a:r>
+              <a:t>| B100 / B200 / B300 / B400 | 完成 |</a:t>
+            </a:r>
+          </a:p>
+          <a:p>
+            <a:pPr>
+              <a:defRPr sz="2000">
+                <a:solidFill>
+                  <a:srgbClr val="202020"/>
+                </a:solidFill>
+              </a:defRPr>
+            </a:pPr>
+            <a:r>
+              <a:t>| B500 | 停在 0.433 ns，未续跑成功 |</a:t>
+            </a:r>
+          </a:p>
+          <a:p>
+            <a:pPr>
+              <a:defRPr sz="2000">
+                <a:solidFill>
+                  <a:srgbClr val="202020"/>
+                </a:solidFill>
+              </a:defRPr>
+            </a:pPr>
+            <a:r>
+              <a:t>| B700 / B1000 / B2000 | 未跑 |</a:t>
+            </a:r>
+          </a:p>
+          <a:p>
+            <a:pPr>
+              <a:defRPr sz="2000">
+                <a:solidFill>
+                  <a:srgbClr val="202020"/>
+                </a:solidFill>
+              </a:defRPr>
+            </a:pPr>
+          </a:p>
+          <a:p>
+            <a:pPr>
+              <a:defRPr sz="2000">
+                <a:solidFill>
+                  <a:srgbClr val="202020"/>
+                </a:solidFill>
+              </a:defRPr>
+            </a:pPr>
+            <a:r>
+              <a:t>已完成的 B100-B400 显示 Hopfion 位移随 B 增大但尚无完整 v(B) 曲线，无标度律结论。</a:t>
+            </a:r>
+          </a:p>
+        </p:txBody>
+      </p:sp>
+      <p:sp>
+        <p:nvSpPr>
+          <p:cNvPr id="4" name="TextBox 3"/>
           <p:cNvSpPr txBox="1"/>
           <p:nvPr/>
         </p:nvSpPr>
@@ -4518,7 +4429,7 @@
               </a:defRPr>
             </a:pPr>
             <a:r>
-              <a:t>来源：`20260105_frustrated_fm/spin_wave_dynamics/amplitude_sweep/plane_wave/`</a:t>
+              <a:t>来源：`20260105_frustrated_fm/spin_wave_dynamics/amplitude_sweep/point_source/`</a:t>
             </a:r>
           </a:p>
         </p:txBody>
@@ -4571,7 +4482,7 @@
               </a:defRPr>
             </a:pPr>
             <a:r>
-              <a:t>srcZ 幅度扫描 @1100 GHz（cron 跑，部分数据）</a:t>
+              <a:t>多源基线 + 双向 z v1</a:t>
             </a:r>
           </a:p>
         </p:txBody>
@@ -4606,28 +4517,49 @@
               </a:defRPr>
             </a:pPr>
             <a:r>
-              <a:t>amplitude_sweep/plane_wave_srcZ：B=0.1 / 0.5 / 1.0 / 1.5 / 2.0 T 等约 6 点 @1100 GHz cron 进行。当前数据回收状态不全，未整理分析。</a:t>
-            </a:r>
-          </a:p>
-          <a:p>
-            <a:pPr>
-              <a:defRPr sz="2000">
-                <a:solidFill>
-                  <a:srgbClr val="202020"/>
-                </a:solidFill>
-              </a:defRPr>
-            </a:pPr>
-          </a:p>
-          <a:p>
-            <a:pPr>
-              <a:defRPr sz="2000">
-                <a:solidFill>
-                  <a:srgbClr val="202020"/>
-                </a:solidFill>
-              </a:defRPr>
-            </a:pPr>
-            <a:r>
-              <a:t>仅描述现象：在已完成 B 点上，Hopfion 沿 -z 漂移幅度大致随 B 增大。无量化标度律结论。</a:t>
+              <a:t>baseline：srcX + srcZ 同时激发 @单一频率 → Hopfion 仅 +z，未实现反转。</a:t>
+            </a:r>
+          </a:p>
+          <a:p>
+            <a:pPr>
+              <a:defRPr sz="2000">
+                <a:solidFill>
+                  <a:srgbClr val="202020"/>
+                </a:solidFill>
+              </a:defRPr>
+            </a:pPr>
+          </a:p>
+          <a:p>
+            <a:pPr>
+              <a:defRPr sz="2000">
+                <a:solidFill>
+                  <a:srgbClr val="202020"/>
+                </a:solidFill>
+              </a:defRPr>
+            </a:pPr>
+            <a:r>
+              <a:t>bidirectional_z v1（z_bidirectional_control）：双源叠加 + 反相设计 → Hopfion 仍仅 +z。</a:t>
+            </a:r>
+          </a:p>
+          <a:p>
+            <a:pPr>
+              <a:defRPr sz="2000">
+                <a:solidFill>
+                  <a:srgbClr val="202020"/>
+                </a:solidFill>
+              </a:defRPr>
+            </a:pPr>
+          </a:p>
+          <a:p>
+            <a:pPr>
+              <a:defRPr sz="2000">
+                <a:solidFill>
+                  <a:srgbClr val="202020"/>
+                </a:solidFill>
+              </a:defRPr>
+            </a:pPr>
+            <a:r>
+              <a:t>结论：单纯空间叠加双源不足以实现双向 z 控制，需要时序切换。</a:t>
             </a:r>
           </a:p>
         </p:txBody>
@@ -4662,7 +4594,7 @@
               </a:defRPr>
             </a:pPr>
             <a:r>
-              <a:t>来源：`20260105_frustrated_fm/spin_wave_dynamics/amplitude_sweep/plane_wave_srcZ/`</a:t>
+              <a:t>来源：`20260105_frustrated_fm/spin_wave_dynamics/multisource_control/{baseline, bidirectional_z/v1}/`</a:t>
             </a:r>
           </a:p>
         </p:txBody>
@@ -4715,7 +4647,7 @@
               </a:defRPr>
             </a:pPr>
             <a:r>
-              <a:t>单源双向 z 控制（结论）</a:t>
+              <a:t>freq_switch v2 v3 双向 z 控制（含坍塌真相）</a:t>
             </a:r>
           </a:p>
         </p:txBody>
@@ -4729,7 +4661,7 @@
         <p:spPr>
           <a:xfrm>
             <a:off x="457200" y="1097280"/>
-            <a:ext cx="11247120" cy="4937760"/>
+            <a:ext cx="6858000" cy="4937760"/>
           </a:xfrm>
           <a:prstGeom prst="rect">
             <a:avLst/>
@@ -4750,52 +4682,201 @@
               </a:defRPr>
             </a:pPr>
             <a:r>
-              <a:t>综合 P13 P14：仅靠平面源、单一频率、改换激发位置，就实现 Hopfion 沿 ±z 双向运动：</a:t>
-            </a:r>
-          </a:p>
-          <a:p>
-            <a:pPr>
-              <a:defRPr sz="2000">
-                <a:solidFill>
-                  <a:srgbClr val="202020"/>
-                </a:solidFill>
-              </a:defRPr>
-            </a:pPr>
-            <a:r>
-              <a:t>- srcX → +z（垂直传播）</a:t>
-            </a:r>
-          </a:p>
-          <a:p>
-            <a:pPr>
-              <a:defRPr sz="2000">
-                <a:solidFill>
-                  <a:srgbClr val="202020"/>
-                </a:solidFill>
-              </a:defRPr>
-            </a:pPr>
-            <a:r>
-              <a:t>- srcZ → -z（沿传播）</a:t>
-            </a:r>
-          </a:p>
-          <a:p>
-            <a:pPr>
-              <a:defRPr sz="2000">
-                <a:solidFill>
-                  <a:srgbClr val="202020"/>
-                </a:solidFill>
-              </a:defRPr>
-            </a:pPr>
-          </a:p>
-          <a:p>
-            <a:pPr>
-              <a:defRPr sz="2000">
-                <a:solidFill>
-                  <a:srgbClr val="202020"/>
-                </a:solidFill>
-              </a:defRPr>
-            </a:pPr>
-            <a:r>
-              <a:t>这是后续多源 freq_switch 实验的物理基础。</a:t>
+              <a:t>freq_switch v2（Phase1=0.10ns / Phase2=0.40ns）：</a:t>
+            </a:r>
+          </a:p>
+          <a:p>
+            <a:pPr>
+              <a:defRPr sz="2000">
+                <a:solidFill>
+                  <a:srgbClr val="202020"/>
+                </a:solidFill>
+              </a:defRPr>
+            </a:pPr>
+            <a:r>
+              <a:t>- Phase1 100 GHz：Hopfion 仅 +0.04 nm（Phase1 太短）</a:t>
+            </a:r>
+          </a:p>
+          <a:p>
+            <a:pPr>
+              <a:defRPr sz="2000">
+                <a:solidFill>
+                  <a:srgbClr val="202020"/>
+                </a:solidFill>
+              </a:defRPr>
+            </a:pPr>
+            <a:r>
+              <a:t>- Phase2 1100 GHz：Hopfion 到 -18.7 nm</a:t>
+            </a:r>
+          </a:p>
+          <a:p>
+            <a:pPr>
+              <a:defRPr sz="2000">
+                <a:solidFill>
+                  <a:srgbClr val="202020"/>
+                </a:solidFill>
+              </a:defRPr>
+            </a:pPr>
+            <a:r>
+              <a:t>- 双向 FAILED：未观察到 +z → -z 完整反转</a:t>
+            </a:r>
+          </a:p>
+          <a:p>
+            <a:pPr>
+              <a:defRPr sz="2000">
+                <a:solidFill>
+                  <a:srgbClr val="202020"/>
+                </a:solidFill>
+              </a:defRPr>
+            </a:pPr>
+          </a:p>
+          <a:p>
+            <a:pPr>
+              <a:defRPr sz="2000">
+                <a:solidFill>
+                  <a:srgbClr val="202020"/>
+                </a:solidFill>
+              </a:defRPr>
+            </a:pPr>
+            <a:r>
+              <a:t>freq_switch v3（Phase1=0.50ns / Phase2=0.50ns）：</a:t>
+            </a:r>
+          </a:p>
+          <a:p>
+            <a:pPr>
+              <a:defRPr sz="2000">
+                <a:solidFill>
+                  <a:srgbClr val="202020"/>
+                </a:solidFill>
+              </a:defRPr>
+            </a:pPr>
+            <a:r>
+              <a:t>- Phase1 100 GHz：0 → +17.6 nm（PASS）</a:t>
+            </a:r>
+          </a:p>
+          <a:p>
+            <a:pPr>
+              <a:defRPr sz="2000">
+                <a:solidFill>
+                  <a:srgbClr val="202020"/>
+                </a:solidFill>
+              </a:defRPr>
+            </a:pPr>
+            <a:r>
+              <a:t>- Phase2 1100 GHz：+17.6 nm → -12.9 nm（反转 SUCCESS）</a:t>
+            </a:r>
+          </a:p>
+          <a:p>
+            <a:pPr>
+              <a:defRPr sz="2000">
+                <a:solidFill>
+                  <a:srgbClr val="202020"/>
+                </a:solidFill>
+              </a:defRPr>
+            </a:pPr>
+            <a:r>
+              <a:t>- t ≈ 0.91 ns Hopfion 拓扑结构坍塌，core=0（毕设展示截到 0.80 ns，未提坍塌，本次完整呈现到 1.00 ns）</a:t>
+            </a:r>
+          </a:p>
+          <a:p>
+            <a:pPr>
+              <a:defRPr sz="2000">
+                <a:solidFill>
+                  <a:srgbClr val="202020"/>
+                </a:solidFill>
+              </a:defRPr>
+            </a:pPr>
+          </a:p>
+          <a:p>
+            <a:pPr>
+              <a:defRPr sz="2000">
+                <a:solidFill>
+                  <a:srgbClr val="202020"/>
+                </a:solidFill>
+              </a:defRPr>
+            </a:pPr>
+            <a:r>
+              <a:t>失败根因：1100 GHz 推 -z 力量过强（耦合 ~74 nm/ns，远超 Phase1 的 ~35 nm/ns），Phase2 持续 0.30 ns 形变累积过临界。</a:t>
+            </a:r>
+          </a:p>
+          <a:p>
+            <a:pPr>
+              <a:defRPr sz="2000">
+                <a:solidFill>
+                  <a:srgbClr val="202020"/>
+                </a:solidFill>
+              </a:defRPr>
+            </a:pPr>
+          </a:p>
+          <a:p>
+            <a:pPr>
+              <a:defRPr sz="2000">
+                <a:solidFill>
+                  <a:srgbClr val="202020"/>
+                </a:solidFill>
+              </a:defRPr>
+            </a:pPr>
+            <a:r>
+              <a:t>方案 A 调参（未实施）：Phase2 脉宽 → 0.05-0.10 ns；Phase2 振幅 → 0.3-0.5 T；后接 0 场维持。</a:t>
+            </a:r>
+          </a:p>
+        </p:txBody>
+      </p:sp>
+      <p:pic>
+        <p:nvPicPr>
+          <p:cNvPr id="4" name="Picture 3" descr="freq_switch_v3_collapse.png"/>
+          <p:cNvPicPr>
+            <a:picLocks noChangeAspect="1"/>
+          </p:cNvPicPr>
+          <p:nvPr/>
+        </p:nvPicPr>
+        <p:blipFill>
+          <a:blip r:embed="rId2"/>
+          <a:stretch>
+            <a:fillRect/>
+          </a:stretch>
+        </p:blipFill>
+        <p:spPr>
+          <a:xfrm>
+            <a:off x="7589520" y="1280160"/>
+            <a:ext cx="4297680" cy="2555966"/>
+          </a:xfrm>
+          <a:prstGeom prst="rect">
+            <a:avLst/>
+          </a:prstGeom>
+        </p:spPr>
+      </p:pic>
+      <p:sp>
+        <p:nvSpPr>
+          <p:cNvPr id="5" name="TextBox 4"/>
+          <p:cNvSpPr txBox="1"/>
+          <p:nvPr/>
+        </p:nvSpPr>
+        <p:spPr>
+          <a:xfrm>
+            <a:off x="4572000" y="6355080"/>
+            <a:ext cx="7315200" cy="365760"/>
+          </a:xfrm>
+          <a:prstGeom prst="rect">
+            <a:avLst/>
+          </a:prstGeom>
+          <a:noFill/>
+        </p:spPr>
+        <p:txBody>
+          <a:bodyPr wrap="square">
+            <a:spAutoFit/>
+          </a:bodyPr>
+          <a:lstStyle/>
+          <a:p>
+            <a:pPr algn="r">
+              <a:defRPr sz="1000" i="1">
+                <a:solidFill>
+                  <a:srgbClr val="808080"/>
+                </a:solidFill>
+              </a:defRPr>
+            </a:pPr>
+            <a:r>
+              <a:t>来源：`20260105_frustrated_fm/spin_wave_dynamics/multisource_control/bidirectional_z/`</a:t>
             </a:r>
           </a:p>
         </p:txBody>
@@ -4848,7 +4929,7 @@
               </a:defRPr>
             </a:pPr>
             <a:r>
-              <a:t>点源 srcX 频率扫描（10 频率）</a:t>
+              <a:t>LIF Phase 1：梯度 Ku 恢复力验证（PASS）</a:t>
             </a:r>
           </a:p>
         </p:txBody>
@@ -4883,83 +4964,125 @@
               </a:defRPr>
             </a:pPr>
             <a:r>
-              <a:t>freq_sweep/point_source/srcX：DefRegionCell(7, 30, 50, 50) 单格 0.5 nm³，B_amp=500 T（对比平面源 1 T 薄片层）。10 频率 100-1000 GHz。</a:t>
-            </a:r>
-          </a:p>
-          <a:p>
-            <a:pPr>
-              <a:defRPr sz="2000">
-                <a:solidFill>
-                  <a:srgbClr val="202020"/>
-                </a:solidFill>
-              </a:defRPr>
-            </a:pPr>
-          </a:p>
-          <a:p>
-            <a:pPr>
-              <a:defRPr sz="2000">
-                <a:solidFill>
-                  <a:srgbClr val="202020"/>
-                </a:solidFill>
-              </a:defRPr>
-            </a:pPr>
-            <a:r>
-              <a:t>结论（B 设备数据迁回 2026-04-09）：</a:t>
-            </a:r>
-          </a:p>
-          <a:p>
-            <a:pPr>
-              <a:defRPr sz="2000">
-                <a:solidFill>
-                  <a:srgbClr val="202020"/>
-                </a:solidFill>
-              </a:defRPr>
-            </a:pPr>
-            <a:r>
-              <a:t>- 最强响应：700 GHz，|dr| = 5.71 nm（vs 平面源 1000 GHz）</a:t>
-            </a:r>
-          </a:p>
-          <a:p>
-            <a:pPr>
-              <a:defRPr sz="2000">
-                <a:solidFill>
-                  <a:srgbClr val="202020"/>
-                </a:solidFill>
-              </a:defRPr>
-            </a:pPr>
-            <a:r>
-              <a:t>- 全频段 +z，与平面源 srcX 一致</a:t>
-            </a:r>
-          </a:p>
-          <a:p>
-            <a:pPr>
-              <a:defRPr sz="2000">
-                <a:solidFill>
-                  <a:srgbClr val="202020"/>
-                </a:solidFill>
-              </a:defRPr>
-            </a:pPr>
-            <a:r>
-              <a:t>- 死区消失（平面源有 400-600 GHz 死区）</a:t>
-            </a:r>
-          </a:p>
-          <a:p>
-            <a:pPr>
-              <a:defRPr sz="2000">
-                <a:solidFill>
-                  <a:srgbClr val="202020"/>
-                </a:solidFill>
-              </a:defRPr>
-            </a:pPr>
-            <a:r>
-              <a:t>- Hall 角 69-89°，保持高 Hall 角拓扑特征</a:t>
+              <a:t>lif_neuron_hopfion/gradient_ku_verification：drive-release 实验对照。</a:t>
+            </a:r>
+          </a:p>
+          <a:p>
+            <a:pPr>
+              <a:defRPr sz="2000">
+                <a:solidFill>
+                  <a:srgbClr val="202020"/>
+                </a:solidFill>
+              </a:defRPr>
+            </a:pPr>
+          </a:p>
+          <a:p>
+            <a:pPr>
+              <a:defRPr sz="2000">
+                <a:solidFill>
+                  <a:srgbClr val="202020"/>
+                </a:solidFill>
+              </a:defRPr>
+            </a:pPr>
+            <a:r>
+              <a:t>- gradient_ku_drive_release：100 GHz drive 0.3 ns → OFF 2 ns，Ku 梯度（10000→5500，沿 z 方向 10 区）</a:t>
+            </a:r>
+          </a:p>
+          <a:p>
+            <a:pPr>
+              <a:defRPr sz="2000">
+                <a:solidFill>
+                  <a:srgbClr val="202020"/>
+                </a:solidFill>
+              </a:defRPr>
+            </a:pPr>
+            <a:r>
+              <a:t>- uniform_ku_drive_release：对照，固定 Ku=10000</a:t>
+            </a:r>
+          </a:p>
+          <a:p>
+            <a:pPr>
+              <a:defRPr sz="2000">
+                <a:solidFill>
+                  <a:srgbClr val="202020"/>
+                </a:solidFill>
+              </a:defRPr>
+            </a:pPr>
+          </a:p>
+          <a:p>
+            <a:pPr>
+              <a:defRPr sz="2000">
+                <a:solidFill>
+                  <a:srgbClr val="202020"/>
+                </a:solidFill>
+              </a:defRPr>
+            </a:pPr>
+            <a:r>
+              <a:t>结论 PASS：</a:t>
+            </a:r>
+          </a:p>
+          <a:p>
+            <a:pPr>
+              <a:defRPr sz="2000">
+                <a:solidFill>
+                  <a:srgbClr val="202020"/>
+                </a:solidFill>
+              </a:defRPr>
+            </a:pPr>
+            <a:r>
+              <a:t>- gradient 在 +7.8 nm 收敛（near-critical damping）</a:t>
+            </a:r>
+          </a:p>
+          <a:p>
+            <a:pPr>
+              <a:defRPr sz="2000">
+                <a:solidFill>
+                  <a:srgbClr val="202020"/>
+                </a:solidFill>
+              </a:defRPr>
+            </a:pPr>
+            <a:r>
+              <a:t>- uniform 在原点附近持续振荡（underdamped）</a:t>
+            </a:r>
+          </a:p>
+          <a:p>
+            <a:pPr>
+              <a:defRPr sz="2000">
+                <a:solidFill>
+                  <a:srgbClr val="202020"/>
+                </a:solidFill>
+              </a:defRPr>
+            </a:pPr>
+            <a:r>
+              <a:t>- 梯度 Ku 提供了清晰的恢复力</a:t>
+            </a:r>
+          </a:p>
+          <a:p>
+            <a:pPr>
+              <a:defRPr sz="2000">
+                <a:solidFill>
+                  <a:srgbClr val="202020"/>
+                </a:solidFill>
+              </a:defRPr>
+            </a:pPr>
+          </a:p>
+          <a:p>
+            <a:pPr>
+              <a:defRPr sz="2000">
+                <a:solidFill>
+                  <a:srgbClr val="202020"/>
+                </a:solidFill>
+              </a:defRPr>
+            </a:pPr>
+            <a:r>
+              <a:t>意外发现：Hopfion 偏好低 Ku 区（gradient 平衡在 Ku≈7500 端，即 +z 端），与初始假设"Hopfion 趋向高 Ku 区"相反。Phase 2 设计因此需要反转源-初态位置。</a:t>
             </a:r>
           </a:p>
         </p:txBody>
       </p:sp>
       <p:pic>
         <p:nvPicPr>
-          <p:cNvPr id="4" name="Picture 3" descr="point_vs_plane.png"/>
+          <p:cNvPr id="4" name="Picture 3" descr="lif_phase1_pass.png"/>
           <p:cNvPicPr>
             <a:picLocks noChangeAspect="1"/>
           </p:cNvPicPr>
@@ -4974,7 +5097,7 @@
         <p:spPr>
           <a:xfrm>
             <a:off x="7589520" y="1280160"/>
-            <a:ext cx="4297680" cy="4164043"/>
+            <a:ext cx="4297680" cy="4290451"/>
           </a:xfrm>
           <a:prstGeom prst="rect">
             <a:avLst/>
@@ -5011,7 +5134,7 @@
               </a:defRPr>
             </a:pPr>
             <a:r>
-              <a:t>来源：`20260105_frustrated_fm/spin_wave_dynamics/freq_sweep/point_source/srcX/`</a:t>
+              <a:t>来源：`lif_neuron_hopfion/gradient_ku_verification/drive_release_test/`</a:t>
             </a:r>
           </a:p>
         </p:txBody>
@@ -5064,7 +5187,7 @@
               </a:defRPr>
             </a:pPr>
             <a:r>
-              <a:t>点源 srcZ 频率扫描（10 频率）</a:t>
+              <a:t>LIF Phase 2 F1：脉冲列 integrate（FAILED）</a:t>
             </a:r>
           </a:p>
         </p:txBody>
@@ -5078,7 +5201,7 @@
         <p:spPr>
           <a:xfrm>
             <a:off x="457200" y="1097280"/>
-            <a:ext cx="11247120" cy="4937760"/>
+            <a:ext cx="6858000" cy="4937760"/>
           </a:xfrm>
           <a:prstGeom prst="rect">
             <a:avLst/>
@@ -5099,92 +5222,137 @@
               </a:defRPr>
             </a:pPr>
             <a:r>
-              <a:t>同 P18 参数，srcZ 位置。</a:t>
-            </a:r>
-          </a:p>
-          <a:p>
-            <a:pPr>
-              <a:defRPr sz="2000">
-                <a:solidFill>
-                  <a:srgbClr val="202020"/>
-                </a:solidFill>
-              </a:defRPr>
-            </a:pPr>
-          </a:p>
-          <a:p>
-            <a:pPr>
-              <a:defRPr sz="2000">
-                <a:solidFill>
-                  <a:srgbClr val="202020"/>
-                </a:solidFill>
-              </a:defRPr>
-            </a:pPr>
-            <a:r>
-              <a:t>结论：</a:t>
-            </a:r>
-          </a:p>
-          <a:p>
-            <a:pPr>
-              <a:defRPr sz="2000">
-                <a:solidFill>
-                  <a:srgbClr val="202020"/>
-                </a:solidFill>
-              </a:defRPr>
-            </a:pPr>
-            <a:r>
-              <a:t>- 最强响应：800 GHz，|dr| = 7.31 nm，方向 -z（vs 平面源 1100 GHz）</a:t>
-            </a:r>
-          </a:p>
-          <a:p>
-            <a:pPr>
-              <a:defRPr sz="2000">
-                <a:solidFill>
-                  <a:srgbClr val="202020"/>
-                </a:solidFill>
-              </a:defRPr>
-            </a:pPr>
-            <a:r>
-              <a:t>- 方向分布更复杂：100/200/300/400 / 600 / 900 GHz +z，500 / 700 / 800 GHz -z（vs 平面源仅 100 GHz 异常）</a:t>
-            </a:r>
-          </a:p>
-          <a:p>
-            <a:pPr>
-              <a:defRPr sz="2000">
-                <a:solidFill>
-                  <a:srgbClr val="202020"/>
-                </a:solidFill>
-              </a:defRPr>
-            </a:pPr>
-            <a:r>
-              <a:t>- Hall 角 9-40°（vs 平面源 ~1°），对称性部分破坏</a:t>
-            </a:r>
-          </a:p>
-          <a:p>
-            <a:pPr>
-              <a:defRPr sz="2000">
-                <a:solidFill>
-                  <a:srgbClr val="202020"/>
-                </a:solidFill>
-              </a:defRPr>
-            </a:pPr>
-          </a:p>
-          <a:p>
-            <a:pPr>
-              <a:defRPr sz="2000">
-                <a:solidFill>
-                  <a:srgbClr val="202020"/>
-                </a:solidFill>
-              </a:defRPr>
-            </a:pPr>
-            <a:r>
-              <a:t>核心结论（综合 P18 P19）：振荡方向选择性、运动方向、Hall 角等本质由 Hopfion 拓扑决定，不依赖激励几何。点源改变共振分布细节，未改变基本物理图像。</a:t>
-            </a:r>
-          </a:p>
-        </p:txBody>
-      </p:sp>
-      <p:sp>
-        <p:nvSpPr>
-          <p:cNvPr id="4" name="TextBox 3"/>
+              <a:t>lif_cycle_demo/pulse_train_integrate：4 脉冲 @1100 GHz（0.15 ns on / 0.25 ns gap） + 100 GHz fire + 不应期，总 2.15 ns。</a:t>
+            </a:r>
+          </a:p>
+          <a:p>
+            <a:pPr>
+              <a:defRPr sz="2000">
+                <a:solidFill>
+                  <a:srgbClr val="202020"/>
+                </a:solidFill>
+              </a:defRPr>
+            </a:pPr>
+          </a:p>
+          <a:p>
+            <a:pPr>
+              <a:defRPr sz="2000">
+                <a:solidFill>
+                  <a:srgbClr val="202020"/>
+                </a:solidFill>
+              </a:defRPr>
+            </a:pPr>
+            <a:r>
+              <a:t>FAILED，t=1.089 ns kill（6h49m 跑了 49.5%）。</a:t>
+            </a:r>
+          </a:p>
+          <a:p>
+            <a:pPr>
+              <a:defRPr sz="2000">
+                <a:solidFill>
+                  <a:srgbClr val="202020"/>
+                </a:solidFill>
+              </a:defRPr>
+            </a:pPr>
+          </a:p>
+          <a:p>
+            <a:pPr>
+              <a:defRPr sz="2000">
+                <a:solidFill>
+                  <a:srgbClr val="202020"/>
+                </a:solidFill>
+              </a:defRPr>
+            </a:pPr>
+            <a:r>
+              <a:t>OVF 坐标系修正后真实轨迹：0 → Leak1 末 -6.76 nm → Pulse2 末 -13.93 nm → Leak3 末 -16.95 nm（持续 overshoot，未稳定）。</a:t>
+            </a:r>
+          </a:p>
+          <a:p>
+            <a:pPr>
+              <a:defRPr sz="2000">
+                <a:solidFill>
+                  <a:srgbClr val="202020"/>
+                </a:solidFill>
+              </a:defRPr>
+            </a:pPr>
+          </a:p>
+          <a:p>
+            <a:pPr>
+              <a:defRPr sz="2000">
+                <a:solidFill>
+                  <a:srgbClr val="202020"/>
+                </a:solidFill>
+              </a:defRPr>
+            </a:pPr>
+            <a:r>
+              <a:t>失败原因：</a:t>
+            </a:r>
+          </a:p>
+          <a:p>
+            <a:pPr>
+              <a:defRPr sz="2000">
+                <a:solidFill>
+                  <a:srgbClr val="202020"/>
+                </a:solidFill>
+              </a:defRPr>
+            </a:pPr>
+            <a:r>
+              <a:t>1. 1100 GHz 推 -z 方向，与梯度 Ku 恢复力 +z 同向（不是反向），Hopfion 单向漂移</a:t>
+            </a:r>
+          </a:p>
+          <a:p>
+            <a:pPr>
+              <a:defRPr sz="2000">
+                <a:solidFill>
+                  <a:srgbClr val="202020"/>
+                </a:solidFill>
+              </a:defRPr>
+            </a:pPr>
+            <a:r>
+              <a:t>2. Leak 期 Hopfion 继续 overshoot，残余自旋波能量 &gt;&gt; 梯度恢复力</a:t>
+            </a:r>
+          </a:p>
+          <a:p>
+            <a:pPr>
+              <a:defRPr sz="2000">
+                <a:solidFill>
+                  <a:srgbClr val="202020"/>
+                </a:solidFill>
+              </a:defRPr>
+            </a:pPr>
+            <a:r>
+              <a:t>3. Phase 1 V2 在 100 GHz 下的"低 Ku 偏好"不能外推到 1100 GHz</a:t>
+            </a:r>
+          </a:p>
+        </p:txBody>
+      </p:sp>
+      <p:pic>
+        <p:nvPicPr>
+          <p:cNvPr id="4" name="Picture 3" descr="lif_phase2_f1_failed.png"/>
+          <p:cNvPicPr>
+            <a:picLocks noChangeAspect="1"/>
+          </p:cNvPicPr>
+          <p:nvPr/>
+        </p:nvPicPr>
+        <p:blipFill>
+          <a:blip r:embed="rId2"/>
+          <a:stretch>
+            <a:fillRect/>
+          </a:stretch>
+        </p:blipFill>
+        <p:spPr>
+          <a:xfrm>
+            <a:off x="7589520" y="1280160"/>
+            <a:ext cx="4297680" cy="1953491"/>
+          </a:xfrm>
+          <a:prstGeom prst="rect">
+            <a:avLst/>
+          </a:prstGeom>
+        </p:spPr>
+      </p:pic>
+      <p:sp>
+        <p:nvSpPr>
+          <p:cNvPr id="5" name="TextBox 4"/>
           <p:cNvSpPr txBox="1"/>
           <p:nvPr/>
         </p:nvSpPr>
@@ -5212,7 +5380,7 @@
               </a:defRPr>
             </a:pPr>
             <a:r>
-              <a:t>来源：`20260105_frustrated_fm/spin_wave_dynamics/freq_sweep/point_source/srcZ/`</a:t>
+              <a:t>来源：`lif_neuron_hopfion/lif_cycle_demo/pulse_train_integrate/`</a:t>
             </a:r>
           </a:p>
         </p:txBody>
@@ -5265,7 +5433,7 @@
               </a:defRPr>
             </a:pPr>
             <a:r>
-              <a:t>DMI-FM 失败：Bulk PBC 螺旋态竞争</a:t>
+              <a:t>Frustrated FM 居中稳态（三组 Ku）</a:t>
             </a:r>
           </a:p>
         </p:txBody>
@@ -5300,28 +5468,97 @@
               </a:defRPr>
             </a:pPr>
             <a:r>
-              <a:t>在 Bulk PBC（无 frozen 边界、无表面）几何下尝试 2 次仿真（nopbc_demag、pbc_demag、nopbc_nodemag、pbc_nodemag 四种组合）。Hopfion 初始态弛豫过程中始终被螺旋态竞争掉，最终演化为螺旋态。</a:t>
-            </a:r>
-          </a:p>
-          <a:p>
-            <a:pPr>
-              <a:defRPr sz="2000">
-                <a:solidFill>
-                  <a:srgbClr val="202020"/>
-                </a:solidFill>
-              </a:defRPr>
-            </a:pPr>
-          </a:p>
-          <a:p>
-            <a:pPr>
-              <a:defRPr sz="2000">
-                <a:solidFill>
-                  <a:srgbClr val="202020"/>
-                </a:solidFill>
-              </a:defRPr>
-            </a:pPr>
-            <a:r>
-              <a:t>说明 Bloch Hopfion 在 FeGe 中的稳定性强依赖于表面边界条件，不是 bulk 拓扑稳定相。</a:t>
+              <a:t>centered_stability_test：把 Hopfion 平移到盒子中心，验证不同 Ku 下的居中稳态。</a:t>
+            </a:r>
+          </a:p>
+          <a:p>
+            <a:pPr>
+              <a:defRPr sz="2000">
+                <a:solidFill>
+                  <a:srgbClr val="202020"/>
+                </a:solidFill>
+              </a:defRPr>
+            </a:pPr>
+          </a:p>
+          <a:p>
+            <a:pPr>
+              <a:defRPr sz="2000">
+                <a:solidFill>
+                  <a:srgbClr val="202020"/>
+                </a:solidFill>
+              </a:defRPr>
+            </a:pPr>
+            <a:r>
+              <a:t>| 配置 | 1ns z 漂移 | 结果 |</a:t>
+            </a:r>
+          </a:p>
+          <a:p>
+            <a:pPr>
+              <a:defRPr sz="2000">
+                <a:solidFill>
+                  <a:srgbClr val="202020"/>
+                </a:solidFill>
+              </a:defRPr>
+            </a:pPr>
+            <a:r>
+              <a:t>|---|---|---|</a:t>
+            </a:r>
+          </a:p>
+          <a:p>
+            <a:pPr>
+              <a:defRPr sz="2000">
+                <a:solidFill>
+                  <a:srgbClr val="202020"/>
+                </a:solidFill>
+              </a:defRPr>
+            </a:pPr>
+            <a:r>
+              <a:t>| Ku=0 | +0.70 nm | PASS（呼吸模式）|</a:t>
+            </a:r>
+          </a:p>
+          <a:p>
+            <a:pPr>
+              <a:defRPr sz="2000">
+                <a:solidFill>
+                  <a:srgbClr val="202020"/>
+                </a:solidFill>
+              </a:defRPr>
+            </a:pPr>
+            <a:r>
+              <a:t>| Ku=10k | -0.019 nm | PASS（最稳，选为 SW 初始态）|</a:t>
+            </a:r>
+          </a:p>
+          <a:p>
+            <a:pPr>
+              <a:defRPr sz="2000">
+                <a:solidFill>
+                  <a:srgbClr val="202020"/>
+                </a:solidFill>
+              </a:defRPr>
+            </a:pPr>
+            <a:r>
+              <a:t>| Ku=50k | +0.062 nm | PASS |</a:t>
+            </a:r>
+          </a:p>
+          <a:p>
+            <a:pPr>
+              <a:defRPr sz="2000">
+                <a:solidFill>
+                  <a:srgbClr val="202020"/>
+                </a:solidFill>
+              </a:defRPr>
+            </a:pPr>
+          </a:p>
+          <a:p>
+            <a:pPr>
+              <a:defRPr sz="2000">
+                <a:solidFill>
+                  <a:srgbClr val="202020"/>
+                </a:solidFill>
+              </a:defRPr>
+            </a:pPr>
+            <a:r>
+              <a:t>判定：1 ns z-center 漂移 &lt;2 nm。三组全过。Ku=10k 输出 m000020.ovf 作为后续自旋波动力学全部仿真的公共初始态。</a:t>
             </a:r>
           </a:p>
         </p:txBody>
@@ -5356,7 +5593,7 @@
               </a:defRPr>
             </a:pPr>
             <a:r>
-              <a:t>来源：`20251219_dmi_fm/failed_attempts/bulk_pbc_tests/`（4 runs）</a:t>
+              <a:t>来源：`20260105_frustrated_fm/centered_stability_test/`</a:t>
             </a:r>
           </a:p>
         </p:txBody>
@@ -5409,7 +5646,7 @@
               </a:defRPr>
             </a:pPr>
             <a:r>
-              <a:t>点源幅度扫描（部分完成）</a:t>
+              <a:t>LIF Phase 2 重设计候选（未开工）</a:t>
             </a:r>
           </a:p>
         </p:txBody>
@@ -5444,97 +5681,97 @@
               </a:defRPr>
             </a:pPr>
             <a:r>
-              <a:t>amplitude_sweep/point_source @1100 GHz：</a:t>
-            </a:r>
-          </a:p>
-          <a:p>
-            <a:pPr>
-              <a:defRPr sz="2000">
-                <a:solidFill>
-                  <a:srgbClr val="202020"/>
-                </a:solidFill>
-              </a:defRPr>
-            </a:pPr>
-          </a:p>
-          <a:p>
-            <a:pPr>
-              <a:defRPr sz="2000">
-                <a:solidFill>
-                  <a:srgbClr val="202020"/>
-                </a:solidFill>
-              </a:defRPr>
-            </a:pPr>
-            <a:r>
-              <a:t>| B | 状态 |</a:t>
-            </a:r>
-          </a:p>
-          <a:p>
-            <a:pPr>
-              <a:defRPr sz="2000">
-                <a:solidFill>
-                  <a:srgbClr val="202020"/>
-                </a:solidFill>
-              </a:defRPr>
-            </a:pPr>
-            <a:r>
-              <a:t>|---|---|</a:t>
-            </a:r>
-          </a:p>
-          <a:p>
-            <a:pPr>
-              <a:defRPr sz="2000">
-                <a:solidFill>
-                  <a:srgbClr val="202020"/>
-                </a:solidFill>
-              </a:defRPr>
-            </a:pPr>
-            <a:r>
-              <a:t>| B100 / B200 / B300 / B400 | 完成 |</a:t>
-            </a:r>
-          </a:p>
-          <a:p>
-            <a:pPr>
-              <a:defRPr sz="2000">
-                <a:solidFill>
-                  <a:srgbClr val="202020"/>
-                </a:solidFill>
-              </a:defRPr>
-            </a:pPr>
-            <a:r>
-              <a:t>| B500 | 停在 0.433 ns，未续跑成功 |</a:t>
-            </a:r>
-          </a:p>
-          <a:p>
-            <a:pPr>
-              <a:defRPr sz="2000">
-                <a:solidFill>
-                  <a:srgbClr val="202020"/>
-                </a:solidFill>
-              </a:defRPr>
-            </a:pPr>
-            <a:r>
-              <a:t>| B700 / B1000 / B2000 | 未跑 |</a:t>
-            </a:r>
-          </a:p>
-          <a:p>
-            <a:pPr>
-              <a:defRPr sz="2000">
-                <a:solidFill>
-                  <a:srgbClr val="202020"/>
-                </a:solidFill>
-              </a:defRPr>
-            </a:pPr>
-          </a:p>
-          <a:p>
-            <a:pPr>
-              <a:defRPr sz="2000">
-                <a:solidFill>
-                  <a:srgbClr val="202020"/>
-                </a:solidFill>
-              </a:defRPr>
-            </a:pPr>
-            <a:r>
-              <a:t>仅描述现象：已完成的 B100-B400 显示 Hopfion 位移随 B 增大但尚无完整 v(B) 曲线，无标度律结论。</a:t>
+              <a:t>4 个候选方向：</a:t>
+            </a:r>
+          </a:p>
+          <a:p>
+            <a:pPr>
+              <a:defRPr sz="2000">
+                <a:solidFill>
+                  <a:srgbClr val="202020"/>
+                </a:solidFill>
+              </a:defRPr>
+            </a:pPr>
+            <a:r>
+              <a:t>- 方案 A：反转源-初态相对位置（initial 在 -z 端高 Ku，integrate 用 100 GHz → +z，梯度自然拉回 -z，fire 用反向冲击）</a:t>
+            </a:r>
+          </a:p>
+          <a:p>
+            <a:pPr>
+              <a:defRPr sz="2000">
+                <a:solidFill>
+                  <a:srgbClr val="202020"/>
+                </a:solidFill>
+              </a:defRPr>
+            </a:pPr>
+            <a:r>
+              <a:t>- 方案 B：降低 1100 GHz 幅度（B=0.3 T） + 延长 leak gap（0.5 ns）让自旋波耗散</a:t>
+            </a:r>
+          </a:p>
+          <a:p>
+            <a:pPr>
+              <a:defRPr sz="2000">
+                <a:solidFill>
+                  <a:srgbClr val="202020"/>
+                </a:solidFill>
+              </a:defRPr>
+            </a:pPr>
+            <a:r>
+              <a:t>- 方案 C：缩短 pulse 宽（0.15 → 0.05 ns）减少单次注入能量</a:t>
+            </a:r>
+          </a:p>
+          <a:p>
+            <a:pPr>
+              <a:defRPr sz="2000">
+                <a:solidFill>
+                  <a:srgbClr val="202020"/>
+                </a:solidFill>
+              </a:defRPr>
+            </a:pPr>
+            <a:r>
+              <a:t>- 方案 D：双频叠加 integrate（1100 GHz 短冲 + 立即 100 GHz 反向短冲抑制残余自旋波）</a:t>
+            </a:r>
+          </a:p>
+          <a:p>
+            <a:pPr>
+              <a:defRPr sz="2000">
+                <a:solidFill>
+                  <a:srgbClr val="202020"/>
+                </a:solidFill>
+              </a:defRPr>
+            </a:pPr>
+          </a:p>
+          <a:p>
+            <a:pPr>
+              <a:defRPr sz="2000">
+                <a:solidFill>
+                  <a:srgbClr val="202020"/>
+                </a:solidFill>
+              </a:defRPr>
+            </a:pPr>
+            <a:r>
+              <a:t>仅 sub-threshold 对照（B=0.1 T）脚本就绪：`subthreshold_B0p1T.mx3`。</a:t>
+            </a:r>
+          </a:p>
+          <a:p>
+            <a:pPr>
+              <a:defRPr sz="2000">
+                <a:solidFill>
+                  <a:srgbClr val="202020"/>
+                </a:solidFill>
+              </a:defRPr>
+            </a:pPr>
+          </a:p>
+          <a:p>
+            <a:pPr>
+              <a:defRPr sz="2000">
+                <a:solidFill>
+                  <a:srgbClr val="202020"/>
+                </a:solidFill>
+              </a:defRPr>
+            </a:pPr>
+            <a:r>
+              <a:t>未开工，等定方案。</a:t>
             </a:r>
           </a:p>
         </p:txBody>
@@ -5569,7 +5806,7 @@
               </a:defRPr>
             </a:pPr>
             <a:r>
-              <a:t>来源：`20260105_frustrated_fm/spin_wave_dynamics/amplitude_sweep/point_source/`</a:t>
+              <a:t>来源：`lif_neuron_hopfion/lif_cycle_demo/`（脚本就绪）</a:t>
             </a:r>
           </a:p>
         </p:txBody>
@@ -5622,7 +5859,7 @@
               </a:defRPr>
             </a:pPr>
             <a:r>
-              <a:t>多源基线 + 双向 z v1</a:t>
+              <a:t>旧版本对标：My_old_simulation（系数错误）</a:t>
             </a:r>
           </a:p>
         </p:txBody>
@@ -5657,49 +5894,70 @@
               </a:defRPr>
             </a:pPr>
             <a:r>
-              <a:t>baseline：srcX + srcZ 同时激发 @单一频率 → Hopfion 仅 +z，未实现反转。</a:t>
-            </a:r>
-          </a:p>
-          <a:p>
-            <a:pPr>
-              <a:defRPr sz="2000">
-                <a:solidFill>
-                  <a:srgbClr val="202020"/>
-                </a:solidFill>
-              </a:defRPr>
-            </a:pPr>
-          </a:p>
-          <a:p>
-            <a:pPr>
-              <a:defRPr sz="2000">
-                <a:solidFill>
-                  <a:srgbClr val="202020"/>
-                </a:solidFill>
-              </a:defRPr>
-            </a:pPr>
-            <a:r>
-              <a:t>bidirectional_z v1（z_bidirectional_control）：双源叠加 + 反相设计 → Hopfion 仍仅 +z。</a:t>
-            </a:r>
-          </a:p>
-          <a:p>
-            <a:pPr>
-              <a:defRPr sz="2000">
-                <a:solidFill>
-                  <a:srgbClr val="202020"/>
-                </a:solidFill>
-              </a:defRPr>
-            </a:pPr>
-          </a:p>
-          <a:p>
-            <a:pPr>
-              <a:defRPr sz="2000">
-                <a:solidFill>
-                  <a:srgbClr val="202020"/>
-                </a:solidFill>
-              </a:defRPr>
-            </a:pPr>
-            <a:r>
-              <a:t>结论：单纯空间叠加双源不足以实现双向 z 控制，需要时序切换。</a:t>
+              <a:t>old_results/My_old_simulation/ 共 20 个 srcX/srcZ point source freq sweep。含 J2/J4 系数符号错误。</a:t>
+            </a:r>
+          </a:p>
+          <a:p>
+            <a:pPr>
+              <a:defRPr sz="2000">
+                <a:solidFill>
+                  <a:srgbClr val="202020"/>
+                </a:solidFill>
+              </a:defRPr>
+            </a:pPr>
+          </a:p>
+          <a:p>
+            <a:pPr>
+              <a:defRPr sz="2000">
+                <a:solidFill>
+                  <a:srgbClr val="202020"/>
+                </a:solidFill>
+              </a:defRPr>
+            </a:pPr>
+            <a:r>
+              <a:t>具体陷阱：J2 / J4 在 frustrated FM 模型里有正负号约定，不同文献存在差异。旧版本采用了错误符号约定。</a:t>
+            </a:r>
+          </a:p>
+          <a:p>
+            <a:pPr>
+              <a:defRPr sz="2000">
+                <a:solidFill>
+                  <a:srgbClr val="202020"/>
+                </a:solidFill>
+              </a:defRPr>
+            </a:pPr>
+          </a:p>
+          <a:p>
+            <a:pPr>
+              <a:defRPr sz="2000">
+                <a:solidFill>
+                  <a:srgbClr val="202020"/>
+                </a:solidFill>
+              </a:defRPr>
+            </a:pPr>
+            <a:r>
+              <a:t>与当前正确版本对比：拓扑荷数值差异约 2-3%；动力学定性趋势相同但定量结果不可比。</a:t>
+            </a:r>
+          </a:p>
+          <a:p>
+            <a:pPr>
+              <a:defRPr sz="2000">
+                <a:solidFill>
+                  <a:srgbClr val="202020"/>
+                </a:solidFill>
+              </a:defRPr>
+            </a:pPr>
+          </a:p>
+          <a:p>
+            <a:pPr>
+              <a:defRPr sz="2000">
+                <a:solidFill>
+                  <a:srgbClr val="202020"/>
+                </a:solidFill>
+              </a:defRPr>
+            </a:pPr>
+            <a:r>
+              <a:t>经验：复用别人代码时必须验证符号；从已验证的 R8r4_Ku0.mx3 拷参数，不要从公式重推。</a:t>
             </a:r>
           </a:p>
         </p:txBody>
@@ -5734,7 +5992,7 @@
               </a:defRPr>
             </a:pPr>
             <a:r>
-              <a:t>来源：`20260105_frustrated_fm/spin_wave_dynamics/multisource_control/{baseline, bidirectional_z/v1}/`</a:t>
+              <a:t>来源：`old_results/My_old_simulation/A材料尺寸对hopfion的影响/`</a:t>
             </a:r>
           </a:p>
         </p:txBody>
@@ -5787,7 +6045,7 @@
               </a:defRPr>
             </a:pPr>
             <a:r>
-              <a:t>freq_switch v2 v3 双向 z 控制（含坍塌真相）</a:t>
+              <a:t>Device B 验证 + srtp 学生项目</a:t>
             </a:r>
           </a:p>
         </p:txBody>
@@ -5801,7 +6059,7 @@
         <p:spPr>
           <a:xfrm>
             <a:off x="457200" y="1097280"/>
-            <a:ext cx="6858000" cy="4937760"/>
+            <a:ext cx="11247120" cy="4937760"/>
           </a:xfrm>
           <a:prstGeom prst="rect">
             <a:avLst/>
@@ -5822,173 +6080,92 @@
               </a:defRPr>
             </a:pPr>
             <a:r>
-              <a:t>freq_switch v2（Phase1=0.10ns / Phase2=0.40ns）：</a:t>
-            </a:r>
-          </a:p>
-          <a:p>
-            <a:pPr>
-              <a:defRPr sz="2000">
-                <a:solidFill>
-                  <a:srgbClr val="202020"/>
-                </a:solidFill>
-              </a:defRPr>
-            </a:pPr>
-            <a:r>
-              <a:t>- Phase1 100 GHz：Hopfion 仅 +0.04 nm（Phase1 太短）</a:t>
-            </a:r>
-          </a:p>
-          <a:p>
-            <a:pPr>
-              <a:defRPr sz="2000">
-                <a:solidFill>
-                  <a:srgbClr val="202020"/>
-                </a:solidFill>
-              </a:defRPr>
-            </a:pPr>
-            <a:r>
-              <a:t>- Phase2 1100 GHz：Hopfion 到 -18.7 nm</a:t>
-            </a:r>
-          </a:p>
-          <a:p>
-            <a:pPr>
-              <a:defRPr sz="2000">
-                <a:solidFill>
-                  <a:srgbClr val="202020"/>
-                </a:solidFill>
-              </a:defRPr>
-            </a:pPr>
-            <a:r>
-              <a:t>- 双向 FAILED：未观察到 +z → -z 完整反转</a:t>
-            </a:r>
-          </a:p>
-          <a:p>
-            <a:pPr>
-              <a:defRPr sz="2000">
-                <a:solidFill>
-                  <a:srgbClr val="202020"/>
-                </a:solidFill>
-              </a:defRPr>
-            </a:pPr>
-          </a:p>
-          <a:p>
-            <a:pPr>
-              <a:defRPr sz="2000">
-                <a:solidFill>
-                  <a:srgbClr val="202020"/>
-                </a:solidFill>
-              </a:defRPr>
-            </a:pPr>
-            <a:r>
-              <a:t>freq_switch v3（Phase1=0.50ns / Phase2=0.50ns）：</a:t>
-            </a:r>
-          </a:p>
-          <a:p>
-            <a:pPr>
-              <a:defRPr sz="2000">
-                <a:solidFill>
-                  <a:srgbClr val="202020"/>
-                </a:solidFill>
-              </a:defRPr>
-            </a:pPr>
-            <a:r>
-              <a:t>- Phase1 100 GHz：0 → +17.6 nm（PASS）</a:t>
-            </a:r>
-          </a:p>
-          <a:p>
-            <a:pPr>
-              <a:defRPr sz="2000">
-                <a:solidFill>
-                  <a:srgbClr val="202020"/>
-                </a:solidFill>
-              </a:defRPr>
-            </a:pPr>
-            <a:r>
-              <a:t>- Phase2 1100 GHz：+17.6 nm → -12.9 nm（反转 SUCCESS）</a:t>
-            </a:r>
-          </a:p>
-          <a:p>
-            <a:pPr>
-              <a:defRPr sz="2000">
-                <a:solidFill>
-                  <a:srgbClr val="202020"/>
-                </a:solidFill>
-              </a:defRPr>
-            </a:pPr>
-            <a:r>
-              <a:t>- t ≈ 0.91 ns Hopfion 拓扑结构坍塌，core=0（毕设展示截到 0.80 ns，未提坍塌，本次完整呈现到 1.00 ns）</a:t>
-            </a:r>
-          </a:p>
-          <a:p>
-            <a:pPr>
-              <a:defRPr sz="2000">
-                <a:solidFill>
-                  <a:srgbClr val="202020"/>
-                </a:solidFill>
-              </a:defRPr>
-            </a:pPr>
-          </a:p>
-          <a:p>
-            <a:pPr>
-              <a:defRPr sz="2000">
-                <a:solidFill>
-                  <a:srgbClr val="202020"/>
-                </a:solidFill>
-              </a:defRPr>
-            </a:pPr>
-            <a:r>
-              <a:t>失败根因：1100 GHz 推 -z 力量过强（耦合 ~74 nm/ns，远超 Phase1 的 ~35 nm/ns），Phase2 持续 0.30 ns 形变累积过临界。</a:t>
-            </a:r>
-          </a:p>
-          <a:p>
-            <a:pPr>
-              <a:defRPr sz="2000">
-                <a:solidFill>
-                  <a:srgbClr val="202020"/>
-                </a:solidFill>
-              </a:defRPr>
-            </a:pPr>
-          </a:p>
-          <a:p>
-            <a:pPr>
-              <a:defRPr sz="2000">
-                <a:solidFill>
-                  <a:srgbClr val="202020"/>
-                </a:solidFill>
-              </a:defRPr>
-            </a:pPr>
-            <a:r>
-              <a:t>方案 A 调参（未实施）：Phase2 脉宽 → 0.05-0.10 ns；Phase2 振幅 → 0.3-0.5 T；后接 0 场维持。</a:t>
-            </a:r>
-          </a:p>
-        </p:txBody>
-      </p:sp>
-      <p:pic>
-        <p:nvPicPr>
-          <p:cNvPr id="4" name="Picture 3" descr="freq_switch_v3_collapse.png"/>
-          <p:cNvPicPr>
-            <a:picLocks noChangeAspect="1"/>
-          </p:cNvPicPr>
-          <p:nvPr/>
-        </p:nvPicPr>
-        <p:blipFill>
-          <a:blip r:embed="rId2"/>
-          <a:stretch>
-            <a:fillRect/>
-          </a:stretch>
-        </p:blipFill>
-        <p:spPr>
-          <a:xfrm>
-            <a:off x="7589520" y="1280160"/>
-            <a:ext cx="4297680" cy="2555966"/>
-          </a:xfrm>
-          <a:prstGeom prst="rect">
-            <a:avLst/>
-          </a:prstGeom>
-        </p:spPr>
-      </p:pic>
-      <p:sp>
-        <p:nvSpPr>
-          <p:cNvPr id="5" name="TextBox 4"/>
+              <a:t>deviceB_package：用户次要 Windows 机器独立运行 srcZ freq sweep 9 个验证。结果与主机一致，作为独立机器交叉验证。</a:t>
+            </a:r>
+          </a:p>
+          <a:p>
+            <a:pPr>
+              <a:defRPr sz="2000">
+                <a:solidFill>
+                  <a:srgbClr val="202020"/>
+                </a:solidFill>
+              </a:defRPr>
+            </a:pPr>
+          </a:p>
+          <a:p>
+            <a:pPr>
+              <a:defRPr sz="2000">
+                <a:solidFill>
+                  <a:srgbClr val="202020"/>
+                </a:solidFill>
+              </a:defRPr>
+            </a:pPr>
+            <a:r>
+              <a:t>srtp/：早期学生项目存档。</a:t>
+            </a:r>
+          </a:p>
+          <a:p>
+            <a:pPr>
+              <a:defRPr sz="2000">
+                <a:solidFill>
+                  <a:srgbClr val="202020"/>
+                </a:solidFill>
+              </a:defRPr>
+            </a:pPr>
+            <a:r>
+              <a:t>- hopfion_mumax3/1.spinwave &amp; magnetic field x/：早期自旋波驱动</a:t>
+            </a:r>
+          </a:p>
+          <a:p>
+            <a:pPr>
+              <a:defRPr sz="2000">
+                <a:solidFill>
+                  <a:srgbClr val="202020"/>
+                </a:solidFill>
+              </a:defRPr>
+            </a:pPr>
+            <a:r>
+              <a:t>- magnon-hopfion-main/：振荡-Hopfion 耦合，未完成</a:t>
+            </a:r>
+          </a:p>
+          <a:p>
+            <a:pPr>
+              <a:defRPr sz="2000">
+                <a:solidFill>
+                  <a:srgbClr val="202020"/>
+                </a:solidFill>
+              </a:defRPr>
+            </a:pPr>
+            <a:r>
+              <a:t>- draw_hopfion/：早期可视化</a:t>
+            </a:r>
+          </a:p>
+          <a:p>
+            <a:pPr>
+              <a:defRPr sz="2000">
+                <a:solidFill>
+                  <a:srgbClr val="202020"/>
+                </a:solidFill>
+              </a:defRPr>
+            </a:pPr>
+          </a:p>
+          <a:p>
+            <a:pPr>
+              <a:defRPr sz="2000">
+                <a:solidFill>
+                  <a:srgbClr val="202020"/>
+                </a:solidFill>
+              </a:defRPr>
+            </a:pPr>
+            <a:r>
+              <a:t>历史价值：展示项目早期摸索过程，与当前体系参数差异较大，不可直接复用。</a:t>
+            </a:r>
+          </a:p>
+        </p:txBody>
+      </p:sp>
+      <p:sp>
+        <p:nvSpPr>
+          <p:cNvPr id="4" name="TextBox 3"/>
           <p:cNvSpPr txBox="1"/>
           <p:nvPr/>
         </p:nvSpPr>
@@ -6016,7 +6193,7 @@
               </a:defRPr>
             </a:pPr>
             <a:r>
-              <a:t>来源：`20260105_frustrated_fm/spin_wave_dynamics/multisource_control/bidirectional_z/`</a:t>
+              <a:t>来源：`deviceB_package/`、`srtp/`</a:t>
             </a:r>
           </a:p>
         </p:txBody>
@@ -6069,7 +6246,7 @@
               </a:defRPr>
             </a:pPr>
             <a:r>
-              <a:t>STT 驱动 Bloch Hopfion（Wang 2019 复现）</a:t>
+              <a:t>现状清单</a:t>
             </a:r>
           </a:p>
         </p:txBody>
@@ -6104,1321 +6281,28 @@
               </a:defRPr>
             </a:pPr>
             <a:r>
-              <a:t>20260310_wang2019_hopfion_STT：复现 Wang et al. 2019 PRL。</a:t>
-            </a:r>
-          </a:p>
-          <a:p>
-            <a:pPr>
-              <a:defRPr sz="2000">
-                <a:solidFill>
-                  <a:srgbClr val="202020"/>
-                </a:solidFill>
-              </a:defRPr>
-            </a:pPr>
-          </a:p>
-          <a:p>
-            <a:pPr>
-              <a:defRPr sz="2000">
-                <a:solidFill>
-                  <a:srgbClr val="202020"/>
-                </a:solidFill>
-              </a:defRPr>
-            </a:pPr>
-            <a:r>
-              <a:t>- v1：91 帧 STT 驱动动力学</a:t>
-            </a:r>
-          </a:p>
-          <a:p>
-            <a:pPr>
-              <a:defRPr sz="2000">
-                <a:solidFill>
-                  <a:srgbClr val="202020"/>
-                </a:solidFill>
-              </a:defRPr>
-            </a:pPr>
-            <a:r>
-              <a:t>- v2：32 帧，参数调整版</a:t>
-            </a:r>
-          </a:p>
-          <a:p>
-            <a:pPr>
-              <a:defRPr sz="2000">
-                <a:solidFill>
-                  <a:srgbClr val="202020"/>
-                </a:solidFill>
-              </a:defRPr>
-            </a:pPr>
-          </a:p>
-          <a:p>
-            <a:pPr>
-              <a:defRPr sz="2000">
-                <a:solidFill>
-                  <a:srgbClr val="202020"/>
-                </a:solidFill>
-              </a:defRPr>
-            </a:pPr>
-            <a:r>
-              <a:t>结论：STT 电流可驱动 Bloch Hopfion 沿电流方向运动，与 Wang 论文趋势一致。后续未深入做参数扫描。</a:t>
-            </a:r>
-          </a:p>
-        </p:txBody>
-      </p:sp>
-      <p:sp>
-        <p:nvSpPr>
-          <p:cNvPr id="4" name="TextBox 3"/>
-          <p:cNvSpPr txBox="1"/>
-          <p:nvPr/>
-        </p:nvSpPr>
-        <p:spPr>
-          <a:xfrm>
-            <a:off x="4572000" y="6355080"/>
-            <a:ext cx="7315200" cy="365760"/>
-          </a:xfrm>
-          <a:prstGeom prst="rect">
-            <a:avLst/>
-          </a:prstGeom>
-          <a:noFill/>
-        </p:spPr>
-        <p:txBody>
-          <a:bodyPr wrap="square">
-            <a:spAutoFit/>
-          </a:bodyPr>
-          <a:lstStyle/>
-          <a:p>
-            <a:pPr algn="r">
-              <a:defRPr sz="1000" i="1">
-                <a:solidFill>
-                  <a:srgbClr val="808080"/>
-                </a:solidFill>
-              </a:defRPr>
-            </a:pPr>
-            <a:r>
-              <a:t>来源：`20260310_wang2019_hopfion_STT/`</a:t>
-            </a:r>
-          </a:p>
-        </p:txBody>
-      </p:sp>
-    </p:spTree>
-  </p:cSld>
-  <p:clrMapOvr>
-    <a:masterClrMapping/>
-  </p:clrMapOvr>
-</p:sld>
-</file>
-
-<file path=ppt/slides/slide24.xml><?xml version="1.0" encoding="utf-8"?>
-<p:sld xmlns:a="http://schemas.openxmlformats.org/drawingml/2006/main" xmlns:p="http://schemas.openxmlformats.org/presentationml/2006/main" xmlns:r="http://schemas.openxmlformats.org/officeDocument/2006/relationships">
-  <p:cSld>
-    <p:spTree>
-      <p:nvGrpSpPr>
-        <p:cNvPr id="1" name=""/>
-        <p:cNvGrpSpPr/>
-        <p:nvPr/>
-      </p:nvGrpSpPr>
-      <p:grpSpPr/>
-      <p:sp>
-        <p:nvSpPr>
-          <p:cNvPr id="2" name="TextBox 1"/>
-          <p:cNvSpPr txBox="1"/>
-          <p:nvPr/>
-        </p:nvSpPr>
-        <p:spPr>
-          <a:xfrm>
-            <a:off x="457200" y="274320"/>
-            <a:ext cx="11247120" cy="640080"/>
-          </a:xfrm>
-          <a:prstGeom prst="rect">
-            <a:avLst/>
-          </a:prstGeom>
-          <a:noFill/>
-        </p:spPr>
-        <p:txBody>
-          <a:bodyPr wrap="none">
-            <a:spAutoFit/>
-          </a:bodyPr>
-          <a:lstStyle/>
-          <a:p>
-            <a:pPr>
-              <a:defRPr sz="2000" b="1">
-                <a:solidFill>
-                  <a:srgbClr val="1F2D5A"/>
-                </a:solidFill>
-              </a:defRPr>
-            </a:pPr>
-            <a:r>
-              <a:t>LIF Phase 1：梯度 Ku 恢复力验证（PASS）</a:t>
-            </a:r>
-          </a:p>
-        </p:txBody>
-      </p:sp>
-      <p:sp>
-        <p:nvSpPr>
-          <p:cNvPr id="3" name="TextBox 2"/>
-          <p:cNvSpPr txBox="1"/>
-          <p:nvPr/>
-        </p:nvSpPr>
-        <p:spPr>
-          <a:xfrm>
-            <a:off x="457200" y="1097280"/>
-            <a:ext cx="6858000" cy="4937760"/>
-          </a:xfrm>
-          <a:prstGeom prst="rect">
-            <a:avLst/>
-          </a:prstGeom>
-          <a:noFill/>
-        </p:spPr>
-        <p:txBody>
-          <a:bodyPr wrap="square">
-            <a:spAutoFit/>
-          </a:bodyPr>
-          <a:lstStyle/>
-          <a:p>
-            <a:pPr>
-              <a:defRPr sz="2000">
-                <a:solidFill>
-                  <a:srgbClr val="202020"/>
-                </a:solidFill>
-              </a:defRPr>
-            </a:pPr>
-            <a:r>
-              <a:t>lif_neuron_hopfion/gradient_ku_verification：drive-release 实验对照。</a:t>
-            </a:r>
-          </a:p>
-          <a:p>
-            <a:pPr>
-              <a:defRPr sz="2000">
-                <a:solidFill>
-                  <a:srgbClr val="202020"/>
-                </a:solidFill>
-              </a:defRPr>
-            </a:pPr>
-          </a:p>
-          <a:p>
-            <a:pPr>
-              <a:defRPr sz="2000">
-                <a:solidFill>
-                  <a:srgbClr val="202020"/>
-                </a:solidFill>
-              </a:defRPr>
-            </a:pPr>
-            <a:r>
-              <a:t>- gradient_ku_drive_release：100 GHz drive 0.3 ns → OFF 2 ns，Ku 梯度（10000→5500，沿 z 方向 10 区）</a:t>
-            </a:r>
-          </a:p>
-          <a:p>
-            <a:pPr>
-              <a:defRPr sz="2000">
-                <a:solidFill>
-                  <a:srgbClr val="202020"/>
-                </a:solidFill>
-              </a:defRPr>
-            </a:pPr>
-            <a:r>
-              <a:t>- uniform_ku_drive_release：对照，固定 Ku=10000</a:t>
-            </a:r>
-          </a:p>
-          <a:p>
-            <a:pPr>
-              <a:defRPr sz="2000">
-                <a:solidFill>
-                  <a:srgbClr val="202020"/>
-                </a:solidFill>
-              </a:defRPr>
-            </a:pPr>
-          </a:p>
-          <a:p>
-            <a:pPr>
-              <a:defRPr sz="2000">
-                <a:solidFill>
-                  <a:srgbClr val="202020"/>
-                </a:solidFill>
-              </a:defRPr>
-            </a:pPr>
-            <a:r>
-              <a:t>结论 PASS：</a:t>
-            </a:r>
-          </a:p>
-          <a:p>
-            <a:pPr>
-              <a:defRPr sz="2000">
-                <a:solidFill>
-                  <a:srgbClr val="202020"/>
-                </a:solidFill>
-              </a:defRPr>
-            </a:pPr>
-            <a:r>
-              <a:t>- gradient 在 +7.8 nm 收敛（near-critical damping）</a:t>
-            </a:r>
-          </a:p>
-          <a:p>
-            <a:pPr>
-              <a:defRPr sz="2000">
-                <a:solidFill>
-                  <a:srgbClr val="202020"/>
-                </a:solidFill>
-              </a:defRPr>
-            </a:pPr>
-            <a:r>
-              <a:t>- uniform 在原点附近持续振荡（underdamped）</a:t>
-            </a:r>
-          </a:p>
-          <a:p>
-            <a:pPr>
-              <a:defRPr sz="2000">
-                <a:solidFill>
-                  <a:srgbClr val="202020"/>
-                </a:solidFill>
-              </a:defRPr>
-            </a:pPr>
-            <a:r>
-              <a:t>- 梯度 Ku 提供了清晰的恢复力</a:t>
-            </a:r>
-          </a:p>
-          <a:p>
-            <a:pPr>
-              <a:defRPr sz="2000">
-                <a:solidFill>
-                  <a:srgbClr val="202020"/>
-                </a:solidFill>
-              </a:defRPr>
-            </a:pPr>
-          </a:p>
-          <a:p>
-            <a:pPr>
-              <a:defRPr sz="2000">
-                <a:solidFill>
-                  <a:srgbClr val="202020"/>
-                </a:solidFill>
-              </a:defRPr>
-            </a:pPr>
-            <a:r>
-              <a:t>意外发现：Hopfion 偏好低 Ku 区（gradient 平衡在 Ku≈7500 端，即 +z 端），与初始假设"Hopfion 趋向高 Ku 区"相反。Phase 2 设计因此需要反转源-初态位置。</a:t>
-            </a:r>
-          </a:p>
-        </p:txBody>
-      </p:sp>
-      <p:pic>
-        <p:nvPicPr>
-          <p:cNvPr id="4" name="Picture 3" descr="lif_phase1_pass.png"/>
-          <p:cNvPicPr>
-            <a:picLocks noChangeAspect="1"/>
-          </p:cNvPicPr>
-          <p:nvPr/>
-        </p:nvPicPr>
-        <p:blipFill>
-          <a:blip r:embed="rId2"/>
-          <a:stretch>
-            <a:fillRect/>
-          </a:stretch>
-        </p:blipFill>
-        <p:spPr>
-          <a:xfrm>
-            <a:off x="7589520" y="1280160"/>
-            <a:ext cx="4297680" cy="4290451"/>
-          </a:xfrm>
-          <a:prstGeom prst="rect">
-            <a:avLst/>
-          </a:prstGeom>
-        </p:spPr>
-      </p:pic>
-      <p:sp>
-        <p:nvSpPr>
-          <p:cNvPr id="5" name="TextBox 4"/>
-          <p:cNvSpPr txBox="1"/>
-          <p:nvPr/>
-        </p:nvSpPr>
-        <p:spPr>
-          <a:xfrm>
-            <a:off x="4572000" y="6355080"/>
-            <a:ext cx="7315200" cy="365760"/>
-          </a:xfrm>
-          <a:prstGeom prst="rect">
-            <a:avLst/>
-          </a:prstGeom>
-          <a:noFill/>
-        </p:spPr>
-        <p:txBody>
-          <a:bodyPr wrap="square">
-            <a:spAutoFit/>
-          </a:bodyPr>
-          <a:lstStyle/>
-          <a:p>
-            <a:pPr algn="r">
-              <a:defRPr sz="1000" i="1">
-                <a:solidFill>
-                  <a:srgbClr val="808080"/>
-                </a:solidFill>
-              </a:defRPr>
-            </a:pPr>
-            <a:r>
-              <a:t>来源：`lif_neuron_hopfion/gradient_ku_verification/drive_release_test/`</a:t>
-            </a:r>
-          </a:p>
-        </p:txBody>
-      </p:sp>
-    </p:spTree>
-  </p:cSld>
-  <p:clrMapOvr>
-    <a:masterClrMapping/>
-  </p:clrMapOvr>
-</p:sld>
-</file>
-
-<file path=ppt/slides/slide25.xml><?xml version="1.0" encoding="utf-8"?>
-<p:sld xmlns:a="http://schemas.openxmlformats.org/drawingml/2006/main" xmlns:p="http://schemas.openxmlformats.org/presentationml/2006/main" xmlns:r="http://schemas.openxmlformats.org/officeDocument/2006/relationships">
-  <p:cSld>
-    <p:spTree>
-      <p:nvGrpSpPr>
-        <p:cNvPr id="1" name=""/>
-        <p:cNvGrpSpPr/>
-        <p:nvPr/>
-      </p:nvGrpSpPr>
-      <p:grpSpPr/>
-      <p:sp>
-        <p:nvSpPr>
-          <p:cNvPr id="2" name="TextBox 1"/>
-          <p:cNvSpPr txBox="1"/>
-          <p:nvPr/>
-        </p:nvSpPr>
-        <p:spPr>
-          <a:xfrm>
-            <a:off x="457200" y="274320"/>
-            <a:ext cx="11247120" cy="640080"/>
-          </a:xfrm>
-          <a:prstGeom prst="rect">
-            <a:avLst/>
-          </a:prstGeom>
-          <a:noFill/>
-        </p:spPr>
-        <p:txBody>
-          <a:bodyPr wrap="none">
-            <a:spAutoFit/>
-          </a:bodyPr>
-          <a:lstStyle/>
-          <a:p>
-            <a:pPr>
-              <a:defRPr sz="2000" b="1">
-                <a:solidFill>
-                  <a:srgbClr val="1F2D5A"/>
-                </a:solidFill>
-              </a:defRPr>
-            </a:pPr>
-            <a:r>
-              <a:t>LIF Phase 2 F1：脉冲列 integrate（FAILED）</a:t>
-            </a:r>
-          </a:p>
-        </p:txBody>
-      </p:sp>
-      <p:sp>
-        <p:nvSpPr>
-          <p:cNvPr id="3" name="TextBox 2"/>
-          <p:cNvSpPr txBox="1"/>
-          <p:nvPr/>
-        </p:nvSpPr>
-        <p:spPr>
-          <a:xfrm>
-            <a:off x="457200" y="1097280"/>
-            <a:ext cx="6858000" cy="4937760"/>
-          </a:xfrm>
-          <a:prstGeom prst="rect">
-            <a:avLst/>
-          </a:prstGeom>
-          <a:noFill/>
-        </p:spPr>
-        <p:txBody>
-          <a:bodyPr wrap="square">
-            <a:spAutoFit/>
-          </a:bodyPr>
-          <a:lstStyle/>
-          <a:p>
-            <a:pPr>
-              <a:defRPr sz="2000">
-                <a:solidFill>
-                  <a:srgbClr val="202020"/>
-                </a:solidFill>
-              </a:defRPr>
-            </a:pPr>
-            <a:r>
-              <a:t>lif_cycle_demo/pulse_train_integrate：4 脉冲 @1100 GHz（0.15 ns on / 0.25 ns gap） + 100 GHz fire + 不应期，总 2.15 ns。</a:t>
-            </a:r>
-          </a:p>
-          <a:p>
-            <a:pPr>
-              <a:defRPr sz="2000">
-                <a:solidFill>
-                  <a:srgbClr val="202020"/>
-                </a:solidFill>
-              </a:defRPr>
-            </a:pPr>
-          </a:p>
-          <a:p>
-            <a:pPr>
-              <a:defRPr sz="2000">
-                <a:solidFill>
-                  <a:srgbClr val="202020"/>
-                </a:solidFill>
-              </a:defRPr>
-            </a:pPr>
-            <a:r>
-              <a:t>FAILED，t=1.089 ns kill（6h49m 跑了 49.5%）。</a:t>
-            </a:r>
-          </a:p>
-          <a:p>
-            <a:pPr>
-              <a:defRPr sz="2000">
-                <a:solidFill>
-                  <a:srgbClr val="202020"/>
-                </a:solidFill>
-              </a:defRPr>
-            </a:pPr>
-          </a:p>
-          <a:p>
-            <a:pPr>
-              <a:defRPr sz="2000">
-                <a:solidFill>
-                  <a:srgbClr val="202020"/>
-                </a:solidFill>
-              </a:defRPr>
-            </a:pPr>
-            <a:r>
-              <a:t>OVF 坐标系修正后真实轨迹：0 → Leak1 末 -6.76 nm → Pulse2 末 -13.93 nm → Leak3 末 -16.95 nm（持续 overshoot，未稳定）。</a:t>
-            </a:r>
-          </a:p>
-          <a:p>
-            <a:pPr>
-              <a:defRPr sz="2000">
-                <a:solidFill>
-                  <a:srgbClr val="202020"/>
-                </a:solidFill>
-              </a:defRPr>
-            </a:pPr>
-          </a:p>
-          <a:p>
-            <a:pPr>
-              <a:defRPr sz="2000">
-                <a:solidFill>
-                  <a:srgbClr val="202020"/>
-                </a:solidFill>
-              </a:defRPr>
-            </a:pPr>
-            <a:r>
-              <a:t>失败原因：</a:t>
-            </a:r>
-          </a:p>
-          <a:p>
-            <a:pPr>
-              <a:defRPr sz="2000">
-                <a:solidFill>
-                  <a:srgbClr val="202020"/>
-                </a:solidFill>
-              </a:defRPr>
-            </a:pPr>
-            <a:r>
-              <a:t>1. 1100 GHz 推 -z 方向，与梯度 Ku 恢复力 +z 同向（不是反向），Hopfion 单向漂移</a:t>
-            </a:r>
-          </a:p>
-          <a:p>
-            <a:pPr>
-              <a:defRPr sz="2000">
-                <a:solidFill>
-                  <a:srgbClr val="202020"/>
-                </a:solidFill>
-              </a:defRPr>
-            </a:pPr>
-            <a:r>
-              <a:t>2. Leak 期 Hopfion 继续 overshoot，残余自旋波能量 &gt;&gt; 梯度恢复力</a:t>
-            </a:r>
-          </a:p>
-          <a:p>
-            <a:pPr>
-              <a:defRPr sz="2000">
-                <a:solidFill>
-                  <a:srgbClr val="202020"/>
-                </a:solidFill>
-              </a:defRPr>
-            </a:pPr>
-            <a:r>
-              <a:t>3. Phase 1 V2 在 100 GHz 下的"低 Ku 偏好"不能外推到 1100 GHz</a:t>
-            </a:r>
-          </a:p>
-        </p:txBody>
-      </p:sp>
-      <p:pic>
-        <p:nvPicPr>
-          <p:cNvPr id="4" name="Picture 3" descr="lif_phase2_f1_failed.png"/>
-          <p:cNvPicPr>
-            <a:picLocks noChangeAspect="1"/>
-          </p:cNvPicPr>
-          <p:nvPr/>
-        </p:nvPicPr>
-        <p:blipFill>
-          <a:blip r:embed="rId2"/>
-          <a:stretch>
-            <a:fillRect/>
-          </a:stretch>
-        </p:blipFill>
-        <p:spPr>
-          <a:xfrm>
-            <a:off x="7589520" y="1280160"/>
-            <a:ext cx="4297680" cy="1953491"/>
-          </a:xfrm>
-          <a:prstGeom prst="rect">
-            <a:avLst/>
-          </a:prstGeom>
-        </p:spPr>
-      </p:pic>
-      <p:sp>
-        <p:nvSpPr>
-          <p:cNvPr id="5" name="TextBox 4"/>
-          <p:cNvSpPr txBox="1"/>
-          <p:nvPr/>
-        </p:nvSpPr>
-        <p:spPr>
-          <a:xfrm>
-            <a:off x="4572000" y="6355080"/>
-            <a:ext cx="7315200" cy="365760"/>
-          </a:xfrm>
-          <a:prstGeom prst="rect">
-            <a:avLst/>
-          </a:prstGeom>
-          <a:noFill/>
-        </p:spPr>
-        <p:txBody>
-          <a:bodyPr wrap="square">
-            <a:spAutoFit/>
-          </a:bodyPr>
-          <a:lstStyle/>
-          <a:p>
-            <a:pPr algn="r">
-              <a:defRPr sz="1000" i="1">
-                <a:solidFill>
-                  <a:srgbClr val="808080"/>
-                </a:solidFill>
-              </a:defRPr>
-            </a:pPr>
-            <a:r>
-              <a:t>来源：`lif_neuron_hopfion/lif_cycle_demo/pulse_train_integrate/`</a:t>
-            </a:r>
-          </a:p>
-        </p:txBody>
-      </p:sp>
-    </p:spTree>
-  </p:cSld>
-  <p:clrMapOvr>
-    <a:masterClrMapping/>
-  </p:clrMapOvr>
-</p:sld>
-</file>
-
-<file path=ppt/slides/slide26.xml><?xml version="1.0" encoding="utf-8"?>
-<p:sld xmlns:a="http://schemas.openxmlformats.org/drawingml/2006/main" xmlns:p="http://schemas.openxmlformats.org/presentationml/2006/main" xmlns:r="http://schemas.openxmlformats.org/officeDocument/2006/relationships">
-  <p:cSld>
-    <p:spTree>
-      <p:nvGrpSpPr>
-        <p:cNvPr id="1" name=""/>
-        <p:cNvGrpSpPr/>
-        <p:nvPr/>
-      </p:nvGrpSpPr>
-      <p:grpSpPr/>
-      <p:sp>
-        <p:nvSpPr>
-          <p:cNvPr id="2" name="TextBox 1"/>
-          <p:cNvSpPr txBox="1"/>
-          <p:nvPr/>
-        </p:nvSpPr>
-        <p:spPr>
-          <a:xfrm>
-            <a:off x="457200" y="274320"/>
-            <a:ext cx="11247120" cy="640080"/>
-          </a:xfrm>
-          <a:prstGeom prst="rect">
-            <a:avLst/>
-          </a:prstGeom>
-          <a:noFill/>
-        </p:spPr>
-        <p:txBody>
-          <a:bodyPr wrap="none">
-            <a:spAutoFit/>
-          </a:bodyPr>
-          <a:lstStyle/>
-          <a:p>
-            <a:pPr>
-              <a:defRPr sz="2000" b="1">
-                <a:solidFill>
-                  <a:srgbClr val="1F2D5A"/>
-                </a:solidFill>
-              </a:defRPr>
-            </a:pPr>
-            <a:r>
-              <a:t>LIF Phase 2 重设计候选（未开工）</a:t>
-            </a:r>
-          </a:p>
-        </p:txBody>
-      </p:sp>
-      <p:sp>
-        <p:nvSpPr>
-          <p:cNvPr id="3" name="TextBox 2"/>
-          <p:cNvSpPr txBox="1"/>
-          <p:nvPr/>
-        </p:nvSpPr>
-        <p:spPr>
-          <a:xfrm>
-            <a:off x="457200" y="1097280"/>
-            <a:ext cx="11247120" cy="4937760"/>
-          </a:xfrm>
-          <a:prstGeom prst="rect">
-            <a:avLst/>
-          </a:prstGeom>
-          <a:noFill/>
-        </p:spPr>
-        <p:txBody>
-          <a:bodyPr wrap="square">
-            <a:spAutoFit/>
-          </a:bodyPr>
-          <a:lstStyle/>
-          <a:p>
-            <a:pPr>
-              <a:defRPr sz="2000">
-                <a:solidFill>
-                  <a:srgbClr val="202020"/>
-                </a:solidFill>
-              </a:defRPr>
-            </a:pPr>
-            <a:r>
-              <a:t>4 个候选方向：</a:t>
-            </a:r>
-          </a:p>
-          <a:p>
-            <a:pPr>
-              <a:defRPr sz="2000">
-                <a:solidFill>
-                  <a:srgbClr val="202020"/>
-                </a:solidFill>
-              </a:defRPr>
-            </a:pPr>
-            <a:r>
-              <a:t>- 方案 A：反转源-初态相对位置（initial 在 -z 端高 Ku，integrate 用 100 GHz → +z，梯度自然拉回 -z，fire 用反向冲击）</a:t>
-            </a:r>
-          </a:p>
-          <a:p>
-            <a:pPr>
-              <a:defRPr sz="2000">
-                <a:solidFill>
-                  <a:srgbClr val="202020"/>
-                </a:solidFill>
-              </a:defRPr>
-            </a:pPr>
-            <a:r>
-              <a:t>- 方案 B：降低 1100 GHz 幅度（B=0.3 T） + 延长 leak gap（0.5 ns）让自旋波耗散</a:t>
-            </a:r>
-          </a:p>
-          <a:p>
-            <a:pPr>
-              <a:defRPr sz="2000">
-                <a:solidFill>
-                  <a:srgbClr val="202020"/>
-                </a:solidFill>
-              </a:defRPr>
-            </a:pPr>
-            <a:r>
-              <a:t>- 方案 C：缩短 pulse 宽（0.15 → 0.05 ns）减少单次注入能量</a:t>
-            </a:r>
-          </a:p>
-          <a:p>
-            <a:pPr>
-              <a:defRPr sz="2000">
-                <a:solidFill>
-                  <a:srgbClr val="202020"/>
-                </a:solidFill>
-              </a:defRPr>
-            </a:pPr>
-            <a:r>
-              <a:t>- 方案 D：双频叠加 integrate（1100 GHz 短冲 + 立即 100 GHz 反向短冲抑制残余自旋波）</a:t>
-            </a:r>
-          </a:p>
-          <a:p>
-            <a:pPr>
-              <a:defRPr sz="2000">
-                <a:solidFill>
-                  <a:srgbClr val="202020"/>
-                </a:solidFill>
-              </a:defRPr>
-            </a:pPr>
-          </a:p>
-          <a:p>
-            <a:pPr>
-              <a:defRPr sz="2000">
-                <a:solidFill>
-                  <a:srgbClr val="202020"/>
-                </a:solidFill>
-              </a:defRPr>
-            </a:pPr>
-            <a:r>
-              <a:t>仅 sub-threshold 对照（B=0.1 T）脚本就绪：`subthreshold_B0p1T.mx3`。</a:t>
-            </a:r>
-          </a:p>
-          <a:p>
-            <a:pPr>
-              <a:defRPr sz="2000">
-                <a:solidFill>
-                  <a:srgbClr val="202020"/>
-                </a:solidFill>
-              </a:defRPr>
-            </a:pPr>
-          </a:p>
-          <a:p>
-            <a:pPr>
-              <a:defRPr sz="2000">
-                <a:solidFill>
-                  <a:srgbClr val="202020"/>
-                </a:solidFill>
-              </a:defRPr>
-            </a:pPr>
-            <a:r>
-              <a:t>未开工，等定方案。</a:t>
-            </a:r>
-          </a:p>
-        </p:txBody>
-      </p:sp>
-      <p:sp>
-        <p:nvSpPr>
-          <p:cNvPr id="4" name="TextBox 3"/>
-          <p:cNvSpPr txBox="1"/>
-          <p:nvPr/>
-        </p:nvSpPr>
-        <p:spPr>
-          <a:xfrm>
-            <a:off x="4572000" y="6355080"/>
-            <a:ext cx="7315200" cy="365760"/>
-          </a:xfrm>
-          <a:prstGeom prst="rect">
-            <a:avLst/>
-          </a:prstGeom>
-          <a:noFill/>
-        </p:spPr>
-        <p:txBody>
-          <a:bodyPr wrap="square">
-            <a:spAutoFit/>
-          </a:bodyPr>
-          <a:lstStyle/>
-          <a:p>
-            <a:pPr algn="r">
-              <a:defRPr sz="1000" i="1">
-                <a:solidFill>
-                  <a:srgbClr val="808080"/>
-                </a:solidFill>
-              </a:defRPr>
-            </a:pPr>
-            <a:r>
-              <a:t>来源：`lif_neuron_hopfion/lif_cycle_demo/`（脚本就绪）</a:t>
-            </a:r>
-          </a:p>
-        </p:txBody>
-      </p:sp>
-    </p:spTree>
-  </p:cSld>
-  <p:clrMapOvr>
-    <a:masterClrMapping/>
-  </p:clrMapOvr>
-</p:sld>
-</file>
-
-<file path=ppt/slides/slide27.xml><?xml version="1.0" encoding="utf-8"?>
-<p:sld xmlns:a="http://schemas.openxmlformats.org/drawingml/2006/main" xmlns:p="http://schemas.openxmlformats.org/presentationml/2006/main" xmlns:r="http://schemas.openxmlformats.org/officeDocument/2006/relationships">
-  <p:cSld>
-    <p:spTree>
-      <p:nvGrpSpPr>
-        <p:cNvPr id="1" name=""/>
-        <p:cNvGrpSpPr/>
-        <p:nvPr/>
-      </p:nvGrpSpPr>
-      <p:grpSpPr/>
-      <p:sp>
-        <p:nvSpPr>
-          <p:cNvPr id="2" name="TextBox 1"/>
-          <p:cNvSpPr txBox="1"/>
-          <p:nvPr/>
-        </p:nvSpPr>
-        <p:spPr>
-          <a:xfrm>
-            <a:off x="457200" y="274320"/>
-            <a:ext cx="11247120" cy="640080"/>
-          </a:xfrm>
-          <a:prstGeom prst="rect">
-            <a:avLst/>
-          </a:prstGeom>
-          <a:noFill/>
-        </p:spPr>
-        <p:txBody>
-          <a:bodyPr wrap="none">
-            <a:spAutoFit/>
-          </a:bodyPr>
-          <a:lstStyle/>
-          <a:p>
-            <a:pPr>
-              <a:defRPr sz="2000" b="1">
-                <a:solidFill>
-                  <a:srgbClr val="1F2D5A"/>
-                </a:solidFill>
-              </a:defRPr>
-            </a:pPr>
-            <a:r>
-              <a:t>旧版本对标：My_old_simulation（系数错误）</a:t>
-            </a:r>
-          </a:p>
-        </p:txBody>
-      </p:sp>
-      <p:sp>
-        <p:nvSpPr>
-          <p:cNvPr id="3" name="TextBox 2"/>
-          <p:cNvSpPr txBox="1"/>
-          <p:nvPr/>
-        </p:nvSpPr>
-        <p:spPr>
-          <a:xfrm>
-            <a:off x="457200" y="1097280"/>
-            <a:ext cx="11247120" cy="4937760"/>
-          </a:xfrm>
-          <a:prstGeom prst="rect">
-            <a:avLst/>
-          </a:prstGeom>
-          <a:noFill/>
-        </p:spPr>
-        <p:txBody>
-          <a:bodyPr wrap="square">
-            <a:spAutoFit/>
-          </a:bodyPr>
-          <a:lstStyle/>
-          <a:p>
-            <a:pPr>
-              <a:defRPr sz="2000">
-                <a:solidFill>
-                  <a:srgbClr val="202020"/>
-                </a:solidFill>
-              </a:defRPr>
-            </a:pPr>
-            <a:r>
-              <a:t>old_results/My_old_simulation/ 共 20 个 srcX/srcZ point source freq sweep。含 J2/J4 系数符号错误。</a:t>
-            </a:r>
-          </a:p>
-          <a:p>
-            <a:pPr>
-              <a:defRPr sz="2000">
-                <a:solidFill>
-                  <a:srgbClr val="202020"/>
-                </a:solidFill>
-              </a:defRPr>
-            </a:pPr>
-          </a:p>
-          <a:p>
-            <a:pPr>
-              <a:defRPr sz="2000">
-                <a:solidFill>
-                  <a:srgbClr val="202020"/>
-                </a:solidFill>
-              </a:defRPr>
-            </a:pPr>
-            <a:r>
-              <a:t>具体陷阱：J2 / J4 在 frustrated FM 模型里有正负号约定，不同文献存在差异。旧版本采用了错误符号约定。</a:t>
-            </a:r>
-          </a:p>
-          <a:p>
-            <a:pPr>
-              <a:defRPr sz="2000">
-                <a:solidFill>
-                  <a:srgbClr val="202020"/>
-                </a:solidFill>
-              </a:defRPr>
-            </a:pPr>
-          </a:p>
-          <a:p>
-            <a:pPr>
-              <a:defRPr sz="2000">
-                <a:solidFill>
-                  <a:srgbClr val="202020"/>
-                </a:solidFill>
-              </a:defRPr>
-            </a:pPr>
-            <a:r>
-              <a:t>与当前正确版本对比：拓扑荷数值差异约 2-3%；动力学定性趋势相同但定量结果不可比。</a:t>
-            </a:r>
-          </a:p>
-          <a:p>
-            <a:pPr>
-              <a:defRPr sz="2000">
-                <a:solidFill>
-                  <a:srgbClr val="202020"/>
-                </a:solidFill>
-              </a:defRPr>
-            </a:pPr>
-          </a:p>
-          <a:p>
-            <a:pPr>
-              <a:defRPr sz="2000">
-                <a:solidFill>
-                  <a:srgbClr val="202020"/>
-                </a:solidFill>
-              </a:defRPr>
-            </a:pPr>
-            <a:r>
-              <a:t>经验：复用别人代码时必须验证符号；从已验证的 R8r4_Ku0.mx3 拷参数，不要从公式重推。</a:t>
-            </a:r>
-          </a:p>
-        </p:txBody>
-      </p:sp>
-      <p:sp>
-        <p:nvSpPr>
-          <p:cNvPr id="4" name="TextBox 3"/>
-          <p:cNvSpPr txBox="1"/>
-          <p:nvPr/>
-        </p:nvSpPr>
-        <p:spPr>
-          <a:xfrm>
-            <a:off x="4572000" y="6355080"/>
-            <a:ext cx="7315200" cy="365760"/>
-          </a:xfrm>
-          <a:prstGeom prst="rect">
-            <a:avLst/>
-          </a:prstGeom>
-          <a:noFill/>
-        </p:spPr>
-        <p:txBody>
-          <a:bodyPr wrap="square">
-            <a:spAutoFit/>
-          </a:bodyPr>
-          <a:lstStyle/>
-          <a:p>
-            <a:pPr algn="r">
-              <a:defRPr sz="1000" i="1">
-                <a:solidFill>
-                  <a:srgbClr val="808080"/>
-                </a:solidFill>
-              </a:defRPr>
-            </a:pPr>
-            <a:r>
-              <a:t>来源：`old_results/My_old_simulation/A材料尺寸对hopfion的影响/`</a:t>
-            </a:r>
-          </a:p>
-        </p:txBody>
-      </p:sp>
-    </p:spTree>
-  </p:cSld>
-  <p:clrMapOvr>
-    <a:masterClrMapping/>
-  </p:clrMapOvr>
-</p:sld>
-</file>
-
-<file path=ppt/slides/slide28.xml><?xml version="1.0" encoding="utf-8"?>
-<p:sld xmlns:a="http://schemas.openxmlformats.org/drawingml/2006/main" xmlns:p="http://schemas.openxmlformats.org/presentationml/2006/main" xmlns:r="http://schemas.openxmlformats.org/officeDocument/2006/relationships">
-  <p:cSld>
-    <p:spTree>
-      <p:nvGrpSpPr>
-        <p:cNvPr id="1" name=""/>
-        <p:cNvGrpSpPr/>
-        <p:nvPr/>
-      </p:nvGrpSpPr>
-      <p:grpSpPr/>
-      <p:sp>
-        <p:nvSpPr>
-          <p:cNvPr id="2" name="TextBox 1"/>
-          <p:cNvSpPr txBox="1"/>
-          <p:nvPr/>
-        </p:nvSpPr>
-        <p:spPr>
-          <a:xfrm>
-            <a:off x="457200" y="274320"/>
-            <a:ext cx="11247120" cy="640080"/>
-          </a:xfrm>
-          <a:prstGeom prst="rect">
-            <a:avLst/>
-          </a:prstGeom>
-          <a:noFill/>
-        </p:spPr>
-        <p:txBody>
-          <a:bodyPr wrap="none">
-            <a:spAutoFit/>
-          </a:bodyPr>
-          <a:lstStyle/>
-          <a:p>
-            <a:pPr>
-              <a:defRPr sz="2000" b="1">
-                <a:solidFill>
-                  <a:srgbClr val="1F2D5A"/>
-                </a:solidFill>
-              </a:defRPr>
-            </a:pPr>
-            <a:r>
-              <a:t>Device B 验证 + srtp 学生项目</a:t>
-            </a:r>
-          </a:p>
-        </p:txBody>
-      </p:sp>
-      <p:sp>
-        <p:nvSpPr>
-          <p:cNvPr id="3" name="TextBox 2"/>
-          <p:cNvSpPr txBox="1"/>
-          <p:nvPr/>
-        </p:nvSpPr>
-        <p:spPr>
-          <a:xfrm>
-            <a:off x="457200" y="1097280"/>
-            <a:ext cx="11247120" cy="4937760"/>
-          </a:xfrm>
-          <a:prstGeom prst="rect">
-            <a:avLst/>
-          </a:prstGeom>
-          <a:noFill/>
-        </p:spPr>
-        <p:txBody>
-          <a:bodyPr wrap="square">
-            <a:spAutoFit/>
-          </a:bodyPr>
-          <a:lstStyle/>
-          <a:p>
-            <a:pPr>
-              <a:defRPr sz="2000">
-                <a:solidFill>
-                  <a:srgbClr val="202020"/>
-                </a:solidFill>
-              </a:defRPr>
-            </a:pPr>
-            <a:r>
-              <a:t>deviceB_package：用户次要 Windows 机器独立运行 srcZ freq sweep 9 个验证。结果与主机一致，作为独立机器交叉验证。</a:t>
-            </a:r>
-          </a:p>
-          <a:p>
-            <a:pPr>
-              <a:defRPr sz="2000">
-                <a:solidFill>
-                  <a:srgbClr val="202020"/>
-                </a:solidFill>
-              </a:defRPr>
-            </a:pPr>
-          </a:p>
-          <a:p>
-            <a:pPr>
-              <a:defRPr sz="2000">
-                <a:solidFill>
-                  <a:srgbClr val="202020"/>
-                </a:solidFill>
-              </a:defRPr>
-            </a:pPr>
-            <a:r>
-              <a:t>srtp/：早期学生项目存档。</a:t>
-            </a:r>
-          </a:p>
-          <a:p>
-            <a:pPr>
-              <a:defRPr sz="2000">
-                <a:solidFill>
-                  <a:srgbClr val="202020"/>
-                </a:solidFill>
-              </a:defRPr>
-            </a:pPr>
-            <a:r>
-              <a:t>- experiments/fege.mx3：早期 FeGe 尝试</a:t>
-            </a:r>
-          </a:p>
-          <a:p>
-            <a:pPr>
-              <a:defRPr sz="2000">
-                <a:solidFill>
-                  <a:srgbClr val="202020"/>
-                </a:solidFill>
-              </a:defRPr>
-            </a:pPr>
-            <a:r>
-              <a:t>- hopfion_mumax3/1.spinwave &amp; magnetic field x/：早期自旋波驱动</a:t>
-            </a:r>
-          </a:p>
-          <a:p>
-            <a:pPr>
-              <a:defRPr sz="2000">
-                <a:solidFill>
-                  <a:srgbClr val="202020"/>
-                </a:solidFill>
-              </a:defRPr>
-            </a:pPr>
-            <a:r>
-              <a:t>- magnon-hopfion-main/：振荡-Hopfion 耦合，未完成</a:t>
-            </a:r>
-          </a:p>
-          <a:p>
-            <a:pPr>
-              <a:defRPr sz="2000">
-                <a:solidFill>
-                  <a:srgbClr val="202020"/>
-                </a:solidFill>
-              </a:defRPr>
-            </a:pPr>
-            <a:r>
-              <a:t>- draw_hopfion/：早期可视化</a:t>
-            </a:r>
-          </a:p>
-          <a:p>
-            <a:pPr>
-              <a:defRPr sz="2000">
-                <a:solidFill>
-                  <a:srgbClr val="202020"/>
-                </a:solidFill>
-              </a:defRPr>
-            </a:pPr>
-          </a:p>
-          <a:p>
-            <a:pPr>
-              <a:defRPr sz="2000">
-                <a:solidFill>
-                  <a:srgbClr val="202020"/>
-                </a:solidFill>
-              </a:defRPr>
-            </a:pPr>
-            <a:r>
-              <a:t>历史价值：展示项目早期摸索过程，与当前体系参数差异较大，不可直接复用。</a:t>
-            </a:r>
-          </a:p>
-        </p:txBody>
-      </p:sp>
-      <p:sp>
-        <p:nvSpPr>
-          <p:cNvPr id="4" name="TextBox 3"/>
-          <p:cNvSpPr txBox="1"/>
-          <p:nvPr/>
-        </p:nvSpPr>
-        <p:spPr>
-          <a:xfrm>
-            <a:off x="4572000" y="6355080"/>
-            <a:ext cx="7315200" cy="365760"/>
-          </a:xfrm>
-          <a:prstGeom prst="rect">
-            <a:avLst/>
-          </a:prstGeom>
-          <a:noFill/>
-        </p:spPr>
-        <p:txBody>
-          <a:bodyPr wrap="square">
-            <a:spAutoFit/>
-          </a:bodyPr>
-          <a:lstStyle/>
-          <a:p>
-            <a:pPr algn="r">
-              <a:defRPr sz="1000" i="1">
-                <a:solidFill>
-                  <a:srgbClr val="808080"/>
-                </a:solidFill>
-              </a:defRPr>
-            </a:pPr>
-            <a:r>
-              <a:t>来源：`deviceB_package/`、`srtp/`</a:t>
-            </a:r>
-          </a:p>
-        </p:txBody>
-      </p:sp>
-    </p:spTree>
-  </p:cSld>
-  <p:clrMapOvr>
-    <a:masterClrMapping/>
-  </p:clrMapOvr>
-</p:sld>
-</file>
-
-<file path=ppt/slides/slide29.xml><?xml version="1.0" encoding="utf-8"?>
-<p:sld xmlns:a="http://schemas.openxmlformats.org/drawingml/2006/main" xmlns:p="http://schemas.openxmlformats.org/presentationml/2006/main" xmlns:r="http://schemas.openxmlformats.org/officeDocument/2006/relationships">
-  <p:cSld>
-    <p:spTree>
-      <p:nvGrpSpPr>
-        <p:cNvPr id="1" name=""/>
-        <p:cNvGrpSpPr/>
-        <p:nvPr/>
-      </p:nvGrpSpPr>
-      <p:grpSpPr/>
-      <p:sp>
-        <p:nvSpPr>
-          <p:cNvPr id="2" name="TextBox 1"/>
-          <p:cNvSpPr txBox="1"/>
-          <p:nvPr/>
-        </p:nvSpPr>
-        <p:spPr>
-          <a:xfrm>
-            <a:off x="457200" y="274320"/>
-            <a:ext cx="11247120" cy="640080"/>
-          </a:xfrm>
-          <a:prstGeom prst="rect">
-            <a:avLst/>
-          </a:prstGeom>
-          <a:noFill/>
-        </p:spPr>
-        <p:txBody>
-          <a:bodyPr wrap="none">
-            <a:spAutoFit/>
-          </a:bodyPr>
-          <a:lstStyle/>
-          <a:p>
-            <a:pPr>
-              <a:defRPr sz="2000" b="1">
-                <a:solidFill>
-                  <a:srgbClr val="1F2D5A"/>
-                </a:solidFill>
-              </a:defRPr>
-            </a:pPr>
-            <a:r>
-              <a:t>现状清单</a:t>
-            </a:r>
-          </a:p>
-        </p:txBody>
-      </p:sp>
-      <p:sp>
-        <p:nvSpPr>
-          <p:cNvPr id="3" name="TextBox 2"/>
-          <p:cNvSpPr txBox="1"/>
-          <p:nvPr/>
-        </p:nvSpPr>
-        <p:spPr>
-          <a:xfrm>
-            <a:off x="457200" y="1097280"/>
-            <a:ext cx="11247120" cy="4937760"/>
-          </a:xfrm>
-          <a:prstGeom prst="rect">
-            <a:avLst/>
-          </a:prstGeom>
-          <a:noFill/>
-        </p:spPr>
-        <p:txBody>
-          <a:bodyPr wrap="square">
-            <a:spAutoFit/>
-          </a:bodyPr>
-          <a:lstStyle/>
-          <a:p>
-            <a:pPr>
-              <a:defRPr sz="2000">
-                <a:solidFill>
-                  <a:srgbClr val="202020"/>
-                </a:solidFill>
-              </a:defRPr>
-            </a:pPr>
-            <a:r>
-              <a:t>跑完且有清晰结论：DMI-FM 三条件稳定性 / Frustrated FM 固有吸引子 R=2.60 nm / 居中稳态 Ku 三组 / Ku 临界趋势 / Q_H=1 验证 / 漂移机理修正 / 方向选择性 vibX/vibZ / srcX/srcZ 频率响应 / 单源双向 z 可控性 / 点源 vs 平面源对比 / LIF Phase 1 梯度恢复力 + Hopfion 偏好低 Ku</a:t>
-            </a:r>
-          </a:p>
-          <a:p>
-            <a:pPr>
-              <a:defRPr sz="2000">
-                <a:solidFill>
-                  <a:srgbClr val="202020"/>
-                </a:solidFill>
-              </a:defRPr>
-            </a:pPr>
-          </a:p>
-          <a:p>
-            <a:pPr>
-              <a:defRPr sz="2000">
-                <a:solidFill>
-                  <a:srgbClr val="202020"/>
-                </a:solidFill>
-              </a:defRPr>
-            </a:pPr>
-            <a:r>
-              <a:t>跑完但未归纳完整结论：amplitude_sweep srcX 旧标度律已推翻、新拟合未确定 / freq_switch v3 反转成功但坍塌后无后续 / STT 复现仅趋势确认无定量扫描</a:t>
+              <a:t>跑完且有清晰结论：Frustrated FM 稳态尺寸（与初态无关，与体系参数有关） / 居中稳态 Ku 三组 / Ku 临界趋势 / Q_H=1 验证 / 漂移机理修正 / 方向选择性 vibX/vibZ / srcX/srcZ 频率响应 / 单源双向 z 可控性 / 点源 vs 平面源对比 / LIF Phase 1 梯度恢复力 + Hopfion 偏好低 Ku</a:t>
+            </a:r>
+          </a:p>
+          <a:p>
+            <a:pPr>
+              <a:defRPr sz="2000">
+                <a:solidFill>
+                  <a:srgbClr val="202020"/>
+                </a:solidFill>
+              </a:defRPr>
+            </a:pPr>
+          </a:p>
+          <a:p>
+            <a:pPr>
+              <a:defRPr sz="2000">
+                <a:solidFill>
+                  <a:srgbClr val="202020"/>
+                </a:solidFill>
+              </a:defRPr>
+            </a:pPr>
+            <a:r>
+              <a:t>跑完但未归纳完整结论：amplitude_sweep srcX 旧标度律已推翻、新拟合未确定 / freq_switch v3 反转成功但坍塌后无后续</a:t>
             </a:r>
           </a:p>
           <a:p>
@@ -7460,7 +6344,7 @@
               </a:defRPr>
             </a:pPr>
             <a:r>
-              <a:t>从未启动：Q_H=2 / Q_H=4 稳定性验证 / freq_switch v3 方案 A 调参 / LIF Phase 2 重设计 4 候选 / Wang 2019 STT 参数扫描深化</a:t>
+              <a:t>从未启动：Q_H=2 / Q_H=4 稳定性验证 / freq_switch v3 方案 A 调参 / LIF Phase 2 重设计 4 候选</a:t>
             </a:r>
           </a:p>
         </p:txBody>
@@ -7513,7 +6397,7 @@
               </a:defRPr>
             </a:pPr>
             <a:r>
-              <a:t>DMI-FM 失败：错误环形 ansatz</a:t>
+              <a:t>Ku 临界扫描（13 点）</a:t>
             </a:r>
           </a:p>
         </p:txBody>
@@ -7527,7 +6411,7 @@
         <p:spPr>
           <a:xfrm>
             <a:off x="457200" y="1097280"/>
-            <a:ext cx="11247120" cy="4937760"/>
+            <a:ext cx="6858000" cy="4937760"/>
           </a:xfrm>
           <a:prstGeom prst="rect">
             <a:avLst/>
@@ -7548,35 +6432,59 @@
               </a:defRPr>
             </a:pPr>
             <a:r>
-              <a:t>在意识到需要 Sutcliffe 解析初态之前，尝试用 disc 环形 ansatz 直接构造 Hopfion 初始态。共 4 次尝试（含 128nm 体系 + 含退磁组合）。Hopfion 拓扑结构在弛豫早期就解构。</a:t>
-            </a:r>
-          </a:p>
-          <a:p>
-            <a:pPr>
-              <a:defRPr sz="2000">
-                <a:solidFill>
-                  <a:srgbClr val="202020"/>
-                </a:solidFill>
-              </a:defRPr>
-            </a:pPr>
-          </a:p>
-          <a:p>
-            <a:pPr>
-              <a:defRPr sz="2000">
-                <a:solidFill>
-                  <a:srgbClr val="202020"/>
-                </a:solidFill>
-              </a:defRPr>
-            </a:pPr>
-            <a:r>
-              <a:t>教训：3D 拓扑结构不能用 2D 环形剖面外推；必须用基于 Hopf 不变量的解析解。</a:t>
-            </a:r>
-          </a:p>
-        </p:txBody>
-      </p:sp>
-      <p:sp>
-        <p:nvSpPr>
-          <p:cNvPr id="4" name="TextBox 3"/>
+              <a:t>anisotropy_study/ku_critical_sweep：固定 R8r4 初始，扫描 Ku=0 / 5k / 10k / 20k / 30k / 40k / 50k / 52k / 55k / 56k / 57k / 58k 共 13 个点。</a:t>
+            </a:r>
+          </a:p>
+          <a:p>
+            <a:pPr>
+              <a:defRPr sz="2000">
+                <a:solidFill>
+                  <a:srgbClr val="202020"/>
+                </a:solidFill>
+              </a:defRPr>
+            </a:pPr>
+          </a:p>
+          <a:p>
+            <a:pPr>
+              <a:defRPr sz="2000">
+                <a:solidFill>
+                  <a:srgbClr val="202020"/>
+                </a:solidFill>
+              </a:defRPr>
+            </a:pPr>
+            <a:r>
+              <a:t>现象 + 结论：Ku 增大 Hopfion 单调收缩。R8r4 体系下，约 52–55 k 区间 Hopfion 结构坍塌。具体临界值 Ku_c 因材料体系而异（R3r2、R12r5 各不同），非研究优先级。</a:t>
+            </a:r>
+          </a:p>
+        </p:txBody>
+      </p:sp>
+      <p:pic>
+        <p:nvPicPr>
+          <p:cNvPr id="4" name="Picture 3" descr="ku_critical_R_vs_Ku.png"/>
+          <p:cNvPicPr>
+            <a:picLocks noChangeAspect="1"/>
+          </p:cNvPicPr>
+          <p:nvPr/>
+        </p:nvPicPr>
+        <p:blipFill>
+          <a:blip r:embed="rId2"/>
+          <a:stretch>
+            <a:fillRect/>
+          </a:stretch>
+        </p:blipFill>
+        <p:spPr>
+          <a:xfrm>
+            <a:off x="7589520" y="1280160"/>
+            <a:ext cx="4297680" cy="4779149"/>
+          </a:xfrm>
+          <a:prstGeom prst="rect">
+            <a:avLst/>
+          </a:prstGeom>
+        </p:spPr>
+      </p:pic>
+      <p:sp>
+        <p:nvSpPr>
+          <p:cNvPr id="5" name="TextBox 4"/>
           <p:cNvSpPr txBox="1"/>
           <p:nvPr/>
         </p:nvSpPr>
@@ -7604,7 +6512,7 @@
               </a:defRPr>
             </a:pPr>
             <a:r>
-              <a:t>来源：`20251219_dmi_fm/failed_attempts/sutcliffe_disc_wrong_ansatz/`</a:t>
+              <a:t>来源：`20260105_frustrated_fm/anisotropy_study/ku_critical_sweep/`</a:t>
             </a:r>
           </a:p>
         </p:txBody>
@@ -7657,7 +6565,7 @@
               </a:defRPr>
             </a:pPr>
             <a:r>
-              <a:t>DMI-FM 失败：toroidal nanoring</a:t>
+              <a:t>size_vs_ku + 拓扑荷 Q_H=1 验证</a:t>
             </a:r>
           </a:p>
         </p:txBody>
@@ -7692,7 +6600,28 @@
               </a:defRPr>
             </a:pPr>
             <a:r>
-              <a:t>尝试用环形 nanoring 几何承载 Hopfion，2 次实验都未跑完。判断方向不对后放弃。</a:t>
+              <a:t>anisotropy_study/size_vs_ku：R12r5 起始，扫描 Ku=0 / 2.5k / 5k / 10k / 12k 等共 6 个点，研究 R(Ku) 依赖关系。与 ku_critical_sweep 互补。</a:t>
+            </a:r>
+          </a:p>
+          <a:p>
+            <a:pPr>
+              <a:defRPr sz="2000">
+                <a:solidFill>
+                  <a:srgbClr val="202020"/>
+                </a:solidFill>
+              </a:defRPr>
+            </a:pPr>
+          </a:p>
+          <a:p>
+            <a:pPr>
+              <a:defRPr sz="2000">
+                <a:solidFill>
+                  <a:srgbClr val="202020"/>
+                </a:solidFill>
+              </a:defRPr>
+            </a:pPr>
+            <a:r>
+              <a:t>compute_hopf_index.py 对当前体系所有 Hopfion 初始态做 Q_H 数值验证：结果均为 Q_H=1。Q_H=2 (p=1,q=2) 和 Q_H=4 在 frustrated FM 体系下的稳定性从未仿真，是下一步方向。</a:t>
             </a:r>
           </a:p>
         </p:txBody>
@@ -7727,7 +6656,7 @@
               </a:defRPr>
             </a:pPr>
             <a:r>
-              <a:t>来源：`20251219_dmi_fm/failed_attempts/toroidal_nanoring_approach/`</a:t>
+              <a:t>来源：`20260105_frustrated_fm/anisotropy_study/size_vs_ku/` + `compute_hopf_index.py`</a:t>
             </a:r>
           </a:p>
         </p:txBody>
@@ -7780,7 +6709,7 @@
               </a:defRPr>
             </a:pPr>
             <a:r>
-              <a:t>DMI-FM 旁支：isolated_10λ + Neel 型</a:t>
+              <a:t>漂移旧实验</a:t>
             </a:r>
           </a:p>
         </p:txBody>
@@ -7815,28 +6744,52 @@
               </a:defRPr>
             </a:pPr>
             <a:r>
-              <a:t>isolated_hopfion_10lambda：10λ 盘几何下隔离 Hopfion 1 次测试，作为成功方案的尺寸对照。</a:t>
-            </a:r>
-          </a:p>
-          <a:p>
-            <a:pPr>
-              <a:defRPr sz="2000">
-                <a:solidFill>
-                  <a:srgbClr val="202020"/>
-                </a:solidFill>
-              </a:defRPr>
-            </a:pPr>
-          </a:p>
-          <a:p>
-            <a:pPr>
-              <a:defRPr sz="2000">
-                <a:solidFill>
-                  <a:srgbClr val="202020"/>
-                </a:solidFill>
-              </a:defRPr>
-            </a:pPr>
-            <a:r>
-              <a:t>neel_hopfion：Neel 型 Hopfion 共 9 次扫描（v1-v4 演化 + 5 个变体），v4 最长跑到 125 帧。结论：Neel 型也可稳定，与 Bloch 型并行存在。</a:t>
+              <a:t>drift_experiments 旧实验：</a:t>
+            </a:r>
+          </a:p>
+          <a:p>
+            <a:pPr>
+              <a:defRPr sz="2000">
+                <a:solidFill>
+                  <a:srgbClr val="202020"/>
+                </a:solidFill>
+              </a:defRPr>
+            </a:pPr>
+            <a:r>
+              <a:t>- bg_mx_axis_x_stable：alpha=5.0, R8r4, 10 ns 长跑，200 帧</a:t>
+            </a:r>
+          </a:p>
+          <a:p>
+            <a:pPr>
+              <a:defRPr sz="2000">
+                <a:solidFill>
+                  <a:srgbClr val="202020"/>
+                </a:solidFill>
+              </a:defRPr>
+            </a:pPr>
+            <a:r>
+              <a:t>- bg_my_axis_y_stable：1 ns 短跑，20 帧</a:t>
+            </a:r>
+          </a:p>
+          <a:p>
+            <a:pPr>
+              <a:defRPr sz="2000">
+                <a:solidFill>
+                  <a:srgbClr val="202020"/>
+                </a:solidFill>
+              </a:defRPr>
+            </a:pPr>
+          </a:p>
+          <a:p>
+            <a:pPr>
+              <a:defRPr sz="2000">
+                <a:solidFill>
+                  <a:srgbClr val="202020"/>
+                </a:solidFill>
+              </a:defRPr>
+            </a:pPr>
+            <a:r>
+              <a:t>当初结论：bg=mz 漂移、bg=mx,my 稳定。该结论已写入毕设论文 ch03 §3.2.3 早期版本。</a:t>
             </a:r>
           </a:p>
         </p:txBody>
@@ -7871,7 +6824,7 @@
               </a:defRPr>
             </a:pPr>
             <a:r>
-              <a:t>来源：`20251219_dmi_fm/{isolated_hopfion_10lambda, neel_hopfion}/`</a:t>
+              <a:t>来源：`20260105_frustrated_fm/drift_experiments/{bg_mx_axis_x_stable, bg_my_axis_y_stable}/`</a:t>
             </a:r>
           </a:p>
         </p:txBody>
@@ -7924,7 +6877,7 @@
               </a:defRPr>
             </a:pPr>
             <a:r>
-              <a:t>Frustrated FM 固有吸引子</a:t>
+              <a:t>漂移结论推翻：unified_rerun 控制变量</a:t>
             </a:r>
           </a:p>
         </p:txBody>
@@ -7938,7 +6891,7 @@
         <p:spPr>
           <a:xfrm>
             <a:off x="457200" y="1097280"/>
-            <a:ext cx="11247120" cy="4937760"/>
+            <a:ext cx="6858000" cy="4937760"/>
           </a:xfrm>
           <a:prstGeom prst="rect">
             <a:avLst/>
@@ -7959,35 +6912,101 @@
               </a:defRPr>
             </a:pPr>
             <a:r>
-              <a:t>无 DMI 体系，参数：100³ 格点 / 0.5 nm cell / PBC(1,1,1) / Ms=1.5e5 / Aex=5e-12 / J2=-0.164·J1 / J4=-0.082·J1。</a:t>
-            </a:r>
-          </a:p>
-          <a:p>
-            <a:pPr>
-              <a:defRPr sz="2000">
-                <a:solidFill>
-                  <a:srgbClr val="202020"/>
-                </a:solidFill>
-              </a:defRPr>
-            </a:pPr>
-          </a:p>
-          <a:p>
-            <a:pPr>
-              <a:defRPr sz="2000">
-                <a:solidFill>
-                  <a:srgbClr val="202020"/>
-                </a:solidFill>
-              </a:defRPr>
-            </a:pPr>
-            <a:r>
-              <a:t>size_sweep 两次实验：R8r4 初始 + R12r5 初始，Ku=0 下分别弛豫。两者都收敛到同一吸引子 R=2.60 nm。R12r5 收缩到 R=2.60，R8r4 膨胀到 R=2.60。说明体系存在唯一的固有 Hopfion 尺寸。</a:t>
-            </a:r>
-          </a:p>
-        </p:txBody>
-      </p:sp>
-      <p:sp>
-        <p:nvSpPr>
-          <p:cNvPr id="4" name="TextBox 3"/>
+              <a:t>unified_rerun：4 组统一参数（alpha=0.2, Ku=0, R3r2, 2 ns），bg=mx/my/mz × axis 组合。</a:t>
+            </a:r>
+          </a:p>
+          <a:p>
+            <a:pPr>
+              <a:defRPr sz="2000">
+                <a:solidFill>
+                  <a:srgbClr val="202020"/>
+                </a:solidFill>
+              </a:defRPr>
+            </a:pPr>
+          </a:p>
+          <a:p>
+            <a:pPr>
+              <a:defRPr sz="2000">
+                <a:solidFill>
+                  <a:srgbClr val="202020"/>
+                </a:solidFill>
+              </a:defRPr>
+            </a:pPr>
+            <a:r>
+              <a:t>结果：4 组完全一致，bg 方向无影响。旧结论推翻。</a:t>
+            </a:r>
+          </a:p>
+          <a:p>
+            <a:pPr>
+              <a:defRPr sz="2000">
+                <a:solidFill>
+                  <a:srgbClr val="202020"/>
+                </a:solidFill>
+              </a:defRPr>
+            </a:pPr>
+          </a:p>
+          <a:p>
+            <a:pPr>
+              <a:defRPr sz="2000">
+                <a:solidFill>
+                  <a:srgbClr val="202020"/>
+                </a:solidFill>
+              </a:defRPr>
+            </a:pPr>
+            <a:r>
+              <a:t>真实机理：前 1 ns 轴向格点递举弛豫 4.75 nm，之后钉扎。漂移与背景磁化方向无关。</a:t>
+            </a:r>
+          </a:p>
+          <a:p>
+            <a:pPr>
+              <a:defRPr sz="2000">
+                <a:solidFill>
+                  <a:srgbClr val="202020"/>
+                </a:solidFill>
+              </a:defRPr>
+            </a:pPr>
+          </a:p>
+          <a:p>
+            <a:pPr>
+              <a:defRPr sz="2000">
+                <a:solidFill>
+                  <a:srgbClr val="202020"/>
+                </a:solidFill>
+              </a:defRPr>
+            </a:pPr>
+            <a:r>
+              <a:t>毕设 ch03 §3.2.3、ch06 已同步修正；fig3-4_drift_comparison.png 重新生成入论文。</a:t>
+            </a:r>
+          </a:p>
+        </p:txBody>
+      </p:sp>
+      <p:pic>
+        <p:nvPicPr>
+          <p:cNvPr id="4" name="Picture 3" descr="drift_4groups_comparison.png"/>
+          <p:cNvPicPr>
+            <a:picLocks noChangeAspect="1"/>
+          </p:cNvPicPr>
+          <p:nvPr/>
+        </p:nvPicPr>
+        <p:blipFill>
+          <a:blip r:embed="rId2"/>
+          <a:stretch>
+            <a:fillRect/>
+          </a:stretch>
+        </p:blipFill>
+        <p:spPr>
+          <a:xfrm>
+            <a:off x="7589520" y="1280160"/>
+            <a:ext cx="4297680" cy="1586288"/>
+          </a:xfrm>
+          <a:prstGeom prst="rect">
+            <a:avLst/>
+          </a:prstGeom>
+        </p:spPr>
+      </p:pic>
+      <p:sp>
+        <p:nvSpPr>
+          <p:cNvPr id="5" name="TextBox 4"/>
           <p:cNvSpPr txBox="1"/>
           <p:nvPr/>
         </p:nvSpPr>
@@ -8015,7 +7034,7 @@
               </a:defRPr>
             </a:pPr>
             <a:r>
-              <a:t>来源：`20260105_frustrated_fm/size_sweep/`</a:t>
+              <a:t>来源：`20260105_frustrated_fm/drift_experiments/unified_rerun/`（4 组 + continue）</a:t>
             </a:r>
           </a:p>
         </p:txBody>
@@ -8068,7 +7087,7 @@
               </a:defRPr>
             </a:pPr>
             <a:r>
-              <a:t>Frustrated FM 居中稳态（三组 Ku）</a:t>
+              <a:t>自旋波方向选择性（5 组）</a:t>
             </a:r>
           </a:p>
         </p:txBody>
@@ -8082,7 +7101,7 @@
         <p:spPr>
           <a:xfrm>
             <a:off x="457200" y="1097280"/>
-            <a:ext cx="11247120" cy="4937760"/>
+            <a:ext cx="6858000" cy="4937760"/>
           </a:xfrm>
           <a:prstGeom prst="rect">
             <a:avLst/>
@@ -8103,104 +7122,116 @@
               </a:defRPr>
             </a:pPr>
             <a:r>
-              <a:t>centered_stability_test：把 Hopfion 平移到盒子中心，验证不同 Ku 下的居中稳态。</a:t>
-            </a:r>
-          </a:p>
-          <a:p>
-            <a:pPr>
-              <a:defRPr sz="2000">
-                <a:solidFill>
-                  <a:srgbClr val="202020"/>
-                </a:solidFill>
-              </a:defRPr>
-            </a:pPr>
-          </a:p>
-          <a:p>
-            <a:pPr>
-              <a:defRPr sz="2000">
-                <a:solidFill>
-                  <a:srgbClr val="202020"/>
-                </a:solidFill>
-              </a:defRPr>
-            </a:pPr>
-            <a:r>
-              <a:t>| 配置 | 1ns z 漂移 | 结果 |</a:t>
-            </a:r>
-          </a:p>
-          <a:p>
-            <a:pPr>
-              <a:defRPr sz="2000">
-                <a:solidFill>
-                  <a:srgbClr val="202020"/>
-                </a:solidFill>
-              </a:defRPr>
-            </a:pPr>
-            <a:r>
-              <a:t>|---|---|---|</a:t>
-            </a:r>
-          </a:p>
-          <a:p>
-            <a:pPr>
-              <a:defRPr sz="2000">
-                <a:solidFill>
-                  <a:srgbClr val="202020"/>
-                </a:solidFill>
-              </a:defRPr>
-            </a:pPr>
-            <a:r>
-              <a:t>| Ku=0 | +0.70 nm | PASS（呼吸模式）|</a:t>
-            </a:r>
-          </a:p>
-          <a:p>
-            <a:pPr>
-              <a:defRPr sz="2000">
-                <a:solidFill>
-                  <a:srgbClr val="202020"/>
-                </a:solidFill>
-              </a:defRPr>
-            </a:pPr>
-            <a:r>
-              <a:t>| Ku=10k | -0.019 nm | PASS（最稳，选为 SW 初始态）|</a:t>
-            </a:r>
-          </a:p>
-          <a:p>
-            <a:pPr>
-              <a:defRPr sz="2000">
-                <a:solidFill>
-                  <a:srgbClr val="202020"/>
-                </a:solidFill>
-              </a:defRPr>
-            </a:pPr>
-            <a:r>
-              <a:t>| Ku=50k | +0.062 nm | PASS |</a:t>
-            </a:r>
-          </a:p>
-          <a:p>
-            <a:pPr>
-              <a:defRPr sz="2000">
-                <a:solidFill>
-                  <a:srgbClr val="202020"/>
-                </a:solidFill>
-              </a:defRPr>
-            </a:pPr>
-          </a:p>
-          <a:p>
-            <a:pPr>
-              <a:defRPr sz="2000">
-                <a:solidFill>
-                  <a:srgbClr val="202020"/>
-                </a:solidFill>
-              </a:defRPr>
-            </a:pPr>
-            <a:r>
-              <a:t>判定：1 ns z-center 漂移 &lt;2 nm。三组全过。Ku=10k 输出 m000020.ovf 作为后续自旋波动力学全部仿真的公共初始态。</a:t>
-            </a:r>
-          </a:p>
-        </p:txBody>
-      </p:sp>
-      <p:sp>
-        <p:nvSpPr>
-          <p:cNvPr id="4" name="TextBox 3"/>
+              <a:t>drive_selection/plane_wave 5 次仿真：srcX×vibX, srcX×vibZ, srcY×vibX, srcZ×vibX, srcZ×vibZ。</a:t>
+            </a:r>
+          </a:p>
+          <a:p>
+            <a:pPr>
+              <a:defRPr sz="2000">
+                <a:solidFill>
+                  <a:srgbClr val="202020"/>
+                </a:solidFill>
+              </a:defRPr>
+            </a:pPr>
+          </a:p>
+          <a:p>
+            <a:pPr>
+              <a:defRPr sz="2000">
+                <a:solidFill>
+                  <a:srgbClr val="202020"/>
+                </a:solidFill>
+              </a:defRPr>
+            </a:pPr>
+            <a:r>
+              <a:t>结论：</a:t>
+            </a:r>
+          </a:p>
+          <a:p>
+            <a:pPr>
+              <a:defRPr sz="2000">
+                <a:solidFill>
+                  <a:srgbClr val="202020"/>
+                </a:solidFill>
+              </a:defRPr>
+            </a:pPr>
+            <a:r>
+              <a:t>- vibX 强耦合，vibZ 无耦合</a:t>
+            </a:r>
+          </a:p>
+          <a:p>
+            <a:pPr>
+              <a:defRPr sz="2000">
+                <a:solidFill>
+                  <a:srgbClr val="202020"/>
+                </a:solidFill>
+              </a:defRPr>
+            </a:pPr>
+            <a:r>
+              <a:t>- srcX 与 srcY 完全等价（面内对称性）</a:t>
+            </a:r>
+          </a:p>
+          <a:p>
+            <a:pPr>
+              <a:defRPr sz="2000">
+                <a:solidFill>
+                  <a:srgbClr val="202020"/>
+                </a:solidFill>
+              </a:defRPr>
+            </a:pPr>
+            <a:r>
+              <a:t>- vibZ 路径下 Hopfion 几乎不动</a:t>
+            </a:r>
+          </a:p>
+          <a:p>
+            <a:pPr>
+              <a:defRPr sz="2000">
+                <a:solidFill>
+                  <a:srgbClr val="202020"/>
+                </a:solidFill>
+              </a:defRPr>
+            </a:pPr>
+          </a:p>
+          <a:p>
+            <a:pPr>
+              <a:defRPr sz="2000">
+                <a:solidFill>
+                  <a:srgbClr val="202020"/>
+                </a:solidFill>
+              </a:defRPr>
+            </a:pPr>
+            <a:r>
+              <a:t>后续所有自旋波仿真默认 vib 方向 = X。</a:t>
+            </a:r>
+          </a:p>
+        </p:txBody>
+      </p:sp>
+      <p:pic>
+        <p:nvPicPr>
+          <p:cNvPr id="4" name="Picture 3" descr="direction_selectivity.png"/>
+          <p:cNvPicPr>
+            <a:picLocks noChangeAspect="1"/>
+          </p:cNvPicPr>
+          <p:nvPr/>
+        </p:nvPicPr>
+        <p:blipFill>
+          <a:blip r:embed="rId2"/>
+          <a:stretch>
+            <a:fillRect/>
+          </a:stretch>
+        </p:blipFill>
+        <p:spPr>
+          <a:xfrm>
+            <a:off x="7589520" y="1280160"/>
+            <a:ext cx="4297680" cy="6153752"/>
+          </a:xfrm>
+          <a:prstGeom prst="rect">
+            <a:avLst/>
+          </a:prstGeom>
+        </p:spPr>
+      </p:pic>
+      <p:sp>
+        <p:nvSpPr>
+          <p:cNvPr id="5" name="TextBox 4"/>
           <p:cNvSpPr txBox="1"/>
           <p:nvPr/>
         </p:nvSpPr>
@@ -8228,7 +7259,7 @@
               </a:defRPr>
             </a:pPr>
             <a:r>
-              <a:t>来源：`20260105_frustrated_fm/centered_stability_test/`</a:t>
+              <a:t>来源：`20260105_frustrated_fm/spin_wave_dynamics/drive_selection/plane_wave/`</a:t>
             </a:r>
           </a:p>
         </p:txBody>
@@ -8281,7 +7312,7 @@
               </a:defRPr>
             </a:pPr>
             <a:r>
-              <a:t>Ku 临界扫描（13 点）</a:t>
+              <a:t>平面源 srcX 频率扫描（14 频率）</a:t>
             </a:r>
           </a:p>
         </p:txBody>
@@ -8316,35 +7347,35 @@
               </a:defRPr>
             </a:pPr>
             <a:r>
-              <a:t>anisotropy_study/ku_critical_sweep：固定 R8r4 初始，扫描 Ku=0 / 5k / 10k / 20k / 30k / 40k / 50k / 52k / 55k / 56k / 57k / 58k 共 13 个点。</a:t>
-            </a:r>
-          </a:p>
-          <a:p>
-            <a:pPr>
-              <a:defRPr sz="2000">
-                <a:solidFill>
-                  <a:srgbClr val="202020"/>
-                </a:solidFill>
-              </a:defRPr>
-            </a:pPr>
-          </a:p>
-          <a:p>
-            <a:pPr>
-              <a:defRPr sz="2000">
-                <a:solidFill>
-                  <a:srgbClr val="202020"/>
-                </a:solidFill>
-              </a:defRPr>
-            </a:pPr>
-            <a:r>
-              <a:t>现象 + 结论：Ku 增大 Hopfion 单调收缩。R8r4 体系下，约 52–55 k 区间 Hopfion 结构坍塌。具体临界值 Ku_c 因材料体系而异（R3r2、R12r5 各不同），非研究优先级。</a:t>
+              <a:t>freq_sweep/plane_wave/srcX：02ns 段 10 频率（100/200/300/400/500/600/700/800/900/1000 GHz）+ 05ns 段 4 频率（100/200/500/1000 GHz）。</a:t>
+            </a:r>
+          </a:p>
+          <a:p>
+            <a:pPr>
+              <a:defRPr sz="2000">
+                <a:solidFill>
+                  <a:srgbClr val="202020"/>
+                </a:solidFill>
+              </a:defRPr>
+            </a:pPr>
+          </a:p>
+          <a:p>
+            <a:pPr>
+              <a:defRPr sz="2000">
+                <a:solidFill>
+                  <a:srgbClr val="202020"/>
+                </a:solidFill>
+              </a:defRPr>
+            </a:pPr>
+            <a:r>
+              <a:t>结论：100-200 GHz、1000 GHz 强响应；400-600 GHz 死区（位移近零）；Hopfion 沿 +z 方向运动（垂直波传播方向）。</a:t>
             </a:r>
           </a:p>
         </p:txBody>
       </p:sp>
       <p:pic>
         <p:nvPicPr>
-          <p:cNvPr id="4" name="Picture 3" descr="ku_critical_R_vs_Ku.png"/>
+          <p:cNvPr id="4" name="Picture 3" descr="freq_response_srcX.png"/>
           <p:cNvPicPr>
             <a:picLocks noChangeAspect="1"/>
           </p:cNvPicPr>
@@ -8359,7 +7390,7 @@
         <p:spPr>
           <a:xfrm>
             <a:off x="7589520" y="1280160"/>
-            <a:ext cx="4297680" cy="4779149"/>
+            <a:ext cx="4297680" cy="3069771"/>
           </a:xfrm>
           <a:prstGeom prst="rect">
             <a:avLst/>
@@ -8396,7 +7427,7 @@
               </a:defRPr>
             </a:pPr>
             <a:r>
-              <a:t>来源：`20260105_frustrated_fm/anisotropy_study/ku_critical_sweep/`</a:t>
+              <a:t>来源：`20260105_frustrated_fm/spin_wave_dynamics/freq_sweep/plane_wave/srcX/{02ns, 05ns}/`</a:t>
             </a:r>
           </a:p>
         </p:txBody>
@@ -8449,7 +7480,7 @@
               </a:defRPr>
             </a:pPr>
             <a:r>
-              <a:t>size_vs_ku + 拓扑荷 Q_H=1 验证</a:t>
+              <a:t>平面源 srcZ 频率扫描（20 频率）</a:t>
             </a:r>
           </a:p>
         </p:txBody>
@@ -8463,7 +7494,7 @@
         <p:spPr>
           <a:xfrm>
             <a:off x="457200" y="1097280"/>
-            <a:ext cx="11247120" cy="4937760"/>
+            <a:ext cx="6858000" cy="4937760"/>
           </a:xfrm>
           <a:prstGeom prst="rect">
             <a:avLst/>
@@ -8484,35 +7515,107 @@
               </a:defRPr>
             </a:pPr>
             <a:r>
-              <a:t>anisotropy_study/size_vs_ku：R12r5 起始，扫描 Ku=0 / 2.5k / 5k / 10k / 12k 等共 6 个点，研究 R(Ku) 依赖关系。与 ku_critical_sweep 互补。</a:t>
-            </a:r>
-          </a:p>
-          <a:p>
-            <a:pPr>
-              <a:defRPr sz="2000">
-                <a:solidFill>
-                  <a:srgbClr val="202020"/>
-                </a:solidFill>
-              </a:defRPr>
-            </a:pPr>
-          </a:p>
-          <a:p>
-            <a:pPr>
-              <a:defRPr sz="2000">
-                <a:solidFill>
-                  <a:srgbClr val="202020"/>
-                </a:solidFill>
-              </a:defRPr>
-            </a:pPr>
-            <a:r>
-              <a:t>compute_hopf_index.py 对当前体系所有 Hopfion 初始态做 Q_H 数值验证：结果均为 Q_H=1。Q_H=2 (p=1,q=2) 和 Q_H=4 在 frustrated FM 体系下的稳定性从未仿真，是下一步方向。</a:t>
-            </a:r>
-          </a:p>
-        </p:txBody>
-      </p:sp>
-      <p:sp>
-        <p:nvSpPr>
-          <p:cNvPr id="4" name="TextBox 3"/>
+              <a:t>freq_sweep/plane_wave/srcZ：coarse 10 频率 + fine 10 频率，总共 20 个频率点（100-1500 GHz 区间）。</a:t>
+            </a:r>
+          </a:p>
+          <a:p>
+            <a:pPr>
+              <a:defRPr sz="2000">
+                <a:solidFill>
+                  <a:srgbClr val="202020"/>
+                </a:solidFill>
+              </a:defRPr>
+            </a:pPr>
+          </a:p>
+          <a:p>
+            <a:pPr>
+              <a:defRPr sz="2000">
+                <a:solidFill>
+                  <a:srgbClr val="202020"/>
+                </a:solidFill>
+              </a:defRPr>
+            </a:pPr>
+            <a:r>
+              <a:t>结论：</a:t>
+            </a:r>
+          </a:p>
+          <a:p>
+            <a:pPr>
+              <a:defRPr sz="2000">
+                <a:solidFill>
+                  <a:srgbClr val="202020"/>
+                </a:solidFill>
+              </a:defRPr>
+            </a:pPr>
+            <a:r>
+              <a:t>- 1100 GHz 全频段最强响应：|dz| = 18.1 nm，方向 -z</a:t>
+            </a:r>
+          </a:p>
+          <a:p>
+            <a:pPr>
+              <a:defRPr sz="2000">
+                <a:solidFill>
+                  <a:srgbClr val="202020"/>
+                </a:solidFill>
+              </a:defRPr>
+            </a:pPr>
+            <a:r>
+              <a:t>- 100 GHz 异常：方向 +z（与其他频率相反）</a:t>
+            </a:r>
+          </a:p>
+          <a:p>
+            <a:pPr>
+              <a:defRPr sz="2000">
+                <a:solidFill>
+                  <a:srgbClr val="202020"/>
+                </a:solidFill>
+              </a:defRPr>
+            </a:pPr>
+            <a:r>
+              <a:t>- 死区：75 / 150 / 600 / 1300 GHz</a:t>
+            </a:r>
+          </a:p>
+          <a:p>
+            <a:pPr>
+              <a:defRPr sz="2000">
+                <a:solidFill>
+                  <a:srgbClr val="202020"/>
+                </a:solidFill>
+              </a:defRPr>
+            </a:pPr>
+            <a:r>
+              <a:t>- 整体趋势：srcZ → -z（沿波传播方向）</a:t>
+            </a:r>
+          </a:p>
+        </p:txBody>
+      </p:sp>
+      <p:pic>
+        <p:nvPicPr>
+          <p:cNvPr id="4" name="Picture 3" descr="freq_response_srcZ.png"/>
+          <p:cNvPicPr>
+            <a:picLocks noChangeAspect="1"/>
+          </p:cNvPicPr>
+          <p:nvPr/>
+        </p:nvPicPr>
+        <p:blipFill>
+          <a:blip r:embed="rId2"/>
+          <a:stretch>
+            <a:fillRect/>
+          </a:stretch>
+        </p:blipFill>
+        <p:spPr>
+          <a:xfrm>
+            <a:off x="7589520" y="1280160"/>
+            <a:ext cx="4297680" cy="1193800"/>
+          </a:xfrm>
+          <a:prstGeom prst="rect">
+            <a:avLst/>
+          </a:prstGeom>
+        </p:spPr>
+      </p:pic>
+      <p:sp>
+        <p:nvSpPr>
+          <p:cNvPr id="5" name="TextBox 4"/>
           <p:cNvSpPr txBox="1"/>
           <p:nvPr/>
         </p:nvSpPr>
@@ -8540,7 +7643,7 @@
               </a:defRPr>
             </a:pPr>
             <a:r>
-              <a:t>来源：`20260105_frustrated_fm/anisotropy_study/size_vs_ku/` + `compute_hopf_index.py`</a:t>
+              <a:t>来源：`20260105_frustrated_fm/spin_wave_dynamics/freq_sweep/plane_wave/srcZ/`</a:t>
             </a:r>
           </a:p>
         </p:txBody>
